--- a/jaspersoft/docs/OriginBA_Automated_Deployment.pptx
+++ b/jaspersoft/docs/OriginBA_Automated_Deployment.pptx
@@ -8732,7 +8732,7 @@
               </a:spcAft>
             </a:pPr>
             <a:r>
-              <a:rPr sz="2200" b="1">
+              <a:rPr sz="2400" b="1">
                 <a:solidFill>
                   <a:srgbClr val="0B3D7A"/>
                 </a:solidFill>
@@ -8747,7 +8747,7 @@
               </a:spcAft>
             </a:pPr>
             <a:r>
-              <a:rPr sz="1600" b="0">
+              <a:rPr sz="1800" b="0">
                 <a:solidFill>
                   <a:srgbClr val="4C5D69"/>
                 </a:solidFill>
@@ -8762,7 +8762,7 @@
               </a:spcAft>
             </a:pPr>
             <a:r>
-              <a:rPr sz="1400" b="0">
+              <a:rPr sz="1800" b="0">
                 <a:solidFill>
                   <a:srgbClr val="4C5D69"/>
                 </a:solidFill>
@@ -8876,7 +8876,7 @@
               </a:spcAft>
             </a:pPr>
             <a:r>
-              <a:rPr sz="2200" b="1">
+              <a:rPr sz="2400" b="1">
                 <a:solidFill>
                   <a:srgbClr val="0B3D7A"/>
                 </a:solidFill>
@@ -8891,7 +8891,7 @@
               </a:spcAft>
             </a:pPr>
             <a:r>
-              <a:rPr sz="1600" b="0">
+              <a:rPr sz="1800" b="0">
                 <a:solidFill>
                   <a:srgbClr val="4C5D69"/>
                 </a:solidFill>
@@ -8906,7 +8906,7 @@
               </a:spcAft>
             </a:pPr>
             <a:r>
-              <a:rPr sz="1400" b="0">
+              <a:rPr sz="1800" b="0">
                 <a:solidFill>
                   <a:srgbClr val="4C5D69"/>
                 </a:solidFill>
@@ -9020,7 +9020,7 @@
               </a:spcAft>
             </a:pPr>
             <a:r>
-              <a:rPr sz="2200" b="1">
+              <a:rPr sz="2400" b="1">
                 <a:solidFill>
                   <a:srgbClr val="0B3D7A"/>
                 </a:solidFill>
@@ -9035,7 +9035,7 @@
               </a:spcAft>
             </a:pPr>
             <a:r>
-              <a:rPr sz="1600" b="0">
+              <a:rPr sz="1800" b="0">
                 <a:solidFill>
                   <a:srgbClr val="4C5D69"/>
                 </a:solidFill>
@@ -9050,7 +9050,7 @@
               </a:spcAft>
             </a:pPr>
             <a:r>
-              <a:rPr sz="1400" b="0">
+              <a:rPr sz="1800" b="0">
                 <a:solidFill>
                   <a:srgbClr val="4C5D69"/>
                 </a:solidFill>
@@ -9164,7 +9164,7 @@
               </a:spcAft>
             </a:pPr>
             <a:r>
-              <a:rPr sz="2200" b="1">
+              <a:rPr sz="2400" b="1">
                 <a:solidFill>
                   <a:srgbClr val="0B3D7A"/>
                 </a:solidFill>
@@ -9179,7 +9179,7 @@
               </a:spcAft>
             </a:pPr>
             <a:r>
-              <a:rPr sz="1600" b="0">
+              <a:rPr sz="1800" b="0">
                 <a:solidFill>
                   <a:srgbClr val="4C5D69"/>
                 </a:solidFill>
@@ -9194,7 +9194,7 @@
               </a:spcAft>
             </a:pPr>
             <a:r>
-              <a:rPr sz="1400" b="0">
+              <a:rPr sz="1800" b="0">
                 <a:solidFill>
                   <a:srgbClr val="4C5D69"/>
                 </a:solidFill>
@@ -9308,7 +9308,7 @@
               </a:spcAft>
             </a:pPr>
             <a:r>
-              <a:rPr sz="2200" b="1">
+              <a:rPr sz="2400" b="1">
                 <a:solidFill>
                   <a:srgbClr val="0B3D7A"/>
                 </a:solidFill>
@@ -9323,7 +9323,7 @@
               </a:spcAft>
             </a:pPr>
             <a:r>
-              <a:rPr sz="1600" b="0">
+              <a:rPr sz="1800" b="0">
                 <a:solidFill>
                   <a:srgbClr val="0B3D7A"/>
                 </a:solidFill>
@@ -9338,7 +9338,7 @@
               </a:spcAft>
             </a:pPr>
             <a:r>
-              <a:rPr sz="1400" b="0">
+              <a:rPr sz="1800" b="0">
                 <a:solidFill>
                   <a:srgbClr val="0B3D7A"/>
                 </a:solidFill>

--- a/jaspersoft/docs/OriginBA_Automated_Deployment.pptx
+++ b/jaspersoft/docs/OriginBA_Automated_Deployment.pptx
@@ -7671,7 +7671,7 @@
         <p:spPr>
           <a:xfrm>
             <a:off x="740664" y="384048"/>
-            <a:ext cx="13716000" cy="960120"/>
+            <a:ext cx="18653760" cy="960120"/>
           </a:xfrm>
           <a:prstGeom prst="rect">
             <a:avLst/>
@@ -7695,7 +7695,7 @@
                   <a:srgbClr val="F5EFE9"/>
                 </a:solidFill>
               </a:rPr>
-              <a:t>A Worked Example: College Station, One Morning</a:t>
+              <a:t>Worked Example: College Station</a:t>
             </a:r>
           </a:p>
         </p:txBody>
@@ -7805,11 +7805,11 @@
         <p:spPr>
           <a:xfrm>
             <a:off x="740664" y="6099048"/>
-            <a:ext cx="3465576" cy="3383280"/>
+            <a:ext cx="3465576" cy="2834640"/>
           </a:xfrm>
           <a:prstGeom prst="roundRect">
             <a:avLst>
-              <a:gd name="adj" fmla="val 12000"/>
+              <a:gd name="adj" fmla="val 10000"/>
             </a:avLst>
           </a:prstGeom>
           <a:solidFill>
@@ -7949,11 +7949,11 @@
         <p:spPr>
           <a:xfrm>
             <a:off x="4535424" y="6099048"/>
-            <a:ext cx="3465576" cy="3383280"/>
+            <a:ext cx="3465576" cy="2834640"/>
           </a:xfrm>
           <a:prstGeom prst="roundRect">
             <a:avLst>
-              <a:gd name="adj" fmla="val 12000"/>
+              <a:gd name="adj" fmla="val 10000"/>
             </a:avLst>
           </a:prstGeom>
           <a:solidFill>
@@ -8093,11 +8093,11 @@
         <p:spPr>
           <a:xfrm>
             <a:off x="8330184" y="6099048"/>
-            <a:ext cx="3465576" cy="3383280"/>
+            <a:ext cx="3465576" cy="2834640"/>
           </a:xfrm>
           <a:prstGeom prst="roundRect">
             <a:avLst>
-              <a:gd name="adj" fmla="val 12000"/>
+              <a:gd name="adj" fmla="val 10000"/>
             </a:avLst>
           </a:prstGeom>
           <a:solidFill>
@@ -8237,11 +8237,11 @@
         <p:spPr>
           <a:xfrm>
             <a:off x="12124944" y="6099048"/>
-            <a:ext cx="3465576" cy="3383280"/>
+            <a:ext cx="3465576" cy="2834640"/>
           </a:xfrm>
           <a:prstGeom prst="roundRect">
             <a:avLst>
-              <a:gd name="adj" fmla="val 12000"/>
+              <a:gd name="adj" fmla="val 10000"/>
             </a:avLst>
           </a:prstGeom>
           <a:solidFill>
@@ -8381,11 +8381,11 @@
         <p:spPr>
           <a:xfrm>
             <a:off x="15919704" y="6099048"/>
-            <a:ext cx="3465576" cy="3383280"/>
+            <a:ext cx="3465576" cy="2834640"/>
           </a:xfrm>
           <a:prstGeom prst="roundRect">
             <a:avLst>
-              <a:gd name="adj" fmla="val 12000"/>
+              <a:gd name="adj" fmla="val 10000"/>
             </a:avLst>
           </a:prstGeom>
           <a:solidFill>
@@ -8524,7 +8524,7 @@
         </p:nvSpPr>
         <p:spPr>
           <a:xfrm>
-            <a:off x="740664" y="1828800"/>
+            <a:off x="740664" y="2103120"/>
             <a:ext cx="18288000" cy="2377440"/>
           </a:xfrm>
           <a:prstGeom prst="rect">
@@ -8549,7 +8549,7 @@
                   <a:srgbClr val="F5EFE9"/>
                 </a:solidFill>
               </a:rPr>
-              <a:t>21 production reports the client asked to have in Test: 20 Ad Hoc views, 1 report, and the 13 domains behind them.</a:t>
+              <a:t>One morning, 21 production reports the client asked to have in Test: 20 Ad Hoc views, 1 report, and the 13 domains behind them.</a:t>
             </a:r>
           </a:p>
         </p:txBody>
@@ -8581,7 +8581,7 @@
         <p:spPr>
           <a:xfrm>
             <a:off x="740664" y="384048"/>
-            <a:ext cx="13716000" cy="960120"/>
+            <a:ext cx="18653760" cy="960120"/>
           </a:xfrm>
           <a:prstGeom prst="rect">
             <a:avLst/>
@@ -9278,7 +9278,7 @@
         <p:spPr>
           <a:xfrm>
             <a:off x="740664" y="384048"/>
-            <a:ext cx="13716000" cy="960120"/>
+            <a:ext cx="18653760" cy="960120"/>
           </a:xfrm>
           <a:prstGeom prst="rect">
             <a:avLst/>
@@ -10039,7 +10039,7 @@
         <p:spPr>
           <a:xfrm>
             <a:off x="740664" y="384048"/>
-            <a:ext cx="13716000" cy="960120"/>
+            <a:ext cx="18653760" cy="960120"/>
           </a:xfrm>
           <a:prstGeom prst="rect">
             <a:avLst/>
@@ -10442,7 +10442,7 @@
         <p:spPr>
           <a:xfrm>
             <a:off x="740664" y="384048"/>
-            <a:ext cx="13716000" cy="960120"/>
+            <a:ext cx="18653760" cy="960120"/>
           </a:xfrm>
           <a:prstGeom prst="rect">
             <a:avLst/>
@@ -10845,7 +10845,7 @@
         <p:spPr>
           <a:xfrm>
             <a:off x="740664" y="384048"/>
-            <a:ext cx="13716000" cy="960120"/>
+            <a:ext cx="18653760" cy="960120"/>
           </a:xfrm>
           <a:prstGeom prst="rect">
             <a:avLst/>
@@ -10979,11 +10979,11 @@
         <p:spPr>
           <a:xfrm>
             <a:off x="740664" y="6099048"/>
-            <a:ext cx="3465576" cy="3383280"/>
+            <a:ext cx="3465576" cy="2834640"/>
           </a:xfrm>
           <a:prstGeom prst="roundRect">
             <a:avLst>
-              <a:gd name="adj" fmla="val 12000"/>
+              <a:gd name="adj" fmla="val 10000"/>
             </a:avLst>
           </a:prstGeom>
           <a:solidFill>
@@ -11123,11 +11123,11 @@
         <p:spPr>
           <a:xfrm>
             <a:off x="4535424" y="6099048"/>
-            <a:ext cx="3465576" cy="3383280"/>
+            <a:ext cx="3465576" cy="2834640"/>
           </a:xfrm>
           <a:prstGeom prst="roundRect">
             <a:avLst>
-              <a:gd name="adj" fmla="val 12000"/>
+              <a:gd name="adj" fmla="val 10000"/>
             </a:avLst>
           </a:prstGeom>
           <a:solidFill>
@@ -11267,11 +11267,11 @@
         <p:spPr>
           <a:xfrm>
             <a:off x="8330184" y="6099048"/>
-            <a:ext cx="3465576" cy="3383280"/>
+            <a:ext cx="3465576" cy="2834640"/>
           </a:xfrm>
           <a:prstGeom prst="roundRect">
             <a:avLst>
-              <a:gd name="adj" fmla="val 12000"/>
+              <a:gd name="adj" fmla="val 10000"/>
             </a:avLst>
           </a:prstGeom>
           <a:solidFill>
@@ -11411,11 +11411,11 @@
         <p:spPr>
           <a:xfrm>
             <a:off x="12124944" y="6099048"/>
-            <a:ext cx="3465576" cy="3383280"/>
+            <a:ext cx="3465576" cy="2834640"/>
           </a:xfrm>
           <a:prstGeom prst="roundRect">
             <a:avLst>
-              <a:gd name="adj" fmla="val 12000"/>
+              <a:gd name="adj" fmla="val 10000"/>
             </a:avLst>
           </a:prstGeom>
           <a:solidFill>
@@ -11555,11 +11555,11 @@
         <p:spPr>
           <a:xfrm>
             <a:off x="15919704" y="6099048"/>
-            <a:ext cx="3465576" cy="3383280"/>
+            <a:ext cx="3465576" cy="2834640"/>
           </a:xfrm>
           <a:prstGeom prst="roundRect">
             <a:avLst>
-              <a:gd name="adj" fmla="val 12000"/>
+              <a:gd name="adj" fmla="val 10000"/>
             </a:avLst>
           </a:prstGeom>
           <a:solidFill>
@@ -11698,7 +11698,7 @@
         </p:nvSpPr>
         <p:spPr>
           <a:xfrm>
-            <a:off x="740664" y="1828800"/>
+            <a:off x="740664" y="2103120"/>
             <a:ext cx="18288000" cy="2377440"/>
           </a:xfrm>
           <a:prstGeom prst="rect">
@@ -11755,7 +11755,7 @@
         <p:spPr>
           <a:xfrm>
             <a:off x="740664" y="384048"/>
-            <a:ext cx="13716000" cy="960120"/>
+            <a:ext cx="18653760" cy="960120"/>
           </a:xfrm>
           <a:prstGeom prst="rect">
             <a:avLst/>
@@ -12469,7 +12469,7 @@
         <p:spPr>
           <a:xfrm>
             <a:off x="740664" y="384048"/>
-            <a:ext cx="13716000" cy="960120"/>
+            <a:ext cx="18653760" cy="960120"/>
           </a:xfrm>
           <a:prstGeom prst="rect">
             <a:avLst/>
@@ -13937,7 +13937,7 @@
         <p:spPr>
           <a:xfrm>
             <a:off x="740664" y="384048"/>
-            <a:ext cx="13716000" cy="960120"/>
+            <a:ext cx="18653760" cy="960120"/>
           </a:xfrm>
           <a:prstGeom prst="rect">
             <a:avLst/>
@@ -15000,7 +15000,7 @@
         <p:spPr>
           <a:xfrm>
             <a:off x="740664" y="384048"/>
-            <a:ext cx="13716000" cy="960120"/>
+            <a:ext cx="18653760" cy="960120"/>
           </a:xfrm>
           <a:prstGeom prst="rect">
             <a:avLst/>
@@ -16405,7 +16405,7 @@
         <p:spPr>
           <a:xfrm>
             <a:off x="740664" y="384048"/>
-            <a:ext cx="13716000" cy="960120"/>
+            <a:ext cx="18653760" cy="960120"/>
           </a:xfrm>
           <a:prstGeom prst="rect">
             <a:avLst/>
@@ -17890,7 +17890,7 @@
         <p:spPr>
           <a:xfrm>
             <a:off x="740664" y="384048"/>
-            <a:ext cx="13716000" cy="960120"/>
+            <a:ext cx="18653760" cy="960120"/>
           </a:xfrm>
           <a:prstGeom prst="rect">
             <a:avLst/>
@@ -19170,7 +19170,7 @@
         <p:spPr>
           <a:xfrm>
             <a:off x="740664" y="384048"/>
-            <a:ext cx="13716000" cy="960120"/>
+            <a:ext cx="18653760" cy="960120"/>
           </a:xfrm>
           <a:prstGeom prst="rect">
             <a:avLst/>
@@ -20430,7 +20430,7 @@
         <p:spPr>
           <a:xfrm>
             <a:off x="740664" y="384048"/>
-            <a:ext cx="13716000" cy="960120"/>
+            <a:ext cx="18653760" cy="960120"/>
           </a:xfrm>
           <a:prstGeom prst="rect">
             <a:avLst/>
@@ -21974,7 +21974,7 @@
         <p:spPr>
           <a:xfrm>
             <a:off x="740664" y="384048"/>
-            <a:ext cx="13716000" cy="960120"/>
+            <a:ext cx="18653760" cy="960120"/>
           </a:xfrm>
           <a:prstGeom prst="rect">
             <a:avLst/>

--- a/jaspersoft/docs/OriginBA_Automated_Deployment.pptx
+++ b/jaspersoft/docs/OriginBA_Automated_Deployment.pptx
@@ -7743,8 +7743,8 @@
         </p:nvSpPr>
         <p:spPr>
           <a:xfrm>
-            <a:off x="740664" y="1828800"/>
-            <a:ext cx="5913119" cy="3429000"/>
+            <a:off x="740664" y="3223260"/>
+            <a:ext cx="5913119" cy="5349240"/>
           </a:xfrm>
           <a:prstGeom prst="roundRect">
             <a:avLst>
@@ -7783,6 +7783,36 @@
               </a:spcAft>
             </a:pPr>
             <a:r>
+              <a:rPr sz="6000" b="1">
+                <a:solidFill>
+                  <a:srgbClr val="0B3D7A"/>
+                </a:solidFill>
+              </a:rPr>
+              <a:t>100%</a:t>
+            </a:r>
+          </a:p>
+          <a:p>
+            <a:pPr algn="l">
+              <a:spcAft>
+                <a:spcPts val="600"/>
+              </a:spcAft>
+            </a:pPr>
+            <a:r>
+              <a:rPr sz="1800" b="0">
+                <a:solidFill>
+                  <a:srgbClr val="4C5D69"/>
+                </a:solidFill>
+              </a:rPr>
+              <a:t>138,086 of 138,086 SA balances tie to the cent</a:t>
+            </a:r>
+          </a:p>
+          <a:p>
+            <a:pPr algn="l">
+              <a:spcAft>
+                <a:spcPts val="600"/>
+              </a:spcAft>
+            </a:pPr>
+            <a:r>
               <a:rPr sz="3000" b="1">
                 <a:solidFill>
                   <a:srgbClr val="0B3D7A"/>
@@ -7803,7 +7833,7 @@
                   <a:srgbClr val="4C5D69"/>
                 </a:solidFill>
               </a:rPr>
-              <a:t>Ellensburg, CityCorp, College Station, Newark on the twice-daily schedule</a:t>
+              <a:t>Ellensburg, CityCorp, College Station, Newark refreshed twice daily</a:t>
             </a:r>
           </a:p>
           <a:p>
@@ -7819,21 +7849,6 @@
                 </a:solidFill>
               </a:rPr>
               <a:t>Baselines run as parallel jobs, gated, unattended</a:t>
-            </a:r>
-          </a:p>
-          <a:p>
-            <a:pPr algn="l">
-              <a:spcAft>
-                <a:spcPts val="600"/>
-              </a:spcAft>
-            </a:pPr>
-            <a:r>
-              <a:rPr sz="2200" b="0">
-                <a:solidFill>
-                  <a:srgbClr val="4C5D69"/>
-                </a:solidFill>
-              </a:rPr>
-              <a:t>138,086 of 138,086 balances tie to the cent</a:t>
             </a:r>
           </a:p>
         </p:txBody>
@@ -7846,8 +7861,8 @@
         </p:nvSpPr>
         <p:spPr>
           <a:xfrm>
-            <a:off x="7110983" y="1828800"/>
-            <a:ext cx="5913119" cy="3429000"/>
+            <a:off x="7110983" y="3223260"/>
+            <a:ext cx="5913119" cy="5349240"/>
           </a:xfrm>
           <a:prstGeom prst="roundRect">
             <a:avLst>
@@ -7886,6 +7901,36 @@
               </a:spcAft>
             </a:pPr>
             <a:r>
+              <a:rPr sz="6000" b="1">
+                <a:solidFill>
+                  <a:srgbClr val="0B3D7A"/>
+                </a:solidFill>
+              </a:rPr>
+              <a:t>11 min</a:t>
+            </a:r>
+          </a:p>
+          <a:p>
+            <a:pPr algn="l">
+              <a:spcAft>
+                <a:spcPts val="600"/>
+              </a:spcAft>
+            </a:pPr>
+            <a:r>
+              <a:rPr sz="1800" b="0">
+                <a:solidFill>
+                  <a:srgbClr val="4C5D69"/>
+                </a:solidFill>
+              </a:rPr>
+              <a:t>Ellensburg, test org to prod org, 0 errors</a:t>
+            </a:r>
+          </a:p>
+          <a:p>
+            <a:pPr algn="l">
+              <a:spcAft>
+                <a:spcPts val="600"/>
+              </a:spcAft>
+            </a:pPr>
+            <a:r>
               <a:rPr sz="3000" b="1">
                 <a:solidFill>
                   <a:srgbClr val="0B3D7A"/>
@@ -7906,7 +7951,7 @@
                   <a:srgbClr val="4C5D69"/>
                 </a:solidFill>
               </a:rPr>
-              <a:t>Ellensburg 11 minutes: 116 ok, 7 empty, 27 slow, 0 errors</a:t>
+              <a:t>Newark 21 minutes, 0 errors</a:t>
             </a:r>
           </a:p>
           <a:p>
@@ -7921,7 +7966,7 @@
                   <a:srgbClr val="4C5D69"/>
                 </a:solidFill>
               </a:rPr>
-              <a:t>Newark 21 minutes, 0 errors</a:t>
+              <a:t>116 ok, 7 empty, 27 slow on the first sweep</a:t>
             </a:r>
           </a:p>
           <a:p>
@@ -7949,8 +7994,8 @@
         </p:nvSpPr>
         <p:spPr>
           <a:xfrm>
-            <a:off x="13481303" y="1828800"/>
-            <a:ext cx="5913119" cy="3429000"/>
+            <a:off x="13481303" y="3223260"/>
+            <a:ext cx="5913119" cy="5349240"/>
           </a:xfrm>
           <a:prstGeom prst="roundRect">
             <a:avLst>
@@ -7989,27 +8034,42 @@
               </a:spcAft>
             </a:pPr>
             <a:r>
+              <a:rPr sz="6000" b="1">
+                <a:solidFill>
+                  <a:srgbClr val="0B3D7A"/>
+                </a:solidFill>
+              </a:rPr>
+              <a:t>6 orgs</a:t>
+            </a:r>
+          </a:p>
+          <a:p>
+            <a:pPr algn="l">
+              <a:spcAft>
+                <a:spcPts val="600"/>
+              </a:spcAft>
+            </a:pPr>
+            <a:r>
+              <a:rPr sz="1800" b="0">
+                <a:solidFill>
+                  <a:srgbClr val="4C5D69"/>
+                </a:solidFill>
+              </a:rPr>
+              <a:t>one domain change, seven proofs each, in an afternoon</a:t>
+            </a:r>
+          </a:p>
+          <a:p>
+            <a:pPr algn="l">
+              <a:spcAft>
+                <a:spcPts val="600"/>
+              </a:spcAft>
+            </a:pPr>
+            <a:r>
               <a:rPr sz="3000" b="1">
                 <a:solidFill>
                   <a:srgbClr val="0B3D7A"/>
                 </a:solidFill>
               </a:rPr>
               <a:t>Day-to-day changes</a:t>
-            </a:r>
-          </a:p>
-          <a:p>
-            <a:pPr algn="l">
-              <a:spcAft>
-                <a:spcPts val="600"/>
-              </a:spcAft>
-            </a:pPr>
-            <a:r>
-              <a:rPr sz="2200" b="0">
-                <a:solidFill>
-                  <a:srgbClr val="4C5D69"/>
-                </a:solidFill>
-              </a:rPr>
-              <a:t>Adjustment domain exact on six client orgs in an afternoon</a:t>
             </a:r>
           </a:p>
           <a:p>

--- a/jaspersoft/docs/OriginBA_Automated_Deployment.pptx
+++ b/jaspersoft/docs/OriginBA_Automated_Deployment.pptx
@@ -13343,12 +13343,12 @@
               </a:spcAft>
             </a:pPr>
             <a:r>
-              <a:rPr sz="4600" b="0">
+              <a:rPr sz="6000" b="0">
                 <a:solidFill>
                   <a:srgbClr val="F5EFE9"/>
                 </a:solidFill>
               </a:rPr>
-              <a:t>Standard Offering In Jaspersoft, Step By Step</a:t>
+              <a:t>Standard Offering Deployment Flow</a:t>
             </a:r>
           </a:p>
         </p:txBody>
@@ -13458,11 +13458,506 @@
         <p:spPr>
           <a:xfrm>
             <a:off x="740664" y="1828800"/>
-            <a:ext cx="9212580" cy="1435607"/>
+            <a:ext cx="4443984" cy="5989320"/>
           </a:xfrm>
           <a:prstGeom prst="roundRect">
             <a:avLst>
-              <a:gd name="adj" fmla="val 8000"/>
+              <a:gd name="adj" fmla="val 4000"/>
+            </a:avLst>
+          </a:prstGeom>
+          <a:noFill/>
+          <a:ln w="19050">
+            <a:solidFill>
+              <a:srgbClr val="F5EFE9"/>
+            </a:solidFill>
+          </a:ln>
+          <a:effectLst/>
+        </p:spPr>
+        <p:style>
+          <a:lnRef idx="1">
+            <a:schemeClr val="accent1"/>
+          </a:lnRef>
+          <a:fillRef idx="3">
+            <a:schemeClr val="accent1"/>
+          </a:fillRef>
+          <a:effectRef idx="2">
+            <a:schemeClr val="accent1"/>
+          </a:effectRef>
+          <a:fontRef idx="minor">
+            <a:schemeClr val="lt1"/>
+          </a:fontRef>
+        </p:style>
+        <p:txBody>
+          <a:bodyPr rtlCol="0" anchor="ctr"/>
+          <a:lstStyle/>
+          <a:p>
+            <a:pPr algn="ctr"/>
+          </a:p>
+        </p:txBody>
+      </p:sp>
+      <p:sp>
+        <p:nvSpPr>
+          <p:cNvPr id="6" name="TextBox 5"/>
+          <p:cNvSpPr txBox="1"/>
+          <p:nvPr/>
+        </p:nvSpPr>
+        <p:spPr>
+          <a:xfrm>
+            <a:off x="905256" y="1874519"/>
+            <a:ext cx="4114800" cy="411480"/>
+          </a:xfrm>
+          <a:prstGeom prst="rect">
+            <a:avLst/>
+          </a:prstGeom>
+          <a:noFill/>
+        </p:spPr>
+        <p:txBody>
+          <a:bodyPr wrap="square" anchor="t" lIns="0" rIns="0" tIns="54864" bIns="54864">
+            <a:spAutoFit/>
+          </a:bodyPr>
+          <a:lstStyle/>
+          <a:p>
+            <a:pPr algn="l">
+              <a:spcAft>
+                <a:spcPts val="600"/>
+              </a:spcAft>
+            </a:pPr>
+            <a:r>
+              <a:rPr sz="1400" b="1">
+                <a:solidFill>
+                  <a:srgbClr val="F5EFE9"/>
+                </a:solidFill>
+              </a:rPr>
+              <a:t>Origin_DEV</a:t>
+            </a:r>
+          </a:p>
+          <a:p>
+            <a:pPr algn="l">
+              <a:spcAft>
+                <a:spcPts val="600"/>
+              </a:spcAft>
+            </a:pPr>
+            <a:r>
+              <a:rPr sz="1100" b="0">
+                <a:solidFill>
+                  <a:srgbClr val="F5EFE9"/>
+                </a:solidFill>
+              </a:rPr>
+              <a:t>authoring, the internal server</a:t>
+            </a:r>
+          </a:p>
+        </p:txBody>
+      </p:sp>
+      <p:sp>
+        <p:nvSpPr>
+          <p:cNvPr id="7" name="Rounded Rectangle 6"/>
+          <p:cNvSpPr/>
+          <p:nvPr/>
+        </p:nvSpPr>
+        <p:spPr>
+          <a:xfrm>
+            <a:off x="5477256" y="1828800"/>
+            <a:ext cx="4443984" cy="5989320"/>
+          </a:xfrm>
+          <a:prstGeom prst="roundRect">
+            <a:avLst>
+              <a:gd name="adj" fmla="val 4000"/>
+            </a:avLst>
+          </a:prstGeom>
+          <a:noFill/>
+          <a:ln w="19050">
+            <a:solidFill>
+              <a:srgbClr val="F5EFE9"/>
+            </a:solidFill>
+          </a:ln>
+          <a:effectLst/>
+        </p:spPr>
+        <p:style>
+          <a:lnRef idx="1">
+            <a:schemeClr val="accent1"/>
+          </a:lnRef>
+          <a:fillRef idx="3">
+            <a:schemeClr val="accent1"/>
+          </a:fillRef>
+          <a:effectRef idx="2">
+            <a:schemeClr val="accent1"/>
+          </a:effectRef>
+          <a:fontRef idx="minor">
+            <a:schemeClr val="lt1"/>
+          </a:fontRef>
+        </p:style>
+        <p:txBody>
+          <a:bodyPr rtlCol="0" anchor="ctr"/>
+          <a:lstStyle/>
+          <a:p>
+            <a:pPr algn="ctr"/>
+          </a:p>
+        </p:txBody>
+      </p:sp>
+      <p:sp>
+        <p:nvSpPr>
+          <p:cNvPr id="8" name="TextBox 7"/>
+          <p:cNvSpPr txBox="1"/>
+          <p:nvPr/>
+        </p:nvSpPr>
+        <p:spPr>
+          <a:xfrm>
+            <a:off x="5641848" y="1874519"/>
+            <a:ext cx="4114800" cy="411480"/>
+          </a:xfrm>
+          <a:prstGeom prst="rect">
+            <a:avLst/>
+          </a:prstGeom>
+          <a:noFill/>
+        </p:spPr>
+        <p:txBody>
+          <a:bodyPr wrap="square" anchor="t" lIns="0" rIns="0" tIns="54864" bIns="54864">
+            <a:spAutoFit/>
+          </a:bodyPr>
+          <a:lstStyle/>
+          <a:p>
+            <a:pPr algn="l">
+              <a:spcAft>
+                <a:spcPts val="600"/>
+              </a:spcAft>
+            </a:pPr>
+            <a:r>
+              <a:rPr sz="1400" b="1">
+                <a:solidFill>
+                  <a:srgbClr val="F5EFE9"/>
+                </a:solidFill>
+              </a:rPr>
+              <a:t>Origin_TEST</a:t>
+            </a:r>
+          </a:p>
+          <a:p>
+            <a:pPr algn="l">
+              <a:spcAft>
+                <a:spcPts val="600"/>
+              </a:spcAft>
+            </a:pPr>
+            <a:r>
+              <a:rPr sz="1100" b="0">
+                <a:solidFill>
+                  <a:srgbClr val="F5EFE9"/>
+                </a:solidFill>
+              </a:rPr>
+              <a:t>proving, before any client</a:t>
+            </a:r>
+          </a:p>
+        </p:txBody>
+      </p:sp>
+      <p:sp>
+        <p:nvSpPr>
+          <p:cNvPr id="9" name="Rounded Rectangle 8"/>
+          <p:cNvSpPr/>
+          <p:nvPr/>
+        </p:nvSpPr>
+        <p:spPr>
+          <a:xfrm>
+            <a:off x="10213848" y="1828800"/>
+            <a:ext cx="4443984" cy="5989320"/>
+          </a:xfrm>
+          <a:prstGeom prst="roundRect">
+            <a:avLst>
+              <a:gd name="adj" fmla="val 4000"/>
+            </a:avLst>
+          </a:prstGeom>
+          <a:noFill/>
+          <a:ln w="19050">
+            <a:solidFill>
+              <a:srgbClr val="F5EFE9"/>
+            </a:solidFill>
+          </a:ln>
+          <a:effectLst/>
+        </p:spPr>
+        <p:style>
+          <a:lnRef idx="1">
+            <a:schemeClr val="accent1"/>
+          </a:lnRef>
+          <a:fillRef idx="3">
+            <a:schemeClr val="accent1"/>
+          </a:fillRef>
+          <a:effectRef idx="2">
+            <a:schemeClr val="accent1"/>
+          </a:effectRef>
+          <a:fontRef idx="minor">
+            <a:schemeClr val="lt1"/>
+          </a:fontRef>
+        </p:style>
+        <p:txBody>
+          <a:bodyPr rtlCol="0" anchor="ctr"/>
+          <a:lstStyle/>
+          <a:p>
+            <a:pPr algn="ctr"/>
+          </a:p>
+        </p:txBody>
+      </p:sp>
+      <p:sp>
+        <p:nvSpPr>
+          <p:cNvPr id="10" name="TextBox 9"/>
+          <p:cNvSpPr txBox="1"/>
+          <p:nvPr/>
+        </p:nvSpPr>
+        <p:spPr>
+          <a:xfrm>
+            <a:off x="10378440" y="1874519"/>
+            <a:ext cx="4114800" cy="411480"/>
+          </a:xfrm>
+          <a:prstGeom prst="rect">
+            <a:avLst/>
+          </a:prstGeom>
+          <a:noFill/>
+        </p:spPr>
+        <p:txBody>
+          <a:bodyPr wrap="square" anchor="t" lIns="0" rIns="0" tIns="54864" bIns="54864">
+            <a:spAutoFit/>
+          </a:bodyPr>
+          <a:lstStyle/>
+          <a:p>
+            <a:pPr algn="l">
+              <a:spcAft>
+                <a:spcPts val="600"/>
+              </a:spcAft>
+            </a:pPr>
+            <a:r>
+              <a:rPr sz="1400" b="1">
+                <a:solidFill>
+                  <a:srgbClr val="F5EFE9"/>
+                </a:solidFill>
+              </a:rPr>
+              <a:t>Client test org</a:t>
+            </a:r>
+          </a:p>
+          <a:p>
+            <a:pPr algn="l">
+              <a:spcAft>
+                <a:spcPts val="600"/>
+              </a:spcAft>
+            </a:pPr>
+            <a:r>
+              <a:rPr sz="1100" b="0">
+                <a:solidFill>
+                  <a:srgbClr val="F5EFE9"/>
+                </a:solidFill>
+              </a:rPr>
+              <a:t>the client's own data</a:t>
+            </a:r>
+          </a:p>
+        </p:txBody>
+      </p:sp>
+      <p:sp>
+        <p:nvSpPr>
+          <p:cNvPr id="11" name="Rounded Rectangle 10"/>
+          <p:cNvSpPr/>
+          <p:nvPr/>
+        </p:nvSpPr>
+        <p:spPr>
+          <a:xfrm>
+            <a:off x="14950440" y="1828800"/>
+            <a:ext cx="4443984" cy="5989320"/>
+          </a:xfrm>
+          <a:prstGeom prst="roundRect">
+            <a:avLst>
+              <a:gd name="adj" fmla="val 4000"/>
+            </a:avLst>
+          </a:prstGeom>
+          <a:noFill/>
+          <a:ln w="19050">
+            <a:solidFill>
+              <a:srgbClr val="F5EFE9"/>
+            </a:solidFill>
+          </a:ln>
+          <a:effectLst/>
+        </p:spPr>
+        <p:style>
+          <a:lnRef idx="1">
+            <a:schemeClr val="accent1"/>
+          </a:lnRef>
+          <a:fillRef idx="3">
+            <a:schemeClr val="accent1"/>
+          </a:fillRef>
+          <a:effectRef idx="2">
+            <a:schemeClr val="accent1"/>
+          </a:effectRef>
+          <a:fontRef idx="minor">
+            <a:schemeClr val="lt1"/>
+          </a:fontRef>
+        </p:style>
+        <p:txBody>
+          <a:bodyPr rtlCol="0" anchor="ctr"/>
+          <a:lstStyle/>
+          <a:p>
+            <a:pPr algn="ctr"/>
+          </a:p>
+        </p:txBody>
+      </p:sp>
+      <p:sp>
+        <p:nvSpPr>
+          <p:cNvPr id="12" name="TextBox 11"/>
+          <p:cNvSpPr txBox="1"/>
+          <p:nvPr/>
+        </p:nvSpPr>
+        <p:spPr>
+          <a:xfrm>
+            <a:off x="15115032" y="1874519"/>
+            <a:ext cx="4114800" cy="411480"/>
+          </a:xfrm>
+          <a:prstGeom prst="rect">
+            <a:avLst/>
+          </a:prstGeom>
+          <a:noFill/>
+        </p:spPr>
+        <p:txBody>
+          <a:bodyPr wrap="square" anchor="t" lIns="0" rIns="0" tIns="54864" bIns="54864">
+            <a:spAutoFit/>
+          </a:bodyPr>
+          <a:lstStyle/>
+          <a:p>
+            <a:pPr algn="l">
+              <a:spcAft>
+                <a:spcPts val="600"/>
+              </a:spcAft>
+            </a:pPr>
+            <a:r>
+              <a:rPr sz="1400" b="1">
+                <a:solidFill>
+                  <a:srgbClr val="F5EFE9"/>
+                </a:solidFill>
+              </a:rPr>
+              <a:t>Client prod org</a:t>
+            </a:r>
+          </a:p>
+          <a:p>
+            <a:pPr algn="l">
+              <a:spcAft>
+                <a:spcPts val="600"/>
+              </a:spcAft>
+            </a:pPr>
+            <a:r>
+              <a:rPr sz="1100" b="0">
+                <a:solidFill>
+                  <a:srgbClr val="F5EFE9"/>
+                </a:solidFill>
+              </a:rPr>
+              <a:t>read-only until the prod flag is given</a:t>
+            </a:r>
+          </a:p>
+        </p:txBody>
+      </p:sp>
+      <p:sp>
+        <p:nvSpPr>
+          <p:cNvPr id="13" name="Rounded Rectangle 12"/>
+          <p:cNvSpPr/>
+          <p:nvPr/>
+        </p:nvSpPr>
+        <p:spPr>
+          <a:xfrm>
+            <a:off x="740664" y="8092440"/>
+            <a:ext cx="18653760" cy="1783080"/>
+          </a:xfrm>
+          <a:prstGeom prst="roundRect">
+            <a:avLst>
+              <a:gd name="adj" fmla="val 4000"/>
+            </a:avLst>
+          </a:prstGeom>
+          <a:noFill/>
+          <a:ln w="19050">
+            <a:solidFill>
+              <a:srgbClr val="F5EFE9"/>
+            </a:solidFill>
+          </a:ln>
+          <a:effectLst/>
+        </p:spPr>
+        <p:style>
+          <a:lnRef idx="1">
+            <a:schemeClr val="accent1"/>
+          </a:lnRef>
+          <a:fillRef idx="3">
+            <a:schemeClr val="accent1"/>
+          </a:fillRef>
+          <a:effectRef idx="2">
+            <a:schemeClr val="accent1"/>
+          </a:effectRef>
+          <a:fontRef idx="minor">
+            <a:schemeClr val="lt1"/>
+          </a:fontRef>
+        </p:style>
+        <p:txBody>
+          <a:bodyPr rtlCol="0" anchor="ctr"/>
+          <a:lstStyle/>
+          <a:p>
+            <a:pPr algn="ctr"/>
+          </a:p>
+        </p:txBody>
+      </p:sp>
+      <p:sp>
+        <p:nvSpPr>
+          <p:cNvPr id="14" name="TextBox 13"/>
+          <p:cNvSpPr txBox="1"/>
+          <p:nvPr/>
+        </p:nvSpPr>
+        <p:spPr>
+          <a:xfrm>
+            <a:off x="905256" y="8138160"/>
+            <a:ext cx="18324576" cy="411480"/>
+          </a:xfrm>
+          <a:prstGeom prst="rect">
+            <a:avLst/>
+          </a:prstGeom>
+          <a:noFill/>
+        </p:spPr>
+        <p:txBody>
+          <a:bodyPr wrap="square" anchor="t" lIns="0" rIns="0" tIns="54864" bIns="54864">
+            <a:spAutoFit/>
+          </a:bodyPr>
+          <a:lstStyle/>
+          <a:p>
+            <a:pPr algn="l">
+              <a:spcAft>
+                <a:spcPts val="600"/>
+              </a:spcAft>
+            </a:pPr>
+            <a:r>
+              <a:rPr sz="1400" b="1">
+                <a:solidFill>
+                  <a:srgbClr val="F5EFE9"/>
+                </a:solidFill>
+              </a:rPr>
+              <a:t>After go-live</a:t>
+            </a:r>
+          </a:p>
+          <a:p>
+            <a:pPr algn="l">
+              <a:spcAft>
+                <a:spcPts val="600"/>
+              </a:spcAft>
+            </a:pPr>
+            <a:r>
+              <a:rPr sz="1100" b="0">
+                <a:solidFill>
+                  <a:srgbClr val="F5EFE9"/>
+                </a:solidFill>
+              </a:rPr>
+              <a:t>every change is a tool run with the same proofs, never a hand edit</a:t>
+            </a:r>
+          </a:p>
+        </p:txBody>
+      </p:sp>
+      <p:sp>
+        <p:nvSpPr>
+          <p:cNvPr id="15" name="Rounded Rectangle 14"/>
+          <p:cNvSpPr/>
+          <p:nvPr/>
+        </p:nvSpPr>
+        <p:spPr>
+          <a:xfrm>
+            <a:off x="905256" y="2514600"/>
+            <a:ext cx="4114800" cy="914400"/>
+          </a:xfrm>
+          <a:prstGeom prst="roundRect">
+            <a:avLst>
+              <a:gd name="adj" fmla="val 10000"/>
             </a:avLst>
           </a:prstGeom>
           <a:solidFill>
@@ -13488,25 +13983,198 @@
           </a:fontRef>
         </p:style>
         <p:txBody>
-          <a:bodyPr rtlCol="0" anchor="ctr"/>
-          <a:lstStyle/>
-          <a:p>
-            <a:pPr algn="ctr"/>
-          </a:p>
-        </p:txBody>
-      </p:sp>
-      <p:sp>
-        <p:nvSpPr>
-          <p:cNvPr id="6" name="Oval 5"/>
+          <a:bodyPr rtlCol="0" anchor="ctr" wrap="square" lIns="109728" rIns="109728" tIns="54864" bIns="54864"/>
+          <a:lstStyle/>
+          <a:p>
+            <a:pPr algn="l">
+              <a:spcAft>
+                <a:spcPts val="600"/>
+              </a:spcAft>
+            </a:pPr>
+            <a:r>
+              <a:rPr sz="1400" b="1">
+                <a:solidFill>
+                  <a:srgbClr val="0B3D7A"/>
+                </a:solidFill>
+              </a:rPr>
+              <a:t>Workstreams tree</a:t>
+            </a:r>
+          </a:p>
+          <a:p>
+            <a:pPr algn="l">
+              <a:spcAft>
+                <a:spcPts val="600"/>
+              </a:spcAft>
+            </a:pPr>
+            <a:r>
+              <a:rPr sz="1100" b="0">
+                <a:solidFill>
+                  <a:srgbClr val="4C5D69"/>
+                </a:solidFill>
+              </a:rPr>
+              <a:t>domains, Ad Hoc views, reports and dashboards: the only content edited by hand</a:t>
+            </a:r>
+          </a:p>
+        </p:txBody>
+      </p:sp>
+      <p:sp>
+        <p:nvSpPr>
+          <p:cNvPr id="16" name="Rounded Rectangle 15"/>
           <p:cNvSpPr/>
           <p:nvPr/>
         </p:nvSpPr>
         <p:spPr>
           <a:xfrm>
-            <a:off x="941832" y="2029968"/>
-            <a:ext cx="457200" cy="457200"/>
-          </a:xfrm>
-          <a:prstGeom prst="ellipse">
+            <a:off x="905256" y="3566160"/>
+            <a:ext cx="4114800" cy="731520"/>
+          </a:xfrm>
+          <a:prstGeom prst="roundRect">
+            <a:avLst>
+              <a:gd name="adj" fmla="val 10000"/>
+            </a:avLst>
+          </a:prstGeom>
+          <a:solidFill>
+            <a:srgbClr val="F5EFE9"/>
+          </a:solidFill>
+          <a:ln>
+            <a:noFill/>
+          </a:ln>
+          <a:effectLst/>
+        </p:spPr>
+        <p:style>
+          <a:lnRef idx="1">
+            <a:schemeClr val="accent1"/>
+          </a:lnRef>
+          <a:fillRef idx="3">
+            <a:schemeClr val="accent1"/>
+          </a:fillRef>
+          <a:effectRef idx="2">
+            <a:schemeClr val="accent1"/>
+          </a:effectRef>
+          <a:fontRef idx="minor">
+            <a:schemeClr val="lt1"/>
+          </a:fontRef>
+        </p:style>
+        <p:txBody>
+          <a:bodyPr rtlCol="0" anchor="ctr" wrap="square" lIns="109728" rIns="109728" tIns="54864" bIns="54864"/>
+          <a:lstStyle/>
+          <a:p>
+            <a:pPr algn="l">
+              <a:spcAft>
+                <a:spcPts val="600"/>
+              </a:spcAft>
+            </a:pPr>
+            <a:r>
+              <a:rPr sz="1400" b="1">
+                <a:solidFill>
+                  <a:srgbClr val="0B3D7A"/>
+                </a:solidFill>
+              </a:rPr>
+              <a:t>Export the org</a:t>
+            </a:r>
+          </a:p>
+          <a:p>
+            <a:pPr algn="l">
+              <a:spcAft>
+                <a:spcPts val="600"/>
+              </a:spcAft>
+            </a:pPr>
+            <a:r>
+              <a:rPr sz="1100" b="0">
+                <a:solidFill>
+                  <a:srgbClr val="4C5D69"/>
+                </a:solidFill>
+              </a:rPr>
+              <a:t>one API export task, polled, downloaded</a:t>
+            </a:r>
+          </a:p>
+        </p:txBody>
+      </p:sp>
+      <p:sp>
+        <p:nvSpPr>
+          <p:cNvPr id="17" name="Rounded Rectangle 16"/>
+          <p:cNvSpPr/>
+          <p:nvPr/>
+        </p:nvSpPr>
+        <p:spPr>
+          <a:xfrm>
+            <a:off x="905256" y="4434840"/>
+            <a:ext cx="4114800" cy="1417320"/>
+          </a:xfrm>
+          <a:prstGeom prst="roundRect">
+            <a:avLst>
+              <a:gd name="adj" fmla="val 10000"/>
+            </a:avLst>
+          </a:prstGeom>
+          <a:solidFill>
+            <a:srgbClr val="F5EFE9"/>
+          </a:solidFill>
+          <a:ln>
+            <a:noFill/>
+          </a:ln>
+          <a:effectLst/>
+        </p:spPr>
+        <p:style>
+          <a:lnRef idx="1">
+            <a:schemeClr val="accent1"/>
+          </a:lnRef>
+          <a:fillRef idx="3">
+            <a:schemeClr val="accent1"/>
+          </a:fillRef>
+          <a:effectRef idx="2">
+            <a:schemeClr val="accent1"/>
+          </a:effectRef>
+          <a:fontRef idx="minor">
+            <a:schemeClr val="lt1"/>
+          </a:fontRef>
+        </p:style>
+        <p:txBody>
+          <a:bodyPr rtlCol="0" anchor="ctr" wrap="square" lIns="109728" rIns="109728" tIns="54864" bIns="54864"/>
+          <a:lstStyle/>
+          <a:p>
+            <a:pPr algn="l">
+              <a:spcAft>
+                <a:spcPts val="600"/>
+              </a:spcAft>
+            </a:pPr>
+            <a:r>
+              <a:rPr sz="1400" b="1">
+                <a:solidFill>
+                  <a:srgbClr val="0B3D7A"/>
+                </a:solidFill>
+              </a:rPr>
+              <a:t>Build the package</a:t>
+            </a:r>
+          </a:p>
+          <a:p>
+            <a:pPr algn="l">
+              <a:spcAft>
+                <a:spcPts val="600"/>
+              </a:spcAft>
+            </a:pPr>
+            <a:r>
+              <a:rPr sz="1100" b="0">
+                <a:solidFill>
+                  <a:srgbClr val="4C5D69"/>
+                </a:solidFill>
+              </a:rPr>
+              <a:t>inventory and classify the export; keep the offering list; one copy of each domain in one home; carry the datasource; rewrite every path; strip print wrappers; narrow the import index</a:t>
+            </a:r>
+          </a:p>
+        </p:txBody>
+      </p:sp>
+      <p:sp>
+        <p:nvSpPr>
+          <p:cNvPr id="18" name="Diamond 17"/>
+          <p:cNvSpPr/>
+          <p:nvPr/>
+        </p:nvSpPr>
+        <p:spPr>
+          <a:xfrm>
+            <a:off x="2185415" y="6126480"/>
+            <a:ext cx="1554480" cy="822960"/>
+          </a:xfrm>
+          <a:prstGeom prst="diamond">
             <a:avLst/>
           </a:prstGeom>
           <a:solidFill>
@@ -13532,7 +14200,7 @@
           </a:fontRef>
         </p:style>
         <p:txBody>
-          <a:bodyPr rtlCol="0" anchor="ctr" wrap="square" lIns="0" rIns="0" tIns="54864" bIns="54864"/>
+          <a:bodyPr rtlCol="0" anchor="ctr" wrap="square" lIns="18288" rIns="18288" tIns="54864" bIns="54864"/>
           <a:lstStyle/>
           <a:p>
             <a:pPr algn="ctr">
@@ -13541,83 +14209,30 @@
               </a:spcAft>
             </a:pPr>
             <a:r>
-              <a:rPr sz="1500" b="1">
+              <a:rPr sz="1100" b="1">
                 <a:solidFill>
                   <a:srgbClr val="0B3D7A"/>
                 </a:solidFill>
               </a:rPr>
-              <a:t>1</a:t>
-            </a:r>
-          </a:p>
-        </p:txBody>
-      </p:sp>
-      <p:sp>
-        <p:nvSpPr>
-          <p:cNvPr id="7" name="TextBox 6"/>
-          <p:cNvSpPr txBox="1"/>
-          <p:nvPr/>
-        </p:nvSpPr>
-        <p:spPr>
-          <a:xfrm>
-            <a:off x="1517904" y="1920240"/>
-            <a:ext cx="8252459" cy="1252728"/>
-          </a:xfrm>
-          <a:prstGeom prst="rect">
-            <a:avLst/>
-          </a:prstGeom>
-          <a:noFill/>
-        </p:spPr>
-        <p:txBody>
-          <a:bodyPr wrap="square" anchor="t" lIns="0" rIns="0" tIns="54864" bIns="54864">
-            <a:spAutoFit/>
-          </a:bodyPr>
-          <a:lstStyle/>
-          <a:p>
-            <a:pPr algn="l">
-              <a:spcAft>
-                <a:spcPts val="600"/>
-              </a:spcAft>
-            </a:pPr>
-            <a:r>
-              <a:rPr sz="1900" b="1">
-                <a:solidFill>
-                  <a:srgbClr val="0B3D7A"/>
-                </a:solidFill>
-              </a:rPr>
-              <a:t>Author on Origin_DEV</a:t>
-            </a:r>
-          </a:p>
-          <a:p>
-            <a:pPr algn="l">
-              <a:spcAft>
-                <a:spcPts val="600"/>
-              </a:spcAft>
-            </a:pPr>
-            <a:r>
-              <a:rPr sz="1500" b="0">
-                <a:solidFill>
-                  <a:srgbClr val="4C5D69"/>
-                </a:solidFill>
-              </a:rPr>
-              <a:t>Every domain, Ad Hoc view, report and dashboard is built in the Workstreams tree on the internal server: the only place anything is edited by hand.</a:t>
-            </a:r>
-          </a:p>
-        </p:txBody>
-      </p:sp>
-      <p:sp>
-        <p:nvSpPr>
-          <p:cNvPr id="8" name="Rounded Rectangle 7"/>
+              <a:t>package verifies?</a:t>
+            </a:r>
+          </a:p>
+        </p:txBody>
+      </p:sp>
+      <p:sp>
+        <p:nvSpPr>
+          <p:cNvPr id="19" name="Rounded Rectangle 18"/>
           <p:cNvSpPr/>
           <p:nvPr/>
         </p:nvSpPr>
         <p:spPr>
           <a:xfrm>
-            <a:off x="740664" y="3493008"/>
-            <a:ext cx="9212580" cy="1435607"/>
+            <a:off x="5641848" y="2514600"/>
+            <a:ext cx="4114800" cy="777240"/>
           </a:xfrm>
           <a:prstGeom prst="roundRect">
             <a:avLst>
-              <a:gd name="adj" fmla="val 8000"/>
+              <a:gd name="adj" fmla="val 10000"/>
             </a:avLst>
           </a:prstGeom>
           <a:solidFill>
@@ -13643,25 +14258,198 @@
           </a:fontRef>
         </p:style>
         <p:txBody>
-          <a:bodyPr rtlCol="0" anchor="ctr"/>
-          <a:lstStyle/>
-          <a:p>
-            <a:pPr algn="ctr"/>
-          </a:p>
-        </p:txBody>
-      </p:sp>
-      <p:sp>
-        <p:nvSpPr>
-          <p:cNvPr id="9" name="Oval 8"/>
+          <a:bodyPr rtlCol="0" anchor="ctr" wrap="square" lIns="109728" rIns="109728" tIns="54864" bIns="54864"/>
+          <a:lstStyle/>
+          <a:p>
+            <a:pPr algn="l">
+              <a:spcAft>
+                <a:spcPts val="600"/>
+              </a:spcAft>
+            </a:pPr>
+            <a:r>
+              <a:rPr sz="1400" b="1">
+                <a:solidFill>
+                  <a:srgbClr val="0B3D7A"/>
+                </a:solidFill>
+              </a:rPr>
+              <a:t>Import, update in place</a:t>
+            </a:r>
+          </a:p>
+          <a:p>
+            <a:pPr algn="l">
+              <a:spcAft>
+                <a:spcPts val="600"/>
+              </a:spcAft>
+            </a:pPr>
+            <a:r>
+              <a:rPr sz="1100" b="0">
+                <a:solidFill>
+                  <a:srgbClr val="4C5D69"/>
+                </a:solidFill>
+              </a:rPr>
+              <a:t>polled; an importer warning counts as a failure</a:t>
+            </a:r>
+          </a:p>
+        </p:txBody>
+      </p:sp>
+      <p:sp>
+        <p:nvSpPr>
+          <p:cNvPr id="20" name="Rounded Rectangle 19"/>
           <p:cNvSpPr/>
           <p:nvPr/>
         </p:nvSpPr>
         <p:spPr>
           <a:xfrm>
-            <a:off x="941832" y="3694176"/>
-            <a:ext cx="457200" cy="457200"/>
-          </a:xfrm>
-          <a:prstGeom prst="ellipse">
+            <a:off x="5641848" y="3429000"/>
+            <a:ext cx="4114800" cy="777240"/>
+          </a:xfrm>
+          <a:prstGeom prst="roundRect">
+            <a:avLst>
+              <a:gd name="adj" fmla="val 10000"/>
+            </a:avLst>
+          </a:prstGeom>
+          <a:solidFill>
+            <a:srgbClr val="F5EFE9"/>
+          </a:solidFill>
+          <a:ln>
+            <a:noFill/>
+          </a:ln>
+          <a:effectLst/>
+        </p:spPr>
+        <p:style>
+          <a:lnRef idx="1">
+            <a:schemeClr val="accent1"/>
+          </a:lnRef>
+          <a:fillRef idx="3">
+            <a:schemeClr val="accent1"/>
+          </a:fillRef>
+          <a:effectRef idx="2">
+            <a:schemeClr val="accent1"/>
+          </a:effectRef>
+          <a:fontRef idx="minor">
+            <a:schemeClr val="lt1"/>
+          </a:fontRef>
+        </p:style>
+        <p:txBody>
+          <a:bodyPr rtlCol="0" anchor="ctr" wrap="square" lIns="109728" rIns="109728" tIns="54864" bIns="54864"/>
+          <a:lstStyle/>
+          <a:p>
+            <a:pPr algn="l">
+              <a:spcAft>
+                <a:spcPts val="600"/>
+              </a:spcAft>
+            </a:pPr>
+            <a:r>
+              <a:rPr sz="1400" b="1">
+                <a:solidFill>
+                  <a:srgbClr val="0B3D7A"/>
+                </a:solidFill>
+              </a:rPr>
+              <a:t>Re-export and compare</a:t>
+            </a:r>
+          </a:p>
+          <a:p>
+            <a:pPr algn="l">
+              <a:spcAft>
+                <a:spcPts val="600"/>
+              </a:spcAft>
+            </a:pPr>
+            <a:r>
+              <a:rPr sz="1100" b="0">
+                <a:solidFill>
+                  <a:srgbClr val="4C5D69"/>
+                </a:solidFill>
+              </a:rPr>
+              <a:t>byte-equal inside the scope, importer stamps ignored</a:t>
+            </a:r>
+          </a:p>
+        </p:txBody>
+      </p:sp>
+      <p:sp>
+        <p:nvSpPr>
+          <p:cNvPr id="21" name="Rounded Rectangle 20"/>
+          <p:cNvSpPr/>
+          <p:nvPr/>
+        </p:nvSpPr>
+        <p:spPr>
+          <a:xfrm>
+            <a:off x="5641848" y="4343400"/>
+            <a:ext cx="4114800" cy="868680"/>
+          </a:xfrm>
+          <a:prstGeom prst="roundRect">
+            <a:avLst>
+              <a:gd name="adj" fmla="val 10000"/>
+            </a:avLst>
+          </a:prstGeom>
+          <a:solidFill>
+            <a:srgbClr val="F5EFE9"/>
+          </a:solidFill>
+          <a:ln>
+            <a:noFill/>
+          </a:ln>
+          <a:effectLst/>
+        </p:spPr>
+        <p:style>
+          <a:lnRef idx="1">
+            <a:schemeClr val="accent1"/>
+          </a:lnRef>
+          <a:fillRef idx="3">
+            <a:schemeClr val="accent1"/>
+          </a:fillRef>
+          <a:effectRef idx="2">
+            <a:schemeClr val="accent1"/>
+          </a:effectRef>
+          <a:fontRef idx="minor">
+            <a:schemeClr val="lt1"/>
+          </a:fontRef>
+        </p:style>
+        <p:txBody>
+          <a:bodyPr rtlCol="0" anchor="ctr" wrap="square" lIns="109728" rIns="109728" tIns="54864" bIns="54864"/>
+          <a:lstStyle/>
+          <a:p>
+            <a:pPr algn="l">
+              <a:spcAft>
+                <a:spcPts val="600"/>
+              </a:spcAft>
+            </a:pPr>
+            <a:r>
+              <a:rPr sz="1400" b="1">
+                <a:solidFill>
+                  <a:srgbClr val="0B3D7A"/>
+                </a:solidFill>
+              </a:rPr>
+              <a:t>Execute everything</a:t>
+            </a:r>
+          </a:p>
+          <a:p>
+            <a:pPr algn="l">
+              <a:spcAft>
+                <a:spcPts val="600"/>
+              </a:spcAft>
+            </a:pPr>
+            <a:r>
+              <a:rPr sz="1100" b="0">
+                <a:solidFill>
+                  <a:srgbClr val="4C5D69"/>
+                </a:solidFill>
+              </a:rPr>
+              <a:t>views by query, reports as PDF, domains by metadata and probe</a:t>
+            </a:r>
+          </a:p>
+        </p:txBody>
+      </p:sp>
+      <p:sp>
+        <p:nvSpPr>
+          <p:cNvPr id="22" name="Diamond 21"/>
+          <p:cNvSpPr/>
+          <p:nvPr/>
+        </p:nvSpPr>
+        <p:spPr>
+          <a:xfrm>
+            <a:off x="6922008" y="5394960"/>
+            <a:ext cx="1554480" cy="822960"/>
+          </a:xfrm>
+          <a:prstGeom prst="diamond">
             <a:avLst/>
           </a:prstGeom>
           <a:solidFill>
@@ -13687,7 +14475,7 @@
           </a:fontRef>
         </p:style>
         <p:txBody>
-          <a:bodyPr rtlCol="0" anchor="ctr" wrap="square" lIns="0" rIns="0" tIns="54864" bIns="54864"/>
+          <a:bodyPr rtlCol="0" anchor="ctr" wrap="square" lIns="18288" rIns="18288" tIns="54864" bIns="54864"/>
           <a:lstStyle/>
           <a:p>
             <a:pPr algn="ctr">
@@ -13696,83 +14484,30 @@
               </a:spcAft>
             </a:pPr>
             <a:r>
-              <a:rPr sz="1500" b="1">
+              <a:rPr sz="1100" b="1">
                 <a:solidFill>
                   <a:srgbClr val="0B3D7A"/>
                 </a:solidFill>
               </a:rPr>
-              <a:t>2</a:t>
-            </a:r>
-          </a:p>
-        </p:txBody>
-      </p:sp>
-      <p:sp>
-        <p:nvSpPr>
-          <p:cNvPr id="10" name="TextBox 9"/>
-          <p:cNvSpPr txBox="1"/>
-          <p:nvPr/>
-        </p:nvSpPr>
-        <p:spPr>
-          <a:xfrm>
-            <a:off x="1517904" y="3584448"/>
-            <a:ext cx="8252459" cy="1252728"/>
-          </a:xfrm>
-          <a:prstGeom prst="rect">
-            <a:avLst/>
-          </a:prstGeom>
-          <a:noFill/>
-        </p:spPr>
-        <p:txBody>
-          <a:bodyPr wrap="square" anchor="t" lIns="0" rIns="0" tIns="54864" bIns="54864">
-            <a:spAutoFit/>
-          </a:bodyPr>
-          <a:lstStyle/>
-          <a:p>
-            <a:pPr algn="l">
-              <a:spcAft>
-                <a:spcPts val="600"/>
-              </a:spcAft>
-            </a:pPr>
-            <a:r>
-              <a:rPr sz="1900" b="1">
-                <a:solidFill>
-                  <a:srgbClr val="0B3D7A"/>
-                </a:solidFill>
-              </a:rPr>
-              <a:t>Inventory and classify the export</a:t>
-            </a:r>
-          </a:p>
-          <a:p>
-            <a:pPr algn="l">
-              <a:spcAft>
-                <a:spcPts val="600"/>
-              </a:spcAft>
-            </a:pPr>
-            <a:r>
-              <a:rPr sz="1500" b="0">
-                <a:solidFill>
-                  <a:srgbClr val="4C5D69"/>
-                </a:solidFill>
-              </a:rPr>
-              <a:t>The org export is scanned for domains, Ad Hoc views, report units, dashboards and the datasource. Matching uses the business-facing labels, never the generic internal ids.</a:t>
-            </a:r>
-          </a:p>
-        </p:txBody>
-      </p:sp>
-      <p:sp>
-        <p:nvSpPr>
-          <p:cNvPr id="11" name="Rounded Rectangle 10"/>
+              <a:t>seven proofs pass?</a:t>
+            </a:r>
+          </a:p>
+        </p:txBody>
+      </p:sp>
+      <p:sp>
+        <p:nvSpPr>
+          <p:cNvPr id="23" name="Rounded Rectangle 22"/>
           <p:cNvSpPr/>
           <p:nvPr/>
         </p:nvSpPr>
         <p:spPr>
           <a:xfrm>
-            <a:off x="740664" y="5157216"/>
-            <a:ext cx="9212580" cy="1435607"/>
+            <a:off x="5641848" y="6400800"/>
+            <a:ext cx="4114800" cy="777240"/>
           </a:xfrm>
           <a:prstGeom prst="roundRect">
             <a:avLst>
-              <a:gd name="adj" fmla="val 8000"/>
+              <a:gd name="adj" fmla="val 10000"/>
             </a:avLst>
           </a:prstGeom>
           <a:solidFill>
@@ -13798,25 +14533,198 @@
           </a:fontRef>
         </p:style>
         <p:txBody>
-          <a:bodyPr rtlCol="0" anchor="ctr"/>
-          <a:lstStyle/>
-          <a:p>
-            <a:pPr algn="ctr"/>
-          </a:p>
-        </p:txBody>
-      </p:sp>
-      <p:sp>
-        <p:nvSpPr>
-          <p:cNvPr id="12" name="Oval 11"/>
+          <a:bodyPr rtlCol="0" anchor="ctr" wrap="square" lIns="109728" rIns="109728" tIns="54864" bIns="54864"/>
+          <a:lstStyle/>
+          <a:p>
+            <a:pPr algn="ctr">
+              <a:spcAft>
+                <a:spcPts val="600"/>
+              </a:spcAft>
+            </a:pPr>
+            <a:r>
+              <a:rPr sz="1400" b="1">
+                <a:solidFill>
+                  <a:srgbClr val="0B3D7A"/>
+                </a:solidFill>
+              </a:rPr>
+              <a:t>Proven offering</a:t>
+            </a:r>
+          </a:p>
+          <a:p>
+            <a:pPr algn="ctr">
+              <a:spcAft>
+                <a:spcPts val="600"/>
+              </a:spcAft>
+            </a:pPr>
+            <a:r>
+              <a:rPr sz="1100" b="0">
+                <a:solidFill>
+                  <a:srgbClr val="4C5D69"/>
+                </a:solidFill>
+              </a:rPr>
+              <a:t>the package every client promotion starts from</a:t>
+            </a:r>
+          </a:p>
+        </p:txBody>
+      </p:sp>
+      <p:sp>
+        <p:nvSpPr>
+          <p:cNvPr id="24" name="Rounded Rectangle 23"/>
           <p:cNvSpPr/>
           <p:nvPr/>
         </p:nvSpPr>
         <p:spPr>
           <a:xfrm>
-            <a:off x="941832" y="5358383"/>
-            <a:ext cx="457200" cy="457200"/>
-          </a:xfrm>
-          <a:prstGeom prst="ellipse">
+            <a:off x="10378440" y="2514600"/>
+            <a:ext cx="4114800" cy="731520"/>
+          </a:xfrm>
+          <a:prstGeom prst="roundRect">
+            <a:avLst>
+              <a:gd name="adj" fmla="val 10000"/>
+            </a:avLst>
+          </a:prstGeom>
+          <a:solidFill>
+            <a:srgbClr val="F5EFE9"/>
+          </a:solidFill>
+          <a:ln>
+            <a:noFill/>
+          </a:ln>
+          <a:effectLst/>
+        </p:spPr>
+        <p:style>
+          <a:lnRef idx="1">
+            <a:schemeClr val="accent1"/>
+          </a:lnRef>
+          <a:fillRef idx="3">
+            <a:schemeClr val="accent1"/>
+          </a:fillRef>
+          <a:effectRef idx="2">
+            <a:schemeClr val="accent1"/>
+          </a:effectRef>
+          <a:fontRef idx="minor">
+            <a:schemeClr val="lt1"/>
+          </a:fontRef>
+        </p:style>
+        <p:txBody>
+          <a:bodyPr rtlCol="0" anchor="ctr" wrap="square" lIns="109728" rIns="109728" tIns="54864" bIns="54864"/>
+          <a:lstStyle/>
+          <a:p>
+            <a:pPr algn="l">
+              <a:spcAft>
+                <a:spcPts val="600"/>
+              </a:spcAft>
+            </a:pPr>
+            <a:r>
+              <a:rPr sz="1400" b="1">
+                <a:solidFill>
+                  <a:srgbClr val="0B3D7A"/>
+                </a:solidFill>
+              </a:rPr>
+              <a:t>Inventory snapshot</a:t>
+            </a:r>
+          </a:p>
+          <a:p>
+            <a:pPr algn="l">
+              <a:spcAft>
+                <a:spcPts val="600"/>
+              </a:spcAft>
+            </a:pPr>
+            <a:r>
+              <a:rPr sz="1100" b="0">
+                <a:solidFill>
+                  <a:srgbClr val="4C5D69"/>
+                </a:solidFill>
+              </a:rPr>
+              <a:t>every resource on the org before anything changes</a:t>
+            </a:r>
+          </a:p>
+        </p:txBody>
+      </p:sp>
+      <p:sp>
+        <p:nvSpPr>
+          <p:cNvPr id="25" name="Rounded Rectangle 24"/>
+          <p:cNvSpPr/>
+          <p:nvPr/>
+        </p:nvSpPr>
+        <p:spPr>
+          <a:xfrm>
+            <a:off x="10378440" y="3383280"/>
+            <a:ext cx="4114800" cy="1097280"/>
+          </a:xfrm>
+          <a:prstGeom prst="roundRect">
+            <a:avLst>
+              <a:gd name="adj" fmla="val 10000"/>
+            </a:avLst>
+          </a:prstGeom>
+          <a:solidFill>
+            <a:srgbClr val="F5EFE9"/>
+          </a:solidFill>
+          <a:ln>
+            <a:noFill/>
+          </a:ln>
+          <a:effectLst/>
+        </p:spPr>
+        <p:style>
+          <a:lnRef idx="1">
+            <a:schemeClr val="accent1"/>
+          </a:lnRef>
+          <a:fillRef idx="3">
+            <a:schemeClr val="accent1"/>
+          </a:fillRef>
+          <a:effectRef idx="2">
+            <a:schemeClr val="accent1"/>
+          </a:effectRef>
+          <a:fontRef idx="minor">
+            <a:schemeClr val="lt1"/>
+          </a:fontRef>
+        </p:style>
+        <p:txBody>
+          <a:bodyPr rtlCol="0" anchor="ctr" wrap="square" lIns="109728" rIns="109728" tIns="54864" bIns="54864"/>
+          <a:lstStyle/>
+          <a:p>
+            <a:pPr algn="l">
+              <a:spcAft>
+                <a:spcPts val="600"/>
+              </a:spcAft>
+            </a:pPr>
+            <a:r>
+              <a:rPr sz="1400" b="1">
+                <a:solidFill>
+                  <a:srgbClr val="0B3D7A"/>
+                </a:solidFill>
+              </a:rPr>
+              <a:t>Rebuild for the client</a:t>
+            </a:r>
+          </a:p>
+          <a:p>
+            <a:pPr algn="l">
+              <a:spcAft>
+                <a:spcPts val="600"/>
+              </a:spcAft>
+            </a:pPr>
+            <a:r>
+              <a:rPr sz="1100" b="0">
+                <a:solidFill>
+                  <a:srgbClr val="4C5D69"/>
+                </a:solidFill>
+              </a:rPr>
+              <a:t>the client's own datasource export carried byte for byte; org path, folder, alias and tenant root rewritten</a:t>
+            </a:r>
+          </a:p>
+        </p:txBody>
+      </p:sp>
+      <p:sp>
+        <p:nvSpPr>
+          <p:cNvPr id="26" name="Diamond 25"/>
+          <p:cNvSpPr/>
+          <p:nvPr/>
+        </p:nvSpPr>
+        <p:spPr>
+          <a:xfrm>
+            <a:off x="11247119" y="4617720"/>
+            <a:ext cx="2377440" cy="960120"/>
+          </a:xfrm>
+          <a:prstGeom prst="diamond">
             <a:avLst/>
           </a:prstGeom>
           <a:solidFill>
@@ -13842,7 +14750,7 @@
           </a:fontRef>
         </p:style>
         <p:txBody>
-          <a:bodyPr rtlCol="0" anchor="ctr" wrap="square" lIns="0" rIns="0" tIns="54864" bIns="54864"/>
+          <a:bodyPr rtlCol="0" anchor="ctr" wrap="square" lIns="18288" rIns="18288" tIns="54864" bIns="54864"/>
           <a:lstStyle/>
           <a:p>
             <a:pPr algn="ctr">
@@ -13851,83 +14759,30 @@
               </a:spcAft>
             </a:pPr>
             <a:r>
-              <a:rPr sz="1500" b="1">
+              <a:rPr sz="1000" b="1">
                 <a:solidFill>
                   <a:srgbClr val="0B3D7A"/>
                 </a:solidFill>
               </a:rPr>
-              <a:t>3</a:t>
-            </a:r>
-          </a:p>
-        </p:txBody>
-      </p:sp>
-      <p:sp>
-        <p:nvSpPr>
-          <p:cNvPr id="13" name="TextBox 12"/>
-          <p:cNvSpPr txBox="1"/>
-          <p:nvPr/>
-        </p:nvSpPr>
-        <p:spPr>
-          <a:xfrm>
-            <a:off x="1517904" y="5248655"/>
-            <a:ext cx="8252459" cy="1252728"/>
-          </a:xfrm>
-          <a:prstGeom prst="rect">
-            <a:avLst/>
-          </a:prstGeom>
-          <a:noFill/>
-        </p:spPr>
-        <p:txBody>
-          <a:bodyPr wrap="square" anchor="t" lIns="0" rIns="0" tIns="54864" bIns="54864">
-            <a:spAutoFit/>
-          </a:bodyPr>
-          <a:lstStyle/>
-          <a:p>
-            <a:pPr algn="l">
-              <a:spcAft>
-                <a:spcPts val="600"/>
-              </a:spcAft>
-            </a:pPr>
-            <a:r>
-              <a:rPr sz="1900" b="1">
-                <a:solidFill>
-                  <a:srgbClr val="0B3D7A"/>
-                </a:solidFill>
-              </a:rPr>
-              <a:t>Select the offering</a:t>
-            </a:r>
-          </a:p>
-          <a:p>
-            <a:pPr algn="l">
-              <a:spcAft>
-                <a:spcPts val="600"/>
-              </a:spcAft>
-            </a:pPr>
-            <a:r>
-              <a:rPr sz="1500" b="0">
-                <a:solidFill>
-                  <a:srgbClr val="4C5D69"/>
-                </a:solidFill>
-              </a:rPr>
-              <a:t>Only the Standard Offering list is kept, remapped into nine workstream folders by business process. The Workstreams tree is left untouched: a curated copy, not a move.</a:t>
-            </a:r>
-          </a:p>
-        </p:txBody>
-      </p:sp>
-      <p:sp>
-        <p:nvSpPr>
-          <p:cNvPr id="14" name="Rounded Rectangle 13"/>
+              <a:t>verified? no source strings, references exist, fields resolve</a:t>
+            </a:r>
+          </a:p>
+        </p:txBody>
+      </p:sp>
+      <p:sp>
+        <p:nvSpPr>
+          <p:cNvPr id="27" name="Rounded Rectangle 26"/>
           <p:cNvSpPr/>
           <p:nvPr/>
         </p:nvSpPr>
         <p:spPr>
           <a:xfrm>
-            <a:off x="740664" y="6821423"/>
-            <a:ext cx="9212580" cy="1435607"/>
+            <a:off x="10378440" y="5715000"/>
+            <a:ext cx="4114800" cy="731520"/>
           </a:xfrm>
           <a:prstGeom prst="roundRect">
             <a:avLst>
-              <a:gd name="adj" fmla="val 8000"/>
+              <a:gd name="adj" fmla="val 10000"/>
             </a:avLst>
           </a:prstGeom>
           <a:solidFill>
@@ -13953,26 +14808,128 @@
           </a:fontRef>
         </p:style>
         <p:txBody>
-          <a:bodyPr rtlCol="0" anchor="ctr"/>
-          <a:lstStyle/>
-          <a:p>
-            <a:pPr algn="ctr"/>
-          </a:p>
-        </p:txBody>
-      </p:sp>
-      <p:sp>
-        <p:nvSpPr>
-          <p:cNvPr id="15" name="Oval 14"/>
+          <a:bodyPr rtlCol="0" anchor="ctr" wrap="square" lIns="109728" rIns="109728" tIns="54864" bIns="54864"/>
+          <a:lstStyle/>
+          <a:p>
+            <a:pPr algn="l">
+              <a:spcAft>
+                <a:spcPts val="600"/>
+              </a:spcAft>
+            </a:pPr>
+            <a:r>
+              <a:rPr sz="1400" b="1">
+                <a:solidFill>
+                  <a:srgbClr val="0B3D7A"/>
+                </a:solidFill>
+              </a:rPr>
+              <a:t>Import, compare, execute</a:t>
+            </a:r>
+          </a:p>
+          <a:p>
+            <a:pPr algn="l">
+              <a:spcAft>
+                <a:spcPts val="600"/>
+              </a:spcAft>
+            </a:pPr>
+            <a:r>
+              <a:rPr sz="1100" b="0">
+                <a:solidFill>
+                  <a:srgbClr val="4C5D69"/>
+                </a:solidFill>
+              </a:rPr>
+              <a:t>the same three proofs as Origin_TEST</a:t>
+            </a:r>
+          </a:p>
+        </p:txBody>
+      </p:sp>
+      <p:sp>
+        <p:nvSpPr>
+          <p:cNvPr id="28" name="Rounded Rectangle 27"/>
           <p:cNvSpPr/>
           <p:nvPr/>
         </p:nvSpPr>
         <p:spPr>
           <a:xfrm>
-            <a:off x="941832" y="7022591"/>
-            <a:ext cx="457200" cy="457200"/>
-          </a:xfrm>
-          <a:prstGeom prst="ellipse">
-            <a:avLst/>
+            <a:off x="10378440" y="6583680"/>
+            <a:ext cx="4114800" cy="914400"/>
+          </a:xfrm>
+          <a:prstGeom prst="roundRect">
+            <a:avLst>
+              <a:gd name="adj" fmla="val 10000"/>
+            </a:avLst>
+          </a:prstGeom>
+          <a:solidFill>
+            <a:srgbClr val="F5EFE9"/>
+          </a:solidFill>
+          <a:ln>
+            <a:noFill/>
+          </a:ln>
+          <a:effectLst/>
+        </p:spPr>
+        <p:style>
+          <a:lnRef idx="1">
+            <a:schemeClr val="accent1"/>
+          </a:lnRef>
+          <a:fillRef idx="3">
+            <a:schemeClr val="accent1"/>
+          </a:fillRef>
+          <a:effectRef idx="2">
+            <a:schemeClr val="accent1"/>
+          </a:effectRef>
+          <a:fontRef idx="minor">
+            <a:schemeClr val="lt1"/>
+          </a:fontRef>
+        </p:style>
+        <p:txBody>
+          <a:bodyPr rtlCol="0" anchor="ctr" wrap="square" lIns="109728" rIns="109728" tIns="54864" bIns="54864"/>
+          <a:lstStyle/>
+          <a:p>
+            <a:pPr algn="l">
+              <a:spcAft>
+                <a:spcPts val="600"/>
+              </a:spcAft>
+            </a:pPr>
+            <a:r>
+              <a:rPr sz="1400" b="1">
+                <a:solidFill>
+                  <a:srgbClr val="0B3D7A"/>
+                </a:solidFill>
+              </a:rPr>
+              <a:t>Sweep and sign off</a:t>
+            </a:r>
+          </a:p>
+          <a:p>
+            <a:pPr algn="l">
+              <a:spcAft>
+                <a:spcPts val="600"/>
+              </a:spcAft>
+            </a:pPr>
+            <a:r>
+              <a:rPr sz="1100" b="0">
+                <a:solidFill>
+                  <a:srgbClr val="4C5D69"/>
+                </a:solidFill>
+              </a:rPr>
+              <a:t>PASS, EMPTY, SLOW or FAIL per resource with timing; one document per org</a:t>
+            </a:r>
+          </a:p>
+        </p:txBody>
+      </p:sp>
+      <p:sp>
+        <p:nvSpPr>
+          <p:cNvPr id="29" name="Rounded Rectangle 28"/>
+          <p:cNvSpPr/>
+          <p:nvPr/>
+        </p:nvSpPr>
+        <p:spPr>
+          <a:xfrm>
+            <a:off x="15115032" y="2514600"/>
+            <a:ext cx="4114800" cy="457200"/>
+          </a:xfrm>
+          <a:prstGeom prst="roundRect">
+            <a:avLst>
+              <a:gd name="adj" fmla="val 50000"/>
+            </a:avLst>
           </a:prstGeom>
           <a:solidFill>
             <a:srgbClr val="FFA418"/>
@@ -13997,7 +14954,7 @@
           </a:fontRef>
         </p:style>
         <p:txBody>
-          <a:bodyPr rtlCol="0" anchor="ctr" wrap="square" lIns="0" rIns="0" tIns="54864" bIns="54864"/>
+          <a:bodyPr rtlCol="0" anchor="ctr" wrap="square" lIns="73152" rIns="73152" tIns="54864" bIns="54864"/>
           <a:lstStyle/>
           <a:p>
             <a:pPr algn="ctr">
@@ -14006,83 +14963,30 @@
               </a:spcAft>
             </a:pPr>
             <a:r>
-              <a:rPr sz="1500" b="1">
+              <a:rPr sz="1200" b="1">
                 <a:solidFill>
                   <a:srgbClr val="0B3D7A"/>
                 </a:solidFill>
               </a:rPr>
-              <a:t>4</a:t>
-            </a:r>
-          </a:p>
-        </p:txBody>
-      </p:sp>
-      <p:sp>
-        <p:nvSpPr>
-          <p:cNvPr id="16" name="TextBox 15"/>
-          <p:cNvSpPr txBox="1"/>
-          <p:nvPr/>
-        </p:nvSpPr>
-        <p:spPr>
-          <a:xfrm>
-            <a:off x="1517904" y="6912863"/>
-            <a:ext cx="8252459" cy="1252728"/>
-          </a:xfrm>
-          <a:prstGeom prst="rect">
-            <a:avLst/>
-          </a:prstGeom>
-          <a:noFill/>
-        </p:spPr>
-        <p:txBody>
-          <a:bodyPr wrap="square" anchor="t" lIns="0" rIns="0" tIns="54864" bIns="54864">
-            <a:spAutoFit/>
-          </a:bodyPr>
-          <a:lstStyle/>
-          <a:p>
-            <a:pPr algn="l">
-              <a:spcAft>
-                <a:spcPts val="600"/>
-              </a:spcAft>
-            </a:pPr>
-            <a:r>
-              <a:rPr sz="1900" b="1">
-                <a:solidFill>
-                  <a:srgbClr val="0B3D7A"/>
-                </a:solidFill>
-              </a:rPr>
-              <a:t>Carry only what it needs</a:t>
-            </a:r>
-          </a:p>
-          <a:p>
-            <a:pPr algn="l">
-              <a:spcAft>
-                <a:spcPts val="600"/>
-              </a:spcAft>
-            </a:pPr>
-            <a:r>
-              <a:rPr sz="1500" b="0">
-                <a:solidFill>
-                  <a:srgbClr val="4C5D69"/>
-                </a:solidFill>
-              </a:rPr>
-              <a:t>One packaged copy of each domain (53 today) in one business-process home, every report and view reference rewritten to that copy, and the datasource resource carried because the domains reference it.</a:t>
-            </a:r>
-          </a:p>
-        </p:txBody>
-      </p:sp>
-      <p:sp>
-        <p:nvSpPr>
-          <p:cNvPr id="17" name="Rounded Rectangle 16"/>
+              <a:t>explicit prod flag required</a:t>
+            </a:r>
+          </a:p>
+        </p:txBody>
+      </p:sp>
+      <p:sp>
+        <p:nvSpPr>
+          <p:cNvPr id="30" name="Rounded Rectangle 29"/>
           <p:cNvSpPr/>
           <p:nvPr/>
         </p:nvSpPr>
         <p:spPr>
           <a:xfrm>
-            <a:off x="740664" y="8485632"/>
-            <a:ext cx="9212580" cy="1435607"/>
+            <a:off x="15115032" y="3108960"/>
+            <a:ext cx="4114800" cy="685800"/>
           </a:xfrm>
           <a:prstGeom prst="roundRect">
             <a:avLst>
-              <a:gd name="adj" fmla="val 8000"/>
+              <a:gd name="adj" fmla="val 10000"/>
             </a:avLst>
           </a:prstGeom>
           <a:solidFill>
@@ -14108,25 +15012,125 @@
           </a:fontRef>
         </p:style>
         <p:txBody>
-          <a:bodyPr rtlCol="0" anchor="ctr"/>
-          <a:lstStyle/>
-          <a:p>
-            <a:pPr algn="ctr"/>
-          </a:p>
-        </p:txBody>
-      </p:sp>
-      <p:sp>
-        <p:nvSpPr>
-          <p:cNvPr id="18" name="Oval 17"/>
+          <a:bodyPr rtlCol="0" anchor="ctr" wrap="square" lIns="109728" rIns="109728" tIns="54864" bIns="54864"/>
+          <a:lstStyle/>
+          <a:p>
+            <a:pPr algn="l">
+              <a:spcAft>
+                <a:spcPts val="600"/>
+              </a:spcAft>
+            </a:pPr>
+            <a:r>
+              <a:rPr sz="1400" b="1">
+                <a:solidFill>
+                  <a:srgbClr val="0B3D7A"/>
+                </a:solidFill>
+              </a:rPr>
+              <a:t>Inventory snapshot</a:t>
+            </a:r>
+          </a:p>
+          <a:p>
+            <a:pPr algn="l">
+              <a:spcAft>
+                <a:spcPts val="600"/>
+              </a:spcAft>
+            </a:pPr>
+            <a:r>
+              <a:rPr sz="1100" b="0">
+                <a:solidFill>
+                  <a:srgbClr val="4C5D69"/>
+                </a:solidFill>
+              </a:rPr>
+              <a:t>the rollback baseline</a:t>
+            </a:r>
+          </a:p>
+        </p:txBody>
+      </p:sp>
+      <p:sp>
+        <p:nvSpPr>
+          <p:cNvPr id="31" name="Rounded Rectangle 30"/>
           <p:cNvSpPr/>
           <p:nvPr/>
         </p:nvSpPr>
         <p:spPr>
           <a:xfrm>
-            <a:off x="941832" y="8686800"/>
-            <a:ext cx="457200" cy="457200"/>
-          </a:xfrm>
-          <a:prstGeom prst="ellipse">
+            <a:off x="15115032" y="3931920"/>
+            <a:ext cx="4114800" cy="1005840"/>
+          </a:xfrm>
+          <a:prstGeom prst="roundRect">
+            <a:avLst>
+              <a:gd name="adj" fmla="val 10000"/>
+            </a:avLst>
+          </a:prstGeom>
+          <a:solidFill>
+            <a:srgbClr val="F5EFE9"/>
+          </a:solidFill>
+          <a:ln>
+            <a:noFill/>
+          </a:ln>
+          <a:effectLst/>
+        </p:spPr>
+        <p:style>
+          <a:lnRef idx="1">
+            <a:schemeClr val="accent1"/>
+          </a:lnRef>
+          <a:fillRef idx="3">
+            <a:schemeClr val="accent1"/>
+          </a:fillRef>
+          <a:effectRef idx="2">
+            <a:schemeClr val="accent1"/>
+          </a:effectRef>
+          <a:fontRef idx="minor">
+            <a:schemeClr val="lt1"/>
+          </a:fontRef>
+        </p:style>
+        <p:txBody>
+          <a:bodyPr rtlCol="0" anchor="ctr" wrap="square" lIns="109728" rIns="109728" tIns="54864" bIns="54864"/>
+          <a:lstStyle/>
+          <a:p>
+            <a:pPr algn="l">
+              <a:spcAft>
+                <a:spcPts val="600"/>
+              </a:spcAft>
+            </a:pPr>
+            <a:r>
+              <a:rPr sz="1400" b="1">
+                <a:solidFill>
+                  <a:srgbClr val="0B3D7A"/>
+                </a:solidFill>
+              </a:rPr>
+              <a:t>Same promotion, same proofs</a:t>
+            </a:r>
+          </a:p>
+          <a:p>
+            <a:pPr algn="l">
+              <a:spcAft>
+                <a:spcPts val="600"/>
+              </a:spcAft>
+            </a:pPr>
+            <a:r>
+              <a:rPr sz="1100" b="0">
+                <a:solidFill>
+                  <a:srgbClr val="4C5D69"/>
+                </a:solidFill>
+              </a:rPr>
+              <a:t>target datasource carried; rewritten; verified; imported; compared; executed</a:t>
+            </a:r>
+          </a:p>
+        </p:txBody>
+      </p:sp>
+      <p:sp>
+        <p:nvSpPr>
+          <p:cNvPr id="32" name="Diamond 31"/>
+          <p:cNvSpPr/>
+          <p:nvPr/>
+        </p:nvSpPr>
+        <p:spPr>
+          <a:xfrm>
+            <a:off x="16395192" y="5074920"/>
+            <a:ext cx="1554480" cy="822960"/>
+          </a:xfrm>
+          <a:prstGeom prst="diamond">
             <a:avLst/>
           </a:prstGeom>
           <a:solidFill>
@@ -14152,7 +15156,7 @@
           </a:fontRef>
         </p:style>
         <p:txBody>
-          <a:bodyPr rtlCol="0" anchor="ctr" wrap="square" lIns="0" rIns="0" tIns="54864" bIns="54864"/>
+          <a:bodyPr rtlCol="0" anchor="ctr" wrap="square" lIns="18288" rIns="18288" tIns="54864" bIns="54864"/>
           <a:lstStyle/>
           <a:p>
             <a:pPr algn="ctr">
@@ -14161,83 +15165,30 @@
               </a:spcAft>
             </a:pPr>
             <a:r>
-              <a:rPr sz="1500" b="1">
+              <a:rPr sz="1100" b="1">
                 <a:solidFill>
                   <a:srgbClr val="0B3D7A"/>
                 </a:solidFill>
               </a:rPr>
-              <a:t>5</a:t>
-            </a:r>
-          </a:p>
-        </p:txBody>
-      </p:sp>
-      <p:sp>
-        <p:nvSpPr>
-          <p:cNvPr id="19" name="TextBox 18"/>
-          <p:cNvSpPr txBox="1"/>
-          <p:nvPr/>
-        </p:nvSpPr>
-        <p:spPr>
-          <a:xfrm>
-            <a:off x="1517904" y="8577072"/>
-            <a:ext cx="8252459" cy="1252728"/>
-          </a:xfrm>
-          <a:prstGeom prst="rect">
-            <a:avLst/>
-          </a:prstGeom>
-          <a:noFill/>
-        </p:spPr>
-        <p:txBody>
-          <a:bodyPr wrap="square" anchor="t" lIns="0" rIns="0" tIns="54864" bIns="54864">
-            <a:spAutoFit/>
-          </a:bodyPr>
-          <a:lstStyle/>
-          <a:p>
-            <a:pPr algn="l">
-              <a:spcAft>
-                <a:spcPts val="600"/>
-              </a:spcAft>
-            </a:pPr>
-            <a:r>
-              <a:rPr sz="1900" b="1">
-                <a:solidFill>
-                  <a:srgbClr val="0B3D7A"/>
-                </a:solidFill>
-              </a:rPr>
-              <a:t>Clean the package</a:t>
-            </a:r>
-          </a:p>
-          <a:p>
-            <a:pPr algn="l">
-              <a:spcAft>
-                <a:spcPts val="600"/>
-              </a:spcAft>
-            </a:pPr>
-            <a:r>
-              <a:rPr sz="1500" b="0">
-                <a:solidFill>
-                  <a:srgbClr val="4C5D69"/>
-                </a:solidFill>
-              </a:rPr>
-              <a:t>Print-wrapper reports stripped from saved Ad Hoc views, dashboards tied to public templates left out, folder metadata generated, the import index narrowed to the offering folder plus the datasource.</a:t>
-            </a:r>
-          </a:p>
-        </p:txBody>
-      </p:sp>
-      <p:sp>
-        <p:nvSpPr>
-          <p:cNvPr id="20" name="Rounded Rectangle 19"/>
+              <a:t>seven proofs pass?</a:t>
+            </a:r>
+          </a:p>
+        </p:txBody>
+      </p:sp>
+      <p:sp>
+        <p:nvSpPr>
+          <p:cNvPr id="33" name="Rounded Rectangle 32"/>
           <p:cNvSpPr/>
           <p:nvPr/>
         </p:nvSpPr>
         <p:spPr>
           <a:xfrm>
-            <a:off x="10181844" y="1828800"/>
-            <a:ext cx="9212580" cy="1435607"/>
+            <a:off x="15115032" y="6035040"/>
+            <a:ext cx="4114800" cy="685800"/>
           </a:xfrm>
           <a:prstGeom prst="roundRect">
             <a:avLst>
-              <a:gd name="adj" fmla="val 8000"/>
+              <a:gd name="adj" fmla="val 10000"/>
             </a:avLst>
           </a:prstGeom>
           <a:solidFill>
@@ -14263,136 +15214,54 @@
           </a:fontRef>
         </p:style>
         <p:txBody>
-          <a:bodyPr rtlCol="0" anchor="ctr"/>
-          <a:lstStyle/>
-          <a:p>
-            <a:pPr algn="ctr"/>
-          </a:p>
-        </p:txBody>
-      </p:sp>
-      <p:sp>
-        <p:nvSpPr>
-          <p:cNvPr id="21" name="Oval 20"/>
+          <a:bodyPr rtlCol="0" anchor="ctr" wrap="square" lIns="109728" rIns="109728" tIns="54864" bIns="54864"/>
+          <a:lstStyle/>
+          <a:p>
+            <a:pPr algn="l">
+              <a:spcAft>
+                <a:spcPts val="600"/>
+              </a:spcAft>
+            </a:pPr>
+            <a:r>
+              <a:rPr sz="1400" b="1">
+                <a:solidFill>
+                  <a:srgbClr val="0B3D7A"/>
+                </a:solidFill>
+              </a:rPr>
+              <a:t>Sweep and sign off</a:t>
+            </a:r>
+          </a:p>
+          <a:p>
+            <a:pPr algn="l">
+              <a:spcAft>
+                <a:spcPts val="600"/>
+              </a:spcAft>
+            </a:pPr>
+            <a:r>
+              <a:rPr sz="1100" b="0">
+                <a:solidFill>
+                  <a:srgbClr val="4C5D69"/>
+                </a:solidFill>
+              </a:rPr>
+              <a:t>on the client's prod numbers</a:t>
+            </a:r>
+          </a:p>
+        </p:txBody>
+      </p:sp>
+      <p:sp>
+        <p:nvSpPr>
+          <p:cNvPr id="34" name="Rounded Rectangle 33"/>
           <p:cNvSpPr/>
           <p:nvPr/>
         </p:nvSpPr>
         <p:spPr>
           <a:xfrm>
-            <a:off x="10383012" y="2029968"/>
-            <a:ext cx="457200" cy="457200"/>
-          </a:xfrm>
-          <a:prstGeom prst="ellipse">
-            <a:avLst/>
-          </a:prstGeom>
-          <a:solidFill>
-            <a:srgbClr val="FFA418"/>
-          </a:solidFill>
-          <a:ln>
-            <a:noFill/>
-          </a:ln>
-          <a:effectLst/>
-        </p:spPr>
-        <p:style>
-          <a:lnRef idx="1">
-            <a:schemeClr val="accent1"/>
-          </a:lnRef>
-          <a:fillRef idx="3">
-            <a:schemeClr val="accent1"/>
-          </a:fillRef>
-          <a:effectRef idx="2">
-            <a:schemeClr val="accent1"/>
-          </a:effectRef>
-          <a:fontRef idx="minor">
-            <a:schemeClr val="lt1"/>
-          </a:fontRef>
-        </p:style>
-        <p:txBody>
-          <a:bodyPr rtlCol="0" anchor="ctr" wrap="square" lIns="0" rIns="0" tIns="54864" bIns="54864"/>
-          <a:lstStyle/>
-          <a:p>
-            <a:pPr algn="ctr">
-              <a:spcAft>
-                <a:spcPts val="600"/>
-              </a:spcAft>
-            </a:pPr>
-            <a:r>
-              <a:rPr sz="1500" b="1">
-                <a:solidFill>
-                  <a:srgbClr val="0B3D7A"/>
-                </a:solidFill>
-              </a:rPr>
-              <a:t>6</a:t>
-            </a:r>
-          </a:p>
-        </p:txBody>
-      </p:sp>
-      <p:sp>
-        <p:nvSpPr>
-          <p:cNvPr id="22" name="TextBox 21"/>
-          <p:cNvSpPr txBox="1"/>
-          <p:nvPr/>
-        </p:nvSpPr>
-        <p:spPr>
-          <a:xfrm>
-            <a:off x="10959084" y="1920240"/>
-            <a:ext cx="8252459" cy="1252728"/>
-          </a:xfrm>
-          <a:prstGeom prst="rect">
-            <a:avLst/>
-          </a:prstGeom>
-          <a:noFill/>
-        </p:spPr>
-        <p:txBody>
-          <a:bodyPr wrap="square" anchor="t" lIns="0" rIns="0" tIns="54864" bIns="54864">
-            <a:spAutoFit/>
-          </a:bodyPr>
-          <a:lstStyle/>
-          <a:p>
-            <a:pPr algn="l">
-              <a:spcAft>
-                <a:spcPts val="600"/>
-              </a:spcAft>
-            </a:pPr>
-            <a:r>
-              <a:rPr sz="1900" b="1">
-                <a:solidFill>
-                  <a:srgbClr val="0B3D7A"/>
-                </a:solidFill>
-              </a:rPr>
-              <a:t>Prove on Origin_TEST</a:t>
-            </a:r>
-          </a:p>
-          <a:p>
-            <a:pPr algn="l">
-              <a:spcAft>
-                <a:spcPts val="600"/>
-              </a:spcAft>
-            </a:pPr>
-            <a:r>
-              <a:rPr sz="1500" b="0">
-                <a:solidFill>
-                  <a:srgbClr val="4C5D69"/>
-                </a:solidFill>
-              </a:rPr>
-              <a:t>The first promotion, with the seven proofs: import without warnings, re-export byte-equal inside the scope, every resource executed, datasource connection unchanged.</a:t>
-            </a:r>
-          </a:p>
-        </p:txBody>
-      </p:sp>
-      <p:sp>
-        <p:nvSpPr>
-          <p:cNvPr id="23" name="Rounded Rectangle 22"/>
-          <p:cNvSpPr/>
-          <p:nvPr/>
-        </p:nvSpPr>
-        <p:spPr>
-          <a:xfrm>
-            <a:off x="10181844" y="3493008"/>
-            <a:ext cx="9212580" cy="1435607"/>
+            <a:off x="15115032" y="6858000"/>
+            <a:ext cx="4114800" cy="777240"/>
           </a:xfrm>
           <a:prstGeom prst="roundRect">
             <a:avLst>
-              <a:gd name="adj" fmla="val 8000"/>
+              <a:gd name="adj" fmla="val 10000"/>
             </a:avLst>
           </a:prstGeom>
           <a:solidFill>
@@ -14418,136 +15287,54 @@
           </a:fontRef>
         </p:style>
         <p:txBody>
-          <a:bodyPr rtlCol="0" anchor="ctr"/>
-          <a:lstStyle/>
-          <a:p>
-            <a:pPr algn="ctr"/>
-          </a:p>
-        </p:txBody>
-      </p:sp>
-      <p:sp>
-        <p:nvSpPr>
-          <p:cNvPr id="24" name="Oval 23"/>
+          <a:bodyPr rtlCol="0" anchor="ctr" wrap="square" lIns="109728" rIns="109728" tIns="54864" bIns="54864"/>
+          <a:lstStyle/>
+          <a:p>
+            <a:pPr algn="l">
+              <a:spcAft>
+                <a:spcPts val="600"/>
+              </a:spcAft>
+            </a:pPr>
+            <a:r>
+              <a:rPr sz="1400" b="1">
+                <a:solidFill>
+                  <a:srgbClr val="0B3D7A"/>
+                </a:solidFill>
+              </a:rPr>
+              <a:t>Diff after = rollback record</a:t>
+            </a:r>
+          </a:p>
+          <a:p>
+            <a:pPr algn="l">
+              <a:spcAft>
+                <a:spcPts val="600"/>
+              </a:spcAft>
+            </a:pPr>
+            <a:r>
+              <a:rPr sz="1100" b="0">
+                <a:solidFill>
+                  <a:srgbClr val="4C5D69"/>
+                </a:solidFill>
+              </a:rPr>
+              <a:t>inventory before against after: nothing else moved</a:t>
+            </a:r>
+          </a:p>
+        </p:txBody>
+      </p:sp>
+      <p:sp>
+        <p:nvSpPr>
+          <p:cNvPr id="35" name="Rounded Rectangle 34"/>
           <p:cNvSpPr/>
           <p:nvPr/>
         </p:nvSpPr>
         <p:spPr>
           <a:xfrm>
-            <a:off x="10383012" y="3694176"/>
-            <a:ext cx="457200" cy="457200"/>
-          </a:xfrm>
-          <a:prstGeom prst="ellipse">
-            <a:avLst/>
-          </a:prstGeom>
-          <a:solidFill>
-            <a:srgbClr val="FFA418"/>
-          </a:solidFill>
-          <a:ln>
-            <a:noFill/>
-          </a:ln>
-          <a:effectLst/>
-        </p:spPr>
-        <p:style>
-          <a:lnRef idx="1">
-            <a:schemeClr val="accent1"/>
-          </a:lnRef>
-          <a:fillRef idx="3">
-            <a:schemeClr val="accent1"/>
-          </a:fillRef>
-          <a:effectRef idx="2">
-            <a:schemeClr val="accent1"/>
-          </a:effectRef>
-          <a:fontRef idx="minor">
-            <a:schemeClr val="lt1"/>
-          </a:fontRef>
-        </p:style>
-        <p:txBody>
-          <a:bodyPr rtlCol="0" anchor="ctr" wrap="square" lIns="0" rIns="0" tIns="54864" bIns="54864"/>
-          <a:lstStyle/>
-          <a:p>
-            <a:pPr algn="ctr">
-              <a:spcAft>
-                <a:spcPts val="600"/>
-              </a:spcAft>
-            </a:pPr>
-            <a:r>
-              <a:rPr sz="1500" b="1">
-                <a:solidFill>
-                  <a:srgbClr val="0B3D7A"/>
-                </a:solidFill>
-              </a:rPr>
-              <a:t>7</a:t>
-            </a:r>
-          </a:p>
-        </p:txBody>
-      </p:sp>
-      <p:sp>
-        <p:nvSpPr>
-          <p:cNvPr id="25" name="TextBox 24"/>
-          <p:cNvSpPr txBox="1"/>
-          <p:nvPr/>
-        </p:nvSpPr>
-        <p:spPr>
-          <a:xfrm>
-            <a:off x="10959084" y="3584448"/>
-            <a:ext cx="8252459" cy="1252728"/>
-          </a:xfrm>
-          <a:prstGeom prst="rect">
-            <a:avLst/>
-          </a:prstGeom>
-          <a:noFill/>
-        </p:spPr>
-        <p:txBody>
-          <a:bodyPr wrap="square" anchor="t" lIns="0" rIns="0" tIns="54864" bIns="54864">
-            <a:spAutoFit/>
-          </a:bodyPr>
-          <a:lstStyle/>
-          <a:p>
-            <a:pPr algn="l">
-              <a:spcAft>
-                <a:spcPts val="600"/>
-              </a:spcAft>
-            </a:pPr>
-            <a:r>
-              <a:rPr sz="1900" b="1">
-                <a:solidFill>
-                  <a:srgbClr val="0B3D7A"/>
-                </a:solidFill>
-              </a:rPr>
-              <a:t>Client test org</a:t>
-            </a:r>
-          </a:p>
-          <a:p>
-            <a:pPr algn="l">
-              <a:spcAft>
-                <a:spcPts val="600"/>
-              </a:spcAft>
-            </a:pPr>
-            <a:r>
-              <a:rPr sz="1500" b="0">
-                <a:solidFill>
-                  <a:srgbClr val="4C5D69"/>
-                </a:solidFill>
-              </a:rPr>
-              <a:t>The datasource switched to the client's test database by carrying the target's own datasource export byte for byte; org path, folder, alias and tenant root rewritten; verified before import.</a:t>
-            </a:r>
-          </a:p>
-        </p:txBody>
-      </p:sp>
-      <p:sp>
-        <p:nvSpPr>
-          <p:cNvPr id="26" name="Rounded Rectangle 25"/>
-          <p:cNvSpPr/>
-          <p:nvPr/>
-        </p:nvSpPr>
-        <p:spPr>
-          <a:xfrm>
-            <a:off x="10181844" y="5157216"/>
-            <a:ext cx="9212580" cy="1435607"/>
+            <a:off x="914400" y="8641080"/>
+            <a:ext cx="5852160" cy="1051560"/>
           </a:xfrm>
           <a:prstGeom prst="roundRect">
             <a:avLst>
-              <a:gd name="adj" fmla="val 8000"/>
+              <a:gd name="adj" fmla="val 10000"/>
             </a:avLst>
           </a:prstGeom>
           <a:solidFill>
@@ -14573,136 +15360,54 @@
           </a:fontRef>
         </p:style>
         <p:txBody>
-          <a:bodyPr rtlCol="0" anchor="ctr"/>
-          <a:lstStyle/>
-          <a:p>
-            <a:pPr algn="ctr"/>
-          </a:p>
-        </p:txBody>
-      </p:sp>
-      <p:sp>
-        <p:nvSpPr>
-          <p:cNvPr id="27" name="Oval 26"/>
+          <a:bodyPr rtlCol="0" anchor="ctr" wrap="square" lIns="109728" rIns="109728" tIns="54864" bIns="54864"/>
+          <a:lstStyle/>
+          <a:p>
+            <a:pPr algn="l">
+              <a:spcAft>
+                <a:spcPts val="600"/>
+              </a:spcAft>
+            </a:pPr>
+            <a:r>
+              <a:rPr sz="1400" b="1">
+                <a:solidFill>
+                  <a:srgbClr val="0B3D7A"/>
+                </a:solidFill>
+              </a:rPr>
+              <a:t>Additive-only domain patch</a:t>
+            </a:r>
+          </a:p>
+          <a:p>
+            <a:pPr algn="l">
+              <a:spcAft>
+                <a:spcPts val="600"/>
+              </a:spcAft>
+            </a:pPr>
+            <a:r>
+              <a:rPr sz="1100" b="0">
+                <a:solidFill>
+                  <a:srgbClr val="4C5D69"/>
+                </a:solidFill>
+              </a:rPr>
+              <a:t>the additions guard refuses any change to what is there; seven proofs per org; one-command restore</a:t>
+            </a:r>
+          </a:p>
+        </p:txBody>
+      </p:sp>
+      <p:sp>
+        <p:nvSpPr>
+          <p:cNvPr id="36" name="Rounded Rectangle 35"/>
           <p:cNvSpPr/>
           <p:nvPr/>
         </p:nvSpPr>
         <p:spPr>
           <a:xfrm>
-            <a:off x="10383012" y="5358383"/>
-            <a:ext cx="457200" cy="457200"/>
-          </a:xfrm>
-          <a:prstGeom prst="ellipse">
-            <a:avLst/>
-          </a:prstGeom>
-          <a:solidFill>
-            <a:srgbClr val="FFA418"/>
-          </a:solidFill>
-          <a:ln>
-            <a:noFill/>
-          </a:ln>
-          <a:effectLst/>
-        </p:spPr>
-        <p:style>
-          <a:lnRef idx="1">
-            <a:schemeClr val="accent1"/>
-          </a:lnRef>
-          <a:fillRef idx="3">
-            <a:schemeClr val="accent1"/>
-          </a:fillRef>
-          <a:effectRef idx="2">
-            <a:schemeClr val="accent1"/>
-          </a:effectRef>
-          <a:fontRef idx="minor">
-            <a:schemeClr val="lt1"/>
-          </a:fontRef>
-        </p:style>
-        <p:txBody>
-          <a:bodyPr rtlCol="0" anchor="ctr" wrap="square" lIns="0" rIns="0" tIns="54864" bIns="54864"/>
-          <a:lstStyle/>
-          <a:p>
-            <a:pPr algn="ctr">
-              <a:spcAft>
-                <a:spcPts val="600"/>
-              </a:spcAft>
-            </a:pPr>
-            <a:r>
-              <a:rPr sz="1500" b="1">
-                <a:solidFill>
-                  <a:srgbClr val="0B3D7A"/>
-                </a:solidFill>
-              </a:rPr>
-              <a:t>8</a:t>
-            </a:r>
-          </a:p>
-        </p:txBody>
-      </p:sp>
-      <p:sp>
-        <p:nvSpPr>
-          <p:cNvPr id="28" name="TextBox 27"/>
-          <p:cNvSpPr txBox="1"/>
-          <p:nvPr/>
-        </p:nvSpPr>
-        <p:spPr>
-          <a:xfrm>
-            <a:off x="10959084" y="5248655"/>
-            <a:ext cx="8252459" cy="1252728"/>
-          </a:xfrm>
-          <a:prstGeom prst="rect">
-            <a:avLst/>
-          </a:prstGeom>
-          <a:noFill/>
-        </p:spPr>
-        <p:txBody>
-          <a:bodyPr wrap="square" anchor="t" lIns="0" rIns="0" tIns="54864" bIns="54864">
-            <a:spAutoFit/>
-          </a:bodyPr>
-          <a:lstStyle/>
-          <a:p>
-            <a:pPr algn="l">
-              <a:spcAft>
-                <a:spcPts val="600"/>
-              </a:spcAft>
-            </a:pPr>
-            <a:r>
-              <a:rPr sz="1900" b="1">
-                <a:solidFill>
-                  <a:srgbClr val="0B3D7A"/>
-                </a:solidFill>
-              </a:rPr>
-              <a:t>Sweep and sign off</a:t>
-            </a:r>
-          </a:p>
-          <a:p>
-            <a:pPr algn="l">
-              <a:spcAft>
-                <a:spcPts val="600"/>
-              </a:spcAft>
-            </a:pPr>
-            <a:r>
-              <a:rPr sz="1500" b="0">
-                <a:solidFill>
-                  <a:srgbClr val="4C5D69"/>
-                </a:solidFill>
-              </a:rPr>
-              <a:t>Every view queried, every report rendered, every domain probed on the client's own numbers. PASS, EMPTY, SLOW or FAIL per resource with its timing; one sign-off document per org.</a:t>
-            </a:r>
-          </a:p>
-        </p:txBody>
-      </p:sp>
-      <p:sp>
-        <p:nvSpPr>
-          <p:cNvPr id="29" name="Rounded Rectangle 28"/>
-          <p:cNvSpPr/>
-          <p:nvPr/>
-        </p:nvSpPr>
-        <p:spPr>
-          <a:xfrm>
-            <a:off x="10181844" y="6821423"/>
-            <a:ext cx="9212580" cy="1435607"/>
+            <a:off x="7132320" y="8641080"/>
+            <a:ext cx="5852160" cy="1051560"/>
           </a:xfrm>
           <a:prstGeom prst="roundRect">
             <a:avLst>
-              <a:gd name="adj" fmla="val 8000"/>
+              <a:gd name="adj" fmla="val 10000"/>
             </a:avLst>
           </a:prstGeom>
           <a:solidFill>
@@ -14728,136 +15433,54 @@
           </a:fontRef>
         </p:style>
         <p:txBody>
-          <a:bodyPr rtlCol="0" anchor="ctr"/>
-          <a:lstStyle/>
-          <a:p>
-            <a:pPr algn="ctr"/>
-          </a:p>
-        </p:txBody>
-      </p:sp>
-      <p:sp>
-        <p:nvSpPr>
-          <p:cNvPr id="30" name="Oval 29"/>
+          <a:bodyPr rtlCol="0" anchor="ctr" wrap="square" lIns="109728" rIns="109728" tIns="54864" bIns="54864"/>
+          <a:lstStyle/>
+          <a:p>
+            <a:pPr algn="l">
+              <a:spcAft>
+                <a:spcPts val="600"/>
+              </a:spcAft>
+            </a:pPr>
+            <a:r>
+              <a:rPr sz="1400" b="1">
+                <a:solidFill>
+                  <a:srgbClr val="0B3D7A"/>
+                </a:solidFill>
+              </a:rPr>
+              <a:t>Standardized Reports folder</a:t>
+            </a:r>
+          </a:p>
+          <a:p>
+            <a:pPr algn="l">
+              <a:spcAft>
+                <a:spcPts val="600"/>
+              </a:spcAft>
+            </a:pPr>
+            <a:r>
+              <a:rPr sz="1100" b="0">
+                <a:solidFill>
+                  <a:srgbClr val="4C5D69"/>
+                </a:solidFill>
+              </a:rPr>
+              <a:t>scheduled SQL reports in one place on every org, promoted by the same tool</a:t>
+            </a:r>
+          </a:p>
+        </p:txBody>
+      </p:sp>
+      <p:sp>
+        <p:nvSpPr>
+          <p:cNvPr id="37" name="Rounded Rectangle 36"/>
           <p:cNvSpPr/>
           <p:nvPr/>
         </p:nvSpPr>
         <p:spPr>
           <a:xfrm>
-            <a:off x="10383012" y="7022591"/>
-            <a:ext cx="457200" cy="457200"/>
-          </a:xfrm>
-          <a:prstGeom prst="ellipse">
-            <a:avLst/>
-          </a:prstGeom>
-          <a:solidFill>
-            <a:srgbClr val="FFA418"/>
-          </a:solidFill>
-          <a:ln>
-            <a:noFill/>
-          </a:ln>
-          <a:effectLst/>
-        </p:spPr>
-        <p:style>
-          <a:lnRef idx="1">
-            <a:schemeClr val="accent1"/>
-          </a:lnRef>
-          <a:fillRef idx="3">
-            <a:schemeClr val="accent1"/>
-          </a:fillRef>
-          <a:effectRef idx="2">
-            <a:schemeClr val="accent1"/>
-          </a:effectRef>
-          <a:fontRef idx="minor">
-            <a:schemeClr val="lt1"/>
-          </a:fontRef>
-        </p:style>
-        <p:txBody>
-          <a:bodyPr rtlCol="0" anchor="ctr" wrap="square" lIns="0" rIns="0" tIns="54864" bIns="54864"/>
-          <a:lstStyle/>
-          <a:p>
-            <a:pPr algn="ctr">
-              <a:spcAft>
-                <a:spcPts val="600"/>
-              </a:spcAft>
-            </a:pPr>
-            <a:r>
-              <a:rPr sz="1500" b="1">
-                <a:solidFill>
-                  <a:srgbClr val="0B3D7A"/>
-                </a:solidFill>
-              </a:rPr>
-              <a:t>9</a:t>
-            </a:r>
-          </a:p>
-        </p:txBody>
-      </p:sp>
-      <p:sp>
-        <p:nvSpPr>
-          <p:cNvPr id="31" name="TextBox 30"/>
-          <p:cNvSpPr txBox="1"/>
-          <p:nvPr/>
-        </p:nvSpPr>
-        <p:spPr>
-          <a:xfrm>
-            <a:off x="10959084" y="6912863"/>
-            <a:ext cx="8252459" cy="1252728"/>
-          </a:xfrm>
-          <a:prstGeom prst="rect">
-            <a:avLst/>
-          </a:prstGeom>
-          <a:noFill/>
-        </p:spPr>
-        <p:txBody>
-          <a:bodyPr wrap="square" anchor="t" lIns="0" rIns="0" tIns="54864" bIns="54864">
-            <a:spAutoFit/>
-          </a:bodyPr>
-          <a:lstStyle/>
-          <a:p>
-            <a:pPr algn="l">
-              <a:spcAft>
-                <a:spcPts val="600"/>
-              </a:spcAft>
-            </a:pPr>
-            <a:r>
-              <a:rPr sz="1900" b="1">
-                <a:solidFill>
-                  <a:srgbClr val="0B3D7A"/>
-                </a:solidFill>
-              </a:rPr>
-              <a:t>Client prod org</a:t>
-            </a:r>
-          </a:p>
-          <a:p>
-            <a:pPr algn="l">
-              <a:spcAft>
-                <a:spcPts val="600"/>
-              </a:spcAft>
-            </a:pPr>
-            <a:r>
-              <a:rPr sz="1500" b="0">
-                <a:solidFill>
-                  <a:srgbClr val="4C5D69"/>
-                </a:solidFill>
-              </a:rPr>
-              <a:t>The same tool and the same proofs with an explicit prod flag. A repository inventory snapshot before and a diff after are the rollback record.</a:t>
-            </a:r>
-          </a:p>
-        </p:txBody>
-      </p:sp>
-      <p:sp>
-        <p:nvSpPr>
-          <p:cNvPr id="32" name="Rounded Rectangle 31"/>
-          <p:cNvSpPr/>
-          <p:nvPr/>
-        </p:nvSpPr>
-        <p:spPr>
-          <a:xfrm>
-            <a:off x="10181844" y="8485632"/>
-            <a:ext cx="9212580" cy="1435607"/>
+            <a:off x="13350240" y="8641080"/>
+            <a:ext cx="5852160" cy="1051560"/>
           </a:xfrm>
           <a:prstGeom prst="roundRect">
             <a:avLst>
-              <a:gd name="adj" fmla="val 8000"/>
+              <a:gd name="adj" fmla="val 10000"/>
             </a:avLst>
           </a:prstGeom>
           <a:solidFill>
@@ -14883,79 +15506,1050 @@
           </a:fontRef>
         </p:style>
         <p:txBody>
-          <a:bodyPr rtlCol="0" anchor="ctr"/>
-          <a:lstStyle/>
-          <a:p>
-            <a:pPr algn="ctr"/>
-          </a:p>
-        </p:txBody>
-      </p:sp>
-      <p:sp>
-        <p:nvSpPr>
-          <p:cNvPr id="33" name="Oval 32"/>
-          <p:cNvSpPr/>
-          <p:nvPr/>
-        </p:nvSpPr>
-        <p:spPr>
-          <a:xfrm>
-            <a:off x="10383012" y="8686800"/>
-            <a:ext cx="457200" cy="457200"/>
-          </a:xfrm>
-          <a:prstGeom prst="ellipse">
+          <a:bodyPr rtlCol="0" anchor="ctr" wrap="square" lIns="109728" rIns="109728" tIns="54864" bIns="54864"/>
+          <a:lstStyle/>
+          <a:p>
+            <a:pPr algn="l">
+              <a:spcAft>
+                <a:spcPts val="600"/>
+              </a:spcAft>
+            </a:pPr>
+            <a:r>
+              <a:rPr sz="1400" b="1">
+                <a:solidFill>
+                  <a:srgbClr val="0B3D7A"/>
+                </a:solidFill>
+              </a:rPr>
+              <a:t>Sweep after every change</a:t>
+            </a:r>
+          </a:p>
+          <a:p>
+            <a:pPr algn="l">
+              <a:spcAft>
+                <a:spcPts val="600"/>
+              </a:spcAft>
+            </a:pPr>
+            <a:r>
+              <a:rPr sz="1100" b="0">
+                <a:solidFill>
+                  <a:srgbClr val="4C5D69"/>
+                </a:solidFill>
+              </a:rPr>
+              <a:t>the sign-off is regenerated; the first red row is the alert</a:t>
+            </a:r>
+          </a:p>
+        </p:txBody>
+      </p:sp>
+      <p:cxnSp>
+        <p:nvCxnSpPr>
+          <p:cNvPr id="38" name="Connector 37"/>
+          <p:cNvCxnSpPr/>
+          <p:nvPr/>
+        </p:nvCxnSpPr>
+        <p:spPr>
+          <a:xfrm>
+            <a:off x="2962656" y="3429000"/>
+            <a:ext cx="0" cy="137160"/>
+          </a:xfrm>
+          <a:prstGeom prst="line">
             <a:avLst/>
           </a:prstGeom>
-          <a:solidFill>
-            <a:srgbClr val="FFA418"/>
-          </a:solidFill>
-          <a:ln>
-            <a:noFill/>
-          </a:ln>
-          <a:effectLst/>
-        </p:spPr>
-        <p:style>
-          <a:lnRef idx="1">
-            <a:schemeClr val="accent1"/>
-          </a:lnRef>
-          <a:fillRef idx="3">
-            <a:schemeClr val="accent1"/>
-          </a:fillRef>
-          <a:effectRef idx="2">
-            <a:schemeClr val="accent1"/>
-          </a:effectRef>
-          <a:fontRef idx="minor">
-            <a:schemeClr val="lt1"/>
-          </a:fontRef>
-        </p:style>
-        <p:txBody>
-          <a:bodyPr rtlCol="0" anchor="ctr" wrap="square" lIns="0" rIns="0" tIns="54864" bIns="54864"/>
-          <a:lstStyle/>
-          <a:p>
-            <a:pPr algn="ctr">
-              <a:spcAft>
-                <a:spcPts val="600"/>
-              </a:spcAft>
-            </a:pPr>
-            <a:r>
-              <a:rPr sz="1500" b="1">
-                <a:solidFill>
-                  <a:srgbClr val="0B3D7A"/>
-                </a:solidFill>
-              </a:rPr>
-              <a:t>10</a:t>
-            </a:r>
-          </a:p>
-        </p:txBody>
-      </p:sp>
-      <p:sp>
-        <p:nvSpPr>
-          <p:cNvPr id="34" name="TextBox 33"/>
+          <a:ln w="28575">
+            <a:solidFill>
+              <a:srgbClr val="F5EFE9"/>
+            </a:solidFill>
+            <a:tailEnd type="triangle" w="med" len="med"/>
+          </a:ln>
+        </p:spPr>
+        <p:style>
+          <a:lnRef idx="2">
+            <a:schemeClr val="accent1"/>
+          </a:lnRef>
+          <a:fillRef idx="0">
+            <a:schemeClr val="accent1"/>
+          </a:fillRef>
+          <a:effectRef idx="1">
+            <a:schemeClr val="accent1"/>
+          </a:effectRef>
+          <a:fontRef idx="minor">
+            <a:schemeClr val="tx1"/>
+          </a:fontRef>
+        </p:style>
+      </p:cxnSp>
+      <p:cxnSp>
+        <p:nvCxnSpPr>
+          <p:cNvPr id="39" name="Connector 38"/>
+          <p:cNvCxnSpPr/>
+          <p:nvPr/>
+        </p:nvCxnSpPr>
+        <p:spPr>
+          <a:xfrm>
+            <a:off x="2962656" y="4297680"/>
+            <a:ext cx="0" cy="137160"/>
+          </a:xfrm>
+          <a:prstGeom prst="line">
+            <a:avLst/>
+          </a:prstGeom>
+          <a:ln w="28575">
+            <a:solidFill>
+              <a:srgbClr val="F5EFE9"/>
+            </a:solidFill>
+            <a:tailEnd type="triangle" w="med" len="med"/>
+          </a:ln>
+        </p:spPr>
+        <p:style>
+          <a:lnRef idx="2">
+            <a:schemeClr val="accent1"/>
+          </a:lnRef>
+          <a:fillRef idx="0">
+            <a:schemeClr val="accent1"/>
+          </a:fillRef>
+          <a:effectRef idx="1">
+            <a:schemeClr val="accent1"/>
+          </a:effectRef>
+          <a:fontRef idx="minor">
+            <a:schemeClr val="tx1"/>
+          </a:fontRef>
+        </p:style>
+      </p:cxnSp>
+      <p:cxnSp>
+        <p:nvCxnSpPr>
+          <p:cNvPr id="40" name="Connector 39"/>
+          <p:cNvCxnSpPr/>
+          <p:nvPr/>
+        </p:nvCxnSpPr>
+        <p:spPr>
+          <a:xfrm>
+            <a:off x="2962656" y="5852159"/>
+            <a:ext cx="0" cy="274321"/>
+          </a:xfrm>
+          <a:prstGeom prst="line">
+            <a:avLst/>
+          </a:prstGeom>
+          <a:ln w="28575">
+            <a:solidFill>
+              <a:srgbClr val="F5EFE9"/>
+            </a:solidFill>
+            <a:tailEnd type="triangle" w="med" len="med"/>
+          </a:ln>
+        </p:spPr>
+        <p:style>
+          <a:lnRef idx="2">
+            <a:schemeClr val="accent1"/>
+          </a:lnRef>
+          <a:fillRef idx="0">
+            <a:schemeClr val="accent1"/>
+          </a:fillRef>
+          <a:effectRef idx="1">
+            <a:schemeClr val="accent1"/>
+          </a:effectRef>
+          <a:fontRef idx="minor">
+            <a:schemeClr val="tx1"/>
+          </a:fontRef>
+        </p:style>
+      </p:cxnSp>
+      <p:cxnSp>
+        <p:nvCxnSpPr>
+          <p:cNvPr id="41" name="Connector 40"/>
+          <p:cNvCxnSpPr/>
+          <p:nvPr/>
+        </p:nvCxnSpPr>
+        <p:spPr>
+          <a:xfrm>
+            <a:off x="3739896" y="6537960"/>
+            <a:ext cx="1591056" cy="0"/>
+          </a:xfrm>
+          <a:prstGeom prst="line">
+            <a:avLst/>
+          </a:prstGeom>
+          <a:ln w="28575">
+            <a:solidFill>
+              <a:srgbClr val="F5EFE9"/>
+            </a:solidFill>
+          </a:ln>
+        </p:spPr>
+        <p:style>
+          <a:lnRef idx="2">
+            <a:schemeClr val="accent1"/>
+          </a:lnRef>
+          <a:fillRef idx="0">
+            <a:schemeClr val="accent1"/>
+          </a:fillRef>
+          <a:effectRef idx="1">
+            <a:schemeClr val="accent1"/>
+          </a:effectRef>
+          <a:fontRef idx="minor">
+            <a:schemeClr val="tx1"/>
+          </a:fontRef>
+        </p:style>
+      </p:cxnSp>
+      <p:cxnSp>
+        <p:nvCxnSpPr>
+          <p:cNvPr id="42" name="Connector 41"/>
+          <p:cNvCxnSpPr/>
+          <p:nvPr/>
+        </p:nvCxnSpPr>
+        <p:spPr>
+          <a:xfrm flipV="1">
+            <a:off x="5330952" y="2898648"/>
+            <a:ext cx="0" cy="3639312"/>
+          </a:xfrm>
+          <a:prstGeom prst="line">
+            <a:avLst/>
+          </a:prstGeom>
+          <a:ln w="28575">
+            <a:solidFill>
+              <a:srgbClr val="F5EFE9"/>
+            </a:solidFill>
+          </a:ln>
+        </p:spPr>
+        <p:style>
+          <a:lnRef idx="2">
+            <a:schemeClr val="accent1"/>
+          </a:lnRef>
+          <a:fillRef idx="0">
+            <a:schemeClr val="accent1"/>
+          </a:fillRef>
+          <a:effectRef idx="1">
+            <a:schemeClr val="accent1"/>
+          </a:effectRef>
+          <a:fontRef idx="minor">
+            <a:schemeClr val="tx1"/>
+          </a:fontRef>
+        </p:style>
+      </p:cxnSp>
+      <p:cxnSp>
+        <p:nvCxnSpPr>
+          <p:cNvPr id="43" name="Connector 42"/>
+          <p:cNvCxnSpPr/>
+          <p:nvPr/>
+        </p:nvCxnSpPr>
+        <p:spPr>
+          <a:xfrm>
+            <a:off x="5330952" y="2898648"/>
+            <a:ext cx="310896" cy="4572"/>
+          </a:xfrm>
+          <a:prstGeom prst="line">
+            <a:avLst/>
+          </a:prstGeom>
+          <a:ln w="28575">
+            <a:solidFill>
+              <a:srgbClr val="F5EFE9"/>
+            </a:solidFill>
+            <a:tailEnd type="triangle" w="med" len="med"/>
+          </a:ln>
+        </p:spPr>
+        <p:style>
+          <a:lnRef idx="2">
+            <a:schemeClr val="accent1"/>
+          </a:lnRef>
+          <a:fillRef idx="0">
+            <a:schemeClr val="accent1"/>
+          </a:fillRef>
+          <a:effectRef idx="1">
+            <a:schemeClr val="accent1"/>
+          </a:effectRef>
+          <a:fontRef idx="minor">
+            <a:schemeClr val="tx1"/>
+          </a:fontRef>
+        </p:style>
+      </p:cxnSp>
+      <p:cxnSp>
+        <p:nvCxnSpPr>
+          <p:cNvPr id="44" name="Connector 43"/>
+          <p:cNvCxnSpPr/>
+          <p:nvPr/>
+        </p:nvCxnSpPr>
+        <p:spPr>
+          <a:xfrm>
+            <a:off x="7699248" y="3291840"/>
+            <a:ext cx="0" cy="137160"/>
+          </a:xfrm>
+          <a:prstGeom prst="line">
+            <a:avLst/>
+          </a:prstGeom>
+          <a:ln w="28575">
+            <a:solidFill>
+              <a:srgbClr val="F5EFE9"/>
+            </a:solidFill>
+            <a:tailEnd type="triangle" w="med" len="med"/>
+          </a:ln>
+        </p:spPr>
+        <p:style>
+          <a:lnRef idx="2">
+            <a:schemeClr val="accent1"/>
+          </a:lnRef>
+          <a:fillRef idx="0">
+            <a:schemeClr val="accent1"/>
+          </a:fillRef>
+          <a:effectRef idx="1">
+            <a:schemeClr val="accent1"/>
+          </a:effectRef>
+          <a:fontRef idx="minor">
+            <a:schemeClr val="tx1"/>
+          </a:fontRef>
+        </p:style>
+      </p:cxnSp>
+      <p:cxnSp>
+        <p:nvCxnSpPr>
+          <p:cNvPr id="45" name="Connector 44"/>
+          <p:cNvCxnSpPr/>
+          <p:nvPr/>
+        </p:nvCxnSpPr>
+        <p:spPr>
+          <a:xfrm>
+            <a:off x="7699248" y="4206240"/>
+            <a:ext cx="0" cy="137160"/>
+          </a:xfrm>
+          <a:prstGeom prst="line">
+            <a:avLst/>
+          </a:prstGeom>
+          <a:ln w="28575">
+            <a:solidFill>
+              <a:srgbClr val="F5EFE9"/>
+            </a:solidFill>
+            <a:tailEnd type="triangle" w="med" len="med"/>
+          </a:ln>
+        </p:spPr>
+        <p:style>
+          <a:lnRef idx="2">
+            <a:schemeClr val="accent1"/>
+          </a:lnRef>
+          <a:fillRef idx="0">
+            <a:schemeClr val="accent1"/>
+          </a:fillRef>
+          <a:effectRef idx="1">
+            <a:schemeClr val="accent1"/>
+          </a:effectRef>
+          <a:fontRef idx="minor">
+            <a:schemeClr val="tx1"/>
+          </a:fontRef>
+        </p:style>
+      </p:cxnSp>
+      <p:cxnSp>
+        <p:nvCxnSpPr>
+          <p:cNvPr id="46" name="Connector 45"/>
+          <p:cNvCxnSpPr/>
+          <p:nvPr/>
+        </p:nvCxnSpPr>
+        <p:spPr>
+          <a:xfrm>
+            <a:off x="7699248" y="5212080"/>
+            <a:ext cx="0" cy="182880"/>
+          </a:xfrm>
+          <a:prstGeom prst="line">
+            <a:avLst/>
+          </a:prstGeom>
+          <a:ln w="28575">
+            <a:solidFill>
+              <a:srgbClr val="F5EFE9"/>
+            </a:solidFill>
+            <a:tailEnd type="triangle" w="med" len="med"/>
+          </a:ln>
+        </p:spPr>
+        <p:style>
+          <a:lnRef idx="2">
+            <a:schemeClr val="accent1"/>
+          </a:lnRef>
+          <a:fillRef idx="0">
+            <a:schemeClr val="accent1"/>
+          </a:fillRef>
+          <a:effectRef idx="1">
+            <a:schemeClr val="accent1"/>
+          </a:effectRef>
+          <a:fontRef idx="minor">
+            <a:schemeClr val="tx1"/>
+          </a:fontRef>
+        </p:style>
+      </p:cxnSp>
+      <p:cxnSp>
+        <p:nvCxnSpPr>
+          <p:cNvPr id="47" name="Connector 46"/>
+          <p:cNvCxnSpPr/>
+          <p:nvPr/>
+        </p:nvCxnSpPr>
+        <p:spPr>
+          <a:xfrm>
+            <a:off x="7699248" y="6217920"/>
+            <a:ext cx="0" cy="182880"/>
+          </a:xfrm>
+          <a:prstGeom prst="line">
+            <a:avLst/>
+          </a:prstGeom>
+          <a:ln w="28575">
+            <a:solidFill>
+              <a:srgbClr val="F5EFE9"/>
+            </a:solidFill>
+            <a:tailEnd type="triangle" w="med" len="med"/>
+          </a:ln>
+        </p:spPr>
+        <p:style>
+          <a:lnRef idx="2">
+            <a:schemeClr val="accent1"/>
+          </a:lnRef>
+          <a:fillRef idx="0">
+            <a:schemeClr val="accent1"/>
+          </a:fillRef>
+          <a:effectRef idx="1">
+            <a:schemeClr val="accent1"/>
+          </a:effectRef>
+          <a:fontRef idx="minor">
+            <a:schemeClr val="tx1"/>
+          </a:fontRef>
+        </p:style>
+      </p:cxnSp>
+      <p:cxnSp>
+        <p:nvCxnSpPr>
+          <p:cNvPr id="48" name="Connector 47"/>
+          <p:cNvCxnSpPr/>
+          <p:nvPr/>
+        </p:nvCxnSpPr>
+        <p:spPr>
+          <a:xfrm flipV="1">
+            <a:off x="9756648" y="6784848"/>
+            <a:ext cx="310896" cy="4572"/>
+          </a:xfrm>
+          <a:prstGeom prst="line">
+            <a:avLst/>
+          </a:prstGeom>
+          <a:ln w="28575">
+            <a:solidFill>
+              <a:srgbClr val="F5EFE9"/>
+            </a:solidFill>
+          </a:ln>
+        </p:spPr>
+        <p:style>
+          <a:lnRef idx="2">
+            <a:schemeClr val="accent1"/>
+          </a:lnRef>
+          <a:fillRef idx="0">
+            <a:schemeClr val="accent1"/>
+          </a:fillRef>
+          <a:effectRef idx="1">
+            <a:schemeClr val="accent1"/>
+          </a:effectRef>
+          <a:fontRef idx="minor">
+            <a:schemeClr val="tx1"/>
+          </a:fontRef>
+        </p:style>
+      </p:cxnSp>
+      <p:cxnSp>
+        <p:nvCxnSpPr>
+          <p:cNvPr id="49" name="Connector 48"/>
+          <p:cNvCxnSpPr/>
+          <p:nvPr/>
+        </p:nvCxnSpPr>
+        <p:spPr>
+          <a:xfrm flipV="1">
+            <a:off x="10067544" y="2880360"/>
+            <a:ext cx="0" cy="3904488"/>
+          </a:xfrm>
+          <a:prstGeom prst="line">
+            <a:avLst/>
+          </a:prstGeom>
+          <a:ln w="28575">
+            <a:solidFill>
+              <a:srgbClr val="F5EFE9"/>
+            </a:solidFill>
+          </a:ln>
+        </p:spPr>
+        <p:style>
+          <a:lnRef idx="2">
+            <a:schemeClr val="accent1"/>
+          </a:lnRef>
+          <a:fillRef idx="0">
+            <a:schemeClr val="accent1"/>
+          </a:fillRef>
+          <a:effectRef idx="1">
+            <a:schemeClr val="accent1"/>
+          </a:effectRef>
+          <a:fontRef idx="minor">
+            <a:schemeClr val="tx1"/>
+          </a:fontRef>
+        </p:style>
+      </p:cxnSp>
+      <p:cxnSp>
+        <p:nvCxnSpPr>
+          <p:cNvPr id="50" name="Connector 49"/>
+          <p:cNvCxnSpPr/>
+          <p:nvPr/>
+        </p:nvCxnSpPr>
+        <p:spPr>
+          <a:xfrm>
+            <a:off x="10067544" y="2880360"/>
+            <a:ext cx="310896" cy="0"/>
+          </a:xfrm>
+          <a:prstGeom prst="line">
+            <a:avLst/>
+          </a:prstGeom>
+          <a:ln w="28575">
+            <a:solidFill>
+              <a:srgbClr val="F5EFE9"/>
+            </a:solidFill>
+            <a:tailEnd type="triangle" w="med" len="med"/>
+          </a:ln>
+        </p:spPr>
+        <p:style>
+          <a:lnRef idx="2">
+            <a:schemeClr val="accent1"/>
+          </a:lnRef>
+          <a:fillRef idx="0">
+            <a:schemeClr val="accent1"/>
+          </a:fillRef>
+          <a:effectRef idx="1">
+            <a:schemeClr val="accent1"/>
+          </a:effectRef>
+          <a:fontRef idx="minor">
+            <a:schemeClr val="tx1"/>
+          </a:fontRef>
+        </p:style>
+      </p:cxnSp>
+      <p:cxnSp>
+        <p:nvCxnSpPr>
+          <p:cNvPr id="51" name="Connector 50"/>
+          <p:cNvCxnSpPr/>
+          <p:nvPr/>
+        </p:nvCxnSpPr>
+        <p:spPr>
+          <a:xfrm>
+            <a:off x="12435840" y="3246120"/>
+            <a:ext cx="0" cy="137160"/>
+          </a:xfrm>
+          <a:prstGeom prst="line">
+            <a:avLst/>
+          </a:prstGeom>
+          <a:ln w="28575">
+            <a:solidFill>
+              <a:srgbClr val="F5EFE9"/>
+            </a:solidFill>
+            <a:tailEnd type="triangle" w="med" len="med"/>
+          </a:ln>
+        </p:spPr>
+        <p:style>
+          <a:lnRef idx="2">
+            <a:schemeClr val="accent1"/>
+          </a:lnRef>
+          <a:fillRef idx="0">
+            <a:schemeClr val="accent1"/>
+          </a:fillRef>
+          <a:effectRef idx="1">
+            <a:schemeClr val="accent1"/>
+          </a:effectRef>
+          <a:fontRef idx="minor">
+            <a:schemeClr val="tx1"/>
+          </a:fontRef>
+        </p:style>
+      </p:cxnSp>
+      <p:cxnSp>
+        <p:nvCxnSpPr>
+          <p:cNvPr id="52" name="Connector 51"/>
+          <p:cNvCxnSpPr/>
+          <p:nvPr/>
+        </p:nvCxnSpPr>
+        <p:spPr>
+          <a:xfrm>
+            <a:off x="12435840" y="4480560"/>
+            <a:ext cx="0" cy="137160"/>
+          </a:xfrm>
+          <a:prstGeom prst="line">
+            <a:avLst/>
+          </a:prstGeom>
+          <a:ln w="28575">
+            <a:solidFill>
+              <a:srgbClr val="F5EFE9"/>
+            </a:solidFill>
+            <a:tailEnd type="triangle" w="med" len="med"/>
+          </a:ln>
+        </p:spPr>
+        <p:style>
+          <a:lnRef idx="2">
+            <a:schemeClr val="accent1"/>
+          </a:lnRef>
+          <a:fillRef idx="0">
+            <a:schemeClr val="accent1"/>
+          </a:fillRef>
+          <a:effectRef idx="1">
+            <a:schemeClr val="accent1"/>
+          </a:effectRef>
+          <a:fontRef idx="minor">
+            <a:schemeClr val="tx1"/>
+          </a:fontRef>
+        </p:style>
+      </p:cxnSp>
+      <p:cxnSp>
+        <p:nvCxnSpPr>
+          <p:cNvPr id="53" name="Connector 52"/>
+          <p:cNvCxnSpPr/>
+          <p:nvPr/>
+        </p:nvCxnSpPr>
+        <p:spPr>
+          <a:xfrm>
+            <a:off x="12435840" y="5577840"/>
+            <a:ext cx="0" cy="137160"/>
+          </a:xfrm>
+          <a:prstGeom prst="line">
+            <a:avLst/>
+          </a:prstGeom>
+          <a:ln w="28575">
+            <a:solidFill>
+              <a:srgbClr val="F5EFE9"/>
+            </a:solidFill>
+            <a:tailEnd type="triangle" w="med" len="med"/>
+          </a:ln>
+        </p:spPr>
+        <p:style>
+          <a:lnRef idx="2">
+            <a:schemeClr val="accent1"/>
+          </a:lnRef>
+          <a:fillRef idx="0">
+            <a:schemeClr val="accent1"/>
+          </a:fillRef>
+          <a:effectRef idx="1">
+            <a:schemeClr val="accent1"/>
+          </a:effectRef>
+          <a:fontRef idx="minor">
+            <a:schemeClr val="tx1"/>
+          </a:fontRef>
+        </p:style>
+      </p:cxnSp>
+      <p:cxnSp>
+        <p:nvCxnSpPr>
+          <p:cNvPr id="54" name="Connector 53"/>
+          <p:cNvCxnSpPr/>
+          <p:nvPr/>
+        </p:nvCxnSpPr>
+        <p:spPr>
+          <a:xfrm>
+            <a:off x="12435840" y="6446520"/>
+            <a:ext cx="0" cy="137160"/>
+          </a:xfrm>
+          <a:prstGeom prst="line">
+            <a:avLst/>
+          </a:prstGeom>
+          <a:ln w="28575">
+            <a:solidFill>
+              <a:srgbClr val="F5EFE9"/>
+            </a:solidFill>
+            <a:tailEnd type="triangle" w="med" len="med"/>
+          </a:ln>
+        </p:spPr>
+        <p:style>
+          <a:lnRef idx="2">
+            <a:schemeClr val="accent1"/>
+          </a:lnRef>
+          <a:fillRef idx="0">
+            <a:schemeClr val="accent1"/>
+          </a:fillRef>
+          <a:effectRef idx="1">
+            <a:schemeClr val="accent1"/>
+          </a:effectRef>
+          <a:fontRef idx="minor">
+            <a:schemeClr val="tx1"/>
+          </a:fontRef>
+        </p:style>
+      </p:cxnSp>
+      <p:cxnSp>
+        <p:nvCxnSpPr>
+          <p:cNvPr id="55" name="Connector 54"/>
+          <p:cNvCxnSpPr/>
+          <p:nvPr/>
+        </p:nvCxnSpPr>
+        <p:spPr>
+          <a:xfrm>
+            <a:off x="14493240" y="7040880"/>
+            <a:ext cx="310896" cy="0"/>
+          </a:xfrm>
+          <a:prstGeom prst="line">
+            <a:avLst/>
+          </a:prstGeom>
+          <a:ln w="28575">
+            <a:solidFill>
+              <a:srgbClr val="F5EFE9"/>
+            </a:solidFill>
+          </a:ln>
+        </p:spPr>
+        <p:style>
+          <a:lnRef idx="2">
+            <a:schemeClr val="accent1"/>
+          </a:lnRef>
+          <a:fillRef idx="0">
+            <a:schemeClr val="accent1"/>
+          </a:fillRef>
+          <a:effectRef idx="1">
+            <a:schemeClr val="accent1"/>
+          </a:effectRef>
+          <a:fontRef idx="minor">
+            <a:schemeClr val="tx1"/>
+          </a:fontRef>
+        </p:style>
+      </p:cxnSp>
+      <p:cxnSp>
+        <p:nvCxnSpPr>
+          <p:cNvPr id="56" name="Connector 55"/>
+          <p:cNvCxnSpPr/>
+          <p:nvPr/>
+        </p:nvCxnSpPr>
+        <p:spPr>
+          <a:xfrm flipV="1">
+            <a:off x="14804136" y="2743200"/>
+            <a:ext cx="0" cy="4297680"/>
+          </a:xfrm>
+          <a:prstGeom prst="line">
+            <a:avLst/>
+          </a:prstGeom>
+          <a:ln w="28575">
+            <a:solidFill>
+              <a:srgbClr val="F5EFE9"/>
+            </a:solidFill>
+          </a:ln>
+        </p:spPr>
+        <p:style>
+          <a:lnRef idx="2">
+            <a:schemeClr val="accent1"/>
+          </a:lnRef>
+          <a:fillRef idx="0">
+            <a:schemeClr val="accent1"/>
+          </a:fillRef>
+          <a:effectRef idx="1">
+            <a:schemeClr val="accent1"/>
+          </a:effectRef>
+          <a:fontRef idx="minor">
+            <a:schemeClr val="tx1"/>
+          </a:fontRef>
+        </p:style>
+      </p:cxnSp>
+      <p:cxnSp>
+        <p:nvCxnSpPr>
+          <p:cNvPr id="57" name="Connector 56"/>
+          <p:cNvCxnSpPr/>
+          <p:nvPr/>
+        </p:nvCxnSpPr>
+        <p:spPr>
+          <a:xfrm>
+            <a:off x="14804136" y="2743200"/>
+            <a:ext cx="310896" cy="0"/>
+          </a:xfrm>
+          <a:prstGeom prst="line">
+            <a:avLst/>
+          </a:prstGeom>
+          <a:ln w="28575">
+            <a:solidFill>
+              <a:srgbClr val="F5EFE9"/>
+            </a:solidFill>
+            <a:tailEnd type="triangle" w="med" len="med"/>
+          </a:ln>
+        </p:spPr>
+        <p:style>
+          <a:lnRef idx="2">
+            <a:schemeClr val="accent1"/>
+          </a:lnRef>
+          <a:fillRef idx="0">
+            <a:schemeClr val="accent1"/>
+          </a:fillRef>
+          <a:effectRef idx="1">
+            <a:schemeClr val="accent1"/>
+          </a:effectRef>
+          <a:fontRef idx="minor">
+            <a:schemeClr val="tx1"/>
+          </a:fontRef>
+        </p:style>
+      </p:cxnSp>
+      <p:cxnSp>
+        <p:nvCxnSpPr>
+          <p:cNvPr id="58" name="Connector 57"/>
+          <p:cNvCxnSpPr/>
+          <p:nvPr/>
+        </p:nvCxnSpPr>
+        <p:spPr>
+          <a:xfrm>
+            <a:off x="17172432" y="2971800"/>
+            <a:ext cx="0" cy="137160"/>
+          </a:xfrm>
+          <a:prstGeom prst="line">
+            <a:avLst/>
+          </a:prstGeom>
+          <a:ln w="28575">
+            <a:solidFill>
+              <a:srgbClr val="F5EFE9"/>
+            </a:solidFill>
+            <a:tailEnd type="triangle" w="med" len="med"/>
+          </a:ln>
+        </p:spPr>
+        <p:style>
+          <a:lnRef idx="2">
+            <a:schemeClr val="accent1"/>
+          </a:lnRef>
+          <a:fillRef idx="0">
+            <a:schemeClr val="accent1"/>
+          </a:fillRef>
+          <a:effectRef idx="1">
+            <a:schemeClr val="accent1"/>
+          </a:effectRef>
+          <a:fontRef idx="minor">
+            <a:schemeClr val="tx1"/>
+          </a:fontRef>
+        </p:style>
+      </p:cxnSp>
+      <p:cxnSp>
+        <p:nvCxnSpPr>
+          <p:cNvPr id="59" name="Connector 58"/>
+          <p:cNvCxnSpPr/>
+          <p:nvPr/>
+        </p:nvCxnSpPr>
+        <p:spPr>
+          <a:xfrm>
+            <a:off x="17172432" y="3794760"/>
+            <a:ext cx="0" cy="137160"/>
+          </a:xfrm>
+          <a:prstGeom prst="line">
+            <a:avLst/>
+          </a:prstGeom>
+          <a:ln w="28575">
+            <a:solidFill>
+              <a:srgbClr val="F5EFE9"/>
+            </a:solidFill>
+            <a:tailEnd type="triangle" w="med" len="med"/>
+          </a:ln>
+        </p:spPr>
+        <p:style>
+          <a:lnRef idx="2">
+            <a:schemeClr val="accent1"/>
+          </a:lnRef>
+          <a:fillRef idx="0">
+            <a:schemeClr val="accent1"/>
+          </a:fillRef>
+          <a:effectRef idx="1">
+            <a:schemeClr val="accent1"/>
+          </a:effectRef>
+          <a:fontRef idx="minor">
+            <a:schemeClr val="tx1"/>
+          </a:fontRef>
+        </p:style>
+      </p:cxnSp>
+      <p:cxnSp>
+        <p:nvCxnSpPr>
+          <p:cNvPr id="60" name="Connector 59"/>
+          <p:cNvCxnSpPr/>
+          <p:nvPr/>
+        </p:nvCxnSpPr>
+        <p:spPr>
+          <a:xfrm>
+            <a:off x="17172432" y="4937760"/>
+            <a:ext cx="0" cy="137160"/>
+          </a:xfrm>
+          <a:prstGeom prst="line">
+            <a:avLst/>
+          </a:prstGeom>
+          <a:ln w="28575">
+            <a:solidFill>
+              <a:srgbClr val="F5EFE9"/>
+            </a:solidFill>
+            <a:tailEnd type="triangle" w="med" len="med"/>
+          </a:ln>
+        </p:spPr>
+        <p:style>
+          <a:lnRef idx="2">
+            <a:schemeClr val="accent1"/>
+          </a:lnRef>
+          <a:fillRef idx="0">
+            <a:schemeClr val="accent1"/>
+          </a:fillRef>
+          <a:effectRef idx="1">
+            <a:schemeClr val="accent1"/>
+          </a:effectRef>
+          <a:fontRef idx="minor">
+            <a:schemeClr val="tx1"/>
+          </a:fontRef>
+        </p:style>
+      </p:cxnSp>
+      <p:cxnSp>
+        <p:nvCxnSpPr>
+          <p:cNvPr id="61" name="Connector 60"/>
+          <p:cNvCxnSpPr/>
+          <p:nvPr/>
+        </p:nvCxnSpPr>
+        <p:spPr>
+          <a:xfrm>
+            <a:off x="17172432" y="5897880"/>
+            <a:ext cx="0" cy="137160"/>
+          </a:xfrm>
+          <a:prstGeom prst="line">
+            <a:avLst/>
+          </a:prstGeom>
+          <a:ln w="28575">
+            <a:solidFill>
+              <a:srgbClr val="F5EFE9"/>
+            </a:solidFill>
+            <a:tailEnd type="triangle" w="med" len="med"/>
+          </a:ln>
+        </p:spPr>
+        <p:style>
+          <a:lnRef idx="2">
+            <a:schemeClr val="accent1"/>
+          </a:lnRef>
+          <a:fillRef idx="0">
+            <a:schemeClr val="accent1"/>
+          </a:fillRef>
+          <a:effectRef idx="1">
+            <a:schemeClr val="accent1"/>
+          </a:effectRef>
+          <a:fontRef idx="minor">
+            <a:schemeClr val="tx1"/>
+          </a:fontRef>
+        </p:style>
+      </p:cxnSp>
+      <p:cxnSp>
+        <p:nvCxnSpPr>
+          <p:cNvPr id="62" name="Connector 61"/>
+          <p:cNvCxnSpPr/>
+          <p:nvPr/>
+        </p:nvCxnSpPr>
+        <p:spPr>
+          <a:xfrm>
+            <a:off x="17172432" y="6720840"/>
+            <a:ext cx="0" cy="137160"/>
+          </a:xfrm>
+          <a:prstGeom prst="line">
+            <a:avLst/>
+          </a:prstGeom>
+          <a:ln w="28575">
+            <a:solidFill>
+              <a:srgbClr val="F5EFE9"/>
+            </a:solidFill>
+            <a:tailEnd type="triangle" w="med" len="med"/>
+          </a:ln>
+        </p:spPr>
+        <p:style>
+          <a:lnRef idx="2">
+            <a:schemeClr val="accent1"/>
+          </a:lnRef>
+          <a:fillRef idx="0">
+            <a:schemeClr val="accent1"/>
+          </a:fillRef>
+          <a:effectRef idx="1">
+            <a:schemeClr val="accent1"/>
+          </a:effectRef>
+          <a:fontRef idx="minor">
+            <a:schemeClr val="tx1"/>
+          </a:fontRef>
+        </p:style>
+      </p:cxnSp>
+      <p:cxnSp>
+        <p:nvCxnSpPr>
+          <p:cNvPr id="63" name="Connector 62"/>
+          <p:cNvCxnSpPr/>
+          <p:nvPr/>
+        </p:nvCxnSpPr>
+        <p:spPr>
+          <a:xfrm flipH="1">
+            <a:off x="17007840" y="7635240"/>
+            <a:ext cx="164592" cy="301752"/>
+          </a:xfrm>
+          <a:prstGeom prst="line">
+            <a:avLst/>
+          </a:prstGeom>
+          <a:ln w="28575">
+            <a:solidFill>
+              <a:srgbClr val="F5EFE9"/>
+            </a:solidFill>
+          </a:ln>
+        </p:spPr>
+        <p:style>
+          <a:lnRef idx="2">
+            <a:schemeClr val="accent1"/>
+          </a:lnRef>
+          <a:fillRef idx="0">
+            <a:schemeClr val="accent1"/>
+          </a:fillRef>
+          <a:effectRef idx="1">
+            <a:schemeClr val="accent1"/>
+          </a:effectRef>
+          <a:fontRef idx="minor">
+            <a:schemeClr val="tx1"/>
+          </a:fontRef>
+        </p:style>
+      </p:cxnSp>
+      <p:cxnSp>
+        <p:nvCxnSpPr>
+          <p:cNvPr id="64" name="Connector 63"/>
+          <p:cNvCxnSpPr/>
+          <p:nvPr/>
+        </p:nvCxnSpPr>
+        <p:spPr>
+          <a:xfrm flipH="1">
+            <a:off x="16276320" y="7936992"/>
+            <a:ext cx="731520" cy="0"/>
+          </a:xfrm>
+          <a:prstGeom prst="line">
+            <a:avLst/>
+          </a:prstGeom>
+          <a:ln w="28575">
+            <a:solidFill>
+              <a:srgbClr val="F5EFE9"/>
+            </a:solidFill>
+          </a:ln>
+        </p:spPr>
+        <p:style>
+          <a:lnRef idx="2">
+            <a:schemeClr val="accent1"/>
+          </a:lnRef>
+          <a:fillRef idx="0">
+            <a:schemeClr val="accent1"/>
+          </a:fillRef>
+          <a:effectRef idx="1">
+            <a:schemeClr val="accent1"/>
+          </a:effectRef>
+          <a:fontRef idx="minor">
+            <a:schemeClr val="tx1"/>
+          </a:fontRef>
+        </p:style>
+      </p:cxnSp>
+      <p:cxnSp>
+        <p:nvCxnSpPr>
+          <p:cNvPr id="65" name="Connector 64"/>
+          <p:cNvCxnSpPr/>
+          <p:nvPr/>
+        </p:nvCxnSpPr>
+        <p:spPr>
+          <a:xfrm>
+            <a:off x="16276320" y="7936992"/>
+            <a:ext cx="0" cy="704088"/>
+          </a:xfrm>
+          <a:prstGeom prst="line">
+            <a:avLst/>
+          </a:prstGeom>
+          <a:ln w="28575">
+            <a:solidFill>
+              <a:srgbClr val="F5EFE9"/>
+            </a:solidFill>
+            <a:tailEnd type="triangle" w="med" len="med"/>
+          </a:ln>
+        </p:spPr>
+        <p:style>
+          <a:lnRef idx="2">
+            <a:schemeClr val="accent1"/>
+          </a:lnRef>
+          <a:fillRef idx="0">
+            <a:schemeClr val="accent1"/>
+          </a:fillRef>
+          <a:effectRef idx="1">
+            <a:schemeClr val="accent1"/>
+          </a:effectRef>
+          <a:fontRef idx="minor">
+            <a:schemeClr val="tx1"/>
+          </a:fontRef>
+        </p:style>
+      </p:cxnSp>
+      <p:sp>
+        <p:nvSpPr>
+          <p:cNvPr id="66" name="TextBox 65"/>
           <p:cNvSpPr txBox="1"/>
           <p:nvPr/>
         </p:nvSpPr>
         <p:spPr>
           <a:xfrm>
-            <a:off x="10959084" y="8577072"/>
-            <a:ext cx="8252459" cy="1252728"/>
+            <a:off x="740664" y="10012680"/>
+            <a:ext cx="18653760" cy="457200"/>
           </a:xfrm>
           <a:prstGeom prst="rect">
             <a:avLst/>
@@ -14974,65 +16568,12 @@
               </a:spcAft>
             </a:pPr>
             <a:r>
-              <a:rPr sz="1900" b="1">
-                <a:solidFill>
-                  <a:srgbClr val="0B3D7A"/>
-                </a:solidFill>
-              </a:rPr>
-              <a:t>Keep it current</a:t>
-            </a:r>
-          </a:p>
-          <a:p>
-            <a:pPr algn="l">
-              <a:spcAft>
-                <a:spcPts val="600"/>
-              </a:spcAft>
-            </a:pPr>
-            <a:r>
-              <a:rPr sz="1500" b="0">
-                <a:solidFill>
-                  <a:srgbClr val="4C5D69"/>
-                </a:solidFill>
-              </a:rPr>
-              <a:t>Additive-only domain patches with seven proofs and a one-command restore, the Standardized Reports folder for scheduled SQL reports, and every change swept and re-signed.</a:t>
-            </a:r>
-          </a:p>
-        </p:txBody>
-      </p:sp>
-      <p:sp>
-        <p:nvSpPr>
-          <p:cNvPr id="35" name="TextBox 34"/>
-          <p:cNvSpPr txBox="1"/>
-          <p:nvPr/>
-        </p:nvSpPr>
-        <p:spPr>
-          <a:xfrm>
-            <a:off x="740664" y="10012680"/>
-            <a:ext cx="18288000" cy="457200"/>
-          </a:xfrm>
-          <a:prstGeom prst="rect">
-            <a:avLst/>
-          </a:prstGeom>
-          <a:noFill/>
-        </p:spPr>
-        <p:txBody>
-          <a:bodyPr wrap="square" anchor="t" lIns="0" rIns="0" tIns="54864" bIns="54864">
-            <a:spAutoFit/>
-          </a:bodyPr>
-          <a:lstStyle/>
-          <a:p>
-            <a:pPr algn="l">
-              <a:spcAft>
-                <a:spcPts val="600"/>
-              </a:spcAft>
-            </a:pPr>
-            <a:r>
-              <a:rPr sz="1400" b="0">
+              <a:rPr sz="1200" b="0">
                 <a:solidFill>
                   <a:srgbClr val="F5EFE9"/>
                 </a:solidFill>
               </a:rPr>
-              <a:t>Steps 1 to 5 build the package once; steps 6 to 9 repeat per client org; step 10 is every change after go-live.</a:t>
+              <a:t>Orange diamonds are gates: a failed gate stops the run and names the rollback. The Workstreams tree is never moved; the offering is a curated copy promoted org by org.</a:t>
             </a:r>
           </a:p>
         </p:txBody>
@@ -31249,7 +32790,7 @@
                   <a:srgbClr val="F5EFE9"/>
                 </a:solidFill>
               </a:rPr>
-              <a:t>Database Deployment, Step By Step</a:t>
+              <a:t>Database Deployment Flow</a:t>
             </a:r>
           </a:p>
         </p:txBody>
@@ -31358,12 +32899,210 @@
         </p:nvSpPr>
         <p:spPr>
           <a:xfrm>
-            <a:off x="740664" y="1828800"/>
-            <a:ext cx="9212580" cy="1435607"/>
+            <a:off x="12262104" y="1965960"/>
+            <a:ext cx="7132320" cy="1508760"/>
           </a:xfrm>
           <a:prstGeom prst="roundRect">
             <a:avLst>
-              <a:gd name="adj" fmla="val 8000"/>
+              <a:gd name="adj" fmla="val 4000"/>
+            </a:avLst>
+          </a:prstGeom>
+          <a:noFill/>
+          <a:ln w="19050">
+            <a:solidFill>
+              <a:srgbClr val="F5EFE9"/>
+            </a:solidFill>
+          </a:ln>
+          <a:effectLst/>
+        </p:spPr>
+        <p:style>
+          <a:lnRef idx="1">
+            <a:schemeClr val="accent1"/>
+          </a:lnRef>
+          <a:fillRef idx="3">
+            <a:schemeClr val="accent1"/>
+          </a:fillRef>
+          <a:effectRef idx="2">
+            <a:schemeClr val="accent1"/>
+          </a:effectRef>
+          <a:fontRef idx="minor">
+            <a:schemeClr val="lt1"/>
+          </a:fontRef>
+        </p:style>
+        <p:txBody>
+          <a:bodyPr rtlCol="0" anchor="ctr"/>
+          <a:lstStyle/>
+          <a:p>
+            <a:pPr algn="ctr"/>
+          </a:p>
+        </p:txBody>
+      </p:sp>
+      <p:sp>
+        <p:nvSpPr>
+          <p:cNvPr id="6" name="TextBox 5"/>
+          <p:cNvSpPr txBox="1"/>
+          <p:nvPr/>
+        </p:nvSpPr>
+        <p:spPr>
+          <a:xfrm>
+            <a:off x="12426696" y="2011679"/>
+            <a:ext cx="6803136" cy="411480"/>
+          </a:xfrm>
+          <a:prstGeom prst="rect">
+            <a:avLst/>
+          </a:prstGeom>
+          <a:noFill/>
+        </p:spPr>
+        <p:txBody>
+          <a:bodyPr wrap="square" anchor="t" lIns="0" rIns="0" tIns="54864" bIns="54864">
+            <a:spAutoFit/>
+          </a:bodyPr>
+          <a:lstStyle/>
+          <a:p>
+            <a:pPr algn="l">
+              <a:spcAft>
+                <a:spcPts val="600"/>
+              </a:spcAft>
+            </a:pPr>
+            <a:r>
+              <a:rPr sz="1400" b="1">
+                <a:solidFill>
+                  <a:srgbClr val="F5EFE9"/>
+                </a:solidFill>
+              </a:rPr>
+              <a:t>Submit 8 baselines as parallel scheduler jobs</a:t>
+            </a:r>
+          </a:p>
+          <a:p>
+            <a:pPr algn="l">
+              <a:spcAft>
+                <a:spcPts val="600"/>
+              </a:spcAft>
+            </a:pPr>
+            <a:r>
+              <a:rPr sz="1100" b="0">
+                <a:solidFill>
+                  <a:srgbClr val="F5EFE9"/>
+                </a:solidFill>
+              </a:rPr>
+              <a:t>unattended; they survive a dropped connection</a:t>
+            </a:r>
+          </a:p>
+        </p:txBody>
+      </p:sp>
+      <p:sp>
+        <p:nvSpPr>
+          <p:cNvPr id="7" name="Rounded Rectangle 6"/>
+          <p:cNvSpPr/>
+          <p:nvPr/>
+        </p:nvSpPr>
+        <p:spPr>
+          <a:xfrm>
+            <a:off x="740664" y="5760720"/>
+            <a:ext cx="18653760" cy="4114800"/>
+          </a:xfrm>
+          <a:prstGeom prst="roundRect">
+            <a:avLst>
+              <a:gd name="adj" fmla="val 4000"/>
+            </a:avLst>
+          </a:prstGeom>
+          <a:noFill/>
+          <a:ln w="19050">
+            <a:solidFill>
+              <a:srgbClr val="F5EFE9"/>
+            </a:solidFill>
+          </a:ln>
+          <a:effectLst/>
+        </p:spPr>
+        <p:style>
+          <a:lnRef idx="1">
+            <a:schemeClr val="accent1"/>
+          </a:lnRef>
+          <a:fillRef idx="3">
+            <a:schemeClr val="accent1"/>
+          </a:fillRef>
+          <a:effectRef idx="2">
+            <a:schemeClr val="accent1"/>
+          </a:effectRef>
+          <a:fontRef idx="minor">
+            <a:schemeClr val="lt1"/>
+          </a:fontRef>
+        </p:style>
+        <p:txBody>
+          <a:bodyPr rtlCol="0" anchor="ctr"/>
+          <a:lstStyle/>
+          <a:p>
+            <a:pPr algn="ctr"/>
+          </a:p>
+        </p:txBody>
+      </p:sp>
+      <p:sp>
+        <p:nvSpPr>
+          <p:cNvPr id="8" name="TextBox 7"/>
+          <p:cNvSpPr txBox="1"/>
+          <p:nvPr/>
+        </p:nvSpPr>
+        <p:spPr>
+          <a:xfrm>
+            <a:off x="905256" y="5806440"/>
+            <a:ext cx="18324576" cy="411480"/>
+          </a:xfrm>
+          <a:prstGeom prst="rect">
+            <a:avLst/>
+          </a:prstGeom>
+          <a:noFill/>
+        </p:spPr>
+        <p:txBody>
+          <a:bodyPr wrap="square" anchor="t" lIns="0" rIns="0" tIns="54864" bIns="54864">
+            <a:spAutoFit/>
+          </a:bodyPr>
+          <a:lstStyle/>
+          <a:p>
+            <a:pPr algn="l">
+              <a:spcAft>
+                <a:spcPts val="600"/>
+              </a:spcAft>
+            </a:pPr>
+            <a:r>
+              <a:rPr sz="1400" b="1">
+                <a:solidFill>
+                  <a:srgbClr val="F5EFE9"/>
+                </a:solidFill>
+              </a:rPr>
+              <a:t>What the domains read</a:t>
+            </a:r>
+          </a:p>
+          <a:p>
+            <a:pPr algn="l">
+              <a:spcAft>
+                <a:spcPts val="600"/>
+              </a:spcAft>
+            </a:pPr>
+            <a:r>
+              <a:rPr sz="1100" b="0">
+                <a:solidFill>
+                  <a:srgbClr val="F5EFE9"/>
+                </a:solidFill>
+              </a:rPr>
+              <a:t>created in steps 2 and 3, validated and gated before anything is scheduled; each stack feeds the domain chip beneath it</a:t>
+            </a:r>
+          </a:p>
+        </p:txBody>
+      </p:sp>
+      <p:sp>
+        <p:nvSpPr>
+          <p:cNvPr id="9" name="Rounded Rectangle 8"/>
+          <p:cNvSpPr/>
+          <p:nvPr/>
+        </p:nvSpPr>
+        <p:spPr>
+          <a:xfrm>
+            <a:off x="740664" y="2286000"/>
+            <a:ext cx="2286000" cy="914400"/>
+          </a:xfrm>
+          <a:prstGeom prst="roundRect">
+            <a:avLst>
+              <a:gd name="adj" fmla="val 10000"/>
             </a:avLst>
           </a:prstGeom>
           <a:solidFill>
@@ -31389,25 +33128,735 @@
           </a:fontRef>
         </p:style>
         <p:txBody>
-          <a:bodyPr rtlCol="0" anchor="ctr"/>
-          <a:lstStyle/>
-          <a:p>
-            <a:pPr algn="ctr"/>
-          </a:p>
-        </p:txBody>
-      </p:sp>
-      <p:sp>
-        <p:nvSpPr>
-          <p:cNvPr id="6" name="Oval 5"/>
+          <a:bodyPr rtlCol="0" anchor="ctr" wrap="square" lIns="109728" rIns="109728" tIns="54864" bIns="54864"/>
+          <a:lstStyle/>
+          <a:p>
+            <a:pPr algn="l">
+              <a:spcAft>
+                <a:spcPts val="600"/>
+              </a:spcAft>
+            </a:pPr>
+            <a:r>
+              <a:rPr sz="1400" b="1">
+                <a:solidFill>
+                  <a:srgbClr val="0B3D7A"/>
+                </a:solidFill>
+              </a:rPr>
+              <a:t>Preflight</a:t>
+            </a:r>
+          </a:p>
+          <a:p>
+            <a:pPr algn="l">
+              <a:spcAft>
+                <a:spcPts val="600"/>
+              </a:spcAft>
+            </a:pPr>
+            <a:r>
+              <a:rPr sz="1100" b="0">
+                <a:solidFill>
+                  <a:srgbClr val="4C5D69"/>
+                </a:solidFill>
+              </a:rPr>
+              <a:t>the deploy user can read every source table and write the targets</a:t>
+            </a:r>
+          </a:p>
+        </p:txBody>
+      </p:sp>
+      <p:sp>
+        <p:nvSpPr>
+          <p:cNvPr id="10" name="Rounded Rectangle 9"/>
           <p:cNvSpPr/>
           <p:nvPr/>
         </p:nvSpPr>
         <p:spPr>
           <a:xfrm>
-            <a:off x="941832" y="2029968"/>
-            <a:ext cx="457200" cy="457200"/>
-          </a:xfrm>
-          <a:prstGeom prst="ellipse">
+            <a:off x="3300984" y="2286000"/>
+            <a:ext cx="2651760" cy="914400"/>
+          </a:xfrm>
+          <a:prstGeom prst="roundRect">
+            <a:avLst>
+              <a:gd name="adj" fmla="val 10000"/>
+            </a:avLst>
+          </a:prstGeom>
+          <a:solidFill>
+            <a:srgbClr val="F5EFE9"/>
+          </a:solidFill>
+          <a:ln>
+            <a:noFill/>
+          </a:ln>
+          <a:effectLst/>
+        </p:spPr>
+        <p:style>
+          <a:lnRef idx="1">
+            <a:schemeClr val="accent1"/>
+          </a:lnRef>
+          <a:fillRef idx="3">
+            <a:schemeClr val="accent1"/>
+          </a:fillRef>
+          <a:effectRef idx="2">
+            <a:schemeClr val="accent1"/>
+          </a:effectRef>
+          <a:fontRef idx="minor">
+            <a:schemeClr val="lt1"/>
+          </a:fontRef>
+        </p:style>
+        <p:txBody>
+          <a:bodyPr rtlCol="0" anchor="ctr" wrap="square" lIns="109728" rIns="109728" tIns="54864" bIns="54864"/>
+          <a:lstStyle/>
+          <a:p>
+            <a:pPr algn="l">
+              <a:spcAft>
+                <a:spcPts val="600"/>
+              </a:spcAft>
+            </a:pPr>
+            <a:r>
+              <a:rPr sz="1400" b="1">
+                <a:solidFill>
+                  <a:srgbClr val="0B3D7A"/>
+                </a:solidFill>
+              </a:rPr>
+              <a:t>Create the 7 snapshot tables</a:t>
+            </a:r>
+          </a:p>
+          <a:p>
+            <a:pPr algn="l">
+              <a:spcAft>
+                <a:spcPts val="600"/>
+              </a:spcAft>
+            </a:pPr>
+            <a:r>
+              <a:rPr sz="1100" b="0">
+                <a:solidFill>
+                  <a:srgbClr val="4C5D69"/>
+                </a:solidFill>
+              </a:rPr>
+              <a:t>empty, with their keys</a:t>
+            </a:r>
+          </a:p>
+        </p:txBody>
+      </p:sp>
+      <p:sp>
+        <p:nvSpPr>
+          <p:cNvPr id="11" name="Rounded Rectangle 10"/>
+          <p:cNvSpPr/>
+          <p:nvPr/>
+        </p:nvSpPr>
+        <p:spPr>
+          <a:xfrm>
+            <a:off x="6227064" y="2286000"/>
+            <a:ext cx="2834640" cy="914400"/>
+          </a:xfrm>
+          <a:prstGeom prst="roundRect">
+            <a:avLst>
+              <a:gd name="adj" fmla="val 10000"/>
+            </a:avLst>
+          </a:prstGeom>
+          <a:solidFill>
+            <a:srgbClr val="F5EFE9"/>
+          </a:solidFill>
+          <a:ln>
+            <a:noFill/>
+          </a:ln>
+          <a:effectLst/>
+        </p:spPr>
+        <p:style>
+          <a:lnRef idx="1">
+            <a:schemeClr val="accent1"/>
+          </a:lnRef>
+          <a:fillRef idx="3">
+            <a:schemeClr val="accent1"/>
+          </a:fillRef>
+          <a:effectRef idx="2">
+            <a:schemeClr val="accent1"/>
+          </a:effectRef>
+          <a:fontRef idx="minor">
+            <a:schemeClr val="lt1"/>
+          </a:fontRef>
+        </p:style>
+        <p:txBody>
+          <a:bodyPr rtlCol="0" anchor="ctr" wrap="square" lIns="109728" rIns="109728" tIns="54864" bIns="54864"/>
+          <a:lstStyle/>
+          <a:p>
+            <a:pPr algn="l">
+              <a:spcAft>
+                <a:spcPts val="600"/>
+              </a:spcAft>
+            </a:pPr>
+            <a:r>
+              <a:rPr sz="1400" b="1">
+                <a:solidFill>
+                  <a:srgbClr val="0B3D7A"/>
+                </a:solidFill>
+              </a:rPr>
+              <a:t>Create the domain-support objects</a:t>
+            </a:r>
+          </a:p>
+          <a:p>
+            <a:pPr algn="l">
+              <a:spcAft>
+                <a:spcPts val="600"/>
+              </a:spcAft>
+            </a:pPr>
+            <a:r>
+              <a:rPr sz="1100" b="0">
+                <a:solidFill>
+                  <a:srgbClr val="4C5D69"/>
+                </a:solidFill>
+              </a:rPr>
+              <a:t>SA snapshot table, lookup seed, 8 CMS views, grants, synonyms</a:t>
+            </a:r>
+          </a:p>
+        </p:txBody>
+      </p:sp>
+      <p:sp>
+        <p:nvSpPr>
+          <p:cNvPr id="12" name="Rounded Rectangle 11"/>
+          <p:cNvSpPr/>
+          <p:nvPr/>
+        </p:nvSpPr>
+        <p:spPr>
+          <a:xfrm>
+            <a:off x="9336024" y="2286000"/>
+            <a:ext cx="2651760" cy="914400"/>
+          </a:xfrm>
+          <a:prstGeom prst="roundRect">
+            <a:avLst>
+              <a:gd name="adj" fmla="val 10000"/>
+            </a:avLst>
+          </a:prstGeom>
+          <a:solidFill>
+            <a:srgbClr val="F5EFE9"/>
+          </a:solidFill>
+          <a:ln>
+            <a:noFill/>
+          </a:ln>
+          <a:effectLst/>
+        </p:spPr>
+        <p:style>
+          <a:lnRef idx="1">
+            <a:schemeClr val="accent1"/>
+          </a:lnRef>
+          <a:fillRef idx="3">
+            <a:schemeClr val="accent1"/>
+          </a:fillRef>
+          <a:effectRef idx="2">
+            <a:schemeClr val="accent1"/>
+          </a:effectRef>
+          <a:fontRef idx="minor">
+            <a:schemeClr val="lt1"/>
+          </a:fontRef>
+        </p:style>
+        <p:txBody>
+          <a:bodyPr rtlCol="0" anchor="ctr" wrap="square" lIns="109728" rIns="109728" tIns="54864" bIns="54864"/>
+          <a:lstStyle/>
+          <a:p>
+            <a:pPr algn="l">
+              <a:spcAft>
+                <a:spcPts val="600"/>
+              </a:spcAft>
+            </a:pPr>
+            <a:r>
+              <a:rPr sz="1400" b="1">
+                <a:solidFill>
+                  <a:srgbClr val="0B3D7A"/>
+                </a:solidFill>
+              </a:rPr>
+              <a:t>Deploy the procedures</a:t>
+            </a:r>
+          </a:p>
+          <a:p>
+            <a:pPr algn="l">
+              <a:spcAft>
+                <a:spcPts val="600"/>
+              </a:spcAft>
+            </a:pPr>
+            <a:r>
+              <a:rPr sz="1100" b="0">
+                <a:solidFill>
+                  <a:srgbClr val="4C5D69"/>
+                </a:solidFill>
+              </a:rPr>
+              <a:t>baseline (24 months, once) and operational per table; SA refresh</a:t>
+            </a:r>
+          </a:p>
+        </p:txBody>
+      </p:sp>
+      <p:sp>
+        <p:nvSpPr>
+          <p:cNvPr id="13" name="Rounded Rectangle 12"/>
+          <p:cNvSpPr/>
+          <p:nvPr/>
+        </p:nvSpPr>
+        <p:spPr>
+          <a:xfrm>
+            <a:off x="12454128" y="2542032"/>
+            <a:ext cx="1627632" cy="384048"/>
+          </a:xfrm>
+          <a:prstGeom prst="roundRect">
+            <a:avLst>
+              <a:gd name="adj" fmla="val 10000"/>
+            </a:avLst>
+          </a:prstGeom>
+          <a:solidFill>
+            <a:srgbClr val="F5EFE9"/>
+          </a:solidFill>
+          <a:ln>
+            <a:noFill/>
+          </a:ln>
+          <a:effectLst/>
+        </p:spPr>
+        <p:style>
+          <a:lnRef idx="1">
+            <a:schemeClr val="accent1"/>
+          </a:lnRef>
+          <a:fillRef idx="3">
+            <a:schemeClr val="accent1"/>
+          </a:fillRef>
+          <a:effectRef idx="2">
+            <a:schemeClr val="accent1"/>
+          </a:effectRef>
+          <a:fontRef idx="minor">
+            <a:schemeClr val="lt1"/>
+          </a:fontRef>
+        </p:style>
+        <p:txBody>
+          <a:bodyPr rtlCol="0" anchor="ctr" wrap="square" lIns="109728" rIns="109728" tIns="54864" bIns="54864"/>
+          <a:lstStyle/>
+          <a:p>
+            <a:pPr algn="ctr">
+              <a:spcAft>
+                <a:spcPts val="600"/>
+              </a:spcAft>
+            </a:pPr>
+            <a:r>
+              <a:rPr sz="1000" b="1">
+                <a:solidFill>
+                  <a:srgbClr val="0B3D7A"/>
+                </a:solidFill>
+              </a:rPr>
+              <a:t>FT</a:t>
+            </a:r>
+          </a:p>
+        </p:txBody>
+      </p:sp>
+      <p:sp>
+        <p:nvSpPr>
+          <p:cNvPr id="14" name="Rounded Rectangle 13"/>
+          <p:cNvSpPr/>
+          <p:nvPr/>
+        </p:nvSpPr>
+        <p:spPr>
+          <a:xfrm>
+            <a:off x="14209776" y="2542032"/>
+            <a:ext cx="1627632" cy="384048"/>
+          </a:xfrm>
+          <a:prstGeom prst="roundRect">
+            <a:avLst>
+              <a:gd name="adj" fmla="val 10000"/>
+            </a:avLst>
+          </a:prstGeom>
+          <a:solidFill>
+            <a:srgbClr val="F5EFE9"/>
+          </a:solidFill>
+          <a:ln>
+            <a:noFill/>
+          </a:ln>
+          <a:effectLst/>
+        </p:spPr>
+        <p:style>
+          <a:lnRef idx="1">
+            <a:schemeClr val="accent1"/>
+          </a:lnRef>
+          <a:fillRef idx="3">
+            <a:schemeClr val="accent1"/>
+          </a:fillRef>
+          <a:effectRef idx="2">
+            <a:schemeClr val="accent1"/>
+          </a:effectRef>
+          <a:fontRef idx="minor">
+            <a:schemeClr val="lt1"/>
+          </a:fontRef>
+        </p:style>
+        <p:txBody>
+          <a:bodyPr rtlCol="0" anchor="ctr" wrap="square" lIns="109728" rIns="109728" tIns="54864" bIns="54864"/>
+          <a:lstStyle/>
+          <a:p>
+            <a:pPr algn="ctr">
+              <a:spcAft>
+                <a:spcPts val="600"/>
+              </a:spcAft>
+            </a:pPr>
+            <a:r>
+              <a:rPr sz="1000" b="1">
+                <a:solidFill>
+                  <a:srgbClr val="0B3D7A"/>
+                </a:solidFill>
+              </a:rPr>
+              <a:t>Billed usage</a:t>
+            </a:r>
+          </a:p>
+        </p:txBody>
+      </p:sp>
+      <p:sp>
+        <p:nvSpPr>
+          <p:cNvPr id="15" name="Rounded Rectangle 14"/>
+          <p:cNvSpPr/>
+          <p:nvPr/>
+        </p:nvSpPr>
+        <p:spPr>
+          <a:xfrm>
+            <a:off x="15965424" y="2542032"/>
+            <a:ext cx="1627632" cy="384048"/>
+          </a:xfrm>
+          <a:prstGeom prst="roundRect">
+            <a:avLst>
+              <a:gd name="adj" fmla="val 10000"/>
+            </a:avLst>
+          </a:prstGeom>
+          <a:solidFill>
+            <a:srgbClr val="F5EFE9"/>
+          </a:solidFill>
+          <a:ln>
+            <a:noFill/>
+          </a:ln>
+          <a:effectLst/>
+        </p:spPr>
+        <p:style>
+          <a:lnRef idx="1">
+            <a:schemeClr val="accent1"/>
+          </a:lnRef>
+          <a:fillRef idx="3">
+            <a:schemeClr val="accent1"/>
+          </a:fillRef>
+          <a:effectRef idx="2">
+            <a:schemeClr val="accent1"/>
+          </a:effectRef>
+          <a:fontRef idx="minor">
+            <a:schemeClr val="lt1"/>
+          </a:fontRef>
+        </p:style>
+        <p:txBody>
+          <a:bodyPr rtlCol="0" anchor="ctr" wrap="square" lIns="109728" rIns="109728" tIns="54864" bIns="54864"/>
+          <a:lstStyle/>
+          <a:p>
+            <a:pPr algn="ctr">
+              <a:spcAft>
+                <a:spcPts val="600"/>
+              </a:spcAft>
+            </a:pPr>
+            <a:r>
+              <a:rPr sz="1000" b="1">
+                <a:solidFill>
+                  <a:srgbClr val="0B3D7A"/>
+                </a:solidFill>
+              </a:rPr>
+              <a:t>SQ usage</a:t>
+            </a:r>
+          </a:p>
+        </p:txBody>
+      </p:sp>
+      <p:sp>
+        <p:nvSpPr>
+          <p:cNvPr id="16" name="Rounded Rectangle 15"/>
+          <p:cNvSpPr/>
+          <p:nvPr/>
+        </p:nvSpPr>
+        <p:spPr>
+          <a:xfrm>
+            <a:off x="17721072" y="2542032"/>
+            <a:ext cx="1627632" cy="384048"/>
+          </a:xfrm>
+          <a:prstGeom prst="roundRect">
+            <a:avLst>
+              <a:gd name="adj" fmla="val 10000"/>
+            </a:avLst>
+          </a:prstGeom>
+          <a:solidFill>
+            <a:srgbClr val="F5EFE9"/>
+          </a:solidFill>
+          <a:ln>
+            <a:noFill/>
+          </a:ln>
+          <a:effectLst/>
+        </p:spPr>
+        <p:style>
+          <a:lnRef idx="1">
+            <a:schemeClr val="accent1"/>
+          </a:lnRef>
+          <a:fillRef idx="3">
+            <a:schemeClr val="accent1"/>
+          </a:fillRef>
+          <a:effectRef idx="2">
+            <a:schemeClr val="accent1"/>
+          </a:effectRef>
+          <a:fontRef idx="minor">
+            <a:schemeClr val="lt1"/>
+          </a:fontRef>
+        </p:style>
+        <p:txBody>
+          <a:bodyPr rtlCol="0" anchor="ctr" wrap="square" lIns="109728" rIns="109728" tIns="54864" bIns="54864"/>
+          <a:lstStyle/>
+          <a:p>
+            <a:pPr algn="ctr">
+              <a:spcAft>
+                <a:spcPts val="600"/>
+              </a:spcAft>
+            </a:pPr>
+            <a:r>
+              <a:rPr sz="1000" b="1">
+                <a:solidFill>
+                  <a:srgbClr val="0B3D7A"/>
+                </a:solidFill>
+              </a:rPr>
+              <a:t>GL distribution</a:t>
+            </a:r>
+          </a:p>
+        </p:txBody>
+      </p:sp>
+      <p:sp>
+        <p:nvSpPr>
+          <p:cNvPr id="17" name="Rounded Rectangle 16"/>
+          <p:cNvSpPr/>
+          <p:nvPr/>
+        </p:nvSpPr>
+        <p:spPr>
+          <a:xfrm>
+            <a:off x="12454128" y="3017520"/>
+            <a:ext cx="1627632" cy="384048"/>
+          </a:xfrm>
+          <a:prstGeom prst="roundRect">
+            <a:avLst>
+              <a:gd name="adj" fmla="val 10000"/>
+            </a:avLst>
+          </a:prstGeom>
+          <a:solidFill>
+            <a:srgbClr val="F5EFE9"/>
+          </a:solidFill>
+          <a:ln>
+            <a:noFill/>
+          </a:ln>
+          <a:effectLst/>
+        </p:spPr>
+        <p:style>
+          <a:lnRef idx="1">
+            <a:schemeClr val="accent1"/>
+          </a:lnRef>
+          <a:fillRef idx="3">
+            <a:schemeClr val="accent1"/>
+          </a:fillRef>
+          <a:effectRef idx="2">
+            <a:schemeClr val="accent1"/>
+          </a:effectRef>
+          <a:fontRef idx="minor">
+            <a:schemeClr val="lt1"/>
+          </a:fontRef>
+        </p:style>
+        <p:txBody>
+          <a:bodyPr rtlCol="0" anchor="ctr" wrap="square" lIns="109728" rIns="109728" tIns="54864" bIns="54864"/>
+          <a:lstStyle/>
+          <a:p>
+            <a:pPr algn="ctr">
+              <a:spcAft>
+                <a:spcPts val="600"/>
+              </a:spcAft>
+            </a:pPr>
+            <a:r>
+              <a:rPr sz="1000" b="1">
+                <a:solidFill>
+                  <a:srgbClr val="0B3D7A"/>
+                </a:solidFill>
+              </a:rPr>
+              <a:t>Measurement</a:t>
+            </a:r>
+          </a:p>
+        </p:txBody>
+      </p:sp>
+      <p:sp>
+        <p:nvSpPr>
+          <p:cNvPr id="18" name="Rounded Rectangle 17"/>
+          <p:cNvSpPr/>
+          <p:nvPr/>
+        </p:nvSpPr>
+        <p:spPr>
+          <a:xfrm>
+            <a:off x="14209776" y="3017520"/>
+            <a:ext cx="1627632" cy="384048"/>
+          </a:xfrm>
+          <a:prstGeom prst="roundRect">
+            <a:avLst>
+              <a:gd name="adj" fmla="val 10000"/>
+            </a:avLst>
+          </a:prstGeom>
+          <a:solidFill>
+            <a:srgbClr val="F5EFE9"/>
+          </a:solidFill>
+          <a:ln>
+            <a:noFill/>
+          </a:ln>
+          <a:effectLst/>
+        </p:spPr>
+        <p:style>
+          <a:lnRef idx="1">
+            <a:schemeClr val="accent1"/>
+          </a:lnRef>
+          <a:fillRef idx="3">
+            <a:schemeClr val="accent1"/>
+          </a:fillRef>
+          <a:effectRef idx="2">
+            <a:schemeClr val="accent1"/>
+          </a:effectRef>
+          <a:fontRef idx="minor">
+            <a:schemeClr val="lt1"/>
+          </a:fontRef>
+        </p:style>
+        <p:txBody>
+          <a:bodyPr rtlCol="0" anchor="ctr" wrap="square" lIns="109728" rIns="109728" tIns="54864" bIns="54864"/>
+          <a:lstStyle/>
+          <a:p>
+            <a:pPr algn="ctr">
+              <a:spcAft>
+                <a:spcPts val="600"/>
+              </a:spcAft>
+            </a:pPr>
+            <a:r>
+              <a:rPr sz="1000" b="1">
+                <a:solidFill>
+                  <a:srgbClr val="0B3D7A"/>
+                </a:solidFill>
+              </a:rPr>
+              <a:t>Usage</a:t>
+            </a:r>
+          </a:p>
+        </p:txBody>
+      </p:sp>
+      <p:sp>
+        <p:nvSpPr>
+          <p:cNvPr id="19" name="Rounded Rectangle 18"/>
+          <p:cNvSpPr/>
+          <p:nvPr/>
+        </p:nvSpPr>
+        <p:spPr>
+          <a:xfrm>
+            <a:off x="15965424" y="3017520"/>
+            <a:ext cx="1627632" cy="384048"/>
+          </a:xfrm>
+          <a:prstGeom prst="roundRect">
+            <a:avLst>
+              <a:gd name="adj" fmla="val 10000"/>
+            </a:avLst>
+          </a:prstGeom>
+          <a:solidFill>
+            <a:srgbClr val="F5EFE9"/>
+          </a:solidFill>
+          <a:ln>
+            <a:noFill/>
+          </a:ln>
+          <a:effectLst/>
+        </p:spPr>
+        <p:style>
+          <a:lnRef idx="1">
+            <a:schemeClr val="accent1"/>
+          </a:lnRef>
+          <a:fillRef idx="3">
+            <a:schemeClr val="accent1"/>
+          </a:fillRef>
+          <a:effectRef idx="2">
+            <a:schemeClr val="accent1"/>
+          </a:effectRef>
+          <a:fontRef idx="minor">
+            <a:schemeClr val="lt1"/>
+          </a:fontRef>
+        </p:style>
+        <p:txBody>
+          <a:bodyPr rtlCol="0" anchor="ctr" wrap="square" lIns="109728" rIns="109728" tIns="54864" bIns="54864"/>
+          <a:lstStyle/>
+          <a:p>
+            <a:pPr algn="ctr">
+              <a:spcAft>
+                <a:spcPts val="600"/>
+              </a:spcAft>
+            </a:pPr>
+            <a:r>
+              <a:rPr sz="1000" b="1">
+                <a:solidFill>
+                  <a:srgbClr val="0B3D7A"/>
+                </a:solidFill>
+              </a:rPr>
+              <a:t>Usage scalar detail</a:t>
+            </a:r>
+          </a:p>
+        </p:txBody>
+      </p:sp>
+      <p:sp>
+        <p:nvSpPr>
+          <p:cNvPr id="20" name="Rounded Rectangle 19"/>
+          <p:cNvSpPr/>
+          <p:nvPr/>
+        </p:nvSpPr>
+        <p:spPr>
+          <a:xfrm>
+            <a:off x="17721072" y="3017520"/>
+            <a:ext cx="1627632" cy="384048"/>
+          </a:xfrm>
+          <a:prstGeom prst="roundRect">
+            <a:avLst>
+              <a:gd name="adj" fmla="val 10000"/>
+            </a:avLst>
+          </a:prstGeom>
+          <a:solidFill>
+            <a:srgbClr val="F5EFE9"/>
+          </a:solidFill>
+          <a:ln>
+            <a:noFill/>
+          </a:ln>
+          <a:effectLst/>
+        </p:spPr>
+        <p:style>
+          <a:lnRef idx="1">
+            <a:schemeClr val="accent1"/>
+          </a:lnRef>
+          <a:fillRef idx="3">
+            <a:schemeClr val="accent1"/>
+          </a:fillRef>
+          <a:effectRef idx="2">
+            <a:schemeClr val="accent1"/>
+          </a:effectRef>
+          <a:fontRef idx="minor">
+            <a:schemeClr val="lt1"/>
+          </a:fontRef>
+        </p:style>
+        <p:txBody>
+          <a:bodyPr rtlCol="0" anchor="ctr" wrap="square" lIns="109728" rIns="109728" tIns="54864" bIns="54864"/>
+          <a:lstStyle/>
+          <a:p>
+            <a:pPr algn="ctr">
+              <a:spcAft>
+                <a:spcPts val="600"/>
+              </a:spcAft>
+            </a:pPr>
+            <a:r>
+              <a:rPr sz="1000" b="1">
+                <a:solidFill>
+                  <a:srgbClr val="0B3D7A"/>
+                </a:solidFill>
+              </a:rPr>
+              <a:t>SA snapshot refresh</a:t>
+            </a:r>
+          </a:p>
+        </p:txBody>
+      </p:sp>
+      <p:sp>
+        <p:nvSpPr>
+          <p:cNvPr id="21" name="Diamond 20"/>
+          <p:cNvSpPr/>
+          <p:nvPr/>
+        </p:nvSpPr>
+        <p:spPr>
+          <a:xfrm>
+            <a:off x="17099280" y="4023360"/>
+            <a:ext cx="2103120" cy="960120"/>
+          </a:xfrm>
+          <a:prstGeom prst="diamond">
             <a:avLst/>
           </a:prstGeom>
           <a:solidFill>
@@ -31433,7 +33882,7 @@
           </a:fontRef>
         </p:style>
         <p:txBody>
-          <a:bodyPr rtlCol="0" anchor="ctr" wrap="square" lIns="0" rIns="0" tIns="54864" bIns="54864"/>
+          <a:bodyPr rtlCol="0" anchor="ctr" wrap="square" lIns="18288" rIns="18288" tIns="54864" bIns="54864"/>
           <a:lstStyle/>
           <a:p>
             <a:pPr algn="ctr">
@@ -31442,83 +33891,86 @@
               </a:spcAft>
             </a:pPr>
             <a:r>
-              <a:rPr sz="1500" b="1">
+              <a:rPr sz="1000" b="1">
                 <a:solidFill>
                   <a:srgbClr val="0B3D7A"/>
                 </a:solidFill>
               </a:rPr>
-              <a:t>1</a:t>
-            </a:r>
-          </a:p>
-        </p:txBody>
-      </p:sp>
-      <p:sp>
-        <p:nvSpPr>
-          <p:cNvPr id="7" name="TextBox 6"/>
-          <p:cNvSpPr txBox="1"/>
-          <p:nvPr/>
-        </p:nvSpPr>
-        <p:spPr>
-          <a:xfrm>
-            <a:off x="1517904" y="1920240"/>
-            <a:ext cx="8252459" cy="1252728"/>
-          </a:xfrm>
-          <a:prstGeom prst="rect">
+              <a:t>ready gate: every job SUCCEEDED?</a:t>
+            </a:r>
+          </a:p>
+        </p:txBody>
+      </p:sp>
+      <p:sp>
+        <p:nvSpPr>
+          <p:cNvPr id="22" name="Diamond 21"/>
+          <p:cNvSpPr/>
+          <p:nvPr/>
+        </p:nvSpPr>
+        <p:spPr>
+          <a:xfrm>
+            <a:off x="14264640" y="4023360"/>
+            <a:ext cx="2377440" cy="960120"/>
+          </a:xfrm>
+          <a:prstGeom prst="diamond">
             <a:avLst/>
           </a:prstGeom>
-          <a:noFill/>
-        </p:spPr>
-        <p:txBody>
-          <a:bodyPr wrap="square" anchor="t" lIns="0" rIns="0" tIns="54864" bIns="54864">
-            <a:spAutoFit/>
-          </a:bodyPr>
-          <a:lstStyle/>
-          <a:p>
-            <a:pPr algn="l">
-              <a:spcAft>
-                <a:spcPts val="600"/>
-              </a:spcAft>
-            </a:pPr>
-            <a:r>
-              <a:rPr sz="1900" b="1">
+          <a:solidFill>
+            <a:srgbClr val="FFA418"/>
+          </a:solidFill>
+          <a:ln>
+            <a:noFill/>
+          </a:ln>
+          <a:effectLst/>
+        </p:spPr>
+        <p:style>
+          <a:lnRef idx="1">
+            <a:schemeClr val="accent1"/>
+          </a:lnRef>
+          <a:fillRef idx="3">
+            <a:schemeClr val="accent1"/>
+          </a:fillRef>
+          <a:effectRef idx="2">
+            <a:schemeClr val="accent1"/>
+          </a:effectRef>
+          <a:fontRef idx="minor">
+            <a:schemeClr val="lt1"/>
+          </a:fontRef>
+        </p:style>
+        <p:txBody>
+          <a:bodyPr rtlCol="0" anchor="ctr" wrap="square" lIns="18288" rIns="18288" tIns="54864" bIns="54864"/>
+          <a:lstStyle/>
+          <a:p>
+            <a:pPr algn="ctr">
+              <a:spcAft>
+                <a:spcPts val="600"/>
+              </a:spcAft>
+            </a:pPr>
+            <a:r>
+              <a:rPr sz="1000" b="1">
                 <a:solidFill>
                   <a:srgbClr val="0B3D7A"/>
                 </a:solidFill>
               </a:rPr>
-              <a:t>Preflight</a:t>
-            </a:r>
-          </a:p>
-          <a:p>
-            <a:pPr algn="l">
-              <a:spcAft>
-                <a:spcPts val="600"/>
-              </a:spcAft>
-            </a:pPr>
-            <a:r>
-              <a:rPr sz="1500" b="0">
-                <a:solidFill>
-                  <a:srgbClr val="4C5D69"/>
-                </a:solidFill>
-              </a:rPr>
-              <a:t>Proves the deploy user can read every CISADM table the snapshots need and write the target objects. A limited-privilege variant exists for locked-down instances.</a:t>
-            </a:r>
-          </a:p>
-        </p:txBody>
-      </p:sp>
-      <p:sp>
-        <p:nvSpPr>
-          <p:cNvPr id="8" name="Rounded Rectangle 7"/>
+              <a:t>validate and install gates pass?</a:t>
+            </a:r>
+          </a:p>
+        </p:txBody>
+      </p:sp>
+      <p:sp>
+        <p:nvSpPr>
+          <p:cNvPr id="23" name="Rounded Rectangle 22"/>
           <p:cNvSpPr/>
           <p:nvPr/>
         </p:nvSpPr>
         <p:spPr>
           <a:xfrm>
-            <a:off x="740664" y="3493008"/>
-            <a:ext cx="9212580" cy="1435607"/>
+            <a:off x="11612880" y="4114800"/>
+            <a:ext cx="2194560" cy="777240"/>
           </a:xfrm>
           <a:prstGeom prst="roundRect">
             <a:avLst>
-              <a:gd name="adj" fmla="val 8000"/>
+              <a:gd name="adj" fmla="val 10000"/>
             </a:avLst>
           </a:prstGeom>
           <a:solidFill>
@@ -31544,25 +33996,125 @@
           </a:fontRef>
         </p:style>
         <p:txBody>
-          <a:bodyPr rtlCol="0" anchor="ctr"/>
-          <a:lstStyle/>
-          <a:p>
-            <a:pPr algn="ctr"/>
-          </a:p>
-        </p:txBody>
-      </p:sp>
-      <p:sp>
-        <p:nvSpPr>
-          <p:cNvPr id="9" name="Oval 8"/>
+          <a:bodyPr rtlCol="0" anchor="ctr" wrap="square" lIns="109728" rIns="109728" tIns="54864" bIns="54864"/>
+          <a:lstStyle/>
+          <a:p>
+            <a:pPr algn="l">
+              <a:spcAft>
+                <a:spcPts val="600"/>
+              </a:spcAft>
+            </a:pPr>
+            <a:r>
+              <a:rPr sz="1400" b="1">
+                <a:solidFill>
+                  <a:srgbClr val="0B3D7A"/>
+                </a:solidFill>
+              </a:rPr>
+              <a:t>Post-load indexes</a:t>
+            </a:r>
+          </a:p>
+          <a:p>
+            <a:pPr algn="l">
+              <a:spcAft>
+                <a:spcPts val="600"/>
+              </a:spcAft>
+            </a:pPr>
+            <a:r>
+              <a:rPr sz="1100" b="0">
+                <a:solidFill>
+                  <a:srgbClr val="4C5D69"/>
+                </a:solidFill>
+              </a:rPr>
+              <a:t>keys and dates the domains filter on</a:t>
+            </a:r>
+          </a:p>
+        </p:txBody>
+      </p:sp>
+      <p:sp>
+        <p:nvSpPr>
+          <p:cNvPr id="24" name="Rounded Rectangle 23"/>
           <p:cNvSpPr/>
           <p:nvPr/>
         </p:nvSpPr>
         <p:spPr>
           <a:xfrm>
-            <a:off x="941832" y="3694176"/>
-            <a:ext cx="457200" cy="457200"/>
-          </a:xfrm>
-          <a:prstGeom prst="ellipse">
+            <a:off x="8412480" y="4069080"/>
+            <a:ext cx="2743200" cy="868680"/>
+          </a:xfrm>
+          <a:prstGeom prst="roundRect">
+            <a:avLst>
+              <a:gd name="adj" fmla="val 10000"/>
+            </a:avLst>
+          </a:prstGeom>
+          <a:solidFill>
+            <a:srgbClr val="F5EFE9"/>
+          </a:solidFill>
+          <a:ln>
+            <a:noFill/>
+          </a:ln>
+          <a:effectLst/>
+        </p:spPr>
+        <p:style>
+          <a:lnRef idx="1">
+            <a:schemeClr val="accent1"/>
+          </a:lnRef>
+          <a:fillRef idx="3">
+            <a:schemeClr val="accent1"/>
+          </a:fillRef>
+          <a:effectRef idx="2">
+            <a:schemeClr val="accent1"/>
+          </a:effectRef>
+          <a:fontRef idx="minor">
+            <a:schemeClr val="lt1"/>
+          </a:fontRef>
+        </p:style>
+        <p:txBody>
+          <a:bodyPr rtlCol="0" anchor="ctr" wrap="square" lIns="109728" rIns="109728" tIns="54864" bIns="54864"/>
+          <a:lstStyle/>
+          <a:p>
+            <a:pPr algn="l">
+              <a:spcAft>
+                <a:spcPts val="600"/>
+              </a:spcAft>
+            </a:pPr>
+            <a:r>
+              <a:rPr sz="1400" b="1">
+                <a:solidFill>
+                  <a:srgbClr val="0B3D7A"/>
+                </a:solidFill>
+              </a:rPr>
+              <a:t>Rolling procedures</a:t>
+            </a:r>
+          </a:p>
+          <a:p>
+            <a:pPr algn="l">
+              <a:spcAft>
+                <a:spcPts val="600"/>
+              </a:spcAft>
+            </a:pPr>
+            <a:r>
+              <a:rPr sz="1100" b="0">
+                <a:solidFill>
+                  <a:srgbClr val="4C5D69"/>
+                </a:solidFill>
+              </a:rPr>
+              <a:t>3 months rebuilt, 24 kept; one operational refresh run by hand</a:t>
+            </a:r>
+          </a:p>
+        </p:txBody>
+      </p:sp>
+      <p:sp>
+        <p:nvSpPr>
+          <p:cNvPr id="25" name="Diamond 24"/>
+          <p:cNvSpPr/>
+          <p:nvPr/>
+        </p:nvSpPr>
+        <p:spPr>
+          <a:xfrm>
+            <a:off x="5943600" y="4023360"/>
+            <a:ext cx="2011680" cy="960120"/>
+          </a:xfrm>
+          <a:prstGeom prst="diamond">
             <a:avLst/>
           </a:prstGeom>
           <a:solidFill>
@@ -31588,7 +34140,7 @@
           </a:fontRef>
         </p:style>
         <p:txBody>
-          <a:bodyPr rtlCol="0" anchor="ctr" wrap="square" lIns="0" rIns="0" tIns="54864" bIns="54864"/>
+          <a:bodyPr rtlCol="0" anchor="ctr" wrap="square" lIns="18288" rIns="18288" tIns="54864" bIns="54864"/>
           <a:lstStyle/>
           <a:p>
             <a:pPr algn="ctr">
@@ -31597,83 +34149,30 @@
               </a:spcAft>
             </a:pPr>
             <a:r>
-              <a:rPr sz="1500" b="1">
+              <a:rPr sz="1000" b="1">
                 <a:solidFill>
                   <a:srgbClr val="0B3D7A"/>
                 </a:solidFill>
               </a:rPr>
-              <a:t>2</a:t>
-            </a:r>
-          </a:p>
-        </p:txBody>
-      </p:sp>
-      <p:sp>
-        <p:nvSpPr>
-          <p:cNvPr id="10" name="TextBox 9"/>
-          <p:cNvSpPr txBox="1"/>
-          <p:nvPr/>
-        </p:nvSpPr>
-        <p:spPr>
-          <a:xfrm>
-            <a:off x="1517904" y="3584448"/>
-            <a:ext cx="8252459" cy="1252728"/>
-          </a:xfrm>
-          <a:prstGeom prst="rect">
-            <a:avLst/>
-          </a:prstGeom>
-          <a:noFill/>
-        </p:spPr>
-        <p:txBody>
-          <a:bodyPr wrap="square" anchor="t" lIns="0" rIns="0" tIns="54864" bIns="54864">
-            <a:spAutoFit/>
-          </a:bodyPr>
-          <a:lstStyle/>
-          <a:p>
-            <a:pPr algn="l">
-              <a:spcAft>
-                <a:spcPts val="600"/>
-              </a:spcAft>
-            </a:pPr>
-            <a:r>
-              <a:rPr sz="1900" b="1">
-                <a:solidFill>
-                  <a:srgbClr val="0B3D7A"/>
-                </a:solidFill>
-              </a:rPr>
-              <a:t>Create the seven rolling snapshot tables</a:t>
-            </a:r>
-          </a:p>
-          <a:p>
-            <a:pPr algn="l">
-              <a:spcAft>
-                <a:spcPts val="600"/>
-              </a:spcAft>
-            </a:pPr>
-            <a:r>
-              <a:rPr sz="1500" b="0">
-                <a:solidFill>
-                  <a:srgbClr val="4C5D69"/>
-                </a:solidFill>
-              </a:rPr>
-              <a:t>Financial transactions, billed usage, SQ usage, GL distribution, measurements, usage and usage scalar detail: created empty with their keys, nothing loaded yet.</a:t>
-            </a:r>
-          </a:p>
-        </p:txBody>
-      </p:sp>
-      <p:sp>
-        <p:nvSpPr>
-          <p:cNvPr id="11" name="Rounded Rectangle 10"/>
+              <a:t>validated again?</a:t>
+            </a:r>
+          </a:p>
+        </p:txBody>
+      </p:sp>
+      <p:sp>
+        <p:nvSpPr>
+          <p:cNvPr id="26" name="Rounded Rectangle 25"/>
           <p:cNvSpPr/>
           <p:nvPr/>
         </p:nvSpPr>
         <p:spPr>
           <a:xfrm>
-            <a:off x="740664" y="5157216"/>
-            <a:ext cx="9212580" cy="1435607"/>
+            <a:off x="3063240" y="4069080"/>
+            <a:ext cx="2468880" cy="868680"/>
           </a:xfrm>
           <a:prstGeom prst="roundRect">
             <a:avLst>
-              <a:gd name="adj" fmla="val 8000"/>
+              <a:gd name="adj" fmla="val 10000"/>
             </a:avLst>
           </a:prstGeom>
           <a:solidFill>
@@ -31699,136 +34198,54 @@
           </a:fontRef>
         </p:style>
         <p:txBody>
-          <a:bodyPr rtlCol="0" anchor="ctr"/>
-          <a:lstStyle/>
-          <a:p>
-            <a:pPr algn="ctr"/>
-          </a:p>
-        </p:txBody>
-      </p:sp>
-      <p:sp>
-        <p:nvSpPr>
-          <p:cNvPr id="12" name="Oval 11"/>
+          <a:bodyPr rtlCol="0" anchor="ctr" wrap="square" lIns="109728" rIns="109728" tIns="54864" bIns="54864"/>
+          <a:lstStyle/>
+          <a:p>
+            <a:pPr algn="l">
+              <a:spcAft>
+                <a:spcPts val="600"/>
+              </a:spcAft>
+            </a:pPr>
+            <a:r>
+              <a:rPr sz="1400" b="1">
+                <a:solidFill>
+                  <a:srgbClr val="0B3D7A"/>
+                </a:solidFill>
+              </a:rPr>
+              <a:t>Schedule</a:t>
+            </a:r>
+          </a:p>
+          <a:p>
+            <a:pPr algn="l">
+              <a:spcAft>
+                <a:spcPts val="600"/>
+              </a:spcAft>
+            </a:pPr>
+            <a:r>
+              <a:rPr sz="1100" b="0">
+                <a:solidFill>
+                  <a:srgbClr val="4C5D69"/>
+                </a:solidFill>
+              </a:rPr>
+              <a:t>twice daily, 30-minute stagger, held on TEST until approved</a:t>
+            </a:r>
+          </a:p>
+        </p:txBody>
+      </p:sp>
+      <p:sp>
+        <p:nvSpPr>
+          <p:cNvPr id="27" name="Rounded Rectangle 26"/>
           <p:cNvSpPr/>
           <p:nvPr/>
         </p:nvSpPr>
         <p:spPr>
           <a:xfrm>
-            <a:off x="941832" y="5358383"/>
-            <a:ext cx="457200" cy="457200"/>
-          </a:xfrm>
-          <a:prstGeom prst="ellipse">
-            <a:avLst/>
-          </a:prstGeom>
-          <a:solidFill>
-            <a:srgbClr val="FFA418"/>
-          </a:solidFill>
-          <a:ln>
-            <a:noFill/>
-          </a:ln>
-          <a:effectLst/>
-        </p:spPr>
-        <p:style>
-          <a:lnRef idx="1">
-            <a:schemeClr val="accent1"/>
-          </a:lnRef>
-          <a:fillRef idx="3">
-            <a:schemeClr val="accent1"/>
-          </a:fillRef>
-          <a:effectRef idx="2">
-            <a:schemeClr val="accent1"/>
-          </a:effectRef>
-          <a:fontRef idx="minor">
-            <a:schemeClr val="lt1"/>
-          </a:fontRef>
-        </p:style>
-        <p:txBody>
-          <a:bodyPr rtlCol="0" anchor="ctr" wrap="square" lIns="0" rIns="0" tIns="54864" bIns="54864"/>
-          <a:lstStyle/>
-          <a:p>
-            <a:pPr algn="ctr">
-              <a:spcAft>
-                <a:spcPts val="600"/>
-              </a:spcAft>
-            </a:pPr>
-            <a:r>
-              <a:rPr sz="1500" b="1">
-                <a:solidFill>
-                  <a:srgbClr val="0B3D7A"/>
-                </a:solidFill>
-              </a:rPr>
-              <a:t>3</a:t>
-            </a:r>
-          </a:p>
-        </p:txBody>
-      </p:sp>
-      <p:sp>
-        <p:nvSpPr>
-          <p:cNvPr id="13" name="TextBox 12"/>
-          <p:cNvSpPr txBox="1"/>
-          <p:nvPr/>
-        </p:nvSpPr>
-        <p:spPr>
-          <a:xfrm>
-            <a:off x="1517904" y="5248655"/>
-            <a:ext cx="8252459" cy="1252728"/>
-          </a:xfrm>
-          <a:prstGeom prst="rect">
-            <a:avLst/>
-          </a:prstGeom>
-          <a:noFill/>
-        </p:spPr>
-        <p:txBody>
-          <a:bodyPr wrap="square" anchor="t" lIns="0" rIns="0" tIns="54864" bIns="54864">
-            <a:spAutoFit/>
-          </a:bodyPr>
-          <a:lstStyle/>
-          <a:p>
-            <a:pPr algn="l">
-              <a:spcAft>
-                <a:spcPts val="600"/>
-              </a:spcAft>
-            </a:pPr>
-            <a:r>
-              <a:rPr sz="1900" b="1">
-                <a:solidFill>
-                  <a:srgbClr val="0B3D7A"/>
-                </a:solidFill>
-              </a:rPr>
-              <a:t>Create the domain-support objects</a:t>
-            </a:r>
-          </a:p>
-          <a:p>
-            <a:pPr algn="l">
-              <a:spcAft>
-                <a:spcPts val="600"/>
-              </a:spcAft>
-            </a:pPr>
-            <a:r>
-              <a:rPr sz="1500" b="0">
-                <a:solidFill>
-                  <a:srgbClr val="4C5D69"/>
-                </a:solidFill>
-              </a:rPr>
-              <a:t>The SA aged-balance snapshot table, its snapshot-type lookup seed, and eight CMS views for device, asset, crew, field activity and case, with grants and the read-schema synonyms repaired.</a:t>
-            </a:r>
-          </a:p>
-        </p:txBody>
-      </p:sp>
-      <p:sp>
-        <p:nvSpPr>
-          <p:cNvPr id="14" name="Rounded Rectangle 13"/>
-          <p:cNvSpPr/>
-          <p:nvPr/>
-        </p:nvSpPr>
-        <p:spPr>
-          <a:xfrm>
-            <a:off x="740664" y="6821423"/>
-            <a:ext cx="9212580" cy="1435607"/>
+            <a:off x="740664" y="4069080"/>
+            <a:ext cx="1920240" cy="868680"/>
           </a:xfrm>
           <a:prstGeom prst="roundRect">
             <a:avLst>
-              <a:gd name="adj" fmla="val 8000"/>
+              <a:gd name="adj" fmla="val 10000"/>
             </a:avLst>
           </a:prstGeom>
           <a:solidFill>
@@ -31854,79 +34271,50 @@
           </a:fontRef>
         </p:style>
         <p:txBody>
-          <a:bodyPr rtlCol="0" anchor="ctr"/>
-          <a:lstStyle/>
-          <a:p>
-            <a:pPr algn="ctr"/>
-          </a:p>
-        </p:txBody>
-      </p:sp>
-      <p:sp>
-        <p:nvSpPr>
-          <p:cNvPr id="15" name="Oval 14"/>
-          <p:cNvSpPr/>
-          <p:nvPr/>
-        </p:nvSpPr>
-        <p:spPr>
-          <a:xfrm>
-            <a:off x="941832" y="7022591"/>
-            <a:ext cx="457200" cy="457200"/>
-          </a:xfrm>
-          <a:prstGeom prst="ellipse">
-            <a:avLst/>
-          </a:prstGeom>
-          <a:solidFill>
-            <a:srgbClr val="FFA418"/>
-          </a:solidFill>
-          <a:ln>
-            <a:noFill/>
-          </a:ln>
-          <a:effectLst/>
-        </p:spPr>
-        <p:style>
-          <a:lnRef idx="1">
-            <a:schemeClr val="accent1"/>
-          </a:lnRef>
-          <a:fillRef idx="3">
-            <a:schemeClr val="accent1"/>
-          </a:fillRef>
-          <a:effectRef idx="2">
-            <a:schemeClr val="accent1"/>
-          </a:effectRef>
-          <a:fontRef idx="minor">
-            <a:schemeClr val="lt1"/>
-          </a:fontRef>
-        </p:style>
-        <p:txBody>
-          <a:bodyPr rtlCol="0" anchor="ctr" wrap="square" lIns="0" rIns="0" tIns="54864" bIns="54864"/>
-          <a:lstStyle/>
-          <a:p>
-            <a:pPr algn="ctr">
-              <a:spcAft>
-                <a:spcPts val="600"/>
-              </a:spcAft>
-            </a:pPr>
-            <a:r>
-              <a:rPr sz="1500" b="1">
+          <a:bodyPr rtlCol="0" anchor="ctr" wrap="square" lIns="109728" rIns="109728" tIns="54864" bIns="54864"/>
+          <a:lstStyle/>
+          <a:p>
+            <a:pPr algn="l">
+              <a:spcAft>
+                <a:spcPts val="600"/>
+              </a:spcAft>
+            </a:pPr>
+            <a:r>
+              <a:rPr sz="1400" b="1">
                 <a:solidFill>
                   <a:srgbClr val="0B3D7A"/>
                 </a:solidFill>
               </a:rPr>
-              <a:t>4</a:t>
-            </a:r>
-          </a:p>
-        </p:txBody>
-      </p:sp>
-      <p:sp>
-        <p:nvSpPr>
-          <p:cNvPr id="16" name="TextBox 15"/>
+              <a:t>Capture runs, data quality</a:t>
+            </a:r>
+          </a:p>
+          <a:p>
+            <a:pPr algn="l">
+              <a:spcAft>
+                <a:spcPts val="600"/>
+              </a:spcAft>
+            </a:pPr>
+            <a:r>
+              <a:rPr sz="1100" b="0">
+                <a:solidFill>
+                  <a:srgbClr val="4C5D69"/>
+                </a:solidFill>
+              </a:rPr>
+              <a:t>per client, kept with the log</a:t>
+            </a:r>
+          </a:p>
+        </p:txBody>
+      </p:sp>
+      <p:sp>
+        <p:nvSpPr>
+          <p:cNvPr id="28" name="TextBox 27"/>
           <p:cNvSpPr txBox="1"/>
           <p:nvPr/>
         </p:nvSpPr>
         <p:spPr>
           <a:xfrm>
-            <a:off x="1517904" y="6912863"/>
-            <a:ext cx="8252459" cy="1252728"/>
+            <a:off x="868680" y="6327648"/>
+            <a:ext cx="2103120" cy="320040"/>
           </a:xfrm>
           <a:prstGeom prst="rect">
             <a:avLst/>
@@ -31945,46 +34333,257 @@
               </a:spcAft>
             </a:pPr>
             <a:r>
-              <a:rPr sz="1900" b="1">
-                <a:solidFill>
-                  <a:srgbClr val="0B3D7A"/>
-                </a:solidFill>
-              </a:rPr>
-              <a:t>Deploy the procedures</a:t>
-            </a:r>
-          </a:p>
-          <a:p>
-            <a:pPr algn="l">
-              <a:spcAft>
-                <a:spcPts val="600"/>
-              </a:spcAft>
-            </a:pPr>
-            <a:r>
-              <a:rPr sz="1500" b="0">
-                <a:solidFill>
-                  <a:srgbClr val="4C5D69"/>
-                </a:solidFill>
-              </a:rPr>
-              <a:t>One baseline procedure per snapshot (the retained 24 months, loaded once) and one operational procedure; the aged-balance refresh procedure for the SA snapshot.</a:t>
-            </a:r>
-          </a:p>
-        </p:txBody>
-      </p:sp>
-      <p:sp>
-        <p:nvSpPr>
-          <p:cNvPr id="17" name="Rounded Rectangle 16"/>
+              <a:rPr sz="1200" b="1">
+                <a:solidFill>
+                  <a:srgbClr val="F5EFE9"/>
+                </a:solidFill>
+              </a:rPr>
+              <a:t>Finance</a:t>
+            </a:r>
+          </a:p>
+        </p:txBody>
+      </p:sp>
+      <p:sp>
+        <p:nvSpPr>
+          <p:cNvPr id="29" name="TextBox 28"/>
+          <p:cNvSpPr txBox="1"/>
+          <p:nvPr/>
+        </p:nvSpPr>
+        <p:spPr>
+          <a:xfrm>
+            <a:off x="3108960" y="6327648"/>
+            <a:ext cx="2103120" cy="320040"/>
+          </a:xfrm>
+          <a:prstGeom prst="rect">
+            <a:avLst/>
+          </a:prstGeom>
+          <a:noFill/>
+        </p:spPr>
+        <p:txBody>
+          <a:bodyPr wrap="square" anchor="t" lIns="0" rIns="0" tIns="54864" bIns="54864">
+            <a:spAutoFit/>
+          </a:bodyPr>
+          <a:lstStyle/>
+          <a:p>
+            <a:pPr algn="l">
+              <a:spcAft>
+                <a:spcPts val="600"/>
+              </a:spcAft>
+            </a:pPr>
+            <a:r>
+              <a:rPr sz="1200" b="1">
+                <a:solidFill>
+                  <a:srgbClr val="F5EFE9"/>
+                </a:solidFill>
+              </a:rPr>
+              <a:t>Billing and Rates</a:t>
+            </a:r>
+          </a:p>
+        </p:txBody>
+      </p:sp>
+      <p:sp>
+        <p:nvSpPr>
+          <p:cNvPr id="30" name="TextBox 29"/>
+          <p:cNvSpPr txBox="1"/>
+          <p:nvPr/>
+        </p:nvSpPr>
+        <p:spPr>
+          <a:xfrm>
+            <a:off x="5349240" y="6327648"/>
+            <a:ext cx="2103120" cy="320040"/>
+          </a:xfrm>
+          <a:prstGeom prst="rect">
+            <a:avLst/>
+          </a:prstGeom>
+          <a:noFill/>
+        </p:spPr>
+        <p:txBody>
+          <a:bodyPr wrap="square" anchor="t" lIns="0" rIns="0" tIns="54864" bIns="54864">
+            <a:spAutoFit/>
+          </a:bodyPr>
+          <a:lstStyle/>
+          <a:p>
+            <a:pPr algn="l">
+              <a:spcAft>
+                <a:spcPts val="600"/>
+              </a:spcAft>
+            </a:pPr>
+            <a:r>
+              <a:rPr sz="1200" b="1">
+                <a:solidFill>
+                  <a:srgbClr val="F5EFE9"/>
+                </a:solidFill>
+              </a:rPr>
+              <a:t>Meter Operations</a:t>
+            </a:r>
+          </a:p>
+        </p:txBody>
+      </p:sp>
+      <p:sp>
+        <p:nvSpPr>
+          <p:cNvPr id="31" name="TextBox 30"/>
+          <p:cNvSpPr txBox="1"/>
+          <p:nvPr/>
+        </p:nvSpPr>
+        <p:spPr>
+          <a:xfrm>
+            <a:off x="7863840" y="6327648"/>
+            <a:ext cx="2377440" cy="320040"/>
+          </a:xfrm>
+          <a:prstGeom prst="rect">
+            <a:avLst/>
+          </a:prstGeom>
+          <a:noFill/>
+        </p:spPr>
+        <p:txBody>
+          <a:bodyPr wrap="square" anchor="t" lIns="0" rIns="0" tIns="54864" bIns="54864">
+            <a:spAutoFit/>
+          </a:bodyPr>
+          <a:lstStyle/>
+          <a:p>
+            <a:pPr algn="l">
+              <a:spcAft>
+                <a:spcPts val="600"/>
+              </a:spcAft>
+            </a:pPr>
+            <a:r>
+              <a:rPr sz="1200" b="1">
+                <a:solidFill>
+                  <a:srgbClr val="F5EFE9"/>
+                </a:solidFill>
+              </a:rPr>
+              <a:t>Debt Management</a:t>
+            </a:r>
+          </a:p>
+        </p:txBody>
+      </p:sp>
+      <p:sp>
+        <p:nvSpPr>
+          <p:cNvPr id="32" name="TextBox 31"/>
+          <p:cNvSpPr txBox="1"/>
+          <p:nvPr/>
+        </p:nvSpPr>
+        <p:spPr>
+          <a:xfrm>
+            <a:off x="10515600" y="6327648"/>
+            <a:ext cx="2971800" cy="320040"/>
+          </a:xfrm>
+          <a:prstGeom prst="rect">
+            <a:avLst/>
+          </a:prstGeom>
+          <a:noFill/>
+        </p:spPr>
+        <p:txBody>
+          <a:bodyPr wrap="square" anchor="t" lIns="0" rIns="0" tIns="54864" bIns="54864">
+            <a:spAutoFit/>
+          </a:bodyPr>
+          <a:lstStyle/>
+          <a:p>
+            <a:pPr algn="l">
+              <a:spcAft>
+                <a:spcPts val="600"/>
+              </a:spcAft>
+            </a:pPr>
+            <a:r>
+              <a:rPr sz="1200" b="1">
+                <a:solidFill>
+                  <a:srgbClr val="F5EFE9"/>
+                </a:solidFill>
+              </a:rPr>
+              <a:t>Meter Operations views</a:t>
+            </a:r>
+          </a:p>
+        </p:txBody>
+      </p:sp>
+      <p:sp>
+        <p:nvSpPr>
+          <p:cNvPr id="33" name="TextBox 32"/>
+          <p:cNvSpPr txBox="1"/>
+          <p:nvPr/>
+        </p:nvSpPr>
+        <p:spPr>
+          <a:xfrm>
+            <a:off x="13716000" y="6327648"/>
+            <a:ext cx="3063240" cy="320040"/>
+          </a:xfrm>
+          <a:prstGeom prst="rect">
+            <a:avLst/>
+          </a:prstGeom>
+          <a:noFill/>
+        </p:spPr>
+        <p:txBody>
+          <a:bodyPr wrap="square" anchor="t" lIns="0" rIns="0" tIns="54864" bIns="54864">
+            <a:spAutoFit/>
+          </a:bodyPr>
+          <a:lstStyle/>
+          <a:p>
+            <a:pPr algn="l">
+              <a:spcAft>
+                <a:spcPts val="600"/>
+              </a:spcAft>
+            </a:pPr>
+            <a:r>
+              <a:rPr sz="1200" b="1">
+                <a:solidFill>
+                  <a:srgbClr val="F5EFE9"/>
+                </a:solidFill>
+              </a:rPr>
+              <a:t>Field Operations views</a:t>
+            </a:r>
+          </a:p>
+        </p:txBody>
+      </p:sp>
+      <p:sp>
+        <p:nvSpPr>
+          <p:cNvPr id="34" name="TextBox 33"/>
+          <p:cNvSpPr txBox="1"/>
+          <p:nvPr/>
+        </p:nvSpPr>
+        <p:spPr>
+          <a:xfrm>
+            <a:off x="17007840" y="6327648"/>
+            <a:ext cx="2194560" cy="320040"/>
+          </a:xfrm>
+          <a:prstGeom prst="rect">
+            <a:avLst/>
+          </a:prstGeom>
+          <a:noFill/>
+        </p:spPr>
+        <p:txBody>
+          <a:bodyPr wrap="square" anchor="t" lIns="0" rIns="0" tIns="54864" bIns="54864">
+            <a:spAutoFit/>
+          </a:bodyPr>
+          <a:lstStyle/>
+          <a:p>
+            <a:pPr algn="l">
+              <a:spcAft>
+                <a:spcPts val="600"/>
+              </a:spcAft>
+            </a:pPr>
+            <a:r>
+              <a:rPr sz="1200" b="1">
+                <a:solidFill>
+                  <a:srgbClr val="F5EFE9"/>
+                </a:solidFill>
+              </a:rPr>
+              <a:t>Customer Operations views</a:t>
+            </a:r>
+          </a:p>
+        </p:txBody>
+      </p:sp>
+      <p:sp>
+        <p:nvSpPr>
+          <p:cNvPr id="35" name="Can 34"/>
           <p:cNvSpPr/>
           <p:nvPr/>
         </p:nvSpPr>
         <p:spPr>
           <a:xfrm>
-            <a:off x="740664" y="8485632"/>
-            <a:ext cx="9212580" cy="1435607"/>
-          </a:xfrm>
-          <a:prstGeom prst="roundRect">
-            <a:avLst>
-              <a:gd name="adj" fmla="val 8000"/>
-            </a:avLst>
+            <a:off x="868680" y="6675120"/>
+            <a:ext cx="2103120" cy="822960"/>
+          </a:xfrm>
+          <a:prstGeom prst="can">
+            <a:avLst/>
           </a:prstGeom>
           <a:solidFill>
             <a:srgbClr val="F5EFE9"/>
@@ -32009,137 +34608,53 @@
           </a:fontRef>
         </p:style>
         <p:txBody>
-          <a:bodyPr rtlCol="0" anchor="ctr"/>
-          <a:lstStyle/>
-          <a:p>
-            <a:pPr algn="ctr"/>
-          </a:p>
-        </p:txBody>
-      </p:sp>
-      <p:sp>
-        <p:nvSpPr>
-          <p:cNvPr id="18" name="Oval 17"/>
+          <a:bodyPr rtlCol="0" anchor="ctr" wrap="square" lIns="45720" rIns="45720" tIns="54864" bIns="54864"/>
+          <a:lstStyle/>
+          <a:p>
+            <a:pPr algn="ctr">
+              <a:spcAft>
+                <a:spcPts val="600"/>
+              </a:spcAft>
+            </a:pPr>
+            <a:r>
+              <a:rPr sz="1100" b="1">
+                <a:solidFill>
+                  <a:srgbClr val="0B3D7A"/>
+                </a:solidFill>
+              </a:rPr>
+              <a:t>FT_RPT_CURR</a:t>
+            </a:r>
+          </a:p>
+          <a:p>
+            <a:pPr algn="ctr">
+              <a:spcAft>
+                <a:spcPts val="600"/>
+              </a:spcAft>
+            </a:pPr>
+            <a:r>
+              <a:rPr sz="950" b="0">
+                <a:solidFill>
+                  <a:srgbClr val="4C5D69"/>
+                </a:solidFill>
+              </a:rPr>
+              <a:t>financial transactions</a:t>
+            </a:r>
+          </a:p>
+        </p:txBody>
+      </p:sp>
+      <p:sp>
+        <p:nvSpPr>
+          <p:cNvPr id="36" name="Can 35"/>
           <p:cNvSpPr/>
           <p:nvPr/>
         </p:nvSpPr>
         <p:spPr>
           <a:xfrm>
-            <a:off x="941832" y="8686800"/>
-            <a:ext cx="457200" cy="457200"/>
-          </a:xfrm>
-          <a:prstGeom prst="ellipse">
+            <a:off x="868680" y="7635240"/>
+            <a:ext cx="2103120" cy="822960"/>
+          </a:xfrm>
+          <a:prstGeom prst="can">
             <a:avLst/>
-          </a:prstGeom>
-          <a:solidFill>
-            <a:srgbClr val="FFA418"/>
-          </a:solidFill>
-          <a:ln>
-            <a:noFill/>
-          </a:ln>
-          <a:effectLst/>
-        </p:spPr>
-        <p:style>
-          <a:lnRef idx="1">
-            <a:schemeClr val="accent1"/>
-          </a:lnRef>
-          <a:fillRef idx="3">
-            <a:schemeClr val="accent1"/>
-          </a:fillRef>
-          <a:effectRef idx="2">
-            <a:schemeClr val="accent1"/>
-          </a:effectRef>
-          <a:fontRef idx="minor">
-            <a:schemeClr val="lt1"/>
-          </a:fontRef>
-        </p:style>
-        <p:txBody>
-          <a:bodyPr rtlCol="0" anchor="ctr" wrap="square" lIns="0" rIns="0" tIns="54864" bIns="54864"/>
-          <a:lstStyle/>
-          <a:p>
-            <a:pPr algn="ctr">
-              <a:spcAft>
-                <a:spcPts val="600"/>
-              </a:spcAft>
-            </a:pPr>
-            <a:r>
-              <a:rPr sz="1500" b="1">
-                <a:solidFill>
-                  <a:srgbClr val="0B3D7A"/>
-                </a:solidFill>
-              </a:rPr>
-              <a:t>5</a:t>
-            </a:r>
-          </a:p>
-        </p:txBody>
-      </p:sp>
-      <p:sp>
-        <p:nvSpPr>
-          <p:cNvPr id="19" name="TextBox 18"/>
-          <p:cNvSpPr txBox="1"/>
-          <p:nvPr/>
-        </p:nvSpPr>
-        <p:spPr>
-          <a:xfrm>
-            <a:off x="1517904" y="8577072"/>
-            <a:ext cx="8252459" cy="1252728"/>
-          </a:xfrm>
-          <a:prstGeom prst="rect">
-            <a:avLst/>
-          </a:prstGeom>
-          <a:noFill/>
-        </p:spPr>
-        <p:txBody>
-          <a:bodyPr wrap="square" anchor="t" lIns="0" rIns="0" tIns="54864" bIns="54864">
-            <a:spAutoFit/>
-          </a:bodyPr>
-          <a:lstStyle/>
-          <a:p>
-            <a:pPr algn="l">
-              <a:spcAft>
-                <a:spcPts val="600"/>
-              </a:spcAft>
-            </a:pPr>
-            <a:r>
-              <a:rPr sz="1900" b="1">
-                <a:solidFill>
-                  <a:srgbClr val="0B3D7A"/>
-                </a:solidFill>
-              </a:rPr>
-              <a:t>Submit the baselines</a:t>
-            </a:r>
-          </a:p>
-          <a:p>
-            <a:pPr algn="l">
-              <a:spcAft>
-                <a:spcPts val="600"/>
-              </a:spcAft>
-            </a:pPr>
-            <a:r>
-              <a:rPr sz="1500" b="0">
-                <a:solidFill>
-                  <a:srgbClr val="4C5D69"/>
-                </a:solidFill>
-              </a:rPr>
-              <a:t>All eight loads submitted at once as database scheduler jobs; they run unattended and survive a dropped connection. The SA snapshot refresh runs alongside from live financial transactions.</a:t>
-            </a:r>
-          </a:p>
-        </p:txBody>
-      </p:sp>
-      <p:sp>
-        <p:nvSpPr>
-          <p:cNvPr id="20" name="Rounded Rectangle 19"/>
-          <p:cNvSpPr/>
-          <p:nvPr/>
-        </p:nvSpPr>
-        <p:spPr>
-          <a:xfrm>
-            <a:off x="10181844" y="1828800"/>
-            <a:ext cx="9212580" cy="1435607"/>
-          </a:xfrm>
-          <a:prstGeom prst="roundRect">
-            <a:avLst>
-              <a:gd name="adj" fmla="val 8000"/>
-            </a:avLst>
           </a:prstGeom>
           <a:solidFill>
             <a:srgbClr val="F5EFE9"/>
@@ -32164,137 +34679,53 @@
           </a:fontRef>
         </p:style>
         <p:txBody>
-          <a:bodyPr rtlCol="0" anchor="ctr"/>
-          <a:lstStyle/>
-          <a:p>
-            <a:pPr algn="ctr"/>
-          </a:p>
-        </p:txBody>
-      </p:sp>
-      <p:sp>
-        <p:nvSpPr>
-          <p:cNvPr id="21" name="Oval 20"/>
+          <a:bodyPr rtlCol="0" anchor="ctr" wrap="square" lIns="45720" rIns="45720" tIns="54864" bIns="54864"/>
+          <a:lstStyle/>
+          <a:p>
+            <a:pPr algn="ctr">
+              <a:spcAft>
+                <a:spcPts val="600"/>
+              </a:spcAft>
+            </a:pPr>
+            <a:r>
+              <a:rPr sz="950" b="1">
+                <a:solidFill>
+                  <a:srgbClr val="0B3D7A"/>
+                </a:solidFill>
+              </a:rPr>
+              <a:t>FT_GL_DISTRIBUTION_RPT_CURR</a:t>
+            </a:r>
+          </a:p>
+          <a:p>
+            <a:pPr algn="ctr">
+              <a:spcAft>
+                <a:spcPts val="600"/>
+              </a:spcAft>
+            </a:pPr>
+            <a:r>
+              <a:rPr sz="950" b="0">
+                <a:solidFill>
+                  <a:srgbClr val="4C5D69"/>
+                </a:solidFill>
+              </a:rPr>
+              <a:t>GL distribution</a:t>
+            </a:r>
+          </a:p>
+        </p:txBody>
+      </p:sp>
+      <p:sp>
+        <p:nvSpPr>
+          <p:cNvPr id="37" name="Can 36"/>
           <p:cNvSpPr/>
           <p:nvPr/>
         </p:nvSpPr>
         <p:spPr>
           <a:xfrm>
-            <a:off x="10383012" y="2029968"/>
-            <a:ext cx="457200" cy="457200"/>
-          </a:xfrm>
-          <a:prstGeom prst="ellipse">
+            <a:off x="3108960" y="6675120"/>
+            <a:ext cx="2103120" cy="822960"/>
+          </a:xfrm>
+          <a:prstGeom prst="can">
             <a:avLst/>
-          </a:prstGeom>
-          <a:solidFill>
-            <a:srgbClr val="FFA418"/>
-          </a:solidFill>
-          <a:ln>
-            <a:noFill/>
-          </a:ln>
-          <a:effectLst/>
-        </p:spPr>
-        <p:style>
-          <a:lnRef idx="1">
-            <a:schemeClr val="accent1"/>
-          </a:lnRef>
-          <a:fillRef idx="3">
-            <a:schemeClr val="accent1"/>
-          </a:fillRef>
-          <a:effectRef idx="2">
-            <a:schemeClr val="accent1"/>
-          </a:effectRef>
-          <a:fontRef idx="minor">
-            <a:schemeClr val="lt1"/>
-          </a:fontRef>
-        </p:style>
-        <p:txBody>
-          <a:bodyPr rtlCol="0" anchor="ctr" wrap="square" lIns="0" rIns="0" tIns="54864" bIns="54864"/>
-          <a:lstStyle/>
-          <a:p>
-            <a:pPr algn="ctr">
-              <a:spcAft>
-                <a:spcPts val="600"/>
-              </a:spcAft>
-            </a:pPr>
-            <a:r>
-              <a:rPr sz="1500" b="1">
-                <a:solidFill>
-                  <a:srgbClr val="0B3D7A"/>
-                </a:solidFill>
-              </a:rPr>
-              <a:t>6</a:t>
-            </a:r>
-          </a:p>
-        </p:txBody>
-      </p:sp>
-      <p:sp>
-        <p:nvSpPr>
-          <p:cNvPr id="22" name="TextBox 21"/>
-          <p:cNvSpPr txBox="1"/>
-          <p:nvPr/>
-        </p:nvSpPr>
-        <p:spPr>
-          <a:xfrm>
-            <a:off x="10959084" y="1920240"/>
-            <a:ext cx="8252459" cy="1252728"/>
-          </a:xfrm>
-          <a:prstGeom prst="rect">
-            <a:avLst/>
-          </a:prstGeom>
-          <a:noFill/>
-        </p:spPr>
-        <p:txBody>
-          <a:bodyPr wrap="square" anchor="t" lIns="0" rIns="0" tIns="54864" bIns="54864">
-            <a:spAutoFit/>
-          </a:bodyPr>
-          <a:lstStyle/>
-          <a:p>
-            <a:pPr algn="l">
-              <a:spcAft>
-                <a:spcPts val="600"/>
-              </a:spcAft>
-            </a:pPr>
-            <a:r>
-              <a:rPr sz="1900" b="1">
-                <a:solidFill>
-                  <a:srgbClr val="0B3D7A"/>
-                </a:solidFill>
-              </a:rPr>
-              <a:t>Ready gate</a:t>
-            </a:r>
-          </a:p>
-          <a:p>
-            <a:pPr algn="l">
-              <a:spcAft>
-                <a:spcPts val="600"/>
-              </a:spcAft>
-            </a:pPr>
-            <a:r>
-              <a:rPr sz="1500" b="0">
-                <a:solidFill>
-                  <a:srgbClr val="4C5D69"/>
-                </a:solidFill>
-              </a:rPr>
-              <a:t>The scheduler's job table is polled up to eight hours until every job reports SUCCEEDED. A FAILED or missing job stops the rollout.</a:t>
-            </a:r>
-          </a:p>
-        </p:txBody>
-      </p:sp>
-      <p:sp>
-        <p:nvSpPr>
-          <p:cNvPr id="23" name="Rounded Rectangle 22"/>
-          <p:cNvSpPr/>
-          <p:nvPr/>
-        </p:nvSpPr>
-        <p:spPr>
-          <a:xfrm>
-            <a:off x="10181844" y="3493008"/>
-            <a:ext cx="9212580" cy="1435607"/>
-          </a:xfrm>
-          <a:prstGeom prst="roundRect">
-            <a:avLst>
-              <a:gd name="adj" fmla="val 8000"/>
-            </a:avLst>
           </a:prstGeom>
           <a:solidFill>
             <a:srgbClr val="F5EFE9"/>
@@ -32319,137 +34750,53 @@
           </a:fontRef>
         </p:style>
         <p:txBody>
-          <a:bodyPr rtlCol="0" anchor="ctr"/>
-          <a:lstStyle/>
-          <a:p>
-            <a:pPr algn="ctr"/>
-          </a:p>
-        </p:txBody>
-      </p:sp>
-      <p:sp>
-        <p:nvSpPr>
-          <p:cNvPr id="24" name="Oval 23"/>
+          <a:bodyPr rtlCol="0" anchor="ctr" wrap="square" lIns="45720" rIns="45720" tIns="54864" bIns="54864"/>
+          <a:lstStyle/>
+          <a:p>
+            <a:pPr algn="ctr">
+              <a:spcAft>
+                <a:spcPts val="600"/>
+              </a:spcAft>
+            </a:pPr>
+            <a:r>
+              <a:rPr sz="950" b="1">
+                <a:solidFill>
+                  <a:srgbClr val="0B3D7A"/>
+                </a:solidFill>
+              </a:rPr>
+              <a:t>BSEG_BILLED_USAGE_RPT_CURR</a:t>
+            </a:r>
+          </a:p>
+          <a:p>
+            <a:pPr algn="ctr">
+              <a:spcAft>
+                <a:spcPts val="600"/>
+              </a:spcAft>
+            </a:pPr>
+            <a:r>
+              <a:rPr sz="950" b="0">
+                <a:solidFill>
+                  <a:srgbClr val="4C5D69"/>
+                </a:solidFill>
+              </a:rPr>
+              <a:t>billed usage per segment</a:t>
+            </a:r>
+          </a:p>
+        </p:txBody>
+      </p:sp>
+      <p:sp>
+        <p:nvSpPr>
+          <p:cNvPr id="38" name="Can 37"/>
           <p:cNvSpPr/>
           <p:nvPr/>
         </p:nvSpPr>
         <p:spPr>
           <a:xfrm>
-            <a:off x="10383012" y="3694176"/>
-            <a:ext cx="457200" cy="457200"/>
-          </a:xfrm>
-          <a:prstGeom prst="ellipse">
+            <a:off x="3108960" y="7635240"/>
+            <a:ext cx="2103120" cy="822960"/>
+          </a:xfrm>
+          <a:prstGeom prst="can">
             <a:avLst/>
-          </a:prstGeom>
-          <a:solidFill>
-            <a:srgbClr val="FFA418"/>
-          </a:solidFill>
-          <a:ln>
-            <a:noFill/>
-          </a:ln>
-          <a:effectLst/>
-        </p:spPr>
-        <p:style>
-          <a:lnRef idx="1">
-            <a:schemeClr val="accent1"/>
-          </a:lnRef>
-          <a:fillRef idx="3">
-            <a:schemeClr val="accent1"/>
-          </a:fillRef>
-          <a:effectRef idx="2">
-            <a:schemeClr val="accent1"/>
-          </a:effectRef>
-          <a:fontRef idx="minor">
-            <a:schemeClr val="lt1"/>
-          </a:fontRef>
-        </p:style>
-        <p:txBody>
-          <a:bodyPr rtlCol="0" anchor="ctr" wrap="square" lIns="0" rIns="0" tIns="54864" bIns="54864"/>
-          <a:lstStyle/>
-          <a:p>
-            <a:pPr algn="ctr">
-              <a:spcAft>
-                <a:spcPts val="600"/>
-              </a:spcAft>
-            </a:pPr>
-            <a:r>
-              <a:rPr sz="1500" b="1">
-                <a:solidFill>
-                  <a:srgbClr val="0B3D7A"/>
-                </a:solidFill>
-              </a:rPr>
-              <a:t>7</a:t>
-            </a:r>
-          </a:p>
-        </p:txBody>
-      </p:sp>
-      <p:sp>
-        <p:nvSpPr>
-          <p:cNvPr id="25" name="TextBox 24"/>
-          <p:cNvSpPr txBox="1"/>
-          <p:nvPr/>
-        </p:nvSpPr>
-        <p:spPr>
-          <a:xfrm>
-            <a:off x="10959084" y="3584448"/>
-            <a:ext cx="8252459" cy="1252728"/>
-          </a:xfrm>
-          <a:prstGeom prst="rect">
-            <a:avLst/>
-          </a:prstGeom>
-          <a:noFill/>
-        </p:spPr>
-        <p:txBody>
-          <a:bodyPr wrap="square" anchor="t" lIns="0" rIns="0" tIns="54864" bIns="54864">
-            <a:spAutoFit/>
-          </a:bodyPr>
-          <a:lstStyle/>
-          <a:p>
-            <a:pPr algn="l">
-              <a:spcAft>
-                <a:spcPts val="600"/>
-              </a:spcAft>
-            </a:pPr>
-            <a:r>
-              <a:rPr sz="1900" b="1">
-                <a:solidFill>
-                  <a:srgbClr val="0B3D7A"/>
-                </a:solidFill>
-              </a:rPr>
-              <a:t>Validate and gate</a:t>
-            </a:r>
-          </a:p>
-          <a:p>
-            <a:pPr algn="l">
-              <a:spcAft>
-                <a:spcPts val="600"/>
-              </a:spcAft>
-            </a:pPr>
-            <a:r>
-              <a:rPr sz="1500" b="0">
-                <a:solidFill>
-                  <a:srgbClr val="4C5D69"/>
-                </a:solidFill>
-              </a:rPr>
-              <a:t>Row counts, twelve monthly totals against the source, duplicate keys. The install gate fails on any empty table or duplicate key. Domain support: views valid, lookup seeded, aging buckets sum to the balance, FT parity.</a:t>
-            </a:r>
-          </a:p>
-        </p:txBody>
-      </p:sp>
-      <p:sp>
-        <p:nvSpPr>
-          <p:cNvPr id="26" name="Rounded Rectangle 25"/>
-          <p:cNvSpPr/>
-          <p:nvPr/>
-        </p:nvSpPr>
-        <p:spPr>
-          <a:xfrm>
-            <a:off x="10181844" y="5157216"/>
-            <a:ext cx="9212580" cy="1435607"/>
-          </a:xfrm>
-          <a:prstGeom prst="roundRect">
-            <a:avLst>
-              <a:gd name="adj" fmla="val 8000"/>
-            </a:avLst>
           </a:prstGeom>
           <a:solidFill>
             <a:srgbClr val="F5EFE9"/>
@@ -32474,137 +34821,53 @@
           </a:fontRef>
         </p:style>
         <p:txBody>
-          <a:bodyPr rtlCol="0" anchor="ctr"/>
-          <a:lstStyle/>
-          <a:p>
-            <a:pPr algn="ctr"/>
-          </a:p>
-        </p:txBody>
-      </p:sp>
-      <p:sp>
-        <p:nvSpPr>
-          <p:cNvPr id="27" name="Oval 26"/>
+          <a:bodyPr rtlCol="0" anchor="ctr" wrap="square" lIns="45720" rIns="45720" tIns="54864" bIns="54864"/>
+          <a:lstStyle/>
+          <a:p>
+            <a:pPr algn="ctr">
+              <a:spcAft>
+                <a:spcPts val="600"/>
+              </a:spcAft>
+            </a:pPr>
+            <a:r>
+              <a:rPr sz="950" b="1">
+                <a:solidFill>
+                  <a:srgbClr val="0B3D7A"/>
+                </a:solidFill>
+              </a:rPr>
+              <a:t>BSEG_SQ_USAGE_RPT_CURR</a:t>
+            </a:r>
+          </a:p>
+          <a:p>
+            <a:pPr algn="ctr">
+              <a:spcAft>
+                <a:spcPts val="600"/>
+              </a:spcAft>
+            </a:pPr>
+            <a:r>
+              <a:rPr sz="950" b="0">
+                <a:solidFill>
+                  <a:srgbClr val="4C5D69"/>
+                </a:solidFill>
+              </a:rPr>
+              <a:t>service quantities</a:t>
+            </a:r>
+          </a:p>
+        </p:txBody>
+      </p:sp>
+      <p:sp>
+        <p:nvSpPr>
+          <p:cNvPr id="39" name="Can 38"/>
           <p:cNvSpPr/>
           <p:nvPr/>
         </p:nvSpPr>
         <p:spPr>
           <a:xfrm>
-            <a:off x="10383012" y="5358383"/>
-            <a:ext cx="457200" cy="457200"/>
-          </a:xfrm>
-          <a:prstGeom prst="ellipse">
+            <a:off x="5349240" y="6675120"/>
+            <a:ext cx="2103120" cy="594360"/>
+          </a:xfrm>
+          <a:prstGeom prst="can">
             <a:avLst/>
-          </a:prstGeom>
-          <a:solidFill>
-            <a:srgbClr val="FFA418"/>
-          </a:solidFill>
-          <a:ln>
-            <a:noFill/>
-          </a:ln>
-          <a:effectLst/>
-        </p:spPr>
-        <p:style>
-          <a:lnRef idx="1">
-            <a:schemeClr val="accent1"/>
-          </a:lnRef>
-          <a:fillRef idx="3">
-            <a:schemeClr val="accent1"/>
-          </a:fillRef>
-          <a:effectRef idx="2">
-            <a:schemeClr val="accent1"/>
-          </a:effectRef>
-          <a:fontRef idx="minor">
-            <a:schemeClr val="lt1"/>
-          </a:fontRef>
-        </p:style>
-        <p:txBody>
-          <a:bodyPr rtlCol="0" anchor="ctr" wrap="square" lIns="0" rIns="0" tIns="54864" bIns="54864"/>
-          <a:lstStyle/>
-          <a:p>
-            <a:pPr algn="ctr">
-              <a:spcAft>
-                <a:spcPts val="600"/>
-              </a:spcAft>
-            </a:pPr>
-            <a:r>
-              <a:rPr sz="1500" b="1">
-                <a:solidFill>
-                  <a:srgbClr val="0B3D7A"/>
-                </a:solidFill>
-              </a:rPr>
-              <a:t>8</a:t>
-            </a:r>
-          </a:p>
-        </p:txBody>
-      </p:sp>
-      <p:sp>
-        <p:nvSpPr>
-          <p:cNvPr id="28" name="TextBox 27"/>
-          <p:cNvSpPr txBox="1"/>
-          <p:nvPr/>
-        </p:nvSpPr>
-        <p:spPr>
-          <a:xfrm>
-            <a:off x="10959084" y="5248655"/>
-            <a:ext cx="8252459" cy="1252728"/>
-          </a:xfrm>
-          <a:prstGeom prst="rect">
-            <a:avLst/>
-          </a:prstGeom>
-          <a:noFill/>
-        </p:spPr>
-        <p:txBody>
-          <a:bodyPr wrap="square" anchor="t" lIns="0" rIns="0" tIns="54864" bIns="54864">
-            <a:spAutoFit/>
-          </a:bodyPr>
-          <a:lstStyle/>
-          <a:p>
-            <a:pPr algn="l">
-              <a:spcAft>
-                <a:spcPts val="600"/>
-              </a:spcAft>
-            </a:pPr>
-            <a:r>
-              <a:rPr sz="1900" b="1">
-                <a:solidFill>
-                  <a:srgbClr val="0B3D7A"/>
-                </a:solidFill>
-              </a:rPr>
-              <a:t>Post-load indexes</a:t>
-            </a:r>
-          </a:p>
-          <a:p>
-            <a:pPr algn="l">
-              <a:spcAft>
-                <a:spcPts val="600"/>
-              </a:spcAft>
-            </a:pPr>
-            <a:r>
-              <a:rPr sz="1500" b="0">
-                <a:solidFill>
-                  <a:srgbClr val="4C5D69"/>
-                </a:solidFill>
-              </a:rPr>
-              <a:t>Indexes on the keys and dates the domains filter on, created after the load so the baseline is never slowed by them.</a:t>
-            </a:r>
-          </a:p>
-        </p:txBody>
-      </p:sp>
-      <p:sp>
-        <p:nvSpPr>
-          <p:cNvPr id="29" name="Rounded Rectangle 28"/>
-          <p:cNvSpPr/>
-          <p:nvPr/>
-        </p:nvSpPr>
-        <p:spPr>
-          <a:xfrm>
-            <a:off x="10181844" y="6821423"/>
-            <a:ext cx="9212580" cy="1435607"/>
-          </a:xfrm>
-          <a:prstGeom prst="roundRect">
-            <a:avLst>
-              <a:gd name="adj" fmla="val 8000"/>
-            </a:avLst>
           </a:prstGeom>
           <a:solidFill>
             <a:srgbClr val="F5EFE9"/>
@@ -32629,137 +34892,53 @@
           </a:fontRef>
         </p:style>
         <p:txBody>
-          <a:bodyPr rtlCol="0" anchor="ctr"/>
-          <a:lstStyle/>
-          <a:p>
-            <a:pPr algn="ctr"/>
-          </a:p>
-        </p:txBody>
-      </p:sp>
-      <p:sp>
-        <p:nvSpPr>
-          <p:cNvPr id="30" name="Oval 29"/>
+          <a:bodyPr rtlCol="0" anchor="ctr" wrap="square" lIns="45720" rIns="45720" tIns="54864" bIns="54864"/>
+          <a:lstStyle/>
+          <a:p>
+            <a:pPr algn="ctr">
+              <a:spcAft>
+                <a:spcPts val="600"/>
+              </a:spcAft>
+            </a:pPr>
+            <a:r>
+              <a:rPr sz="950" b="1">
+                <a:solidFill>
+                  <a:srgbClr val="0B3D7A"/>
+                </a:solidFill>
+              </a:rPr>
+              <a:t>D1_MSRMT_RPT_CURR</a:t>
+            </a:r>
+          </a:p>
+          <a:p>
+            <a:pPr algn="ctr">
+              <a:spcAft>
+                <a:spcPts val="600"/>
+              </a:spcAft>
+            </a:pPr>
+            <a:r>
+              <a:rPr sz="950" b="0">
+                <a:solidFill>
+                  <a:srgbClr val="4C5D69"/>
+                </a:solidFill>
+              </a:rPr>
+              <a:t>measurements</a:t>
+            </a:r>
+          </a:p>
+        </p:txBody>
+      </p:sp>
+      <p:sp>
+        <p:nvSpPr>
+          <p:cNvPr id="40" name="Can 39"/>
           <p:cNvSpPr/>
           <p:nvPr/>
         </p:nvSpPr>
         <p:spPr>
           <a:xfrm>
-            <a:off x="10383012" y="7022591"/>
-            <a:ext cx="457200" cy="457200"/>
-          </a:xfrm>
-          <a:prstGeom prst="ellipse">
+            <a:off x="5349240" y="7360920"/>
+            <a:ext cx="2103120" cy="594360"/>
+          </a:xfrm>
+          <a:prstGeom prst="can">
             <a:avLst/>
-          </a:prstGeom>
-          <a:solidFill>
-            <a:srgbClr val="FFA418"/>
-          </a:solidFill>
-          <a:ln>
-            <a:noFill/>
-          </a:ln>
-          <a:effectLst/>
-        </p:spPr>
-        <p:style>
-          <a:lnRef idx="1">
-            <a:schemeClr val="accent1"/>
-          </a:lnRef>
-          <a:fillRef idx="3">
-            <a:schemeClr val="accent1"/>
-          </a:fillRef>
-          <a:effectRef idx="2">
-            <a:schemeClr val="accent1"/>
-          </a:effectRef>
-          <a:fontRef idx="minor">
-            <a:schemeClr val="lt1"/>
-          </a:fontRef>
-        </p:style>
-        <p:txBody>
-          <a:bodyPr rtlCol="0" anchor="ctr" wrap="square" lIns="0" rIns="0" tIns="54864" bIns="54864"/>
-          <a:lstStyle/>
-          <a:p>
-            <a:pPr algn="ctr">
-              <a:spcAft>
-                <a:spcPts val="600"/>
-              </a:spcAft>
-            </a:pPr>
-            <a:r>
-              <a:rPr sz="1500" b="1">
-                <a:solidFill>
-                  <a:srgbClr val="0B3D7A"/>
-                </a:solidFill>
-              </a:rPr>
-              <a:t>9</a:t>
-            </a:r>
-          </a:p>
-        </p:txBody>
-      </p:sp>
-      <p:sp>
-        <p:nvSpPr>
-          <p:cNvPr id="31" name="TextBox 30"/>
-          <p:cNvSpPr txBox="1"/>
-          <p:nvPr/>
-        </p:nvSpPr>
-        <p:spPr>
-          <a:xfrm>
-            <a:off x="10959084" y="6912863"/>
-            <a:ext cx="8252459" cy="1252728"/>
-          </a:xfrm>
-          <a:prstGeom prst="rect">
-            <a:avLst/>
-          </a:prstGeom>
-          <a:noFill/>
-        </p:spPr>
-        <p:txBody>
-          <a:bodyPr wrap="square" anchor="t" lIns="0" rIns="0" tIns="54864" bIns="54864">
-            <a:spAutoFit/>
-          </a:bodyPr>
-          <a:lstStyle/>
-          <a:p>
-            <a:pPr algn="l">
-              <a:spcAft>
-                <a:spcPts val="600"/>
-              </a:spcAft>
-            </a:pPr>
-            <a:r>
-              <a:rPr sz="1900" b="1">
-                <a:solidFill>
-                  <a:srgbClr val="0B3D7A"/>
-                </a:solidFill>
-              </a:rPr>
-              <a:t>Rolling cutover</a:t>
-            </a:r>
-          </a:p>
-          <a:p>
-            <a:pPr algn="l">
-              <a:spcAft>
-                <a:spcPts val="600"/>
-              </a:spcAft>
-            </a:pPr>
-            <a:r>
-              <a:rPr sz="1500" b="0">
-                <a:solidFill>
-                  <a:srgbClr val="4C5D69"/>
-                </a:solidFill>
-              </a:rPr>
-              <a:t>Rolling procedures installed (3 months rebuilt, 24 kept; 6-month at CityCorp and Odessa), one operational refresh run by hand and validated again. Long refreshes run as background jobs, never in the session.</a:t>
-            </a:r>
-          </a:p>
-        </p:txBody>
-      </p:sp>
-      <p:sp>
-        <p:nvSpPr>
-          <p:cNvPr id="32" name="Rounded Rectangle 31"/>
-          <p:cNvSpPr/>
-          <p:nvPr/>
-        </p:nvSpPr>
-        <p:spPr>
-          <a:xfrm>
-            <a:off x="10181844" y="8485632"/>
-            <a:ext cx="9212580" cy="1435607"/>
-          </a:xfrm>
-          <a:prstGeom prst="roundRect">
-            <a:avLst>
-              <a:gd name="adj" fmla="val 8000"/>
-            </a:avLst>
           </a:prstGeom>
           <a:solidFill>
             <a:srgbClr val="F5EFE9"/>
@@ -32784,29 +34963,56 @@
           </a:fontRef>
         </p:style>
         <p:txBody>
-          <a:bodyPr rtlCol="0" anchor="ctr"/>
-          <a:lstStyle/>
-          <a:p>
-            <a:pPr algn="ctr"/>
-          </a:p>
-        </p:txBody>
-      </p:sp>
-      <p:sp>
-        <p:nvSpPr>
-          <p:cNvPr id="33" name="Oval 32"/>
+          <a:bodyPr rtlCol="0" anchor="ctr" wrap="square" lIns="45720" rIns="45720" tIns="54864" bIns="54864"/>
+          <a:lstStyle/>
+          <a:p>
+            <a:pPr algn="ctr">
+              <a:spcAft>
+                <a:spcPts val="600"/>
+              </a:spcAft>
+            </a:pPr>
+            <a:r>
+              <a:rPr sz="950" b="1">
+                <a:solidFill>
+                  <a:srgbClr val="0B3D7A"/>
+                </a:solidFill>
+              </a:rPr>
+              <a:t>D1_USAGE_RPT_CURR</a:t>
+            </a:r>
+          </a:p>
+          <a:p>
+            <a:pPr algn="ctr">
+              <a:spcAft>
+                <a:spcPts val="600"/>
+              </a:spcAft>
+            </a:pPr>
+            <a:r>
+              <a:rPr sz="950" b="0">
+                <a:solidFill>
+                  <a:srgbClr val="4C5D69"/>
+                </a:solidFill>
+              </a:rPr>
+              <a:t>usage transactions</a:t>
+            </a:r>
+          </a:p>
+        </p:txBody>
+      </p:sp>
+      <p:sp>
+        <p:nvSpPr>
+          <p:cNvPr id="41" name="Can 40"/>
           <p:cNvSpPr/>
           <p:nvPr/>
         </p:nvSpPr>
         <p:spPr>
           <a:xfrm>
-            <a:off x="10383012" y="8686800"/>
-            <a:ext cx="457200" cy="457200"/>
-          </a:xfrm>
-          <a:prstGeom prst="ellipse">
+            <a:off x="5349240" y="8046720"/>
+            <a:ext cx="2103120" cy="594360"/>
+          </a:xfrm>
+          <a:prstGeom prst="can">
             <a:avLst/>
           </a:prstGeom>
           <a:solidFill>
-            <a:srgbClr val="FFA418"/>
+            <a:srgbClr val="F5EFE9"/>
           </a:solidFill>
           <a:ln>
             <a:noFill/>
@@ -32828,7 +35034,7 @@
           </a:fontRef>
         </p:style>
         <p:txBody>
-          <a:bodyPr rtlCol="0" anchor="ctr" wrap="square" lIns="0" rIns="0" tIns="54864" bIns="54864"/>
+          <a:bodyPr rtlCol="0" anchor="ctr" wrap="square" lIns="45720" rIns="45720" tIns="54864" bIns="54864"/>
           <a:lstStyle/>
           <a:p>
             <a:pPr algn="ctr">
@@ -32837,26 +35043,2385 @@
               </a:spcAft>
             </a:pPr>
             <a:r>
-              <a:rPr sz="1500" b="1">
+              <a:rPr sz="900" b="1">
                 <a:solidFill>
                   <a:srgbClr val="0B3D7A"/>
                 </a:solidFill>
               </a:rPr>
-              <a:t>10</a:t>
-            </a:r>
-          </a:p>
-        </p:txBody>
-      </p:sp>
-      <p:sp>
-        <p:nvSpPr>
-          <p:cNvPr id="34" name="TextBox 33"/>
+              <a:t>D1_USAGE_SCALAR_DTL_RPT_CURR</a:t>
+            </a:r>
+          </a:p>
+          <a:p>
+            <a:pPr algn="ctr">
+              <a:spcAft>
+                <a:spcPts val="600"/>
+              </a:spcAft>
+            </a:pPr>
+            <a:r>
+              <a:rPr sz="950" b="0">
+                <a:solidFill>
+                  <a:srgbClr val="4C5D69"/>
+                </a:solidFill>
+              </a:rPr>
+              <a:t>usage scalar detail</a:t>
+            </a:r>
+          </a:p>
+        </p:txBody>
+      </p:sp>
+      <p:sp>
+        <p:nvSpPr>
+          <p:cNvPr id="42" name="Rounded Rectangle 41"/>
+          <p:cNvSpPr/>
+          <p:nvPr/>
+        </p:nvSpPr>
+        <p:spPr>
+          <a:xfrm>
+            <a:off x="868680" y="9006840"/>
+            <a:ext cx="2103120" cy="548640"/>
+          </a:xfrm>
+          <a:prstGeom prst="roundRect">
+            <a:avLst>
+              <a:gd name="adj" fmla="val 35000"/>
+            </a:avLst>
+          </a:prstGeom>
+          <a:solidFill>
+            <a:srgbClr val="FFFFFF"/>
+          </a:solidFill>
+          <a:ln>
+            <a:noFill/>
+          </a:ln>
+          <a:effectLst/>
+        </p:spPr>
+        <p:style>
+          <a:lnRef idx="1">
+            <a:schemeClr val="accent1"/>
+          </a:lnRef>
+          <a:fillRef idx="3">
+            <a:schemeClr val="accent1"/>
+          </a:fillRef>
+          <a:effectRef idx="2">
+            <a:schemeClr val="accent1"/>
+          </a:effectRef>
+          <a:fontRef idx="minor">
+            <a:schemeClr val="lt1"/>
+          </a:fontRef>
+        </p:style>
+        <p:txBody>
+          <a:bodyPr rtlCol="0" anchor="ctr" wrap="square" lIns="73152" rIns="73152" tIns="54864" bIns="54864"/>
+          <a:lstStyle/>
+          <a:p>
+            <a:pPr algn="ctr">
+              <a:spcAft>
+                <a:spcPts val="600"/>
+              </a:spcAft>
+            </a:pPr>
+            <a:r>
+              <a:rPr sz="1100" b="1">
+                <a:solidFill>
+                  <a:srgbClr val="0B3D7A"/>
+                </a:solidFill>
+              </a:rPr>
+              <a:t>Finance domains</a:t>
+            </a:r>
+          </a:p>
+        </p:txBody>
+      </p:sp>
+      <p:sp>
+        <p:nvSpPr>
+          <p:cNvPr id="43" name="Rounded Rectangle 42"/>
+          <p:cNvSpPr/>
+          <p:nvPr/>
+        </p:nvSpPr>
+        <p:spPr>
+          <a:xfrm>
+            <a:off x="3108960" y="9006840"/>
+            <a:ext cx="2103120" cy="548640"/>
+          </a:xfrm>
+          <a:prstGeom prst="roundRect">
+            <a:avLst>
+              <a:gd name="adj" fmla="val 35000"/>
+            </a:avLst>
+          </a:prstGeom>
+          <a:solidFill>
+            <a:srgbClr val="FFFFFF"/>
+          </a:solidFill>
+          <a:ln>
+            <a:noFill/>
+          </a:ln>
+          <a:effectLst/>
+        </p:spPr>
+        <p:style>
+          <a:lnRef idx="1">
+            <a:schemeClr val="accent1"/>
+          </a:lnRef>
+          <a:fillRef idx="3">
+            <a:schemeClr val="accent1"/>
+          </a:fillRef>
+          <a:effectRef idx="2">
+            <a:schemeClr val="accent1"/>
+          </a:effectRef>
+          <a:fontRef idx="minor">
+            <a:schemeClr val="lt1"/>
+          </a:fontRef>
+        </p:style>
+        <p:txBody>
+          <a:bodyPr rtlCol="0" anchor="ctr" wrap="square" lIns="73152" rIns="73152" tIns="54864" bIns="54864"/>
+          <a:lstStyle/>
+          <a:p>
+            <a:pPr algn="ctr">
+              <a:spcAft>
+                <a:spcPts val="600"/>
+              </a:spcAft>
+            </a:pPr>
+            <a:r>
+              <a:rPr sz="1000" b="1">
+                <a:solidFill>
+                  <a:srgbClr val="0B3D7A"/>
+                </a:solidFill>
+              </a:rPr>
+              <a:t>Billing and Rates domains</a:t>
+            </a:r>
+          </a:p>
+        </p:txBody>
+      </p:sp>
+      <p:sp>
+        <p:nvSpPr>
+          <p:cNvPr id="44" name="Rounded Rectangle 43"/>
+          <p:cNvSpPr/>
+          <p:nvPr/>
+        </p:nvSpPr>
+        <p:spPr>
+          <a:xfrm>
+            <a:off x="5349240" y="9006840"/>
+            <a:ext cx="2103120" cy="548640"/>
+          </a:xfrm>
+          <a:prstGeom prst="roundRect">
+            <a:avLst>
+              <a:gd name="adj" fmla="val 35000"/>
+            </a:avLst>
+          </a:prstGeom>
+          <a:solidFill>
+            <a:srgbClr val="FFFFFF"/>
+          </a:solidFill>
+          <a:ln>
+            <a:noFill/>
+          </a:ln>
+          <a:effectLst/>
+        </p:spPr>
+        <p:style>
+          <a:lnRef idx="1">
+            <a:schemeClr val="accent1"/>
+          </a:lnRef>
+          <a:fillRef idx="3">
+            <a:schemeClr val="accent1"/>
+          </a:fillRef>
+          <a:effectRef idx="2">
+            <a:schemeClr val="accent1"/>
+          </a:effectRef>
+          <a:fontRef idx="minor">
+            <a:schemeClr val="lt1"/>
+          </a:fontRef>
+        </p:style>
+        <p:txBody>
+          <a:bodyPr rtlCol="0" anchor="ctr" wrap="square" lIns="73152" rIns="73152" tIns="54864" bIns="54864"/>
+          <a:lstStyle/>
+          <a:p>
+            <a:pPr algn="ctr">
+              <a:spcAft>
+                <a:spcPts val="600"/>
+              </a:spcAft>
+            </a:pPr>
+            <a:r>
+              <a:rPr sz="1000" b="1">
+                <a:solidFill>
+                  <a:srgbClr val="0B3D7A"/>
+                </a:solidFill>
+              </a:rPr>
+              <a:t>Usage and measurement domains</a:t>
+            </a:r>
+          </a:p>
+        </p:txBody>
+      </p:sp>
+      <p:sp>
+        <p:nvSpPr>
+          <p:cNvPr id="45" name="Can 44"/>
+          <p:cNvSpPr/>
+          <p:nvPr/>
+        </p:nvSpPr>
+        <p:spPr>
+          <a:xfrm>
+            <a:off x="7863840" y="6675120"/>
+            <a:ext cx="2377440" cy="868680"/>
+          </a:xfrm>
+          <a:prstGeom prst="can">
+            <a:avLst/>
+          </a:prstGeom>
+          <a:solidFill>
+            <a:srgbClr val="F5EFE9"/>
+          </a:solidFill>
+          <a:ln>
+            <a:noFill/>
+          </a:ln>
+          <a:effectLst/>
+        </p:spPr>
+        <p:style>
+          <a:lnRef idx="1">
+            <a:schemeClr val="accent1"/>
+          </a:lnRef>
+          <a:fillRef idx="3">
+            <a:schemeClr val="accent1"/>
+          </a:fillRef>
+          <a:effectRef idx="2">
+            <a:schemeClr val="accent1"/>
+          </a:effectRef>
+          <a:fontRef idx="minor">
+            <a:schemeClr val="lt1"/>
+          </a:fontRef>
+        </p:style>
+        <p:txBody>
+          <a:bodyPr rtlCol="0" anchor="ctr" wrap="square" lIns="45720" rIns="45720" tIns="54864" bIns="54864"/>
+          <a:lstStyle/>
+          <a:p>
+            <a:pPr algn="ctr">
+              <a:spcAft>
+                <a:spcPts val="600"/>
+              </a:spcAft>
+            </a:pPr>
+            <a:r>
+              <a:rPr sz="1000" b="1">
+                <a:solidFill>
+                  <a:srgbClr val="0B3D7A"/>
+                </a:solidFill>
+              </a:rPr>
+              <a:t>CMS_SA_SNAPSHOT</a:t>
+            </a:r>
+          </a:p>
+          <a:p>
+            <a:pPr algn="ctr">
+              <a:spcAft>
+                <a:spcPts val="600"/>
+              </a:spcAft>
+            </a:pPr>
+            <a:r>
+              <a:rPr sz="950" b="0">
+                <a:solidFill>
+                  <a:srgbClr val="4C5D69"/>
+                </a:solidFill>
+              </a:rPr>
+              <a:t>aged balance per SA, refreshed by procedure</a:t>
+            </a:r>
+          </a:p>
+        </p:txBody>
+      </p:sp>
+      <p:sp>
+        <p:nvSpPr>
+          <p:cNvPr id="46" name="Rounded Rectangle 45"/>
+          <p:cNvSpPr/>
+          <p:nvPr/>
+        </p:nvSpPr>
+        <p:spPr>
+          <a:xfrm>
+            <a:off x="7863840" y="7726679"/>
+            <a:ext cx="2377440" cy="640080"/>
+          </a:xfrm>
+          <a:prstGeom prst="roundRect">
+            <a:avLst>
+              <a:gd name="adj" fmla="val 10000"/>
+            </a:avLst>
+          </a:prstGeom>
+          <a:solidFill>
+            <a:srgbClr val="F5EFE9"/>
+          </a:solidFill>
+          <a:ln>
+            <a:noFill/>
+          </a:ln>
+          <a:effectLst/>
+        </p:spPr>
+        <p:style>
+          <a:lnRef idx="1">
+            <a:schemeClr val="accent1"/>
+          </a:lnRef>
+          <a:fillRef idx="3">
+            <a:schemeClr val="accent1"/>
+          </a:fillRef>
+          <a:effectRef idx="2">
+            <a:schemeClr val="accent1"/>
+          </a:effectRef>
+          <a:fontRef idx="minor">
+            <a:schemeClr val="lt1"/>
+          </a:fontRef>
+        </p:style>
+        <p:txBody>
+          <a:bodyPr rtlCol="0" anchor="ctr" wrap="square" lIns="109728" rIns="109728" tIns="54864" bIns="54864"/>
+          <a:lstStyle/>
+          <a:p>
+            <a:pPr algn="ctr">
+              <a:spcAft>
+                <a:spcPts val="600"/>
+              </a:spcAft>
+            </a:pPr>
+            <a:r>
+              <a:rPr sz="1000" b="1">
+                <a:solidFill>
+                  <a:srgbClr val="0B3D7A"/>
+                </a:solidFill>
+              </a:rPr>
+              <a:t>CM_SNAPSHOT_TYPE_FLG</a:t>
+            </a:r>
+          </a:p>
+          <a:p>
+            <a:pPr algn="ctr">
+              <a:spcAft>
+                <a:spcPts val="600"/>
+              </a:spcAft>
+            </a:pPr>
+            <a:r>
+              <a:rPr sz="950" b="0">
+                <a:solidFill>
+                  <a:srgbClr val="4C5D69"/>
+                </a:solidFill>
+              </a:rPr>
+              <a:t>lookup seed: LDAY, EMON, ARCH, LEMN</a:t>
+            </a:r>
+          </a:p>
+        </p:txBody>
+      </p:sp>
+      <p:sp>
+        <p:nvSpPr>
+          <p:cNvPr id="47" name="Rounded Rectangle 46"/>
+          <p:cNvSpPr/>
+          <p:nvPr/>
+        </p:nvSpPr>
+        <p:spPr>
+          <a:xfrm>
+            <a:off x="7863840" y="9006840"/>
+            <a:ext cx="2377440" cy="548640"/>
+          </a:xfrm>
+          <a:prstGeom prst="roundRect">
+            <a:avLst>
+              <a:gd name="adj" fmla="val 35000"/>
+            </a:avLst>
+          </a:prstGeom>
+          <a:solidFill>
+            <a:srgbClr val="FFFFFF"/>
+          </a:solidFill>
+          <a:ln>
+            <a:noFill/>
+          </a:ln>
+          <a:effectLst/>
+        </p:spPr>
+        <p:style>
+          <a:lnRef idx="1">
+            <a:schemeClr val="accent1"/>
+          </a:lnRef>
+          <a:fillRef idx="3">
+            <a:schemeClr val="accent1"/>
+          </a:fillRef>
+          <a:effectRef idx="2">
+            <a:schemeClr val="accent1"/>
+          </a:effectRef>
+          <a:fontRef idx="minor">
+            <a:schemeClr val="lt1"/>
+          </a:fontRef>
+        </p:style>
+        <p:txBody>
+          <a:bodyPr rtlCol="0" anchor="ctr" wrap="square" lIns="73152" rIns="73152" tIns="54864" bIns="54864"/>
+          <a:lstStyle/>
+          <a:p>
+            <a:pPr algn="ctr">
+              <a:spcAft>
+                <a:spcPts val="600"/>
+              </a:spcAft>
+            </a:pPr>
+            <a:r>
+              <a:rPr sz="1000" b="1">
+                <a:solidFill>
+                  <a:srgbClr val="0B3D7A"/>
+                </a:solidFill>
+              </a:rPr>
+              <a:t>SA Snapshot Aged Balance domain</a:t>
+            </a:r>
+          </a:p>
+        </p:txBody>
+      </p:sp>
+      <p:sp>
+        <p:nvSpPr>
+          <p:cNvPr id="48" name="Rounded Rectangle 47"/>
+          <p:cNvSpPr/>
+          <p:nvPr/>
+        </p:nvSpPr>
+        <p:spPr>
+          <a:xfrm>
+            <a:off x="10515600" y="6675120"/>
+            <a:ext cx="2971800" cy="457200"/>
+          </a:xfrm>
+          <a:prstGeom prst="roundRect">
+            <a:avLst>
+              <a:gd name="adj" fmla="val 10000"/>
+            </a:avLst>
+          </a:prstGeom>
+          <a:solidFill>
+            <a:srgbClr val="F5EFE9"/>
+          </a:solidFill>
+          <a:ln>
+            <a:noFill/>
+          </a:ln>
+          <a:effectLst/>
+        </p:spPr>
+        <p:style>
+          <a:lnRef idx="1">
+            <a:schemeClr val="accent1"/>
+          </a:lnRef>
+          <a:fillRef idx="3">
+            <a:schemeClr val="accent1"/>
+          </a:fillRef>
+          <a:effectRef idx="2">
+            <a:schemeClr val="accent1"/>
+          </a:effectRef>
+          <a:fontRef idx="minor">
+            <a:schemeClr val="lt1"/>
+          </a:fontRef>
+        </p:style>
+        <p:txBody>
+          <a:bodyPr rtlCol="0" anchor="ctr" wrap="square" lIns="109728" rIns="109728" tIns="54864" bIns="54864"/>
+          <a:lstStyle/>
+          <a:p>
+            <a:pPr algn="ctr">
+              <a:spcAft>
+                <a:spcPts val="600"/>
+              </a:spcAft>
+            </a:pPr>
+            <a:r>
+              <a:rPr sz="900" b="1">
+                <a:solidFill>
+                  <a:srgbClr val="0B3D7A"/>
+                </a:solidFill>
+              </a:rPr>
+              <a:t>CMS_D1_DVC_IDENTIFIER_VW</a:t>
+            </a:r>
+          </a:p>
+        </p:txBody>
+      </p:sp>
+      <p:sp>
+        <p:nvSpPr>
+          <p:cNvPr id="49" name="Rounded Rectangle 48"/>
+          <p:cNvSpPr/>
+          <p:nvPr/>
+        </p:nvSpPr>
+        <p:spPr>
+          <a:xfrm>
+            <a:off x="10515600" y="7223760"/>
+            <a:ext cx="2971800" cy="457200"/>
+          </a:xfrm>
+          <a:prstGeom prst="roundRect">
+            <a:avLst>
+              <a:gd name="adj" fmla="val 10000"/>
+            </a:avLst>
+          </a:prstGeom>
+          <a:solidFill>
+            <a:srgbClr val="F5EFE9"/>
+          </a:solidFill>
+          <a:ln>
+            <a:noFill/>
+          </a:ln>
+          <a:effectLst/>
+        </p:spPr>
+        <p:style>
+          <a:lnRef idx="1">
+            <a:schemeClr val="accent1"/>
+          </a:lnRef>
+          <a:fillRef idx="3">
+            <a:schemeClr val="accent1"/>
+          </a:fillRef>
+          <a:effectRef idx="2">
+            <a:schemeClr val="accent1"/>
+          </a:effectRef>
+          <a:fontRef idx="minor">
+            <a:schemeClr val="lt1"/>
+          </a:fontRef>
+        </p:style>
+        <p:txBody>
+          <a:bodyPr rtlCol="0" anchor="ctr" wrap="square" lIns="109728" rIns="109728" tIns="54864" bIns="54864"/>
+          <a:lstStyle/>
+          <a:p>
+            <a:pPr algn="ctr">
+              <a:spcAft>
+                <a:spcPts val="600"/>
+              </a:spcAft>
+            </a:pPr>
+            <a:r>
+              <a:rPr sz="900" b="1">
+                <a:solidFill>
+                  <a:srgbClr val="0B3D7A"/>
+                </a:solidFill>
+              </a:rPr>
+              <a:t>CMS_D1_DVC_BODA_VW</a:t>
+            </a:r>
+          </a:p>
+        </p:txBody>
+      </p:sp>
+      <p:sp>
+        <p:nvSpPr>
+          <p:cNvPr id="50" name="Rounded Rectangle 49"/>
+          <p:cNvSpPr/>
+          <p:nvPr/>
+        </p:nvSpPr>
+        <p:spPr>
+          <a:xfrm>
+            <a:off x="10515600" y="7772400"/>
+            <a:ext cx="2971800" cy="457200"/>
+          </a:xfrm>
+          <a:prstGeom prst="roundRect">
+            <a:avLst>
+              <a:gd name="adj" fmla="val 10000"/>
+            </a:avLst>
+          </a:prstGeom>
+          <a:solidFill>
+            <a:srgbClr val="F5EFE9"/>
+          </a:solidFill>
+          <a:ln>
+            <a:noFill/>
+          </a:ln>
+          <a:effectLst/>
+        </p:spPr>
+        <p:style>
+          <a:lnRef idx="1">
+            <a:schemeClr val="accent1"/>
+          </a:lnRef>
+          <a:fillRef idx="3">
+            <a:schemeClr val="accent1"/>
+          </a:fillRef>
+          <a:effectRef idx="2">
+            <a:schemeClr val="accent1"/>
+          </a:effectRef>
+          <a:fontRef idx="minor">
+            <a:schemeClr val="lt1"/>
+          </a:fontRef>
+        </p:style>
+        <p:txBody>
+          <a:bodyPr rtlCol="0" anchor="ctr" wrap="square" lIns="109728" rIns="109728" tIns="54864" bIns="54864"/>
+          <a:lstStyle/>
+          <a:p>
+            <a:pPr algn="ctr">
+              <a:spcAft>
+                <a:spcPts val="600"/>
+              </a:spcAft>
+            </a:pPr>
+            <a:r>
+              <a:rPr sz="900" b="1">
+                <a:solidFill>
+                  <a:srgbClr val="0B3D7A"/>
+                </a:solidFill>
+              </a:rPr>
+              <a:t>CMS_W1_ASSET_IDENTIFIER_VW</a:t>
+            </a:r>
+          </a:p>
+        </p:txBody>
+      </p:sp>
+      <p:sp>
+        <p:nvSpPr>
+          <p:cNvPr id="51" name="Rounded Rectangle 50"/>
+          <p:cNvSpPr/>
+          <p:nvPr/>
+        </p:nvSpPr>
+        <p:spPr>
+          <a:xfrm>
+            <a:off x="10515600" y="9006840"/>
+            <a:ext cx="1417320" cy="548640"/>
+          </a:xfrm>
+          <a:prstGeom prst="roundRect">
+            <a:avLst>
+              <a:gd name="adj" fmla="val 35000"/>
+            </a:avLst>
+          </a:prstGeom>
+          <a:solidFill>
+            <a:srgbClr val="FFFFFF"/>
+          </a:solidFill>
+          <a:ln>
+            <a:noFill/>
+          </a:ln>
+          <a:effectLst/>
+        </p:spPr>
+        <p:style>
+          <a:lnRef idx="1">
+            <a:schemeClr val="accent1"/>
+          </a:lnRef>
+          <a:fillRef idx="3">
+            <a:schemeClr val="accent1"/>
+          </a:fillRef>
+          <a:effectRef idx="2">
+            <a:schemeClr val="accent1"/>
+          </a:effectRef>
+          <a:fontRef idx="minor">
+            <a:schemeClr val="lt1"/>
+          </a:fontRef>
+        </p:style>
+        <p:txBody>
+          <a:bodyPr rtlCol="0" anchor="ctr" wrap="square" lIns="73152" rIns="73152" tIns="54864" bIns="54864"/>
+          <a:lstStyle/>
+          <a:p>
+            <a:pPr algn="ctr">
+              <a:spcAft>
+                <a:spcPts val="600"/>
+              </a:spcAft>
+            </a:pPr>
+            <a:r>
+              <a:rPr sz="1000" b="1">
+                <a:solidFill>
+                  <a:srgbClr val="0B3D7A"/>
+                </a:solidFill>
+              </a:rPr>
+              <a:t>Device domain</a:t>
+            </a:r>
+          </a:p>
+        </p:txBody>
+      </p:sp>
+      <p:sp>
+        <p:nvSpPr>
+          <p:cNvPr id="52" name="Rounded Rectangle 51"/>
+          <p:cNvSpPr/>
+          <p:nvPr/>
+        </p:nvSpPr>
+        <p:spPr>
+          <a:xfrm>
+            <a:off x="12070080" y="9006840"/>
+            <a:ext cx="1417320" cy="548640"/>
+          </a:xfrm>
+          <a:prstGeom prst="roundRect">
+            <a:avLst>
+              <a:gd name="adj" fmla="val 35000"/>
+            </a:avLst>
+          </a:prstGeom>
+          <a:solidFill>
+            <a:srgbClr val="FFFFFF"/>
+          </a:solidFill>
+          <a:ln>
+            <a:noFill/>
+          </a:ln>
+          <a:effectLst/>
+        </p:spPr>
+        <p:style>
+          <a:lnRef idx="1">
+            <a:schemeClr val="accent1"/>
+          </a:lnRef>
+          <a:fillRef idx="3">
+            <a:schemeClr val="accent1"/>
+          </a:fillRef>
+          <a:effectRef idx="2">
+            <a:schemeClr val="accent1"/>
+          </a:effectRef>
+          <a:fontRef idx="minor">
+            <a:schemeClr val="lt1"/>
+          </a:fontRef>
+        </p:style>
+        <p:txBody>
+          <a:bodyPr rtlCol="0" anchor="ctr" wrap="square" lIns="73152" rIns="73152" tIns="54864" bIns="54864"/>
+          <a:lstStyle/>
+          <a:p>
+            <a:pPr algn="ctr">
+              <a:spcAft>
+                <a:spcPts val="600"/>
+              </a:spcAft>
+            </a:pPr>
+            <a:r>
+              <a:rPr sz="1000" b="1">
+                <a:solidFill>
+                  <a:srgbClr val="0B3D7A"/>
+                </a:solidFill>
+              </a:rPr>
+              <a:t>Asset domain</a:t>
+            </a:r>
+          </a:p>
+        </p:txBody>
+      </p:sp>
+      <p:sp>
+        <p:nvSpPr>
+          <p:cNvPr id="53" name="Rounded Rectangle 52"/>
+          <p:cNvSpPr/>
+          <p:nvPr/>
+        </p:nvSpPr>
+        <p:spPr>
+          <a:xfrm>
+            <a:off x="13716000" y="6675120"/>
+            <a:ext cx="3063240" cy="457200"/>
+          </a:xfrm>
+          <a:prstGeom prst="roundRect">
+            <a:avLst>
+              <a:gd name="adj" fmla="val 10000"/>
+            </a:avLst>
+          </a:prstGeom>
+          <a:solidFill>
+            <a:srgbClr val="F5EFE9"/>
+          </a:solidFill>
+          <a:ln>
+            <a:noFill/>
+          </a:ln>
+          <a:effectLst/>
+        </p:spPr>
+        <p:style>
+          <a:lnRef idx="1">
+            <a:schemeClr val="accent1"/>
+          </a:lnRef>
+          <a:fillRef idx="3">
+            <a:schemeClr val="accent1"/>
+          </a:fillRef>
+          <a:effectRef idx="2">
+            <a:schemeClr val="accent1"/>
+          </a:effectRef>
+          <a:fontRef idx="minor">
+            <a:schemeClr val="lt1"/>
+          </a:fontRef>
+        </p:style>
+        <p:txBody>
+          <a:bodyPr rtlCol="0" anchor="ctr" wrap="square" lIns="109728" rIns="109728" tIns="54864" bIns="54864"/>
+          <a:lstStyle/>
+          <a:p>
+            <a:pPr algn="ctr">
+              <a:spcAft>
+                <a:spcPts val="600"/>
+              </a:spcAft>
+            </a:pPr>
+            <a:r>
+              <a:rPr sz="900" b="1">
+                <a:solidFill>
+                  <a:srgbClr val="0B3D7A"/>
+                </a:solidFill>
+              </a:rPr>
+              <a:t>CMS_C1_REPRESENTATIVE_BODA_VW</a:t>
+            </a:r>
+          </a:p>
+        </p:txBody>
+      </p:sp>
+      <p:sp>
+        <p:nvSpPr>
+          <p:cNvPr id="54" name="Rounded Rectangle 53"/>
+          <p:cNvSpPr/>
+          <p:nvPr/>
+        </p:nvSpPr>
+        <p:spPr>
+          <a:xfrm>
+            <a:off x="13716000" y="7223760"/>
+            <a:ext cx="3063240" cy="457200"/>
+          </a:xfrm>
+          <a:prstGeom prst="roundRect">
+            <a:avLst>
+              <a:gd name="adj" fmla="val 10000"/>
+            </a:avLst>
+          </a:prstGeom>
+          <a:solidFill>
+            <a:srgbClr val="F5EFE9"/>
+          </a:solidFill>
+          <a:ln>
+            <a:noFill/>
+          </a:ln>
+          <a:effectLst/>
+        </p:spPr>
+        <p:style>
+          <a:lnRef idx="1">
+            <a:schemeClr val="accent1"/>
+          </a:lnRef>
+          <a:fillRef idx="3">
+            <a:schemeClr val="accent1"/>
+          </a:fillRef>
+          <a:effectRef idx="2">
+            <a:schemeClr val="accent1"/>
+          </a:effectRef>
+          <a:fontRef idx="minor">
+            <a:schemeClr val="lt1"/>
+          </a:fontRef>
+        </p:style>
+        <p:txBody>
+          <a:bodyPr rtlCol="0" anchor="ctr" wrap="square" lIns="109728" rIns="109728" tIns="54864" bIns="54864"/>
+          <a:lstStyle/>
+          <a:p>
+            <a:pPr algn="ctr">
+              <a:spcAft>
+                <a:spcPts val="600"/>
+              </a:spcAft>
+            </a:pPr>
+            <a:r>
+              <a:rPr sz="900" b="1">
+                <a:solidFill>
+                  <a:srgbClr val="0B3D7A"/>
+                </a:solidFill>
+              </a:rPr>
+              <a:t>CMS_D1_ACTIVITY_CHAR_VW</a:t>
+            </a:r>
+          </a:p>
+        </p:txBody>
+      </p:sp>
+      <p:sp>
+        <p:nvSpPr>
+          <p:cNvPr id="55" name="Rounded Rectangle 54"/>
+          <p:cNvSpPr/>
+          <p:nvPr/>
+        </p:nvSpPr>
+        <p:spPr>
+          <a:xfrm>
+            <a:off x="13716000" y="7772400"/>
+            <a:ext cx="3063240" cy="457200"/>
+          </a:xfrm>
+          <a:prstGeom prst="roundRect">
+            <a:avLst>
+              <a:gd name="adj" fmla="val 10000"/>
+            </a:avLst>
+          </a:prstGeom>
+          <a:solidFill>
+            <a:srgbClr val="F5EFE9"/>
+          </a:solidFill>
+          <a:ln>
+            <a:noFill/>
+          </a:ln>
+          <a:effectLst/>
+        </p:spPr>
+        <p:style>
+          <a:lnRef idx="1">
+            <a:schemeClr val="accent1"/>
+          </a:lnRef>
+          <a:fillRef idx="3">
+            <a:schemeClr val="accent1"/>
+          </a:fillRef>
+          <a:effectRef idx="2">
+            <a:schemeClr val="accent1"/>
+          </a:effectRef>
+          <a:fontRef idx="minor">
+            <a:schemeClr val="lt1"/>
+          </a:fontRef>
+        </p:style>
+        <p:txBody>
+          <a:bodyPr rtlCol="0" anchor="ctr" wrap="square" lIns="109728" rIns="109728" tIns="54864" bIns="54864"/>
+          <a:lstStyle/>
+          <a:p>
+            <a:pPr algn="ctr">
+              <a:spcAft>
+                <a:spcPts val="600"/>
+              </a:spcAft>
+            </a:pPr>
+            <a:r>
+              <a:rPr sz="900" b="1">
+                <a:solidFill>
+                  <a:srgbClr val="0B3D7A"/>
+                </a:solidFill>
+              </a:rPr>
+              <a:t>CMS_D1_ACTIVITY_D1FA_BODA_VW</a:t>
+            </a:r>
+          </a:p>
+        </p:txBody>
+      </p:sp>
+      <p:sp>
+        <p:nvSpPr>
+          <p:cNvPr id="56" name="Rounded Rectangle 55"/>
+          <p:cNvSpPr/>
+          <p:nvPr/>
+        </p:nvSpPr>
+        <p:spPr>
+          <a:xfrm>
+            <a:off x="13716000" y="9006840"/>
+            <a:ext cx="1463040" cy="548640"/>
+          </a:xfrm>
+          <a:prstGeom prst="roundRect">
+            <a:avLst>
+              <a:gd name="adj" fmla="val 35000"/>
+            </a:avLst>
+          </a:prstGeom>
+          <a:solidFill>
+            <a:srgbClr val="FFFFFF"/>
+          </a:solidFill>
+          <a:ln>
+            <a:noFill/>
+          </a:ln>
+          <a:effectLst/>
+        </p:spPr>
+        <p:style>
+          <a:lnRef idx="1">
+            <a:schemeClr val="accent1"/>
+          </a:lnRef>
+          <a:fillRef idx="3">
+            <a:schemeClr val="accent1"/>
+          </a:fillRef>
+          <a:effectRef idx="2">
+            <a:schemeClr val="accent1"/>
+          </a:effectRef>
+          <a:fontRef idx="minor">
+            <a:schemeClr val="lt1"/>
+          </a:fontRef>
+        </p:style>
+        <p:txBody>
+          <a:bodyPr rtlCol="0" anchor="ctr" wrap="square" lIns="73152" rIns="73152" tIns="54864" bIns="54864"/>
+          <a:lstStyle/>
+          <a:p>
+            <a:pPr algn="ctr">
+              <a:spcAft>
+                <a:spcPts val="600"/>
+              </a:spcAft>
+            </a:pPr>
+            <a:r>
+              <a:rPr sz="1000" b="1">
+                <a:solidFill>
+                  <a:srgbClr val="0B3D7A"/>
+                </a:solidFill>
+              </a:rPr>
+              <a:t>Crew domain</a:t>
+            </a:r>
+          </a:p>
+        </p:txBody>
+      </p:sp>
+      <p:sp>
+        <p:nvSpPr>
+          <p:cNvPr id="57" name="Rounded Rectangle 56"/>
+          <p:cNvSpPr/>
+          <p:nvPr/>
+        </p:nvSpPr>
+        <p:spPr>
+          <a:xfrm>
+            <a:off x="15316200" y="9006840"/>
+            <a:ext cx="1463040" cy="548640"/>
+          </a:xfrm>
+          <a:prstGeom prst="roundRect">
+            <a:avLst>
+              <a:gd name="adj" fmla="val 35000"/>
+            </a:avLst>
+          </a:prstGeom>
+          <a:solidFill>
+            <a:srgbClr val="FFFFFF"/>
+          </a:solidFill>
+          <a:ln>
+            <a:noFill/>
+          </a:ln>
+          <a:effectLst/>
+        </p:spPr>
+        <p:style>
+          <a:lnRef idx="1">
+            <a:schemeClr val="accent1"/>
+          </a:lnRef>
+          <a:fillRef idx="3">
+            <a:schemeClr val="accent1"/>
+          </a:fillRef>
+          <a:effectRef idx="2">
+            <a:schemeClr val="accent1"/>
+          </a:effectRef>
+          <a:fontRef idx="minor">
+            <a:schemeClr val="lt1"/>
+          </a:fontRef>
+        </p:style>
+        <p:txBody>
+          <a:bodyPr rtlCol="0" anchor="ctr" wrap="square" lIns="73152" rIns="73152" tIns="54864" bIns="54864"/>
+          <a:lstStyle/>
+          <a:p>
+            <a:pPr algn="ctr">
+              <a:spcAft>
+                <a:spcPts val="600"/>
+              </a:spcAft>
+            </a:pPr>
+            <a:r>
+              <a:rPr sz="1000" b="1">
+                <a:solidFill>
+                  <a:srgbClr val="0B3D7A"/>
+                </a:solidFill>
+              </a:rPr>
+              <a:t>Field Activity domain</a:t>
+            </a:r>
+          </a:p>
+        </p:txBody>
+      </p:sp>
+      <p:sp>
+        <p:nvSpPr>
+          <p:cNvPr id="58" name="Rounded Rectangle 57"/>
+          <p:cNvSpPr/>
+          <p:nvPr/>
+        </p:nvSpPr>
+        <p:spPr>
+          <a:xfrm>
+            <a:off x="17007840" y="6675120"/>
+            <a:ext cx="2194560" cy="457200"/>
+          </a:xfrm>
+          <a:prstGeom prst="roundRect">
+            <a:avLst>
+              <a:gd name="adj" fmla="val 10000"/>
+            </a:avLst>
+          </a:prstGeom>
+          <a:solidFill>
+            <a:srgbClr val="F5EFE9"/>
+          </a:solidFill>
+          <a:ln>
+            <a:noFill/>
+          </a:ln>
+          <a:effectLst/>
+        </p:spPr>
+        <p:style>
+          <a:lnRef idx="1">
+            <a:schemeClr val="accent1"/>
+          </a:lnRef>
+          <a:fillRef idx="3">
+            <a:schemeClr val="accent1"/>
+          </a:fillRef>
+          <a:effectRef idx="2">
+            <a:schemeClr val="accent1"/>
+          </a:effectRef>
+          <a:fontRef idx="minor">
+            <a:schemeClr val="lt1"/>
+          </a:fontRef>
+        </p:style>
+        <p:txBody>
+          <a:bodyPr rtlCol="0" anchor="ctr" wrap="square" lIns="109728" rIns="109728" tIns="54864" bIns="54864"/>
+          <a:lstStyle/>
+          <a:p>
+            <a:pPr algn="ctr">
+              <a:spcAft>
+                <a:spcPts val="600"/>
+              </a:spcAft>
+            </a:pPr>
+            <a:r>
+              <a:rPr sz="900" b="1">
+                <a:solidFill>
+                  <a:srgbClr val="0B3D7A"/>
+                </a:solidFill>
+              </a:rPr>
+              <a:t>CMS_CI_CASE_VW</a:t>
+            </a:r>
+          </a:p>
+        </p:txBody>
+      </p:sp>
+      <p:sp>
+        <p:nvSpPr>
+          <p:cNvPr id="59" name="Rounded Rectangle 58"/>
+          <p:cNvSpPr/>
+          <p:nvPr/>
+        </p:nvSpPr>
+        <p:spPr>
+          <a:xfrm>
+            <a:off x="17007840" y="7223760"/>
+            <a:ext cx="2194560" cy="457200"/>
+          </a:xfrm>
+          <a:prstGeom prst="roundRect">
+            <a:avLst>
+              <a:gd name="adj" fmla="val 10000"/>
+            </a:avLst>
+          </a:prstGeom>
+          <a:solidFill>
+            <a:srgbClr val="F5EFE9"/>
+          </a:solidFill>
+          <a:ln>
+            <a:noFill/>
+          </a:ln>
+          <a:effectLst/>
+        </p:spPr>
+        <p:style>
+          <a:lnRef idx="1">
+            <a:schemeClr val="accent1"/>
+          </a:lnRef>
+          <a:fillRef idx="3">
+            <a:schemeClr val="accent1"/>
+          </a:fillRef>
+          <a:effectRef idx="2">
+            <a:schemeClr val="accent1"/>
+          </a:effectRef>
+          <a:fontRef idx="minor">
+            <a:schemeClr val="lt1"/>
+          </a:fontRef>
+        </p:style>
+        <p:txBody>
+          <a:bodyPr rtlCol="0" anchor="ctr" wrap="square" lIns="109728" rIns="109728" tIns="54864" bIns="54864"/>
+          <a:lstStyle/>
+          <a:p>
+            <a:pPr algn="ctr">
+              <a:spcAft>
+                <a:spcPts val="600"/>
+              </a:spcAft>
+            </a:pPr>
+            <a:r>
+              <a:rPr sz="900" b="1">
+                <a:solidFill>
+                  <a:srgbClr val="0B3D7A"/>
+                </a:solidFill>
+              </a:rPr>
+              <a:t>CMS_CI_CASE_LOG_VW</a:t>
+            </a:r>
+          </a:p>
+        </p:txBody>
+      </p:sp>
+      <p:sp>
+        <p:nvSpPr>
+          <p:cNvPr id="60" name="Rounded Rectangle 59"/>
+          <p:cNvSpPr/>
+          <p:nvPr/>
+        </p:nvSpPr>
+        <p:spPr>
+          <a:xfrm>
+            <a:off x="17007840" y="9006840"/>
+            <a:ext cx="2194560" cy="548640"/>
+          </a:xfrm>
+          <a:prstGeom prst="roundRect">
+            <a:avLst>
+              <a:gd name="adj" fmla="val 35000"/>
+            </a:avLst>
+          </a:prstGeom>
+          <a:solidFill>
+            <a:srgbClr val="FFFFFF"/>
+          </a:solidFill>
+          <a:ln>
+            <a:noFill/>
+          </a:ln>
+          <a:effectLst/>
+        </p:spPr>
+        <p:style>
+          <a:lnRef idx="1">
+            <a:schemeClr val="accent1"/>
+          </a:lnRef>
+          <a:fillRef idx="3">
+            <a:schemeClr val="accent1"/>
+          </a:fillRef>
+          <a:effectRef idx="2">
+            <a:schemeClr val="accent1"/>
+          </a:effectRef>
+          <a:fontRef idx="minor">
+            <a:schemeClr val="lt1"/>
+          </a:fontRef>
+        </p:style>
+        <p:txBody>
+          <a:bodyPr rtlCol="0" anchor="ctr" wrap="square" lIns="73152" rIns="73152" tIns="54864" bIns="54864"/>
+          <a:lstStyle/>
+          <a:p>
+            <a:pPr algn="ctr">
+              <a:spcAft>
+                <a:spcPts val="600"/>
+              </a:spcAft>
+            </a:pPr>
+            <a:r>
+              <a:rPr sz="1000" b="1">
+                <a:solidFill>
+                  <a:srgbClr val="0B3D7A"/>
+                </a:solidFill>
+              </a:rPr>
+              <a:t>Case domain</a:t>
+            </a:r>
+          </a:p>
+        </p:txBody>
+      </p:sp>
+      <p:cxnSp>
+        <p:nvCxnSpPr>
+          <p:cNvPr id="61" name="Connector 60"/>
+          <p:cNvCxnSpPr/>
+          <p:nvPr/>
+        </p:nvCxnSpPr>
+        <p:spPr>
+          <a:xfrm>
+            <a:off x="3026664" y="2743200"/>
+            <a:ext cx="274320" cy="0"/>
+          </a:xfrm>
+          <a:prstGeom prst="line">
+            <a:avLst/>
+          </a:prstGeom>
+          <a:ln w="28575">
+            <a:solidFill>
+              <a:srgbClr val="F5EFE9"/>
+            </a:solidFill>
+            <a:tailEnd type="triangle" w="med" len="med"/>
+          </a:ln>
+        </p:spPr>
+        <p:style>
+          <a:lnRef idx="2">
+            <a:schemeClr val="accent1"/>
+          </a:lnRef>
+          <a:fillRef idx="0">
+            <a:schemeClr val="accent1"/>
+          </a:fillRef>
+          <a:effectRef idx="1">
+            <a:schemeClr val="accent1"/>
+          </a:effectRef>
+          <a:fontRef idx="minor">
+            <a:schemeClr val="tx1"/>
+          </a:fontRef>
+        </p:style>
+      </p:cxnSp>
+      <p:cxnSp>
+        <p:nvCxnSpPr>
+          <p:cNvPr id="62" name="Connector 61"/>
+          <p:cNvCxnSpPr/>
+          <p:nvPr/>
+        </p:nvCxnSpPr>
+        <p:spPr>
+          <a:xfrm>
+            <a:off x="5952744" y="2743200"/>
+            <a:ext cx="274320" cy="0"/>
+          </a:xfrm>
+          <a:prstGeom prst="line">
+            <a:avLst/>
+          </a:prstGeom>
+          <a:ln w="28575">
+            <a:solidFill>
+              <a:srgbClr val="F5EFE9"/>
+            </a:solidFill>
+            <a:tailEnd type="triangle" w="med" len="med"/>
+          </a:ln>
+        </p:spPr>
+        <p:style>
+          <a:lnRef idx="2">
+            <a:schemeClr val="accent1"/>
+          </a:lnRef>
+          <a:fillRef idx="0">
+            <a:schemeClr val="accent1"/>
+          </a:fillRef>
+          <a:effectRef idx="1">
+            <a:schemeClr val="accent1"/>
+          </a:effectRef>
+          <a:fontRef idx="minor">
+            <a:schemeClr val="tx1"/>
+          </a:fontRef>
+        </p:style>
+      </p:cxnSp>
+      <p:cxnSp>
+        <p:nvCxnSpPr>
+          <p:cNvPr id="63" name="Connector 62"/>
+          <p:cNvCxnSpPr/>
+          <p:nvPr/>
+        </p:nvCxnSpPr>
+        <p:spPr>
+          <a:xfrm>
+            <a:off x="9061704" y="2743200"/>
+            <a:ext cx="274320" cy="0"/>
+          </a:xfrm>
+          <a:prstGeom prst="line">
+            <a:avLst/>
+          </a:prstGeom>
+          <a:ln w="28575">
+            <a:solidFill>
+              <a:srgbClr val="F5EFE9"/>
+            </a:solidFill>
+            <a:tailEnd type="triangle" w="med" len="med"/>
+          </a:ln>
+        </p:spPr>
+        <p:style>
+          <a:lnRef idx="2">
+            <a:schemeClr val="accent1"/>
+          </a:lnRef>
+          <a:fillRef idx="0">
+            <a:schemeClr val="accent1"/>
+          </a:fillRef>
+          <a:effectRef idx="1">
+            <a:schemeClr val="accent1"/>
+          </a:effectRef>
+          <a:fontRef idx="minor">
+            <a:schemeClr val="tx1"/>
+          </a:fontRef>
+        </p:style>
+      </p:cxnSp>
+      <p:cxnSp>
+        <p:nvCxnSpPr>
+          <p:cNvPr id="64" name="Connector 63"/>
+          <p:cNvCxnSpPr/>
+          <p:nvPr/>
+        </p:nvCxnSpPr>
+        <p:spPr>
+          <a:xfrm flipV="1">
+            <a:off x="11987784" y="2720339"/>
+            <a:ext cx="274320" cy="22861"/>
+          </a:xfrm>
+          <a:prstGeom prst="line">
+            <a:avLst/>
+          </a:prstGeom>
+          <a:ln w="28575">
+            <a:solidFill>
+              <a:srgbClr val="F5EFE9"/>
+            </a:solidFill>
+            <a:tailEnd type="triangle" w="med" len="med"/>
+          </a:ln>
+        </p:spPr>
+        <p:style>
+          <a:lnRef idx="2">
+            <a:schemeClr val="accent1"/>
+          </a:lnRef>
+          <a:fillRef idx="0">
+            <a:schemeClr val="accent1"/>
+          </a:fillRef>
+          <a:effectRef idx="1">
+            <a:schemeClr val="accent1"/>
+          </a:effectRef>
+          <a:fontRef idx="minor">
+            <a:schemeClr val="tx1"/>
+          </a:fontRef>
+        </p:style>
+      </p:cxnSp>
+      <p:cxnSp>
+        <p:nvCxnSpPr>
+          <p:cNvPr id="65" name="Connector 64"/>
+          <p:cNvCxnSpPr/>
+          <p:nvPr/>
+        </p:nvCxnSpPr>
+        <p:spPr>
+          <a:xfrm>
+            <a:off x="15828263" y="3474720"/>
+            <a:ext cx="2322577" cy="228600"/>
+          </a:xfrm>
+          <a:prstGeom prst="line">
+            <a:avLst/>
+          </a:prstGeom>
+          <a:ln w="28575">
+            <a:solidFill>
+              <a:srgbClr val="F5EFE9"/>
+            </a:solidFill>
+          </a:ln>
+        </p:spPr>
+        <p:style>
+          <a:lnRef idx="2">
+            <a:schemeClr val="accent1"/>
+          </a:lnRef>
+          <a:fillRef idx="0">
+            <a:schemeClr val="accent1"/>
+          </a:fillRef>
+          <a:effectRef idx="1">
+            <a:schemeClr val="accent1"/>
+          </a:effectRef>
+          <a:fontRef idx="minor">
+            <a:schemeClr val="tx1"/>
+          </a:fontRef>
+        </p:style>
+      </p:cxnSp>
+      <p:cxnSp>
+        <p:nvCxnSpPr>
+          <p:cNvPr id="66" name="Connector 65"/>
+          <p:cNvCxnSpPr/>
+          <p:nvPr/>
+        </p:nvCxnSpPr>
+        <p:spPr>
+          <a:xfrm flipH="1">
+            <a:off x="18150839" y="3703320"/>
+            <a:ext cx="1" cy="320040"/>
+          </a:xfrm>
+          <a:prstGeom prst="line">
+            <a:avLst/>
+          </a:prstGeom>
+          <a:ln w="28575">
+            <a:solidFill>
+              <a:srgbClr val="F5EFE9"/>
+            </a:solidFill>
+            <a:tailEnd type="triangle" w="med" len="med"/>
+          </a:ln>
+        </p:spPr>
+        <p:style>
+          <a:lnRef idx="2">
+            <a:schemeClr val="accent1"/>
+          </a:lnRef>
+          <a:fillRef idx="0">
+            <a:schemeClr val="accent1"/>
+          </a:fillRef>
+          <a:effectRef idx="1">
+            <a:schemeClr val="accent1"/>
+          </a:effectRef>
+          <a:fontRef idx="minor">
+            <a:schemeClr val="tx1"/>
+          </a:fontRef>
+        </p:style>
+      </p:cxnSp>
+      <p:cxnSp>
+        <p:nvCxnSpPr>
+          <p:cNvPr id="67" name="Connector 66"/>
+          <p:cNvCxnSpPr/>
+          <p:nvPr/>
+        </p:nvCxnSpPr>
+        <p:spPr>
+          <a:xfrm flipH="1">
+            <a:off x="16642080" y="4503420"/>
+            <a:ext cx="457200" cy="0"/>
+          </a:xfrm>
+          <a:prstGeom prst="line">
+            <a:avLst/>
+          </a:prstGeom>
+          <a:ln w="28575">
+            <a:solidFill>
+              <a:srgbClr val="F5EFE9"/>
+            </a:solidFill>
+            <a:tailEnd type="triangle" w="med" len="med"/>
+          </a:ln>
+        </p:spPr>
+        <p:style>
+          <a:lnRef idx="2">
+            <a:schemeClr val="accent1"/>
+          </a:lnRef>
+          <a:fillRef idx="0">
+            <a:schemeClr val="accent1"/>
+          </a:fillRef>
+          <a:effectRef idx="1">
+            <a:schemeClr val="accent1"/>
+          </a:effectRef>
+          <a:fontRef idx="minor">
+            <a:schemeClr val="tx1"/>
+          </a:fontRef>
+        </p:style>
+      </p:cxnSp>
+      <p:cxnSp>
+        <p:nvCxnSpPr>
+          <p:cNvPr id="68" name="Connector 67"/>
+          <p:cNvCxnSpPr/>
+          <p:nvPr/>
+        </p:nvCxnSpPr>
+        <p:spPr>
+          <a:xfrm flipH="1">
+            <a:off x="13807440" y="4503420"/>
+            <a:ext cx="457200" cy="0"/>
+          </a:xfrm>
+          <a:prstGeom prst="line">
+            <a:avLst/>
+          </a:prstGeom>
+          <a:ln w="28575">
+            <a:solidFill>
+              <a:srgbClr val="F5EFE9"/>
+            </a:solidFill>
+            <a:tailEnd type="triangle" w="med" len="med"/>
+          </a:ln>
+        </p:spPr>
+        <p:style>
+          <a:lnRef idx="2">
+            <a:schemeClr val="accent1"/>
+          </a:lnRef>
+          <a:fillRef idx="0">
+            <a:schemeClr val="accent1"/>
+          </a:fillRef>
+          <a:effectRef idx="1">
+            <a:schemeClr val="accent1"/>
+          </a:effectRef>
+          <a:fontRef idx="minor">
+            <a:schemeClr val="tx1"/>
+          </a:fontRef>
+        </p:style>
+      </p:cxnSp>
+      <p:cxnSp>
+        <p:nvCxnSpPr>
+          <p:cNvPr id="69" name="Connector 68"/>
+          <p:cNvCxnSpPr/>
+          <p:nvPr/>
+        </p:nvCxnSpPr>
+        <p:spPr>
+          <a:xfrm flipH="1">
+            <a:off x="11155680" y="4503420"/>
+            <a:ext cx="457200" cy="0"/>
+          </a:xfrm>
+          <a:prstGeom prst="line">
+            <a:avLst/>
+          </a:prstGeom>
+          <a:ln w="28575">
+            <a:solidFill>
+              <a:srgbClr val="F5EFE9"/>
+            </a:solidFill>
+            <a:tailEnd type="triangle" w="med" len="med"/>
+          </a:ln>
+        </p:spPr>
+        <p:style>
+          <a:lnRef idx="2">
+            <a:schemeClr val="accent1"/>
+          </a:lnRef>
+          <a:fillRef idx="0">
+            <a:schemeClr val="accent1"/>
+          </a:fillRef>
+          <a:effectRef idx="1">
+            <a:schemeClr val="accent1"/>
+          </a:effectRef>
+          <a:fontRef idx="minor">
+            <a:schemeClr val="tx1"/>
+          </a:fontRef>
+        </p:style>
+      </p:cxnSp>
+      <p:cxnSp>
+        <p:nvCxnSpPr>
+          <p:cNvPr id="70" name="Connector 69"/>
+          <p:cNvCxnSpPr/>
+          <p:nvPr/>
+        </p:nvCxnSpPr>
+        <p:spPr>
+          <a:xfrm flipH="1">
+            <a:off x="7955279" y="4503420"/>
+            <a:ext cx="457201" cy="0"/>
+          </a:xfrm>
+          <a:prstGeom prst="line">
+            <a:avLst/>
+          </a:prstGeom>
+          <a:ln w="28575">
+            <a:solidFill>
+              <a:srgbClr val="F5EFE9"/>
+            </a:solidFill>
+            <a:tailEnd type="triangle" w="med" len="med"/>
+          </a:ln>
+        </p:spPr>
+        <p:style>
+          <a:lnRef idx="2">
+            <a:schemeClr val="accent1"/>
+          </a:lnRef>
+          <a:fillRef idx="0">
+            <a:schemeClr val="accent1"/>
+          </a:fillRef>
+          <a:effectRef idx="1">
+            <a:schemeClr val="accent1"/>
+          </a:effectRef>
+          <a:fontRef idx="minor">
+            <a:schemeClr val="tx1"/>
+          </a:fontRef>
+        </p:style>
+      </p:cxnSp>
+      <p:cxnSp>
+        <p:nvCxnSpPr>
+          <p:cNvPr id="71" name="Connector 70"/>
+          <p:cNvCxnSpPr/>
+          <p:nvPr/>
+        </p:nvCxnSpPr>
+        <p:spPr>
+          <a:xfrm flipH="1">
+            <a:off x="5532120" y="4503420"/>
+            <a:ext cx="411480" cy="0"/>
+          </a:xfrm>
+          <a:prstGeom prst="line">
+            <a:avLst/>
+          </a:prstGeom>
+          <a:ln w="28575">
+            <a:solidFill>
+              <a:srgbClr val="F5EFE9"/>
+            </a:solidFill>
+            <a:tailEnd type="triangle" w="med" len="med"/>
+          </a:ln>
+        </p:spPr>
+        <p:style>
+          <a:lnRef idx="2">
+            <a:schemeClr val="accent1"/>
+          </a:lnRef>
+          <a:fillRef idx="0">
+            <a:schemeClr val="accent1"/>
+          </a:fillRef>
+          <a:effectRef idx="1">
+            <a:schemeClr val="accent1"/>
+          </a:effectRef>
+          <a:fontRef idx="minor">
+            <a:schemeClr val="tx1"/>
+          </a:fontRef>
+        </p:style>
+      </p:cxnSp>
+      <p:cxnSp>
+        <p:nvCxnSpPr>
+          <p:cNvPr id="72" name="Connector 71"/>
+          <p:cNvCxnSpPr/>
+          <p:nvPr/>
+        </p:nvCxnSpPr>
+        <p:spPr>
+          <a:xfrm flipH="1">
+            <a:off x="2660904" y="4503420"/>
+            <a:ext cx="402336" cy="0"/>
+          </a:xfrm>
+          <a:prstGeom prst="line">
+            <a:avLst/>
+          </a:prstGeom>
+          <a:ln w="28575">
+            <a:solidFill>
+              <a:srgbClr val="F5EFE9"/>
+            </a:solidFill>
+            <a:tailEnd type="triangle" w="med" len="med"/>
+          </a:ln>
+        </p:spPr>
+        <p:style>
+          <a:lnRef idx="2">
+            <a:schemeClr val="accent1"/>
+          </a:lnRef>
+          <a:fillRef idx="0">
+            <a:schemeClr val="accent1"/>
+          </a:fillRef>
+          <a:effectRef idx="1">
+            <a:schemeClr val="accent1"/>
+          </a:effectRef>
+          <a:fontRef idx="minor">
+            <a:schemeClr val="tx1"/>
+          </a:fontRef>
+        </p:style>
+      </p:cxnSp>
+      <p:cxnSp>
+        <p:nvCxnSpPr>
+          <p:cNvPr id="73" name="Connector 72"/>
+          <p:cNvCxnSpPr/>
+          <p:nvPr/>
+        </p:nvCxnSpPr>
+        <p:spPr>
+          <a:xfrm>
+            <a:off x="4297680" y="4937760"/>
+            <a:ext cx="0" cy="411480"/>
+          </a:xfrm>
+          <a:prstGeom prst="line">
+            <a:avLst/>
+          </a:prstGeom>
+          <a:ln w="28575">
+            <a:solidFill>
+              <a:srgbClr val="F5EFE9"/>
+            </a:solidFill>
+          </a:ln>
+        </p:spPr>
+        <p:style>
+          <a:lnRef idx="2">
+            <a:schemeClr val="accent1"/>
+          </a:lnRef>
+          <a:fillRef idx="0">
+            <a:schemeClr val="accent1"/>
+          </a:fillRef>
+          <a:effectRef idx="1">
+            <a:schemeClr val="accent1"/>
+          </a:effectRef>
+          <a:fontRef idx="minor">
+            <a:schemeClr val="tx1"/>
+          </a:fontRef>
+        </p:style>
+      </p:cxnSp>
+      <p:cxnSp>
+        <p:nvCxnSpPr>
+          <p:cNvPr id="74" name="Connector 73"/>
+          <p:cNvCxnSpPr/>
+          <p:nvPr/>
+        </p:nvCxnSpPr>
+        <p:spPr>
+          <a:xfrm>
+            <a:off x="4297680" y="5349240"/>
+            <a:ext cx="5486400" cy="0"/>
+          </a:xfrm>
+          <a:prstGeom prst="line">
+            <a:avLst/>
+          </a:prstGeom>
+          <a:ln w="28575">
+            <a:solidFill>
+              <a:srgbClr val="F5EFE9"/>
+            </a:solidFill>
+          </a:ln>
+        </p:spPr>
+        <p:style>
+          <a:lnRef idx="2">
+            <a:schemeClr val="accent1"/>
+          </a:lnRef>
+          <a:fillRef idx="0">
+            <a:schemeClr val="accent1"/>
+          </a:fillRef>
+          <a:effectRef idx="1">
+            <a:schemeClr val="accent1"/>
+          </a:effectRef>
+          <a:fontRef idx="minor">
+            <a:schemeClr val="tx1"/>
+          </a:fontRef>
+        </p:style>
+      </p:cxnSp>
+      <p:cxnSp>
+        <p:nvCxnSpPr>
+          <p:cNvPr id="75" name="Connector 74"/>
+          <p:cNvCxnSpPr/>
+          <p:nvPr/>
+        </p:nvCxnSpPr>
+        <p:spPr>
+          <a:xfrm flipV="1">
+            <a:off x="9784080" y="4937760"/>
+            <a:ext cx="0" cy="411480"/>
+          </a:xfrm>
+          <a:prstGeom prst="line">
+            <a:avLst/>
+          </a:prstGeom>
+          <a:ln w="28575">
+            <a:solidFill>
+              <a:srgbClr val="F5EFE9"/>
+            </a:solidFill>
+            <a:tailEnd type="triangle" w="med" len="med"/>
+          </a:ln>
+        </p:spPr>
+        <p:style>
+          <a:lnRef idx="2">
+            <a:schemeClr val="accent1"/>
+          </a:lnRef>
+          <a:fillRef idx="0">
+            <a:schemeClr val="accent1"/>
+          </a:fillRef>
+          <a:effectRef idx="1">
+            <a:schemeClr val="accent1"/>
+          </a:effectRef>
+          <a:fontRef idx="minor">
+            <a:schemeClr val="tx1"/>
+          </a:fontRef>
+        </p:style>
+      </p:cxnSp>
+      <p:sp>
+        <p:nvSpPr>
+          <p:cNvPr id="76" name="TextBox 75"/>
           <p:cNvSpPr txBox="1"/>
           <p:nvPr/>
         </p:nvSpPr>
         <p:spPr>
           <a:xfrm>
-            <a:off x="10959084" y="8577072"/>
-            <a:ext cx="8252459" cy="1252728"/>
+            <a:off x="4572000" y="5029200"/>
+            <a:ext cx="5486400" cy="365760"/>
+          </a:xfrm>
+          <a:prstGeom prst="rect">
+            <a:avLst/>
+          </a:prstGeom>
+          <a:noFill/>
+        </p:spPr>
+        <p:txBody>
+          <a:bodyPr wrap="square" anchor="b" lIns="0" rIns="0" tIns="54864" bIns="54864">
+            <a:spAutoFit/>
+          </a:bodyPr>
+          <a:lstStyle/>
+          <a:p>
+            <a:pPr algn="l">
+              <a:spcAft>
+                <a:spcPts val="600"/>
+              </a:spcAft>
+            </a:pPr>
+            <a:r>
+              <a:rPr sz="1100" b="1">
+                <a:solidFill>
+                  <a:srgbClr val="F5EFE9"/>
+                </a:solidFill>
+              </a:rPr>
+              <a:t>every 12 hours: the newest 3 months rebuilt, older rows kept</a:t>
+            </a:r>
+          </a:p>
+        </p:txBody>
+      </p:sp>
+      <p:cxnSp>
+        <p:nvCxnSpPr>
+          <p:cNvPr id="77" name="Connector 76"/>
+          <p:cNvCxnSpPr/>
+          <p:nvPr/>
+        </p:nvCxnSpPr>
+        <p:spPr>
+          <a:xfrm>
+            <a:off x="1920239" y="8458200"/>
+            <a:ext cx="0" cy="548640"/>
+          </a:xfrm>
+          <a:prstGeom prst="line">
+            <a:avLst/>
+          </a:prstGeom>
+          <a:ln w="28575">
+            <a:solidFill>
+              <a:srgbClr val="F5EFE9"/>
+            </a:solidFill>
+            <a:tailEnd type="triangle" w="med" len="med"/>
+          </a:ln>
+        </p:spPr>
+        <p:style>
+          <a:lnRef idx="2">
+            <a:schemeClr val="accent1"/>
+          </a:lnRef>
+          <a:fillRef idx="0">
+            <a:schemeClr val="accent1"/>
+          </a:fillRef>
+          <a:effectRef idx="1">
+            <a:schemeClr val="accent1"/>
+          </a:effectRef>
+          <a:fontRef idx="minor">
+            <a:schemeClr val="tx1"/>
+          </a:fontRef>
+        </p:style>
+      </p:cxnSp>
+      <p:cxnSp>
+        <p:nvCxnSpPr>
+          <p:cNvPr id="78" name="Connector 77"/>
+          <p:cNvCxnSpPr/>
+          <p:nvPr/>
+        </p:nvCxnSpPr>
+        <p:spPr>
+          <a:xfrm>
+            <a:off x="4160520" y="8458200"/>
+            <a:ext cx="0" cy="548640"/>
+          </a:xfrm>
+          <a:prstGeom prst="line">
+            <a:avLst/>
+          </a:prstGeom>
+          <a:ln w="28575">
+            <a:solidFill>
+              <a:srgbClr val="F5EFE9"/>
+            </a:solidFill>
+            <a:tailEnd type="triangle" w="med" len="med"/>
+          </a:ln>
+        </p:spPr>
+        <p:style>
+          <a:lnRef idx="2">
+            <a:schemeClr val="accent1"/>
+          </a:lnRef>
+          <a:fillRef idx="0">
+            <a:schemeClr val="accent1"/>
+          </a:fillRef>
+          <a:effectRef idx="1">
+            <a:schemeClr val="accent1"/>
+          </a:effectRef>
+          <a:fontRef idx="minor">
+            <a:schemeClr val="tx1"/>
+          </a:fontRef>
+        </p:style>
+      </p:cxnSp>
+      <p:cxnSp>
+        <p:nvCxnSpPr>
+          <p:cNvPr id="79" name="Connector 78"/>
+          <p:cNvCxnSpPr/>
+          <p:nvPr/>
+        </p:nvCxnSpPr>
+        <p:spPr>
+          <a:xfrm>
+            <a:off x="6400800" y="8641080"/>
+            <a:ext cx="0" cy="365760"/>
+          </a:xfrm>
+          <a:prstGeom prst="line">
+            <a:avLst/>
+          </a:prstGeom>
+          <a:ln w="28575">
+            <a:solidFill>
+              <a:srgbClr val="F5EFE9"/>
+            </a:solidFill>
+            <a:tailEnd type="triangle" w="med" len="med"/>
+          </a:ln>
+        </p:spPr>
+        <p:style>
+          <a:lnRef idx="2">
+            <a:schemeClr val="accent1"/>
+          </a:lnRef>
+          <a:fillRef idx="0">
+            <a:schemeClr val="accent1"/>
+          </a:fillRef>
+          <a:effectRef idx="1">
+            <a:schemeClr val="accent1"/>
+          </a:effectRef>
+          <a:fontRef idx="minor">
+            <a:schemeClr val="tx1"/>
+          </a:fontRef>
+        </p:style>
+      </p:cxnSp>
+      <p:cxnSp>
+        <p:nvCxnSpPr>
+          <p:cNvPr id="80" name="Connector 79"/>
+          <p:cNvCxnSpPr/>
+          <p:nvPr/>
+        </p:nvCxnSpPr>
+        <p:spPr>
+          <a:xfrm>
+            <a:off x="9052560" y="8366759"/>
+            <a:ext cx="0" cy="640081"/>
+          </a:xfrm>
+          <a:prstGeom prst="line">
+            <a:avLst/>
+          </a:prstGeom>
+          <a:ln w="28575">
+            <a:solidFill>
+              <a:srgbClr val="F5EFE9"/>
+            </a:solidFill>
+            <a:tailEnd type="triangle" w="med" len="med"/>
+          </a:ln>
+        </p:spPr>
+        <p:style>
+          <a:lnRef idx="2">
+            <a:schemeClr val="accent1"/>
+          </a:lnRef>
+          <a:fillRef idx="0">
+            <a:schemeClr val="accent1"/>
+          </a:fillRef>
+          <a:effectRef idx="1">
+            <a:schemeClr val="accent1"/>
+          </a:effectRef>
+          <a:fontRef idx="minor">
+            <a:schemeClr val="tx1"/>
+          </a:fontRef>
+        </p:style>
+      </p:cxnSp>
+      <p:cxnSp>
+        <p:nvCxnSpPr>
+          <p:cNvPr id="81" name="Connector 80"/>
+          <p:cNvCxnSpPr/>
+          <p:nvPr/>
+        </p:nvCxnSpPr>
+        <p:spPr>
+          <a:xfrm flipH="1">
+            <a:off x="10332720" y="7452360"/>
+            <a:ext cx="182880" cy="0"/>
+          </a:xfrm>
+          <a:prstGeom prst="line">
+            <a:avLst/>
+          </a:prstGeom>
+          <a:ln w="28575">
+            <a:solidFill>
+              <a:srgbClr val="F5EFE9"/>
+            </a:solidFill>
+          </a:ln>
+        </p:spPr>
+        <p:style>
+          <a:lnRef idx="2">
+            <a:schemeClr val="accent1"/>
+          </a:lnRef>
+          <a:fillRef idx="0">
+            <a:schemeClr val="accent1"/>
+          </a:fillRef>
+          <a:effectRef idx="1">
+            <a:schemeClr val="accent1"/>
+          </a:effectRef>
+          <a:fontRef idx="minor">
+            <a:schemeClr val="tx1"/>
+          </a:fontRef>
+        </p:style>
+      </p:cxnSp>
+      <p:cxnSp>
+        <p:nvCxnSpPr>
+          <p:cNvPr id="82" name="Connector 81"/>
+          <p:cNvCxnSpPr/>
+          <p:nvPr/>
+        </p:nvCxnSpPr>
+        <p:spPr>
+          <a:xfrm>
+            <a:off x="10332720" y="7452360"/>
+            <a:ext cx="0" cy="1280160"/>
+          </a:xfrm>
+          <a:prstGeom prst="line">
+            <a:avLst/>
+          </a:prstGeom>
+          <a:ln w="28575">
+            <a:solidFill>
+              <a:srgbClr val="F5EFE9"/>
+            </a:solidFill>
+          </a:ln>
+        </p:spPr>
+        <p:style>
+          <a:lnRef idx="2">
+            <a:schemeClr val="accent1"/>
+          </a:lnRef>
+          <a:fillRef idx="0">
+            <a:schemeClr val="accent1"/>
+          </a:fillRef>
+          <a:effectRef idx="1">
+            <a:schemeClr val="accent1"/>
+          </a:effectRef>
+          <a:fontRef idx="minor">
+            <a:schemeClr val="tx1"/>
+          </a:fontRef>
+        </p:style>
+      </p:cxnSp>
+      <p:cxnSp>
+        <p:nvCxnSpPr>
+          <p:cNvPr id="83" name="Connector 82"/>
+          <p:cNvCxnSpPr/>
+          <p:nvPr/>
+        </p:nvCxnSpPr>
+        <p:spPr>
+          <a:xfrm>
+            <a:off x="10332720" y="8732520"/>
+            <a:ext cx="886968" cy="0"/>
+          </a:xfrm>
+          <a:prstGeom prst="line">
+            <a:avLst/>
+          </a:prstGeom>
+          <a:ln w="28575">
+            <a:solidFill>
+              <a:srgbClr val="F5EFE9"/>
+            </a:solidFill>
+          </a:ln>
+        </p:spPr>
+        <p:style>
+          <a:lnRef idx="2">
+            <a:schemeClr val="accent1"/>
+          </a:lnRef>
+          <a:fillRef idx="0">
+            <a:schemeClr val="accent1"/>
+          </a:fillRef>
+          <a:effectRef idx="1">
+            <a:schemeClr val="accent1"/>
+          </a:effectRef>
+          <a:fontRef idx="minor">
+            <a:schemeClr val="tx1"/>
+          </a:fontRef>
+        </p:style>
+      </p:cxnSp>
+      <p:cxnSp>
+        <p:nvCxnSpPr>
+          <p:cNvPr id="84" name="Connector 83"/>
+          <p:cNvCxnSpPr/>
+          <p:nvPr/>
+        </p:nvCxnSpPr>
+        <p:spPr>
+          <a:xfrm>
+            <a:off x="11219688" y="8732520"/>
+            <a:ext cx="4572" cy="274320"/>
+          </a:xfrm>
+          <a:prstGeom prst="line">
+            <a:avLst/>
+          </a:prstGeom>
+          <a:ln w="28575">
+            <a:solidFill>
+              <a:srgbClr val="F5EFE9"/>
+            </a:solidFill>
+            <a:tailEnd type="triangle" w="med" len="med"/>
+          </a:ln>
+        </p:spPr>
+        <p:style>
+          <a:lnRef idx="2">
+            <a:schemeClr val="accent1"/>
+          </a:lnRef>
+          <a:fillRef idx="0">
+            <a:schemeClr val="accent1"/>
+          </a:fillRef>
+          <a:effectRef idx="1">
+            <a:schemeClr val="accent1"/>
+          </a:effectRef>
+          <a:fontRef idx="minor">
+            <a:schemeClr val="tx1"/>
+          </a:fontRef>
+        </p:style>
+      </p:cxnSp>
+      <p:cxnSp>
+        <p:nvCxnSpPr>
+          <p:cNvPr id="85" name="Connector 84"/>
+          <p:cNvCxnSpPr/>
+          <p:nvPr/>
+        </p:nvCxnSpPr>
+        <p:spPr>
+          <a:xfrm flipH="1">
+            <a:off x="11996928" y="8229600"/>
+            <a:ext cx="4572" cy="502920"/>
+          </a:xfrm>
+          <a:prstGeom prst="line">
+            <a:avLst/>
+          </a:prstGeom>
+          <a:ln w="28575">
+            <a:solidFill>
+              <a:srgbClr val="F5EFE9"/>
+            </a:solidFill>
+          </a:ln>
+        </p:spPr>
+        <p:style>
+          <a:lnRef idx="2">
+            <a:schemeClr val="accent1"/>
+          </a:lnRef>
+          <a:fillRef idx="0">
+            <a:schemeClr val="accent1"/>
+          </a:fillRef>
+          <a:effectRef idx="1">
+            <a:schemeClr val="accent1"/>
+          </a:effectRef>
+          <a:fontRef idx="minor">
+            <a:schemeClr val="tx1"/>
+          </a:fontRef>
+        </p:style>
+      </p:cxnSp>
+      <p:cxnSp>
+        <p:nvCxnSpPr>
+          <p:cNvPr id="86" name="Connector 85"/>
+          <p:cNvCxnSpPr/>
+          <p:nvPr/>
+        </p:nvCxnSpPr>
+        <p:spPr>
+          <a:xfrm>
+            <a:off x="11996928" y="8732520"/>
+            <a:ext cx="777240" cy="0"/>
+          </a:xfrm>
+          <a:prstGeom prst="line">
+            <a:avLst/>
+          </a:prstGeom>
+          <a:ln w="28575">
+            <a:solidFill>
+              <a:srgbClr val="F5EFE9"/>
+            </a:solidFill>
+          </a:ln>
+        </p:spPr>
+        <p:style>
+          <a:lnRef idx="2">
+            <a:schemeClr val="accent1"/>
+          </a:lnRef>
+          <a:fillRef idx="0">
+            <a:schemeClr val="accent1"/>
+          </a:fillRef>
+          <a:effectRef idx="1">
+            <a:schemeClr val="accent1"/>
+          </a:effectRef>
+          <a:fontRef idx="minor">
+            <a:schemeClr val="tx1"/>
+          </a:fontRef>
+        </p:style>
+      </p:cxnSp>
+      <p:cxnSp>
+        <p:nvCxnSpPr>
+          <p:cNvPr id="87" name="Connector 86"/>
+          <p:cNvCxnSpPr/>
+          <p:nvPr/>
+        </p:nvCxnSpPr>
+        <p:spPr>
+          <a:xfrm>
+            <a:off x="12774168" y="8732520"/>
+            <a:ext cx="4572" cy="274320"/>
+          </a:xfrm>
+          <a:prstGeom prst="line">
+            <a:avLst/>
+          </a:prstGeom>
+          <a:ln w="28575">
+            <a:solidFill>
+              <a:srgbClr val="F5EFE9"/>
+            </a:solidFill>
+            <a:tailEnd type="triangle" w="med" len="med"/>
+          </a:ln>
+        </p:spPr>
+        <p:style>
+          <a:lnRef idx="2">
+            <a:schemeClr val="accent1"/>
+          </a:lnRef>
+          <a:fillRef idx="0">
+            <a:schemeClr val="accent1"/>
+          </a:fillRef>
+          <a:effectRef idx="1">
+            <a:schemeClr val="accent1"/>
+          </a:effectRef>
+          <a:fontRef idx="minor">
+            <a:schemeClr val="tx1"/>
+          </a:fontRef>
+        </p:style>
+      </p:cxnSp>
+      <p:cxnSp>
+        <p:nvCxnSpPr>
+          <p:cNvPr id="88" name="Connector 87"/>
+          <p:cNvCxnSpPr/>
+          <p:nvPr/>
+        </p:nvCxnSpPr>
+        <p:spPr>
+          <a:xfrm>
+            <a:off x="15247620" y="8229600"/>
+            <a:ext cx="0" cy="365760"/>
+          </a:xfrm>
+          <a:prstGeom prst="line">
+            <a:avLst/>
+          </a:prstGeom>
+          <a:ln w="28575">
+            <a:solidFill>
+              <a:srgbClr val="F5EFE9"/>
+            </a:solidFill>
+          </a:ln>
+        </p:spPr>
+        <p:style>
+          <a:lnRef idx="2">
+            <a:schemeClr val="accent1"/>
+          </a:lnRef>
+          <a:fillRef idx="0">
+            <a:schemeClr val="accent1"/>
+          </a:fillRef>
+          <a:effectRef idx="1">
+            <a:schemeClr val="accent1"/>
+          </a:effectRef>
+          <a:fontRef idx="minor">
+            <a:schemeClr val="tx1"/>
+          </a:fontRef>
+        </p:style>
+      </p:cxnSp>
+      <p:cxnSp>
+        <p:nvCxnSpPr>
+          <p:cNvPr id="89" name="Connector 88"/>
+          <p:cNvCxnSpPr/>
+          <p:nvPr/>
+        </p:nvCxnSpPr>
+        <p:spPr>
+          <a:xfrm flipH="1">
+            <a:off x="14447520" y="8595360"/>
+            <a:ext cx="800100" cy="0"/>
+          </a:xfrm>
+          <a:prstGeom prst="line">
+            <a:avLst/>
+          </a:prstGeom>
+          <a:ln w="28575">
+            <a:solidFill>
+              <a:srgbClr val="F5EFE9"/>
+            </a:solidFill>
+          </a:ln>
+        </p:spPr>
+        <p:style>
+          <a:lnRef idx="2">
+            <a:schemeClr val="accent1"/>
+          </a:lnRef>
+          <a:fillRef idx="0">
+            <a:schemeClr val="accent1"/>
+          </a:fillRef>
+          <a:effectRef idx="1">
+            <a:schemeClr val="accent1"/>
+          </a:effectRef>
+          <a:fontRef idx="minor">
+            <a:schemeClr val="tx1"/>
+          </a:fontRef>
+        </p:style>
+      </p:cxnSp>
+      <p:cxnSp>
+        <p:nvCxnSpPr>
+          <p:cNvPr id="90" name="Connector 89"/>
+          <p:cNvCxnSpPr/>
+          <p:nvPr/>
+        </p:nvCxnSpPr>
+        <p:spPr>
+          <a:xfrm>
+            <a:off x="14447520" y="8595360"/>
+            <a:ext cx="0" cy="411480"/>
+          </a:xfrm>
+          <a:prstGeom prst="line">
+            <a:avLst/>
+          </a:prstGeom>
+          <a:ln w="28575">
+            <a:solidFill>
+              <a:srgbClr val="F5EFE9"/>
+            </a:solidFill>
+            <a:tailEnd type="triangle" w="med" len="med"/>
+          </a:ln>
+        </p:spPr>
+        <p:style>
+          <a:lnRef idx="2">
+            <a:schemeClr val="accent1"/>
+          </a:lnRef>
+          <a:fillRef idx="0">
+            <a:schemeClr val="accent1"/>
+          </a:fillRef>
+          <a:effectRef idx="1">
+            <a:schemeClr val="accent1"/>
+          </a:effectRef>
+          <a:fontRef idx="minor">
+            <a:schemeClr val="tx1"/>
+          </a:fontRef>
+        </p:style>
+      </p:cxnSp>
+      <p:cxnSp>
+        <p:nvCxnSpPr>
+          <p:cNvPr id="91" name="Connector 90"/>
+          <p:cNvCxnSpPr/>
+          <p:nvPr/>
+        </p:nvCxnSpPr>
+        <p:spPr>
+          <a:xfrm>
+            <a:off x="15247620" y="8229600"/>
+            <a:ext cx="0" cy="365760"/>
+          </a:xfrm>
+          <a:prstGeom prst="line">
+            <a:avLst/>
+          </a:prstGeom>
+          <a:ln w="28575">
+            <a:solidFill>
+              <a:srgbClr val="F5EFE9"/>
+            </a:solidFill>
+          </a:ln>
+        </p:spPr>
+        <p:style>
+          <a:lnRef idx="2">
+            <a:schemeClr val="accent1"/>
+          </a:lnRef>
+          <a:fillRef idx="0">
+            <a:schemeClr val="accent1"/>
+          </a:fillRef>
+          <a:effectRef idx="1">
+            <a:schemeClr val="accent1"/>
+          </a:effectRef>
+          <a:fontRef idx="minor">
+            <a:schemeClr val="tx1"/>
+          </a:fontRef>
+        </p:style>
+      </p:cxnSp>
+      <p:cxnSp>
+        <p:nvCxnSpPr>
+          <p:cNvPr id="92" name="Connector 91"/>
+          <p:cNvCxnSpPr/>
+          <p:nvPr/>
+        </p:nvCxnSpPr>
+        <p:spPr>
+          <a:xfrm>
+            <a:off x="15247620" y="8595360"/>
+            <a:ext cx="800100" cy="0"/>
+          </a:xfrm>
+          <a:prstGeom prst="line">
+            <a:avLst/>
+          </a:prstGeom>
+          <a:ln w="28575">
+            <a:solidFill>
+              <a:srgbClr val="F5EFE9"/>
+            </a:solidFill>
+          </a:ln>
+        </p:spPr>
+        <p:style>
+          <a:lnRef idx="2">
+            <a:schemeClr val="accent1"/>
+          </a:lnRef>
+          <a:fillRef idx="0">
+            <a:schemeClr val="accent1"/>
+          </a:fillRef>
+          <a:effectRef idx="1">
+            <a:schemeClr val="accent1"/>
+          </a:effectRef>
+          <a:fontRef idx="minor">
+            <a:schemeClr val="tx1"/>
+          </a:fontRef>
+        </p:style>
+      </p:cxnSp>
+      <p:cxnSp>
+        <p:nvCxnSpPr>
+          <p:cNvPr id="93" name="Connector 92"/>
+          <p:cNvCxnSpPr/>
+          <p:nvPr/>
+        </p:nvCxnSpPr>
+        <p:spPr>
+          <a:xfrm>
+            <a:off x="16047720" y="8595360"/>
+            <a:ext cx="0" cy="411480"/>
+          </a:xfrm>
+          <a:prstGeom prst="line">
+            <a:avLst/>
+          </a:prstGeom>
+          <a:ln w="28575">
+            <a:solidFill>
+              <a:srgbClr val="F5EFE9"/>
+            </a:solidFill>
+            <a:tailEnd type="triangle" w="med" len="med"/>
+          </a:ln>
+        </p:spPr>
+        <p:style>
+          <a:lnRef idx="2">
+            <a:schemeClr val="accent1"/>
+          </a:lnRef>
+          <a:fillRef idx="0">
+            <a:schemeClr val="accent1"/>
+          </a:fillRef>
+          <a:effectRef idx="1">
+            <a:schemeClr val="accent1"/>
+          </a:effectRef>
+          <a:fontRef idx="minor">
+            <a:schemeClr val="tx1"/>
+          </a:fontRef>
+        </p:style>
+      </p:cxnSp>
+      <p:cxnSp>
+        <p:nvCxnSpPr>
+          <p:cNvPr id="94" name="Connector 93"/>
+          <p:cNvCxnSpPr/>
+          <p:nvPr/>
+        </p:nvCxnSpPr>
+        <p:spPr>
+          <a:xfrm>
+            <a:off x="18105120" y="7680960"/>
+            <a:ext cx="0" cy="1325880"/>
+          </a:xfrm>
+          <a:prstGeom prst="line">
+            <a:avLst/>
+          </a:prstGeom>
+          <a:ln w="28575">
+            <a:solidFill>
+              <a:srgbClr val="F5EFE9"/>
+            </a:solidFill>
+            <a:tailEnd type="triangle" w="med" len="med"/>
+          </a:ln>
+        </p:spPr>
+        <p:style>
+          <a:lnRef idx="2">
+            <a:schemeClr val="accent1"/>
+          </a:lnRef>
+          <a:fillRef idx="0">
+            <a:schemeClr val="accent1"/>
+          </a:fillRef>
+          <a:effectRef idx="1">
+            <a:schemeClr val="accent1"/>
+          </a:effectRef>
+          <a:fontRef idx="minor">
+            <a:schemeClr val="tx1"/>
+          </a:fontRef>
+        </p:style>
+      </p:cxnSp>
+      <p:sp>
+        <p:nvSpPr>
+          <p:cNvPr id="95" name="TextBox 94"/>
+          <p:cNvSpPr txBox="1"/>
+          <p:nvPr/>
+        </p:nvSpPr>
+        <p:spPr>
+          <a:xfrm>
+            <a:off x="740664" y="10012680"/>
+            <a:ext cx="18653760" cy="457200"/>
           </a:xfrm>
           <a:prstGeom prst="rect">
             <a:avLst/>
@@ -32875,65 +37440,12 @@
               </a:spcAft>
             </a:pPr>
             <a:r>
-              <a:rPr sz="1900" b="1">
-                <a:solidFill>
-                  <a:srgbClr val="0B3D7A"/>
-                </a:solidFill>
-              </a:rPr>
-              <a:t>Schedule and monitor</a:t>
-            </a:r>
-          </a:p>
-          <a:p>
-            <a:pPr algn="l">
-              <a:spcAft>
-                <a:spcPts val="600"/>
-              </a:spcAft>
-            </a:pPr>
-            <a:r>
-              <a:rPr sz="1500" b="0">
-                <a:solidFill>
-                  <a:srgbClr val="4C5D69"/>
-                </a:solidFill>
-              </a:rPr>
-              <a:t>One scheduler job per table, twice daily with a 30-minute stagger, held on TEST until approved. Last-run capture and data-quality checks per client; validate again after the first scheduled run.</a:t>
-            </a:r>
-          </a:p>
-        </p:txBody>
-      </p:sp>
-      <p:sp>
-        <p:nvSpPr>
-          <p:cNvPr id="35" name="TextBox 34"/>
-          <p:cNvSpPr txBox="1"/>
-          <p:nvPr/>
-        </p:nvSpPr>
-        <p:spPr>
-          <a:xfrm>
-            <a:off x="740664" y="10012680"/>
-            <a:ext cx="18288000" cy="457200"/>
-          </a:xfrm>
-          <a:prstGeom prst="rect">
-            <a:avLst/>
-          </a:prstGeom>
-          <a:noFill/>
-        </p:spPr>
-        <p:txBody>
-          <a:bodyPr wrap="square" anchor="t" lIns="0" rIns="0" tIns="54864" bIns="54864">
-            <a:spAutoFit/>
-          </a:bodyPr>
-          <a:lstStyle/>
-          <a:p>
-            <a:pPr algn="l">
-              <a:spcAft>
-                <a:spcPts val="600"/>
-              </a:spcAft>
-            </a:pPr>
-            <a:r>
-              <a:rPr sz="1400" b="0">
+              <a:rPr sz="1200" b="0">
                 <a:solidFill>
                   <a:srgbClr val="F5EFE9"/>
                 </a:solidFill>
               </a:rPr>
-              <a:t>Steps 1 to 8 are the baseline; 9 and 10 are the cutover to rolling refresh. The domain-support objects ride the same rollout so the live domains work the day the snapshots do.</a:t>
+              <a:t>Cylinders are the tables the domains read; the boxes under the three view columns are the CMS views; orange diamonds are gates that stop the rollout. The loop under the second row is the twice-daily rolling refresh.</a:t>
             </a:r>
           </a:p>
         </p:txBody>

--- a/jaspersoft/docs/OriginBA_Automated_Deployment.pptx
+++ b/jaspersoft/docs/OriginBA_Automated_Deployment.pptx
@@ -9655,7 +9655,7 @@
                   <a:srgbClr val="4C5D69"/>
                 </a:solidFill>
               </a:rPr>
-              <a:t>loads every year of history once, one job per table</a:t>
+              <a:t>loads the retained 24 months once, one job per table</a:t>
             </a:r>
           </a:p>
         </p:txBody>
@@ -10224,7 +10224,7 @@
                   <a:srgbClr val="4C5D69"/>
                 </a:solidFill>
               </a:rPr>
-              <a:t>12 months; 6 at CityCorp and Odessa; 3 rolling with 24 kept at College Station and Newark</a:t>
+              <a:t>3 months rebuilt, 24 kept, on every table; 6-month rolling at CityCorp and Odessa</a:t>
             </a:r>
           </a:p>
         </p:txBody>
@@ -15462,7 +15462,7 @@
                   <a:srgbClr val="4C5D69"/>
                 </a:solidFill>
               </a:rPr>
-              <a:t>scheduled SQL reports in one place on every org, promoted by the same tool</a:t>
+              <a:t>scheduled SQL reports in one folder; on Origin_DEV today, promoted to client orgs by the same tool when approved</a:t>
             </a:r>
           </a:p>
         </p:txBody>
@@ -21086,7 +21086,7 @@
                   <a:srgbClr val="0B3D7A"/>
                 </a:solidFill>
               </a:rPr>
-              <a:t>8 reporting tables (the active 8) loaded once from full history</a:t>
+              <a:t>8 reporting tables (the active 8) loaded once from the retained history</a:t>
             </a:r>
           </a:p>
         </p:txBody>
@@ -21144,7 +21144,7 @@
                   <a:srgbClr val="0B3D7A"/>
                 </a:solidFill>
               </a:rPr>
-              <a:t>Refresh procedures: full history for the baseline, then a rolling window</a:t>
+              <a:t>Refresh procedures: the retained 24 months once, then a rolling window</a:t>
             </a:r>
           </a:p>
         </p:txBody>
@@ -33376,7 +33376,7 @@
                   <a:srgbClr val="4C5D69"/>
                 </a:solidFill>
               </a:rPr>
-              <a:t>baseline (24 months, once) and operational per table; SA refresh</a:t>
+              <a:t>baseline (the retained 24 months, once) and operational per table; the SA aged-balance refresh</a:t>
             </a:r>
           </a:p>
         </p:txBody>
@@ -34227,7 +34227,7 @@
                   <a:srgbClr val="4C5D69"/>
                 </a:solidFill>
               </a:rPr>
-              <a:t>twice daily, 30-minute stagger, held on TEST until approved</a:t>
+              <a:t>twice daily from 10:00 and 16:00 UTC, 30-minute stagger; held on TEST until approved</a:t>
             </a:r>
           </a:p>
         </p:txBody>
@@ -34338,7 +34338,7 @@
                   <a:srgbClr val="F5EFE9"/>
                 </a:solidFill>
               </a:rPr>
-              <a:t>Finance</a:t>
+              <a:t>Finance tables</a:t>
             </a:r>
           </a:p>
         </p:txBody>
@@ -34376,7 +34376,7 @@
                   <a:srgbClr val="F5EFE9"/>
                 </a:solidFill>
               </a:rPr>
-              <a:t>Billing and Rates</a:t>
+              <a:t>Billing and Rates tables</a:t>
             </a:r>
           </a:p>
         </p:txBody>
@@ -34414,7 +34414,7 @@
                   <a:srgbClr val="F5EFE9"/>
                 </a:solidFill>
               </a:rPr>
-              <a:t>Meter Operations</a:t>
+              <a:t>Meter Operations tables</a:t>
             </a:r>
           </a:p>
         </p:txBody>
@@ -34452,7 +34452,7 @@
                   <a:srgbClr val="F5EFE9"/>
                 </a:solidFill>
               </a:rPr>
-              <a:t>Debt Management</a:t>
+              <a:t>Debt Management table + seed</a:t>
             </a:r>
           </a:p>
         </p:txBody>
@@ -34573,7 +34573,7 @@
       </p:sp>
       <p:sp>
         <p:nvSpPr>
-          <p:cNvPr id="35" name="Can 34"/>
+          <p:cNvPr id="35" name="Rounded Rectangle 34"/>
           <p:cNvSpPr/>
           <p:nvPr/>
         </p:nvSpPr>
@@ -34582,8 +34582,10 @@
             <a:off x="868680" y="6675120"/>
             <a:ext cx="2103120" cy="822960"/>
           </a:xfrm>
-          <a:prstGeom prst="can">
-            <a:avLst/>
+          <a:prstGeom prst="roundRect">
+            <a:avLst>
+              <a:gd name="adj" fmla="val 10000"/>
+            </a:avLst>
           </a:prstGeom>
           <a:solidFill>
             <a:srgbClr val="F5EFE9"/>
@@ -34644,7 +34646,7 @@
       </p:sp>
       <p:sp>
         <p:nvSpPr>
-          <p:cNvPr id="36" name="Can 35"/>
+          <p:cNvPr id="36" name="Rounded Rectangle 35"/>
           <p:cNvSpPr/>
           <p:nvPr/>
         </p:nvSpPr>
@@ -34653,8 +34655,10 @@
             <a:off x="868680" y="7635240"/>
             <a:ext cx="2103120" cy="822960"/>
           </a:xfrm>
-          <a:prstGeom prst="can">
-            <a:avLst/>
+          <a:prstGeom prst="roundRect">
+            <a:avLst>
+              <a:gd name="adj" fmla="val 10000"/>
+            </a:avLst>
           </a:prstGeom>
           <a:solidFill>
             <a:srgbClr val="F5EFE9"/>
@@ -34715,7 +34719,7 @@
       </p:sp>
       <p:sp>
         <p:nvSpPr>
-          <p:cNvPr id="37" name="Can 36"/>
+          <p:cNvPr id="37" name="Rounded Rectangle 36"/>
           <p:cNvSpPr/>
           <p:nvPr/>
         </p:nvSpPr>
@@ -34724,8 +34728,10 @@
             <a:off x="3108960" y="6675120"/>
             <a:ext cx="2103120" cy="822960"/>
           </a:xfrm>
-          <a:prstGeom prst="can">
-            <a:avLst/>
+          <a:prstGeom prst="roundRect">
+            <a:avLst>
+              <a:gd name="adj" fmla="val 10000"/>
+            </a:avLst>
           </a:prstGeom>
           <a:solidFill>
             <a:srgbClr val="F5EFE9"/>
@@ -34786,7 +34792,7 @@
       </p:sp>
       <p:sp>
         <p:nvSpPr>
-          <p:cNvPr id="38" name="Can 37"/>
+          <p:cNvPr id="38" name="Rounded Rectangle 37"/>
           <p:cNvSpPr/>
           <p:nvPr/>
         </p:nvSpPr>
@@ -34795,8 +34801,10 @@
             <a:off x="3108960" y="7635240"/>
             <a:ext cx="2103120" cy="822960"/>
           </a:xfrm>
-          <a:prstGeom prst="can">
-            <a:avLst/>
+          <a:prstGeom prst="roundRect">
+            <a:avLst>
+              <a:gd name="adj" fmla="val 10000"/>
+            </a:avLst>
           </a:prstGeom>
           <a:solidFill>
             <a:srgbClr val="F5EFE9"/>
@@ -34857,7 +34865,7 @@
       </p:sp>
       <p:sp>
         <p:nvSpPr>
-          <p:cNvPr id="39" name="Can 38"/>
+          <p:cNvPr id="39" name="Rounded Rectangle 38"/>
           <p:cNvSpPr/>
           <p:nvPr/>
         </p:nvSpPr>
@@ -34866,8 +34874,10 @@
             <a:off x="5349240" y="6675120"/>
             <a:ext cx="2103120" cy="594360"/>
           </a:xfrm>
-          <a:prstGeom prst="can">
-            <a:avLst/>
+          <a:prstGeom prst="roundRect">
+            <a:avLst>
+              <a:gd name="adj" fmla="val 10000"/>
+            </a:avLst>
           </a:prstGeom>
           <a:solidFill>
             <a:srgbClr val="F5EFE9"/>
@@ -34928,7 +34938,7 @@
       </p:sp>
       <p:sp>
         <p:nvSpPr>
-          <p:cNvPr id="40" name="Can 39"/>
+          <p:cNvPr id="40" name="Rounded Rectangle 39"/>
           <p:cNvSpPr/>
           <p:nvPr/>
         </p:nvSpPr>
@@ -34937,8 +34947,10 @@
             <a:off x="5349240" y="7360920"/>
             <a:ext cx="2103120" cy="594360"/>
           </a:xfrm>
-          <a:prstGeom prst="can">
-            <a:avLst/>
+          <a:prstGeom prst="roundRect">
+            <a:avLst>
+              <a:gd name="adj" fmla="val 10000"/>
+            </a:avLst>
           </a:prstGeom>
           <a:solidFill>
             <a:srgbClr val="F5EFE9"/>
@@ -34999,7 +35011,7 @@
       </p:sp>
       <p:sp>
         <p:nvSpPr>
-          <p:cNvPr id="41" name="Can 40"/>
+          <p:cNvPr id="41" name="Rounded Rectangle 40"/>
           <p:cNvSpPr/>
           <p:nvPr/>
         </p:nvSpPr>
@@ -35008,8 +35020,10 @@
             <a:off x="5349240" y="8046720"/>
             <a:ext cx="2103120" cy="594360"/>
           </a:xfrm>
-          <a:prstGeom prst="can">
-            <a:avLst/>
+          <a:prstGeom prst="roundRect">
+            <a:avLst>
+              <a:gd name="adj" fmla="val 10000"/>
+            </a:avLst>
           </a:prstGeom>
           <a:solidFill>
             <a:srgbClr val="F5EFE9"/>
@@ -35244,7 +35258,7 @@
       </p:sp>
       <p:sp>
         <p:nvSpPr>
-          <p:cNvPr id="45" name="Can 44"/>
+          <p:cNvPr id="45" name="Rounded Rectangle 44"/>
           <p:cNvSpPr/>
           <p:nvPr/>
         </p:nvSpPr>
@@ -35253,8 +35267,10 @@
             <a:off x="7863840" y="6675120"/>
             <a:ext cx="2377440" cy="868680"/>
           </a:xfrm>
-          <a:prstGeom prst="can">
-            <a:avLst/>
+          <a:prstGeom prst="roundRect">
+            <a:avLst>
+              <a:gd name="adj" fmla="val 10000"/>
+            </a:avLst>
           </a:prstGeom>
           <a:solidFill>
             <a:srgbClr val="F5EFE9"/>
@@ -36351,7 +36367,7 @@
         <p:spPr>
           <a:xfrm>
             <a:off x="15828263" y="3474720"/>
-            <a:ext cx="2322577" cy="228600"/>
+            <a:ext cx="0" cy="274319"/>
           </a:xfrm>
           <a:prstGeom prst="line">
             <a:avLst/>
@@ -36384,9 +36400,44 @@
           <p:nvPr/>
         </p:nvCxnSpPr>
         <p:spPr>
+          <a:xfrm>
+            <a:off x="15828263" y="3749039"/>
+            <a:ext cx="2322577" cy="0"/>
+          </a:xfrm>
+          <a:prstGeom prst="line">
+            <a:avLst/>
+          </a:prstGeom>
+          <a:ln w="28575">
+            <a:solidFill>
+              <a:srgbClr val="F5EFE9"/>
+            </a:solidFill>
+          </a:ln>
+        </p:spPr>
+        <p:style>
+          <a:lnRef idx="2">
+            <a:schemeClr val="accent1"/>
+          </a:lnRef>
+          <a:fillRef idx="0">
+            <a:schemeClr val="accent1"/>
+          </a:fillRef>
+          <a:effectRef idx="1">
+            <a:schemeClr val="accent1"/>
+          </a:effectRef>
+          <a:fontRef idx="minor">
+            <a:schemeClr val="tx1"/>
+          </a:fontRef>
+        </p:style>
+      </p:cxnSp>
+      <p:cxnSp>
+        <p:nvCxnSpPr>
+          <p:cNvPr id="67" name="Connector 66"/>
+          <p:cNvCxnSpPr/>
+          <p:nvPr/>
+        </p:nvCxnSpPr>
+        <p:spPr>
           <a:xfrm flipH="1">
-            <a:off x="18150839" y="3703320"/>
-            <a:ext cx="1" cy="320040"/>
+            <a:off x="18150839" y="3749039"/>
+            <a:ext cx="1" cy="274321"/>
           </a:xfrm>
           <a:prstGeom prst="line">
             <a:avLst/>
@@ -36415,7 +36466,7 @@
       </p:cxnSp>
       <p:cxnSp>
         <p:nvCxnSpPr>
-          <p:cNvPr id="67" name="Connector 66"/>
+          <p:cNvPr id="68" name="Connector 67"/>
           <p:cNvCxnSpPr/>
           <p:nvPr/>
         </p:nvCxnSpPr>
@@ -36451,7 +36502,7 @@
       </p:cxnSp>
       <p:cxnSp>
         <p:nvCxnSpPr>
-          <p:cNvPr id="68" name="Connector 67"/>
+          <p:cNvPr id="69" name="Connector 68"/>
           <p:cNvCxnSpPr/>
           <p:nvPr/>
         </p:nvCxnSpPr>
@@ -36487,7 +36538,7 @@
       </p:cxnSp>
       <p:cxnSp>
         <p:nvCxnSpPr>
-          <p:cNvPr id="69" name="Connector 68"/>
+          <p:cNvPr id="70" name="Connector 69"/>
           <p:cNvCxnSpPr/>
           <p:nvPr/>
         </p:nvCxnSpPr>
@@ -36523,7 +36574,7 @@
       </p:cxnSp>
       <p:cxnSp>
         <p:nvCxnSpPr>
-          <p:cNvPr id="70" name="Connector 69"/>
+          <p:cNvPr id="71" name="Connector 70"/>
           <p:cNvCxnSpPr/>
           <p:nvPr/>
         </p:nvCxnSpPr>
@@ -36559,7 +36610,7 @@
       </p:cxnSp>
       <p:cxnSp>
         <p:nvCxnSpPr>
-          <p:cNvPr id="71" name="Connector 70"/>
+          <p:cNvPr id="72" name="Connector 71"/>
           <p:cNvCxnSpPr/>
           <p:nvPr/>
         </p:nvCxnSpPr>
@@ -36595,7 +36646,7 @@
       </p:cxnSp>
       <p:cxnSp>
         <p:nvCxnSpPr>
-          <p:cNvPr id="72" name="Connector 71"/>
+          <p:cNvPr id="73" name="Connector 72"/>
           <p:cNvCxnSpPr/>
           <p:nvPr/>
         </p:nvCxnSpPr>
@@ -36631,7 +36682,7 @@
       </p:cxnSp>
       <p:cxnSp>
         <p:nvCxnSpPr>
-          <p:cNvPr id="73" name="Connector 72"/>
+          <p:cNvPr id="74" name="Connector 73"/>
           <p:cNvCxnSpPr/>
           <p:nvPr/>
         </p:nvCxnSpPr>
@@ -36639,41 +36690,6 @@
           <a:xfrm>
             <a:off x="4297680" y="4937760"/>
             <a:ext cx="0" cy="411480"/>
-          </a:xfrm>
-          <a:prstGeom prst="line">
-            <a:avLst/>
-          </a:prstGeom>
-          <a:ln w="28575">
-            <a:solidFill>
-              <a:srgbClr val="F5EFE9"/>
-            </a:solidFill>
-          </a:ln>
-        </p:spPr>
-        <p:style>
-          <a:lnRef idx="2">
-            <a:schemeClr val="accent1"/>
-          </a:lnRef>
-          <a:fillRef idx="0">
-            <a:schemeClr val="accent1"/>
-          </a:fillRef>
-          <a:effectRef idx="1">
-            <a:schemeClr val="accent1"/>
-          </a:effectRef>
-          <a:fontRef idx="minor">
-            <a:schemeClr val="tx1"/>
-          </a:fontRef>
-        </p:style>
-      </p:cxnSp>
-      <p:cxnSp>
-        <p:nvCxnSpPr>
-          <p:cNvPr id="74" name="Connector 73"/>
-          <p:cNvCxnSpPr/>
-          <p:nvPr/>
-        </p:nvCxnSpPr>
-        <p:spPr>
-          <a:xfrm>
-            <a:off x="4297680" y="5349240"/>
-            <a:ext cx="5486400" cy="0"/>
           </a:xfrm>
           <a:prstGeom prst="line">
             <a:avLst/>
@@ -36706,6 +36722,41 @@
           <p:nvPr/>
         </p:nvCxnSpPr>
         <p:spPr>
+          <a:xfrm>
+            <a:off x="4297680" y="5349240"/>
+            <a:ext cx="5486400" cy="0"/>
+          </a:xfrm>
+          <a:prstGeom prst="line">
+            <a:avLst/>
+          </a:prstGeom>
+          <a:ln w="28575">
+            <a:solidFill>
+              <a:srgbClr val="F5EFE9"/>
+            </a:solidFill>
+          </a:ln>
+        </p:spPr>
+        <p:style>
+          <a:lnRef idx="2">
+            <a:schemeClr val="accent1"/>
+          </a:lnRef>
+          <a:fillRef idx="0">
+            <a:schemeClr val="accent1"/>
+          </a:fillRef>
+          <a:effectRef idx="1">
+            <a:schemeClr val="accent1"/>
+          </a:effectRef>
+          <a:fontRef idx="minor">
+            <a:schemeClr val="tx1"/>
+          </a:fontRef>
+        </p:style>
+      </p:cxnSp>
+      <p:cxnSp>
+        <p:nvCxnSpPr>
+          <p:cNvPr id="76" name="Connector 75"/>
+          <p:cNvCxnSpPr/>
+          <p:nvPr/>
+        </p:nvCxnSpPr>
+        <p:spPr>
           <a:xfrm flipV="1">
             <a:off x="9784080" y="4937760"/>
             <a:ext cx="0" cy="411480"/>
@@ -36737,7 +36788,7 @@
       </p:cxnSp>
       <p:sp>
         <p:nvSpPr>
-          <p:cNvPr id="76" name="TextBox 75"/>
+          <p:cNvPr id="77" name="TextBox 76"/>
           <p:cNvSpPr txBox="1"/>
           <p:nvPr/>
         </p:nvSpPr>
@@ -36775,7 +36826,7 @@
       </p:sp>
       <p:cxnSp>
         <p:nvCxnSpPr>
-          <p:cNvPr id="77" name="Connector 76"/>
+          <p:cNvPr id="78" name="Connector 77"/>
           <p:cNvCxnSpPr/>
           <p:nvPr/>
         </p:nvCxnSpPr>
@@ -36811,7 +36862,7 @@
       </p:cxnSp>
       <p:cxnSp>
         <p:nvCxnSpPr>
-          <p:cNvPr id="78" name="Connector 77"/>
+          <p:cNvPr id="79" name="Connector 78"/>
           <p:cNvCxnSpPr/>
           <p:nvPr/>
         </p:nvCxnSpPr>
@@ -36847,7 +36898,7 @@
       </p:cxnSp>
       <p:cxnSp>
         <p:nvCxnSpPr>
-          <p:cNvPr id="79" name="Connector 78"/>
+          <p:cNvPr id="80" name="Connector 79"/>
           <p:cNvCxnSpPr/>
           <p:nvPr/>
         </p:nvCxnSpPr>
@@ -36883,7 +36934,7 @@
       </p:cxnSp>
       <p:cxnSp>
         <p:nvCxnSpPr>
-          <p:cNvPr id="80" name="Connector 79"/>
+          <p:cNvPr id="81" name="Connector 80"/>
           <p:cNvCxnSpPr/>
           <p:nvPr/>
         </p:nvCxnSpPr>
@@ -36919,7 +36970,7 @@
       </p:cxnSp>
       <p:cxnSp>
         <p:nvCxnSpPr>
-          <p:cNvPr id="81" name="Connector 80"/>
+          <p:cNvPr id="82" name="Connector 81"/>
           <p:cNvCxnSpPr/>
           <p:nvPr/>
         </p:nvCxnSpPr>
@@ -36927,41 +36978,6 @@
           <a:xfrm flipH="1">
             <a:off x="10332720" y="7452360"/>
             <a:ext cx="182880" cy="0"/>
-          </a:xfrm>
-          <a:prstGeom prst="line">
-            <a:avLst/>
-          </a:prstGeom>
-          <a:ln w="28575">
-            <a:solidFill>
-              <a:srgbClr val="F5EFE9"/>
-            </a:solidFill>
-          </a:ln>
-        </p:spPr>
-        <p:style>
-          <a:lnRef idx="2">
-            <a:schemeClr val="accent1"/>
-          </a:lnRef>
-          <a:fillRef idx="0">
-            <a:schemeClr val="accent1"/>
-          </a:fillRef>
-          <a:effectRef idx="1">
-            <a:schemeClr val="accent1"/>
-          </a:effectRef>
-          <a:fontRef idx="minor">
-            <a:schemeClr val="tx1"/>
-          </a:fontRef>
-        </p:style>
-      </p:cxnSp>
-      <p:cxnSp>
-        <p:nvCxnSpPr>
-          <p:cNvPr id="82" name="Connector 81"/>
-          <p:cNvCxnSpPr/>
-          <p:nvPr/>
-        </p:nvCxnSpPr>
-        <p:spPr>
-          <a:xfrm>
-            <a:off x="10332720" y="7452360"/>
-            <a:ext cx="0" cy="1280160"/>
           </a:xfrm>
           <a:prstGeom prst="line">
             <a:avLst/>
@@ -36995,8 +37011,8 @@
         </p:nvCxnSpPr>
         <p:spPr>
           <a:xfrm>
-            <a:off x="10332720" y="8732520"/>
-            <a:ext cx="886968" cy="0"/>
+            <a:off x="10332720" y="7452360"/>
+            <a:ext cx="0" cy="1280160"/>
           </a:xfrm>
           <a:prstGeom prst="line">
             <a:avLst/>
@@ -37030,6 +37046,41 @@
         </p:nvCxnSpPr>
         <p:spPr>
           <a:xfrm>
+            <a:off x="10332720" y="8732520"/>
+            <a:ext cx="886968" cy="0"/>
+          </a:xfrm>
+          <a:prstGeom prst="line">
+            <a:avLst/>
+          </a:prstGeom>
+          <a:ln w="28575">
+            <a:solidFill>
+              <a:srgbClr val="F5EFE9"/>
+            </a:solidFill>
+          </a:ln>
+        </p:spPr>
+        <p:style>
+          <a:lnRef idx="2">
+            <a:schemeClr val="accent1"/>
+          </a:lnRef>
+          <a:fillRef idx="0">
+            <a:schemeClr val="accent1"/>
+          </a:fillRef>
+          <a:effectRef idx="1">
+            <a:schemeClr val="accent1"/>
+          </a:effectRef>
+          <a:fontRef idx="minor">
+            <a:schemeClr val="tx1"/>
+          </a:fontRef>
+        </p:style>
+      </p:cxnSp>
+      <p:cxnSp>
+        <p:nvCxnSpPr>
+          <p:cNvPr id="85" name="Connector 84"/>
+          <p:cNvCxnSpPr/>
+          <p:nvPr/>
+        </p:nvCxnSpPr>
+        <p:spPr>
+          <a:xfrm>
             <a:off x="11219688" y="8732520"/>
             <a:ext cx="4572" cy="274320"/>
           </a:xfrm>
@@ -37060,7 +37111,7 @@
       </p:cxnSp>
       <p:cxnSp>
         <p:nvCxnSpPr>
-          <p:cNvPr id="85" name="Connector 84"/>
+          <p:cNvPr id="86" name="Connector 85"/>
           <p:cNvCxnSpPr/>
           <p:nvPr/>
         </p:nvCxnSpPr>
@@ -37068,41 +37119,6 @@
           <a:xfrm flipH="1">
             <a:off x="11996928" y="8229600"/>
             <a:ext cx="4572" cy="502920"/>
-          </a:xfrm>
-          <a:prstGeom prst="line">
-            <a:avLst/>
-          </a:prstGeom>
-          <a:ln w="28575">
-            <a:solidFill>
-              <a:srgbClr val="F5EFE9"/>
-            </a:solidFill>
-          </a:ln>
-        </p:spPr>
-        <p:style>
-          <a:lnRef idx="2">
-            <a:schemeClr val="accent1"/>
-          </a:lnRef>
-          <a:fillRef idx="0">
-            <a:schemeClr val="accent1"/>
-          </a:fillRef>
-          <a:effectRef idx="1">
-            <a:schemeClr val="accent1"/>
-          </a:effectRef>
-          <a:fontRef idx="minor">
-            <a:schemeClr val="tx1"/>
-          </a:fontRef>
-        </p:style>
-      </p:cxnSp>
-      <p:cxnSp>
-        <p:nvCxnSpPr>
-          <p:cNvPr id="86" name="Connector 85"/>
-          <p:cNvCxnSpPr/>
-          <p:nvPr/>
-        </p:nvCxnSpPr>
-        <p:spPr>
-          <a:xfrm>
-            <a:off x="11996928" y="8732520"/>
-            <a:ext cx="777240" cy="0"/>
           </a:xfrm>
           <a:prstGeom prst="line">
             <a:avLst/>
@@ -37136,6 +37152,41 @@
         </p:nvCxnSpPr>
         <p:spPr>
           <a:xfrm>
+            <a:off x="11996928" y="8732520"/>
+            <a:ext cx="777240" cy="0"/>
+          </a:xfrm>
+          <a:prstGeom prst="line">
+            <a:avLst/>
+          </a:prstGeom>
+          <a:ln w="28575">
+            <a:solidFill>
+              <a:srgbClr val="F5EFE9"/>
+            </a:solidFill>
+          </a:ln>
+        </p:spPr>
+        <p:style>
+          <a:lnRef idx="2">
+            <a:schemeClr val="accent1"/>
+          </a:lnRef>
+          <a:fillRef idx="0">
+            <a:schemeClr val="accent1"/>
+          </a:fillRef>
+          <a:effectRef idx="1">
+            <a:schemeClr val="accent1"/>
+          </a:effectRef>
+          <a:fontRef idx="minor">
+            <a:schemeClr val="tx1"/>
+          </a:fontRef>
+        </p:style>
+      </p:cxnSp>
+      <p:cxnSp>
+        <p:nvCxnSpPr>
+          <p:cNvPr id="88" name="Connector 87"/>
+          <p:cNvCxnSpPr/>
+          <p:nvPr/>
+        </p:nvCxnSpPr>
+        <p:spPr>
+          <a:xfrm>
             <a:off x="12774168" y="8732520"/>
             <a:ext cx="4572" cy="274320"/>
           </a:xfrm>
@@ -37166,7 +37217,7 @@
       </p:cxnSp>
       <p:cxnSp>
         <p:nvCxnSpPr>
-          <p:cNvPr id="88" name="Connector 87"/>
+          <p:cNvPr id="89" name="Connector 88"/>
           <p:cNvCxnSpPr/>
           <p:nvPr/>
         </p:nvCxnSpPr>
@@ -37174,41 +37225,6 @@
           <a:xfrm>
             <a:off x="15247620" y="8229600"/>
             <a:ext cx="0" cy="365760"/>
-          </a:xfrm>
-          <a:prstGeom prst="line">
-            <a:avLst/>
-          </a:prstGeom>
-          <a:ln w="28575">
-            <a:solidFill>
-              <a:srgbClr val="F5EFE9"/>
-            </a:solidFill>
-          </a:ln>
-        </p:spPr>
-        <p:style>
-          <a:lnRef idx="2">
-            <a:schemeClr val="accent1"/>
-          </a:lnRef>
-          <a:fillRef idx="0">
-            <a:schemeClr val="accent1"/>
-          </a:fillRef>
-          <a:effectRef idx="1">
-            <a:schemeClr val="accent1"/>
-          </a:effectRef>
-          <a:fontRef idx="minor">
-            <a:schemeClr val="tx1"/>
-          </a:fontRef>
-        </p:style>
-      </p:cxnSp>
-      <p:cxnSp>
-        <p:nvCxnSpPr>
-          <p:cNvPr id="89" name="Connector 88"/>
-          <p:cNvCxnSpPr/>
-          <p:nvPr/>
-        </p:nvCxnSpPr>
-        <p:spPr>
-          <a:xfrm flipH="1">
-            <a:off x="14447520" y="8595360"/>
-            <a:ext cx="800100" cy="0"/>
           </a:xfrm>
           <a:prstGeom prst="line">
             <a:avLst/>
@@ -37241,6 +37257,41 @@
           <p:nvPr/>
         </p:nvCxnSpPr>
         <p:spPr>
+          <a:xfrm flipH="1">
+            <a:off x="14447520" y="8595360"/>
+            <a:ext cx="800100" cy="0"/>
+          </a:xfrm>
+          <a:prstGeom prst="line">
+            <a:avLst/>
+          </a:prstGeom>
+          <a:ln w="28575">
+            <a:solidFill>
+              <a:srgbClr val="F5EFE9"/>
+            </a:solidFill>
+          </a:ln>
+        </p:spPr>
+        <p:style>
+          <a:lnRef idx="2">
+            <a:schemeClr val="accent1"/>
+          </a:lnRef>
+          <a:fillRef idx="0">
+            <a:schemeClr val="accent1"/>
+          </a:fillRef>
+          <a:effectRef idx="1">
+            <a:schemeClr val="accent1"/>
+          </a:effectRef>
+          <a:fontRef idx="minor">
+            <a:schemeClr val="tx1"/>
+          </a:fontRef>
+        </p:style>
+      </p:cxnSp>
+      <p:cxnSp>
+        <p:nvCxnSpPr>
+          <p:cNvPr id="91" name="Connector 90"/>
+          <p:cNvCxnSpPr/>
+          <p:nvPr/>
+        </p:nvCxnSpPr>
+        <p:spPr>
           <a:xfrm>
             <a:off x="14447520" y="8595360"/>
             <a:ext cx="0" cy="411480"/>
@@ -37272,7 +37323,7 @@
       </p:cxnSp>
       <p:cxnSp>
         <p:nvCxnSpPr>
-          <p:cNvPr id="91" name="Connector 90"/>
+          <p:cNvPr id="92" name="Connector 91"/>
           <p:cNvCxnSpPr/>
           <p:nvPr/>
         </p:nvCxnSpPr>
@@ -37280,41 +37331,6 @@
           <a:xfrm>
             <a:off x="15247620" y="8229600"/>
             <a:ext cx="0" cy="365760"/>
-          </a:xfrm>
-          <a:prstGeom prst="line">
-            <a:avLst/>
-          </a:prstGeom>
-          <a:ln w="28575">
-            <a:solidFill>
-              <a:srgbClr val="F5EFE9"/>
-            </a:solidFill>
-          </a:ln>
-        </p:spPr>
-        <p:style>
-          <a:lnRef idx="2">
-            <a:schemeClr val="accent1"/>
-          </a:lnRef>
-          <a:fillRef idx="0">
-            <a:schemeClr val="accent1"/>
-          </a:fillRef>
-          <a:effectRef idx="1">
-            <a:schemeClr val="accent1"/>
-          </a:effectRef>
-          <a:fontRef idx="minor">
-            <a:schemeClr val="tx1"/>
-          </a:fontRef>
-        </p:style>
-      </p:cxnSp>
-      <p:cxnSp>
-        <p:nvCxnSpPr>
-          <p:cNvPr id="92" name="Connector 91"/>
-          <p:cNvCxnSpPr/>
-          <p:nvPr/>
-        </p:nvCxnSpPr>
-        <p:spPr>
-          <a:xfrm>
-            <a:off x="15247620" y="8595360"/>
-            <a:ext cx="800100" cy="0"/>
           </a:xfrm>
           <a:prstGeom prst="line">
             <a:avLst/>
@@ -37348,6 +37364,41 @@
         </p:nvCxnSpPr>
         <p:spPr>
           <a:xfrm>
+            <a:off x="15247620" y="8595360"/>
+            <a:ext cx="800100" cy="0"/>
+          </a:xfrm>
+          <a:prstGeom prst="line">
+            <a:avLst/>
+          </a:prstGeom>
+          <a:ln w="28575">
+            <a:solidFill>
+              <a:srgbClr val="F5EFE9"/>
+            </a:solidFill>
+          </a:ln>
+        </p:spPr>
+        <p:style>
+          <a:lnRef idx="2">
+            <a:schemeClr val="accent1"/>
+          </a:lnRef>
+          <a:fillRef idx="0">
+            <a:schemeClr val="accent1"/>
+          </a:fillRef>
+          <a:effectRef idx="1">
+            <a:schemeClr val="accent1"/>
+          </a:effectRef>
+          <a:fontRef idx="minor">
+            <a:schemeClr val="tx1"/>
+          </a:fontRef>
+        </p:style>
+      </p:cxnSp>
+      <p:cxnSp>
+        <p:nvCxnSpPr>
+          <p:cNvPr id="94" name="Connector 93"/>
+          <p:cNvCxnSpPr/>
+          <p:nvPr/>
+        </p:nvCxnSpPr>
+        <p:spPr>
+          <a:xfrm>
             <a:off x="16047720" y="8595360"/>
             <a:ext cx="0" cy="411480"/>
           </a:xfrm>
@@ -37378,7 +37429,7 @@
       </p:cxnSp>
       <p:cxnSp>
         <p:nvCxnSpPr>
-          <p:cNvPr id="94" name="Connector 93"/>
+          <p:cNvPr id="95" name="Connector 94"/>
           <p:cNvCxnSpPr/>
           <p:nvPr/>
         </p:nvCxnSpPr>
@@ -37414,7 +37465,7 @@
       </p:cxnSp>
       <p:sp>
         <p:nvSpPr>
-          <p:cNvPr id="95" name="TextBox 94"/>
+          <p:cNvPr id="96" name="TextBox 95"/>
           <p:cNvSpPr txBox="1"/>
           <p:nvPr/>
         </p:nvSpPr>
@@ -37445,7 +37496,7 @@
                   <a:srgbClr val="F5EFE9"/>
                 </a:solidFill>
               </a:rPr>
-              <a:t>Cylinders are the tables the domains read; the boxes under the three view columns are the CMS views; orange diamonds are gates that stop the rollout. The loop under the second row is the twice-daily rolling refresh.</a:t>
+              <a:t>Every box in the map is one database object the domains read: seven rolling snapshot tables, the SA aged-balance table with its lookup seed, and eight CMS views. Orange diamonds are gates that stop the rollout; the loop under the second row is the twice-daily rolling refresh (3 months rebuilt, 24 kept; 6 months at CityCorp and Odessa).</a:t>
             </a:r>
           </a:p>
         </p:txBody>

--- a/jaspersoft/docs/OriginBA_Automated_Deployment.pptx
+++ b/jaspersoft/docs/OriginBA_Automated_Deployment.pptx
@@ -13458,7 +13458,7 @@
         <p:spPr>
           <a:xfrm>
             <a:off x="740664" y="1828800"/>
-            <a:ext cx="4443984" cy="5989320"/>
+            <a:ext cx="4443984" cy="6446520"/>
           </a:xfrm>
           <a:prstGeom prst="roundRect">
             <a:avLst>
@@ -13557,7 +13557,7 @@
         <p:spPr>
           <a:xfrm>
             <a:off x="5477256" y="1828800"/>
-            <a:ext cx="4443984" cy="5989320"/>
+            <a:ext cx="4443984" cy="6446520"/>
           </a:xfrm>
           <a:prstGeom prst="roundRect">
             <a:avLst>
@@ -13656,7 +13656,7 @@
         <p:spPr>
           <a:xfrm>
             <a:off x="10213848" y="1828800"/>
-            <a:ext cx="4443984" cy="5989320"/>
+            <a:ext cx="4443984" cy="6446520"/>
           </a:xfrm>
           <a:prstGeom prst="roundRect">
             <a:avLst>
@@ -13755,7 +13755,7 @@
         <p:spPr>
           <a:xfrm>
             <a:off x="14950440" y="1828800"/>
-            <a:ext cx="4443984" cy="5989320"/>
+            <a:ext cx="4443984" cy="6446520"/>
           </a:xfrm>
           <a:prstGeom prst="roundRect">
             <a:avLst>
@@ -13853,8 +13853,8 @@
         </p:nvSpPr>
         <p:spPr>
           <a:xfrm>
-            <a:off x="740664" y="8092440"/>
-            <a:ext cx="18653760" cy="1783080"/>
+            <a:off x="740664" y="8549640"/>
+            <a:ext cx="18653760" cy="1691640"/>
           </a:xfrm>
           <a:prstGeom prst="roundRect">
             <a:avLst>
@@ -13899,7 +13899,7 @@
         </p:nvSpPr>
         <p:spPr>
           <a:xfrm>
-            <a:off x="905256" y="8138160"/>
+            <a:off x="905256" y="8595360"/>
             <a:ext cx="18324576" cy="411480"/>
           </a:xfrm>
           <a:prstGeom prst="rect">
@@ -14019,7 +14019,63 @@
       </p:sp>
       <p:sp>
         <p:nvSpPr>
-          <p:cNvPr id="16" name="Rounded Rectangle 15"/>
+          <p:cNvPr id="16" name="Oval 15"/>
+          <p:cNvSpPr/>
+          <p:nvPr/>
+        </p:nvSpPr>
+        <p:spPr>
+          <a:xfrm>
+            <a:off x="777240" y="2386584"/>
+            <a:ext cx="310896" cy="310896"/>
+          </a:xfrm>
+          <a:prstGeom prst="ellipse">
+            <a:avLst/>
+          </a:prstGeom>
+          <a:solidFill>
+            <a:srgbClr val="FFA418"/>
+          </a:solidFill>
+          <a:ln>
+            <a:noFill/>
+          </a:ln>
+          <a:effectLst/>
+        </p:spPr>
+        <p:style>
+          <a:lnRef idx="1">
+            <a:schemeClr val="accent1"/>
+          </a:lnRef>
+          <a:fillRef idx="3">
+            <a:schemeClr val="accent1"/>
+          </a:fillRef>
+          <a:effectRef idx="2">
+            <a:schemeClr val="accent1"/>
+          </a:effectRef>
+          <a:fontRef idx="minor">
+            <a:schemeClr val="lt1"/>
+          </a:fontRef>
+        </p:style>
+        <p:txBody>
+          <a:bodyPr rtlCol="0" anchor="ctr" wrap="square" lIns="0" rIns="0" tIns="54864" bIns="54864"/>
+          <a:lstStyle/>
+          <a:p>
+            <a:pPr algn="ctr">
+              <a:spcAft>
+                <a:spcPts val="600"/>
+              </a:spcAft>
+            </a:pPr>
+            <a:r>
+              <a:rPr sz="1000" b="1">
+                <a:solidFill>
+                  <a:srgbClr val="0B3D7A"/>
+                </a:solidFill>
+              </a:rPr>
+              <a:t>1</a:t>
+            </a:r>
+          </a:p>
+        </p:txBody>
+      </p:sp>
+      <p:sp>
+        <p:nvSpPr>
+          <p:cNvPr id="17" name="Rounded Rectangle 16"/>
           <p:cNvSpPr/>
           <p:nvPr/>
         </p:nvSpPr>
@@ -14092,7 +14148,63 @@
       </p:sp>
       <p:sp>
         <p:nvSpPr>
-          <p:cNvPr id="17" name="Rounded Rectangle 16"/>
+          <p:cNvPr id="18" name="Oval 17"/>
+          <p:cNvSpPr/>
+          <p:nvPr/>
+        </p:nvSpPr>
+        <p:spPr>
+          <a:xfrm>
+            <a:off x="777240" y="3438144"/>
+            <a:ext cx="310896" cy="310896"/>
+          </a:xfrm>
+          <a:prstGeom prst="ellipse">
+            <a:avLst/>
+          </a:prstGeom>
+          <a:solidFill>
+            <a:srgbClr val="FFA418"/>
+          </a:solidFill>
+          <a:ln>
+            <a:noFill/>
+          </a:ln>
+          <a:effectLst/>
+        </p:spPr>
+        <p:style>
+          <a:lnRef idx="1">
+            <a:schemeClr val="accent1"/>
+          </a:lnRef>
+          <a:fillRef idx="3">
+            <a:schemeClr val="accent1"/>
+          </a:fillRef>
+          <a:effectRef idx="2">
+            <a:schemeClr val="accent1"/>
+          </a:effectRef>
+          <a:fontRef idx="minor">
+            <a:schemeClr val="lt1"/>
+          </a:fontRef>
+        </p:style>
+        <p:txBody>
+          <a:bodyPr rtlCol="0" anchor="ctr" wrap="square" lIns="0" rIns="0" tIns="54864" bIns="54864"/>
+          <a:lstStyle/>
+          <a:p>
+            <a:pPr algn="ctr">
+              <a:spcAft>
+                <a:spcPts val="600"/>
+              </a:spcAft>
+            </a:pPr>
+            <a:r>
+              <a:rPr sz="1000" b="1">
+                <a:solidFill>
+                  <a:srgbClr val="0B3D7A"/>
+                </a:solidFill>
+              </a:rPr>
+              <a:t>2</a:t>
+            </a:r>
+          </a:p>
+        </p:txBody>
+      </p:sp>
+      <p:sp>
+        <p:nvSpPr>
+          <p:cNvPr id="19" name="Rounded Rectangle 18"/>
           <p:cNvSpPr/>
           <p:nvPr/>
         </p:nvSpPr>
@@ -14165,16 +14277,16 @@
       </p:sp>
       <p:sp>
         <p:nvSpPr>
-          <p:cNvPr id="18" name="Diamond 17"/>
+          <p:cNvPr id="20" name="Oval 19"/>
           <p:cNvSpPr/>
           <p:nvPr/>
         </p:nvSpPr>
         <p:spPr>
           <a:xfrm>
-            <a:off x="2185415" y="6126480"/>
-            <a:ext cx="1554480" cy="822960"/>
-          </a:xfrm>
-          <a:prstGeom prst="diamond">
+            <a:off x="777240" y="4306824"/>
+            <a:ext cx="310896" cy="310896"/>
+          </a:xfrm>
+          <a:prstGeom prst="ellipse">
             <a:avLst/>
           </a:prstGeom>
           <a:solidFill>
@@ -14200,6 +14312,62 @@
           </a:fontRef>
         </p:style>
         <p:txBody>
+          <a:bodyPr rtlCol="0" anchor="ctr" wrap="square" lIns="0" rIns="0" tIns="54864" bIns="54864"/>
+          <a:lstStyle/>
+          <a:p>
+            <a:pPr algn="ctr">
+              <a:spcAft>
+                <a:spcPts val="600"/>
+              </a:spcAft>
+            </a:pPr>
+            <a:r>
+              <a:rPr sz="1000" b="1">
+                <a:solidFill>
+                  <a:srgbClr val="0B3D7A"/>
+                </a:solidFill>
+              </a:rPr>
+              <a:t>3</a:t>
+            </a:r>
+          </a:p>
+        </p:txBody>
+      </p:sp>
+      <p:sp>
+        <p:nvSpPr>
+          <p:cNvPr id="21" name="Diamond 20"/>
+          <p:cNvSpPr/>
+          <p:nvPr/>
+        </p:nvSpPr>
+        <p:spPr>
+          <a:xfrm>
+            <a:off x="2185415" y="6080760"/>
+            <a:ext cx="1554480" cy="822960"/>
+          </a:xfrm>
+          <a:prstGeom prst="diamond">
+            <a:avLst/>
+          </a:prstGeom>
+          <a:solidFill>
+            <a:srgbClr val="FFA418"/>
+          </a:solidFill>
+          <a:ln>
+            <a:noFill/>
+          </a:ln>
+          <a:effectLst/>
+        </p:spPr>
+        <p:style>
+          <a:lnRef idx="1">
+            <a:schemeClr val="accent1"/>
+          </a:lnRef>
+          <a:fillRef idx="3">
+            <a:schemeClr val="accent1"/>
+          </a:fillRef>
+          <a:effectRef idx="2">
+            <a:schemeClr val="accent1"/>
+          </a:effectRef>
+          <a:fontRef idx="minor">
+            <a:schemeClr val="lt1"/>
+          </a:fontRef>
+        </p:style>
+        <p:txBody>
           <a:bodyPr rtlCol="0" anchor="ctr" wrap="square" lIns="18288" rIns="18288" tIns="54864" bIns="54864"/>
           <a:lstStyle/>
           <a:p>
@@ -14221,18 +14389,74 @@
       </p:sp>
       <p:sp>
         <p:nvSpPr>
-          <p:cNvPr id="19" name="Rounded Rectangle 18"/>
+          <p:cNvPr id="22" name="Oval 21"/>
           <p:cNvSpPr/>
           <p:nvPr/>
         </p:nvSpPr>
         <p:spPr>
           <a:xfrm>
-            <a:off x="5641848" y="2514600"/>
-            <a:ext cx="4114800" cy="777240"/>
+            <a:off x="2057399" y="5952744"/>
+            <a:ext cx="310896" cy="310896"/>
+          </a:xfrm>
+          <a:prstGeom prst="ellipse">
+            <a:avLst/>
+          </a:prstGeom>
+          <a:solidFill>
+            <a:srgbClr val="FFA418"/>
+          </a:solidFill>
+          <a:ln>
+            <a:noFill/>
+          </a:ln>
+          <a:effectLst/>
+        </p:spPr>
+        <p:style>
+          <a:lnRef idx="1">
+            <a:schemeClr val="accent1"/>
+          </a:lnRef>
+          <a:fillRef idx="3">
+            <a:schemeClr val="accent1"/>
+          </a:fillRef>
+          <a:effectRef idx="2">
+            <a:schemeClr val="accent1"/>
+          </a:effectRef>
+          <a:fontRef idx="minor">
+            <a:schemeClr val="lt1"/>
+          </a:fontRef>
+        </p:style>
+        <p:txBody>
+          <a:bodyPr rtlCol="0" anchor="ctr" wrap="square" lIns="0" rIns="0" tIns="54864" bIns="54864"/>
+          <a:lstStyle/>
+          <a:p>
+            <a:pPr algn="ctr">
+              <a:spcAft>
+                <a:spcPts val="600"/>
+              </a:spcAft>
+            </a:pPr>
+            <a:r>
+              <a:rPr sz="1000" b="1">
+                <a:solidFill>
+                  <a:srgbClr val="0B3D7A"/>
+                </a:solidFill>
+              </a:rPr>
+              <a:t>4</a:t>
+            </a:r>
+          </a:p>
+        </p:txBody>
+      </p:sp>
+      <p:sp>
+        <p:nvSpPr>
+          <p:cNvPr id="23" name="Rounded Rectangle 22"/>
+          <p:cNvSpPr/>
+          <p:nvPr/>
+        </p:nvSpPr>
+        <p:spPr>
+          <a:xfrm>
+            <a:off x="923544" y="6286500"/>
+            <a:ext cx="1051560" cy="411480"/>
           </a:xfrm>
           <a:prstGeom prst="roundRect">
             <a:avLst>
-              <a:gd name="adj" fmla="val 10000"/>
+              <a:gd name="adj" fmla="val 20000"/>
             </a:avLst>
           </a:prstGeom>
           <a:solidFill>
@@ -14258,49 +14482,34 @@
           </a:fontRef>
         </p:style>
         <p:txBody>
-          <a:bodyPr rtlCol="0" anchor="ctr" wrap="square" lIns="109728" rIns="109728" tIns="54864" bIns="54864"/>
-          <a:lstStyle/>
-          <a:p>
-            <a:pPr algn="l">
-              <a:spcAft>
-                <a:spcPts val="600"/>
-              </a:spcAft>
-            </a:pPr>
-            <a:r>
-              <a:rPr sz="1400" b="1">
+          <a:bodyPr rtlCol="0" anchor="ctr" wrap="square" lIns="36576" rIns="36576" tIns="54864" bIns="54864"/>
+          <a:lstStyle/>
+          <a:p>
+            <a:pPr algn="ctr">
+              <a:spcAft>
+                <a:spcPts val="600"/>
+              </a:spcAft>
+            </a:pPr>
+            <a:r>
+              <a:rPr sz="900" b="1">
                 <a:solidFill>
                   <a:srgbClr val="0B3D7A"/>
                 </a:solidFill>
               </a:rPr>
-              <a:t>Import, update in place</a:t>
-            </a:r>
-          </a:p>
-          <a:p>
-            <a:pPr algn="l">
-              <a:spcAft>
-                <a:spcPts val="600"/>
-              </a:spcAft>
-            </a:pPr>
-            <a:r>
-              <a:rPr sz="1100" b="0">
-                <a:solidFill>
-                  <a:srgbClr val="4C5D69"/>
-                </a:solidFill>
-              </a:rPr>
-              <a:t>polled; an importer warning counts as a failure</a:t>
-            </a:r>
-          </a:p>
-        </p:txBody>
-      </p:sp>
-      <p:sp>
-        <p:nvSpPr>
-          <p:cNvPr id="20" name="Rounded Rectangle 19"/>
+              <a:t>no: stop</a:t>
+            </a:r>
+          </a:p>
+        </p:txBody>
+      </p:sp>
+      <p:sp>
+        <p:nvSpPr>
+          <p:cNvPr id="24" name="Rounded Rectangle 23"/>
           <p:cNvSpPr/>
           <p:nvPr/>
         </p:nvSpPr>
         <p:spPr>
           <a:xfrm>
-            <a:off x="5641848" y="3429000"/>
+            <a:off x="5641848" y="2514600"/>
             <a:ext cx="4114800" cy="777240"/>
           </a:xfrm>
           <a:prstGeom prst="roundRect">
@@ -14345,7 +14554,7 @@
                   <a:srgbClr val="0B3D7A"/>
                 </a:solidFill>
               </a:rPr>
-              <a:t>Re-export and compare</a:t>
+              <a:t>Import, update in place</a:t>
             </a:r>
           </a:p>
           <a:p>
@@ -14360,21 +14569,77 @@
                   <a:srgbClr val="4C5D69"/>
                 </a:solidFill>
               </a:rPr>
-              <a:t>byte-equal inside the scope, importer stamps ignored</a:t>
-            </a:r>
-          </a:p>
-        </p:txBody>
-      </p:sp>
-      <p:sp>
-        <p:nvSpPr>
-          <p:cNvPr id="21" name="Rounded Rectangle 20"/>
+              <a:t>polled; an importer warning counts as a failure</a:t>
+            </a:r>
+          </a:p>
+        </p:txBody>
+      </p:sp>
+      <p:sp>
+        <p:nvSpPr>
+          <p:cNvPr id="25" name="Oval 24"/>
           <p:cNvSpPr/>
           <p:nvPr/>
         </p:nvSpPr>
         <p:spPr>
           <a:xfrm>
-            <a:off x="5641848" y="4343400"/>
-            <a:ext cx="4114800" cy="868680"/>
+            <a:off x="5513832" y="2386584"/>
+            <a:ext cx="310896" cy="310896"/>
+          </a:xfrm>
+          <a:prstGeom prst="ellipse">
+            <a:avLst/>
+          </a:prstGeom>
+          <a:solidFill>
+            <a:srgbClr val="FFA418"/>
+          </a:solidFill>
+          <a:ln>
+            <a:noFill/>
+          </a:ln>
+          <a:effectLst/>
+        </p:spPr>
+        <p:style>
+          <a:lnRef idx="1">
+            <a:schemeClr val="accent1"/>
+          </a:lnRef>
+          <a:fillRef idx="3">
+            <a:schemeClr val="accent1"/>
+          </a:fillRef>
+          <a:effectRef idx="2">
+            <a:schemeClr val="accent1"/>
+          </a:effectRef>
+          <a:fontRef idx="minor">
+            <a:schemeClr val="lt1"/>
+          </a:fontRef>
+        </p:style>
+        <p:txBody>
+          <a:bodyPr rtlCol="0" anchor="ctr" wrap="square" lIns="0" rIns="0" tIns="54864" bIns="54864"/>
+          <a:lstStyle/>
+          <a:p>
+            <a:pPr algn="ctr">
+              <a:spcAft>
+                <a:spcPts val="600"/>
+              </a:spcAft>
+            </a:pPr>
+            <a:r>
+              <a:rPr sz="1000" b="1">
+                <a:solidFill>
+                  <a:srgbClr val="0B3D7A"/>
+                </a:solidFill>
+              </a:rPr>
+              <a:t>5</a:t>
+            </a:r>
+          </a:p>
+        </p:txBody>
+      </p:sp>
+      <p:sp>
+        <p:nvSpPr>
+          <p:cNvPr id="26" name="Rounded Rectangle 25"/>
+          <p:cNvSpPr/>
+          <p:nvPr/>
+        </p:nvSpPr>
+        <p:spPr>
+          <a:xfrm>
+            <a:off x="5641848" y="3429000"/>
+            <a:ext cx="4114800" cy="777240"/>
           </a:xfrm>
           <a:prstGeom prst="roundRect">
             <a:avLst>
@@ -14418,7 +14683,7 @@
                   <a:srgbClr val="0B3D7A"/>
                 </a:solidFill>
               </a:rPr>
-              <a:t>Execute everything</a:t>
+              <a:t>Re-export and compare</a:t>
             </a:r>
           </a:p>
           <a:p>
@@ -14433,23 +14698,23 @@
                   <a:srgbClr val="4C5D69"/>
                 </a:solidFill>
               </a:rPr>
-              <a:t>views by query, reports as PDF, domains by metadata and probe</a:t>
-            </a:r>
-          </a:p>
-        </p:txBody>
-      </p:sp>
-      <p:sp>
-        <p:nvSpPr>
-          <p:cNvPr id="22" name="Diamond 21"/>
+              <a:t>byte-equal inside the scope, importer stamps ignored</a:t>
+            </a:r>
+          </a:p>
+        </p:txBody>
+      </p:sp>
+      <p:sp>
+        <p:nvSpPr>
+          <p:cNvPr id="27" name="Oval 26"/>
           <p:cNvSpPr/>
           <p:nvPr/>
         </p:nvSpPr>
         <p:spPr>
           <a:xfrm>
-            <a:off x="6922008" y="5394960"/>
-            <a:ext cx="1554480" cy="822960"/>
-          </a:xfrm>
-          <a:prstGeom prst="diamond">
+            <a:off x="5513832" y="3300984"/>
+            <a:ext cx="310896" cy="310896"/>
+          </a:xfrm>
+          <a:prstGeom prst="ellipse">
             <a:avLst/>
           </a:prstGeom>
           <a:solidFill>
@@ -14475,7 +14740,7 @@
           </a:fontRef>
         </p:style>
         <p:txBody>
-          <a:bodyPr rtlCol="0" anchor="ctr" wrap="square" lIns="18288" rIns="18288" tIns="54864" bIns="54864"/>
+          <a:bodyPr rtlCol="0" anchor="ctr" wrap="square" lIns="0" rIns="0" tIns="54864" bIns="54864"/>
           <a:lstStyle/>
           <a:p>
             <a:pPr algn="ctr">
@@ -14484,26 +14749,26 @@
               </a:spcAft>
             </a:pPr>
             <a:r>
-              <a:rPr sz="1100" b="1">
+              <a:rPr sz="1000" b="1">
                 <a:solidFill>
                   <a:srgbClr val="0B3D7A"/>
                 </a:solidFill>
               </a:rPr>
-              <a:t>seven proofs pass?</a:t>
-            </a:r>
-          </a:p>
-        </p:txBody>
-      </p:sp>
-      <p:sp>
-        <p:nvSpPr>
-          <p:cNvPr id="23" name="Rounded Rectangle 22"/>
+              <a:t>6</a:t>
+            </a:r>
+          </a:p>
+        </p:txBody>
+      </p:sp>
+      <p:sp>
+        <p:nvSpPr>
+          <p:cNvPr id="28" name="Rounded Rectangle 27"/>
           <p:cNvSpPr/>
           <p:nvPr/>
         </p:nvSpPr>
         <p:spPr>
           <a:xfrm>
-            <a:off x="5641848" y="6400800"/>
-            <a:ext cx="4114800" cy="777240"/>
+            <a:off x="5641848" y="4343400"/>
+            <a:ext cx="4114800" cy="868680"/>
           </a:xfrm>
           <a:prstGeom prst="roundRect">
             <a:avLst>
@@ -14536,20 +14801,132 @@
           <a:bodyPr rtlCol="0" anchor="ctr" wrap="square" lIns="109728" rIns="109728" tIns="54864" bIns="54864"/>
           <a:lstStyle/>
           <a:p>
+            <a:pPr algn="l">
+              <a:spcAft>
+                <a:spcPts val="600"/>
+              </a:spcAft>
+            </a:pPr>
+            <a:r>
+              <a:rPr sz="1400" b="1">
+                <a:solidFill>
+                  <a:srgbClr val="0B3D7A"/>
+                </a:solidFill>
+              </a:rPr>
+              <a:t>Execute everything</a:t>
+            </a:r>
+          </a:p>
+          <a:p>
+            <a:pPr algn="l">
+              <a:spcAft>
+                <a:spcPts val="600"/>
+              </a:spcAft>
+            </a:pPr>
+            <a:r>
+              <a:rPr sz="1100" b="0">
+                <a:solidFill>
+                  <a:srgbClr val="4C5D69"/>
+                </a:solidFill>
+              </a:rPr>
+              <a:t>views by query, reports as PDF, domains by metadata and probe</a:t>
+            </a:r>
+          </a:p>
+        </p:txBody>
+      </p:sp>
+      <p:sp>
+        <p:nvSpPr>
+          <p:cNvPr id="29" name="Oval 28"/>
+          <p:cNvSpPr/>
+          <p:nvPr/>
+        </p:nvSpPr>
+        <p:spPr>
+          <a:xfrm>
+            <a:off x="5513832" y="4215384"/>
+            <a:ext cx="310896" cy="310896"/>
+          </a:xfrm>
+          <a:prstGeom prst="ellipse">
+            <a:avLst/>
+          </a:prstGeom>
+          <a:solidFill>
+            <a:srgbClr val="FFA418"/>
+          </a:solidFill>
+          <a:ln>
+            <a:noFill/>
+          </a:ln>
+          <a:effectLst/>
+        </p:spPr>
+        <p:style>
+          <a:lnRef idx="1">
+            <a:schemeClr val="accent1"/>
+          </a:lnRef>
+          <a:fillRef idx="3">
+            <a:schemeClr val="accent1"/>
+          </a:fillRef>
+          <a:effectRef idx="2">
+            <a:schemeClr val="accent1"/>
+          </a:effectRef>
+          <a:fontRef idx="minor">
+            <a:schemeClr val="lt1"/>
+          </a:fontRef>
+        </p:style>
+        <p:txBody>
+          <a:bodyPr rtlCol="0" anchor="ctr" wrap="square" lIns="0" rIns="0" tIns="54864" bIns="54864"/>
+          <a:lstStyle/>
+          <a:p>
             <a:pPr algn="ctr">
               <a:spcAft>
                 <a:spcPts val="600"/>
               </a:spcAft>
             </a:pPr>
             <a:r>
-              <a:rPr sz="1400" b="1">
+              <a:rPr sz="1000" b="1">
                 <a:solidFill>
                   <a:srgbClr val="0B3D7A"/>
                 </a:solidFill>
               </a:rPr>
-              <a:t>Proven offering</a:t>
-            </a:r>
-          </a:p>
+              <a:t>7</a:t>
+            </a:r>
+          </a:p>
+        </p:txBody>
+      </p:sp>
+      <p:sp>
+        <p:nvSpPr>
+          <p:cNvPr id="30" name="Diamond 29"/>
+          <p:cNvSpPr/>
+          <p:nvPr/>
+        </p:nvSpPr>
+        <p:spPr>
+          <a:xfrm>
+            <a:off x="6922008" y="5394960"/>
+            <a:ext cx="1554480" cy="822960"/>
+          </a:xfrm>
+          <a:prstGeom prst="diamond">
+            <a:avLst/>
+          </a:prstGeom>
+          <a:solidFill>
+            <a:srgbClr val="FFA418"/>
+          </a:solidFill>
+          <a:ln>
+            <a:noFill/>
+          </a:ln>
+          <a:effectLst/>
+        </p:spPr>
+        <p:style>
+          <a:lnRef idx="1">
+            <a:schemeClr val="accent1"/>
+          </a:lnRef>
+          <a:fillRef idx="3">
+            <a:schemeClr val="accent1"/>
+          </a:fillRef>
+          <a:effectRef idx="2">
+            <a:schemeClr val="accent1"/>
+          </a:effectRef>
+          <a:fontRef idx="minor">
+            <a:schemeClr val="lt1"/>
+          </a:fontRef>
+        </p:style>
+        <p:txBody>
+          <a:bodyPr rtlCol="0" anchor="ctr" wrap="square" lIns="18288" rIns="18288" tIns="54864" bIns="54864"/>
+          <a:lstStyle/>
           <a:p>
             <a:pPr algn="ctr">
               <a:spcAft>
@@ -14557,30 +14934,86 @@
               </a:spcAft>
             </a:pPr>
             <a:r>
-              <a:rPr sz="1100" b="0">
-                <a:solidFill>
-                  <a:srgbClr val="4C5D69"/>
-                </a:solidFill>
-              </a:rPr>
-              <a:t>the package every client promotion starts from</a:t>
-            </a:r>
-          </a:p>
-        </p:txBody>
-      </p:sp>
-      <p:sp>
-        <p:nvSpPr>
-          <p:cNvPr id="24" name="Rounded Rectangle 23"/>
+              <a:rPr sz="1100" b="1">
+                <a:solidFill>
+                  <a:srgbClr val="0B3D7A"/>
+                </a:solidFill>
+              </a:rPr>
+              <a:t>seven proofs pass?</a:t>
+            </a:r>
+          </a:p>
+        </p:txBody>
+      </p:sp>
+      <p:sp>
+        <p:nvSpPr>
+          <p:cNvPr id="31" name="Oval 30"/>
           <p:cNvSpPr/>
           <p:nvPr/>
         </p:nvSpPr>
         <p:spPr>
           <a:xfrm>
-            <a:off x="10378440" y="2514600"/>
-            <a:ext cx="4114800" cy="731520"/>
+            <a:off x="6793992" y="5266944"/>
+            <a:ext cx="310896" cy="310896"/>
+          </a:xfrm>
+          <a:prstGeom prst="ellipse">
+            <a:avLst/>
+          </a:prstGeom>
+          <a:solidFill>
+            <a:srgbClr val="FFA418"/>
+          </a:solidFill>
+          <a:ln>
+            <a:noFill/>
+          </a:ln>
+          <a:effectLst/>
+        </p:spPr>
+        <p:style>
+          <a:lnRef idx="1">
+            <a:schemeClr val="accent1"/>
+          </a:lnRef>
+          <a:fillRef idx="3">
+            <a:schemeClr val="accent1"/>
+          </a:fillRef>
+          <a:effectRef idx="2">
+            <a:schemeClr val="accent1"/>
+          </a:effectRef>
+          <a:fontRef idx="minor">
+            <a:schemeClr val="lt1"/>
+          </a:fontRef>
+        </p:style>
+        <p:txBody>
+          <a:bodyPr rtlCol="0" anchor="ctr" wrap="square" lIns="0" rIns="0" tIns="54864" bIns="54864"/>
+          <a:lstStyle/>
+          <a:p>
+            <a:pPr algn="ctr">
+              <a:spcAft>
+                <a:spcPts val="600"/>
+              </a:spcAft>
+            </a:pPr>
+            <a:r>
+              <a:rPr sz="1000" b="1">
+                <a:solidFill>
+                  <a:srgbClr val="0B3D7A"/>
+                </a:solidFill>
+              </a:rPr>
+              <a:t>8</a:t>
+            </a:r>
+          </a:p>
+        </p:txBody>
+      </p:sp>
+      <p:sp>
+        <p:nvSpPr>
+          <p:cNvPr id="32" name="Rounded Rectangle 31"/>
+          <p:cNvSpPr/>
+          <p:nvPr/>
+        </p:nvSpPr>
+        <p:spPr>
+          <a:xfrm>
+            <a:off x="8549640" y="5600700"/>
+            <a:ext cx="1188720" cy="411480"/>
           </a:xfrm>
           <a:prstGeom prst="roundRect">
             <a:avLst>
-              <a:gd name="adj" fmla="val 10000"/>
+              <a:gd name="adj" fmla="val 20000"/>
             </a:avLst>
           </a:prstGeom>
           <a:solidFill>
@@ -14606,50 +15039,35 @@
           </a:fontRef>
         </p:style>
         <p:txBody>
-          <a:bodyPr rtlCol="0" anchor="ctr" wrap="square" lIns="109728" rIns="109728" tIns="54864" bIns="54864"/>
-          <a:lstStyle/>
-          <a:p>
-            <a:pPr algn="l">
-              <a:spcAft>
-                <a:spcPts val="600"/>
-              </a:spcAft>
-            </a:pPr>
-            <a:r>
-              <a:rPr sz="1400" b="1">
+          <a:bodyPr rtlCol="0" anchor="ctr" wrap="square" lIns="36576" rIns="36576" tIns="54864" bIns="54864"/>
+          <a:lstStyle/>
+          <a:p>
+            <a:pPr algn="ctr">
+              <a:spcAft>
+                <a:spcPts val="600"/>
+              </a:spcAft>
+            </a:pPr>
+            <a:r>
+              <a:rPr sz="900" b="1">
                 <a:solidFill>
                   <a:srgbClr val="0B3D7A"/>
                 </a:solidFill>
               </a:rPr>
-              <a:t>Inventory snapshot</a:t>
-            </a:r>
-          </a:p>
-          <a:p>
-            <a:pPr algn="l">
-              <a:spcAft>
-                <a:spcPts val="600"/>
-              </a:spcAft>
-            </a:pPr>
-            <a:r>
-              <a:rPr sz="1100" b="0">
-                <a:solidFill>
-                  <a:srgbClr val="4C5D69"/>
-                </a:solidFill>
-              </a:rPr>
-              <a:t>every resource on the org before anything changes</a:t>
-            </a:r>
-          </a:p>
-        </p:txBody>
-      </p:sp>
-      <p:sp>
-        <p:nvSpPr>
-          <p:cNvPr id="25" name="Rounded Rectangle 24"/>
+              <a:t>no: stop</a:t>
+            </a:r>
+          </a:p>
+        </p:txBody>
+      </p:sp>
+      <p:sp>
+        <p:nvSpPr>
+          <p:cNvPr id="33" name="Rounded Rectangle 32"/>
           <p:cNvSpPr/>
           <p:nvPr/>
         </p:nvSpPr>
         <p:spPr>
           <a:xfrm>
-            <a:off x="10378440" y="3383280"/>
-            <a:ext cx="4114800" cy="1097280"/>
+            <a:off x="5641848" y="6400800"/>
+            <a:ext cx="4114800" cy="777240"/>
           </a:xfrm>
           <a:prstGeom prst="roundRect">
             <a:avLst>
@@ -14682,7 +15100,7 @@
           <a:bodyPr rtlCol="0" anchor="ctr" wrap="square" lIns="109728" rIns="109728" tIns="54864" bIns="54864"/>
           <a:lstStyle/>
           <a:p>
-            <a:pPr algn="l">
+            <a:pPr algn="ctr">
               <a:spcAft>
                 <a:spcPts val="600"/>
               </a:spcAft>
@@ -14693,11 +15111,11 @@
                   <a:srgbClr val="0B3D7A"/>
                 </a:solidFill>
               </a:rPr>
-              <a:t>Rebuild for the client</a:t>
-            </a:r>
-          </a:p>
-          <a:p>
-            <a:pPr algn="l">
+              <a:t>Proven offering</a:t>
+            </a:r>
+          </a:p>
+          <a:p>
+            <a:pPr algn="ctr">
               <a:spcAft>
                 <a:spcPts val="600"/>
               </a:spcAft>
@@ -14708,23 +15126,23 @@
                   <a:srgbClr val="4C5D69"/>
                 </a:solidFill>
               </a:rPr>
-              <a:t>the client's own datasource export carried byte for byte; org path, folder, alias and tenant root rewritten</a:t>
-            </a:r>
-          </a:p>
-        </p:txBody>
-      </p:sp>
-      <p:sp>
-        <p:nvSpPr>
-          <p:cNvPr id="26" name="Diamond 25"/>
+              <a:t>the package every client promotion starts from</a:t>
+            </a:r>
+          </a:p>
+        </p:txBody>
+      </p:sp>
+      <p:sp>
+        <p:nvSpPr>
+          <p:cNvPr id="34" name="Oval 33"/>
           <p:cNvSpPr/>
           <p:nvPr/>
         </p:nvSpPr>
         <p:spPr>
           <a:xfrm>
-            <a:off x="11247119" y="4617720"/>
-            <a:ext cx="2377440" cy="960120"/>
-          </a:xfrm>
-          <a:prstGeom prst="diamond">
+            <a:off x="5513832" y="6272784"/>
+            <a:ext cx="310896" cy="310896"/>
+          </a:xfrm>
+          <a:prstGeom prst="ellipse">
             <a:avLst/>
           </a:prstGeom>
           <a:solidFill>
@@ -14750,7 +15168,7 @@
           </a:fontRef>
         </p:style>
         <p:txBody>
-          <a:bodyPr rtlCol="0" anchor="ctr" wrap="square" lIns="18288" rIns="18288" tIns="54864" bIns="54864"/>
+          <a:bodyPr rtlCol="0" anchor="ctr" wrap="square" lIns="0" rIns="0" tIns="54864" bIns="54864"/>
           <a:lstStyle/>
           <a:p>
             <a:pPr algn="ctr">
@@ -14764,20 +15182,78 @@
                   <a:srgbClr val="0B3D7A"/>
                 </a:solidFill>
               </a:rPr>
-              <a:t>verified? no source strings, references exist, fields resolve</a:t>
-            </a:r>
-          </a:p>
-        </p:txBody>
-      </p:sp>
-      <p:sp>
-        <p:nvSpPr>
-          <p:cNvPr id="27" name="Rounded Rectangle 26"/>
+              <a:t>9</a:t>
+            </a:r>
+          </a:p>
+        </p:txBody>
+      </p:sp>
+      <p:sp>
+        <p:nvSpPr>
+          <p:cNvPr id="35" name="Rounded Rectangle 34"/>
           <p:cNvSpPr/>
           <p:nvPr/>
         </p:nvSpPr>
         <p:spPr>
           <a:xfrm>
-            <a:off x="10378440" y="5715000"/>
+            <a:off x="10378440" y="2514600"/>
+            <a:ext cx="4114800" cy="457200"/>
+          </a:xfrm>
+          <a:prstGeom prst="roundRect">
+            <a:avLst>
+              <a:gd name="adj" fmla="val 50000"/>
+            </a:avLst>
+          </a:prstGeom>
+          <a:solidFill>
+            <a:srgbClr val="FFA418"/>
+          </a:solidFill>
+          <a:ln>
+            <a:noFill/>
+          </a:ln>
+          <a:effectLst/>
+        </p:spPr>
+        <p:style>
+          <a:lnRef idx="1">
+            <a:schemeClr val="accent1"/>
+          </a:lnRef>
+          <a:fillRef idx="3">
+            <a:schemeClr val="accent1"/>
+          </a:fillRef>
+          <a:effectRef idx="2">
+            <a:schemeClr val="accent1"/>
+          </a:effectRef>
+          <a:fontRef idx="minor">
+            <a:schemeClr val="lt1"/>
+          </a:fontRef>
+        </p:style>
+        <p:txBody>
+          <a:bodyPr rtlCol="0" anchor="ctr" wrap="square" lIns="73152" rIns="73152" tIns="54864" bIns="54864"/>
+          <a:lstStyle/>
+          <a:p>
+            <a:pPr algn="ctr">
+              <a:spcAft>
+                <a:spcPts val="600"/>
+              </a:spcAft>
+            </a:pPr>
+            <a:r>
+              <a:rPr sz="1100" b="1">
+                <a:solidFill>
+                  <a:srgbClr val="0B3D7A"/>
+                </a:solidFill>
+              </a:rPr>
+              <a:t>datasource: the client's own export, carried byte for byte</a:t>
+            </a:r>
+          </a:p>
+        </p:txBody>
+      </p:sp>
+      <p:sp>
+        <p:nvSpPr>
+          <p:cNvPr id="36" name="Rounded Rectangle 35"/>
+          <p:cNvSpPr/>
+          <p:nvPr/>
+        </p:nvSpPr>
+        <p:spPr>
+          <a:xfrm>
+            <a:off x="10378440" y="3108960"/>
             <a:ext cx="4114800" cy="731520"/>
           </a:xfrm>
           <a:prstGeom prst="roundRect">
@@ -14822,7 +15298,7 @@
                   <a:srgbClr val="0B3D7A"/>
                 </a:solidFill>
               </a:rPr>
-              <a:t>Import, compare, execute</a:t>
+              <a:t>Inventory snapshot</a:t>
             </a:r>
           </a:p>
           <a:p>
@@ -14837,21 +15313,77 @@
                   <a:srgbClr val="4C5D69"/>
                 </a:solidFill>
               </a:rPr>
-              <a:t>the same three proofs as Origin_TEST</a:t>
-            </a:r>
-          </a:p>
-        </p:txBody>
-      </p:sp>
-      <p:sp>
-        <p:nvSpPr>
-          <p:cNvPr id="28" name="Rounded Rectangle 27"/>
+              <a:t>every resource on the org before anything changes</a:t>
+            </a:r>
+          </a:p>
+        </p:txBody>
+      </p:sp>
+      <p:sp>
+        <p:nvSpPr>
+          <p:cNvPr id="37" name="Oval 36"/>
           <p:cNvSpPr/>
           <p:nvPr/>
         </p:nvSpPr>
         <p:spPr>
           <a:xfrm>
-            <a:off x="10378440" y="6583680"/>
-            <a:ext cx="4114800" cy="914400"/>
+            <a:off x="10250424" y="2980944"/>
+            <a:ext cx="310896" cy="310896"/>
+          </a:xfrm>
+          <a:prstGeom prst="ellipse">
+            <a:avLst/>
+          </a:prstGeom>
+          <a:solidFill>
+            <a:srgbClr val="FFA418"/>
+          </a:solidFill>
+          <a:ln>
+            <a:noFill/>
+          </a:ln>
+          <a:effectLst/>
+        </p:spPr>
+        <p:style>
+          <a:lnRef idx="1">
+            <a:schemeClr val="accent1"/>
+          </a:lnRef>
+          <a:fillRef idx="3">
+            <a:schemeClr val="accent1"/>
+          </a:fillRef>
+          <a:effectRef idx="2">
+            <a:schemeClr val="accent1"/>
+          </a:effectRef>
+          <a:fontRef idx="minor">
+            <a:schemeClr val="lt1"/>
+          </a:fontRef>
+        </p:style>
+        <p:txBody>
+          <a:bodyPr rtlCol="0" anchor="ctr" wrap="square" lIns="0" rIns="0" tIns="54864" bIns="54864"/>
+          <a:lstStyle/>
+          <a:p>
+            <a:pPr algn="ctr">
+              <a:spcAft>
+                <a:spcPts val="600"/>
+              </a:spcAft>
+            </a:pPr>
+            <a:r>
+              <a:rPr sz="1000" b="1">
+                <a:solidFill>
+                  <a:srgbClr val="0B3D7A"/>
+                </a:solidFill>
+              </a:rPr>
+              <a:t>10</a:t>
+            </a:r>
+          </a:p>
+        </p:txBody>
+      </p:sp>
+      <p:sp>
+        <p:nvSpPr>
+          <p:cNvPr id="38" name="Rounded Rectangle 37"/>
+          <p:cNvSpPr/>
+          <p:nvPr/>
+        </p:nvSpPr>
+        <p:spPr>
+          <a:xfrm>
+            <a:off x="10378440" y="3977639"/>
+            <a:ext cx="4114800" cy="1097280"/>
           </a:xfrm>
           <a:prstGeom prst="roundRect">
             <a:avLst>
@@ -14895,7 +15427,7 @@
                   <a:srgbClr val="0B3D7A"/>
                 </a:solidFill>
               </a:rPr>
-              <a:t>Sweep and sign off</a:t>
+              <a:t>Rebuild for the client</a:t>
             </a:r>
           </a:p>
           <a:p>
@@ -14910,26 +15442,24 @@
                   <a:srgbClr val="4C5D69"/>
                 </a:solidFill>
               </a:rPr>
-              <a:t>PASS, EMPTY, SLOW or FAIL per resource with timing; one document per org</a:t>
-            </a:r>
-          </a:p>
-        </p:txBody>
-      </p:sp>
-      <p:sp>
-        <p:nvSpPr>
-          <p:cNvPr id="29" name="Rounded Rectangle 28"/>
+              <a:t>the client's datasource carried; org path, folder, alias and tenant root rewritten by tested replacements</a:t>
+            </a:r>
+          </a:p>
+        </p:txBody>
+      </p:sp>
+      <p:sp>
+        <p:nvSpPr>
+          <p:cNvPr id="39" name="Oval 38"/>
           <p:cNvSpPr/>
           <p:nvPr/>
         </p:nvSpPr>
         <p:spPr>
           <a:xfrm>
-            <a:off x="15115032" y="2514600"/>
-            <a:ext cx="4114800" cy="457200"/>
-          </a:xfrm>
-          <a:prstGeom prst="roundRect">
-            <a:avLst>
-              <a:gd name="adj" fmla="val 50000"/>
-            </a:avLst>
+            <a:off x="10250424" y="3849624"/>
+            <a:ext cx="310896" cy="310896"/>
+          </a:xfrm>
+          <a:prstGeom prst="ellipse">
+            <a:avLst/>
           </a:prstGeom>
           <a:solidFill>
             <a:srgbClr val="FFA418"/>
@@ -14954,7 +15484,7 @@
           </a:fontRef>
         </p:style>
         <p:txBody>
-          <a:bodyPr rtlCol="0" anchor="ctr" wrap="square" lIns="73152" rIns="73152" tIns="54864" bIns="54864"/>
+          <a:bodyPr rtlCol="0" anchor="ctr" wrap="square" lIns="0" rIns="0" tIns="54864" bIns="54864"/>
           <a:lstStyle/>
           <a:p>
             <a:pPr algn="ctr">
@@ -14963,30 +15493,142 @@
               </a:spcAft>
             </a:pPr>
             <a:r>
-              <a:rPr sz="1200" b="1">
+              <a:rPr sz="1000" b="1">
                 <a:solidFill>
                   <a:srgbClr val="0B3D7A"/>
                 </a:solidFill>
               </a:rPr>
-              <a:t>explicit prod flag required</a:t>
-            </a:r>
-          </a:p>
-        </p:txBody>
-      </p:sp>
-      <p:sp>
-        <p:nvSpPr>
-          <p:cNvPr id="30" name="Rounded Rectangle 29"/>
+              <a:t>11</a:t>
+            </a:r>
+          </a:p>
+        </p:txBody>
+      </p:sp>
+      <p:sp>
+        <p:nvSpPr>
+          <p:cNvPr id="40" name="Diamond 39"/>
           <p:cNvSpPr/>
           <p:nvPr/>
         </p:nvSpPr>
         <p:spPr>
           <a:xfrm>
-            <a:off x="15115032" y="3108960"/>
-            <a:ext cx="4114800" cy="685800"/>
+            <a:off x="11247119" y="5212080"/>
+            <a:ext cx="2377440" cy="960120"/>
+          </a:xfrm>
+          <a:prstGeom prst="diamond">
+            <a:avLst/>
+          </a:prstGeom>
+          <a:solidFill>
+            <a:srgbClr val="FFA418"/>
+          </a:solidFill>
+          <a:ln>
+            <a:noFill/>
+          </a:ln>
+          <a:effectLst/>
+        </p:spPr>
+        <p:style>
+          <a:lnRef idx="1">
+            <a:schemeClr val="accent1"/>
+          </a:lnRef>
+          <a:fillRef idx="3">
+            <a:schemeClr val="accent1"/>
+          </a:fillRef>
+          <a:effectRef idx="2">
+            <a:schemeClr val="accent1"/>
+          </a:effectRef>
+          <a:fontRef idx="minor">
+            <a:schemeClr val="lt1"/>
+          </a:fontRef>
+        </p:style>
+        <p:txBody>
+          <a:bodyPr rtlCol="0" anchor="ctr" wrap="square" lIns="18288" rIns="18288" tIns="54864" bIns="54864"/>
+          <a:lstStyle/>
+          <a:p>
+            <a:pPr algn="ctr">
+              <a:spcAft>
+                <a:spcPts val="600"/>
+              </a:spcAft>
+            </a:pPr>
+            <a:r>
+              <a:rPr sz="1000" b="1">
+                <a:solidFill>
+                  <a:srgbClr val="0B3D7A"/>
+                </a:solidFill>
+              </a:rPr>
+              <a:t>verified? no source strings, references exist, fields resolve</a:t>
+            </a:r>
+          </a:p>
+        </p:txBody>
+      </p:sp>
+      <p:sp>
+        <p:nvSpPr>
+          <p:cNvPr id="41" name="Oval 40"/>
+          <p:cNvSpPr/>
+          <p:nvPr/>
+        </p:nvSpPr>
+        <p:spPr>
+          <a:xfrm>
+            <a:off x="11119103" y="5084064"/>
+            <a:ext cx="310896" cy="310896"/>
+          </a:xfrm>
+          <a:prstGeom prst="ellipse">
+            <a:avLst/>
+          </a:prstGeom>
+          <a:solidFill>
+            <a:srgbClr val="FFA418"/>
+          </a:solidFill>
+          <a:ln>
+            <a:noFill/>
+          </a:ln>
+          <a:effectLst/>
+        </p:spPr>
+        <p:style>
+          <a:lnRef idx="1">
+            <a:schemeClr val="accent1"/>
+          </a:lnRef>
+          <a:fillRef idx="3">
+            <a:schemeClr val="accent1"/>
+          </a:fillRef>
+          <a:effectRef idx="2">
+            <a:schemeClr val="accent1"/>
+          </a:effectRef>
+          <a:fontRef idx="minor">
+            <a:schemeClr val="lt1"/>
+          </a:fontRef>
+        </p:style>
+        <p:txBody>
+          <a:bodyPr rtlCol="0" anchor="ctr" wrap="square" lIns="0" rIns="0" tIns="54864" bIns="54864"/>
+          <a:lstStyle/>
+          <a:p>
+            <a:pPr algn="ctr">
+              <a:spcAft>
+                <a:spcPts val="600"/>
+              </a:spcAft>
+            </a:pPr>
+            <a:r>
+              <a:rPr sz="1000" b="1">
+                <a:solidFill>
+                  <a:srgbClr val="0B3D7A"/>
+                </a:solidFill>
+              </a:rPr>
+              <a:t>12</a:t>
+            </a:r>
+          </a:p>
+        </p:txBody>
+      </p:sp>
+      <p:sp>
+        <p:nvSpPr>
+          <p:cNvPr id="42" name="Rounded Rectangle 41"/>
+          <p:cNvSpPr/>
+          <p:nvPr/>
+        </p:nvSpPr>
+        <p:spPr>
+          <a:xfrm>
+            <a:off x="13697711" y="5486400"/>
+            <a:ext cx="777240" cy="411480"/>
           </a:xfrm>
           <a:prstGeom prst="roundRect">
             <a:avLst>
-              <a:gd name="adj" fmla="val 10000"/>
+              <a:gd name="adj" fmla="val 20000"/>
             </a:avLst>
           </a:prstGeom>
           <a:solidFill>
@@ -15012,50 +15654,35 @@
           </a:fontRef>
         </p:style>
         <p:txBody>
-          <a:bodyPr rtlCol="0" anchor="ctr" wrap="square" lIns="109728" rIns="109728" tIns="54864" bIns="54864"/>
-          <a:lstStyle/>
-          <a:p>
-            <a:pPr algn="l">
-              <a:spcAft>
-                <a:spcPts val="600"/>
-              </a:spcAft>
-            </a:pPr>
-            <a:r>
-              <a:rPr sz="1400" b="1">
+          <a:bodyPr rtlCol="0" anchor="ctr" wrap="square" lIns="36576" rIns="36576" tIns="54864" bIns="54864"/>
+          <a:lstStyle/>
+          <a:p>
+            <a:pPr algn="ctr">
+              <a:spcAft>
+                <a:spcPts val="600"/>
+              </a:spcAft>
+            </a:pPr>
+            <a:r>
+              <a:rPr sz="900" b="1">
                 <a:solidFill>
                   <a:srgbClr val="0B3D7A"/>
                 </a:solidFill>
               </a:rPr>
-              <a:t>Inventory snapshot</a:t>
-            </a:r>
-          </a:p>
-          <a:p>
-            <a:pPr algn="l">
-              <a:spcAft>
-                <a:spcPts val="600"/>
-              </a:spcAft>
-            </a:pPr>
-            <a:r>
-              <a:rPr sz="1100" b="0">
-                <a:solidFill>
-                  <a:srgbClr val="4C5D69"/>
-                </a:solidFill>
-              </a:rPr>
-              <a:t>the rollback baseline</a:t>
-            </a:r>
-          </a:p>
-        </p:txBody>
-      </p:sp>
-      <p:sp>
-        <p:nvSpPr>
-          <p:cNvPr id="31" name="Rounded Rectangle 30"/>
+              <a:t>no: stop</a:t>
+            </a:r>
+          </a:p>
+        </p:txBody>
+      </p:sp>
+      <p:sp>
+        <p:nvSpPr>
+          <p:cNvPr id="43" name="Rounded Rectangle 42"/>
           <p:cNvSpPr/>
           <p:nvPr/>
         </p:nvSpPr>
         <p:spPr>
           <a:xfrm>
-            <a:off x="15115032" y="3931920"/>
-            <a:ext cx="4114800" cy="1005840"/>
+            <a:off x="10378440" y="6309360"/>
+            <a:ext cx="4114800" cy="731520"/>
           </a:xfrm>
           <a:prstGeom prst="roundRect">
             <a:avLst>
@@ -15099,7 +15726,7 @@
                   <a:srgbClr val="0B3D7A"/>
                 </a:solidFill>
               </a:rPr>
-              <a:t>Same promotion, same proofs</a:t>
+              <a:t>Import, compare, execute</a:t>
             </a:r>
           </a:p>
           <a:p>
@@ -15114,23 +15741,23 @@
                   <a:srgbClr val="4C5D69"/>
                 </a:solidFill>
               </a:rPr>
-              <a:t>target datasource carried; rewritten; verified; imported; compared; executed</a:t>
-            </a:r>
-          </a:p>
-        </p:txBody>
-      </p:sp>
-      <p:sp>
-        <p:nvSpPr>
-          <p:cNvPr id="32" name="Diamond 31"/>
+              <a:t>the same three proofs as Origin_TEST</a:t>
+            </a:r>
+          </a:p>
+        </p:txBody>
+      </p:sp>
+      <p:sp>
+        <p:nvSpPr>
+          <p:cNvPr id="44" name="Oval 43"/>
           <p:cNvSpPr/>
           <p:nvPr/>
         </p:nvSpPr>
         <p:spPr>
           <a:xfrm>
-            <a:off x="16395192" y="5074920"/>
-            <a:ext cx="1554480" cy="822960"/>
-          </a:xfrm>
-          <a:prstGeom prst="diamond">
+            <a:off x="10250424" y="6181344"/>
+            <a:ext cx="310896" cy="310896"/>
+          </a:xfrm>
+          <a:prstGeom prst="ellipse">
             <a:avLst/>
           </a:prstGeom>
           <a:solidFill>
@@ -15156,7 +15783,7 @@
           </a:fontRef>
         </p:style>
         <p:txBody>
-          <a:bodyPr rtlCol="0" anchor="ctr" wrap="square" lIns="18288" rIns="18288" tIns="54864" bIns="54864"/>
+          <a:bodyPr rtlCol="0" anchor="ctr" wrap="square" lIns="0" rIns="0" tIns="54864" bIns="54864"/>
           <a:lstStyle/>
           <a:p>
             <a:pPr algn="ctr">
@@ -15165,26 +15792,26 @@
               </a:spcAft>
             </a:pPr>
             <a:r>
-              <a:rPr sz="1100" b="1">
+              <a:rPr sz="1000" b="1">
                 <a:solidFill>
                   <a:srgbClr val="0B3D7A"/>
                 </a:solidFill>
               </a:rPr>
-              <a:t>seven proofs pass?</a:t>
-            </a:r>
-          </a:p>
-        </p:txBody>
-      </p:sp>
-      <p:sp>
-        <p:nvSpPr>
-          <p:cNvPr id="33" name="Rounded Rectangle 32"/>
+              <a:t>13</a:t>
+            </a:r>
+          </a:p>
+        </p:txBody>
+      </p:sp>
+      <p:sp>
+        <p:nvSpPr>
+          <p:cNvPr id="45" name="Rounded Rectangle 44"/>
           <p:cNvSpPr/>
           <p:nvPr/>
         </p:nvSpPr>
         <p:spPr>
           <a:xfrm>
-            <a:off x="15115032" y="6035040"/>
-            <a:ext cx="4114800" cy="685800"/>
+            <a:off x="10378440" y="7178040"/>
+            <a:ext cx="4114800" cy="914400"/>
           </a:xfrm>
           <a:prstGeom prst="roundRect">
             <a:avLst>
@@ -15243,21 +15870,135 @@
                   <a:srgbClr val="4C5D69"/>
                 </a:solidFill>
               </a:rPr>
-              <a:t>on the client's prod numbers</a:t>
-            </a:r>
-          </a:p>
-        </p:txBody>
-      </p:sp>
-      <p:sp>
-        <p:nvSpPr>
-          <p:cNvPr id="34" name="Rounded Rectangle 33"/>
+              <a:t>PASS, EMPTY, SLOW or FAIL per resource with timing; one document per org</a:t>
+            </a:r>
+          </a:p>
+        </p:txBody>
+      </p:sp>
+      <p:sp>
+        <p:nvSpPr>
+          <p:cNvPr id="46" name="Oval 45"/>
           <p:cNvSpPr/>
           <p:nvPr/>
         </p:nvSpPr>
         <p:spPr>
           <a:xfrm>
-            <a:off x="15115032" y="6858000"/>
-            <a:ext cx="4114800" cy="777240"/>
+            <a:off x="10250424" y="7050024"/>
+            <a:ext cx="310896" cy="310896"/>
+          </a:xfrm>
+          <a:prstGeom prst="ellipse">
+            <a:avLst/>
+          </a:prstGeom>
+          <a:solidFill>
+            <a:srgbClr val="FFA418"/>
+          </a:solidFill>
+          <a:ln>
+            <a:noFill/>
+          </a:ln>
+          <a:effectLst/>
+        </p:spPr>
+        <p:style>
+          <a:lnRef idx="1">
+            <a:schemeClr val="accent1"/>
+          </a:lnRef>
+          <a:fillRef idx="3">
+            <a:schemeClr val="accent1"/>
+          </a:fillRef>
+          <a:effectRef idx="2">
+            <a:schemeClr val="accent1"/>
+          </a:effectRef>
+          <a:fontRef idx="minor">
+            <a:schemeClr val="lt1"/>
+          </a:fontRef>
+        </p:style>
+        <p:txBody>
+          <a:bodyPr rtlCol="0" anchor="ctr" wrap="square" lIns="0" rIns="0" tIns="54864" bIns="54864"/>
+          <a:lstStyle/>
+          <a:p>
+            <a:pPr algn="ctr">
+              <a:spcAft>
+                <a:spcPts val="600"/>
+              </a:spcAft>
+            </a:pPr>
+            <a:r>
+              <a:rPr sz="1000" b="1">
+                <a:solidFill>
+                  <a:srgbClr val="0B3D7A"/>
+                </a:solidFill>
+              </a:rPr>
+              <a:t>14</a:t>
+            </a:r>
+          </a:p>
+        </p:txBody>
+      </p:sp>
+      <p:sp>
+        <p:nvSpPr>
+          <p:cNvPr id="47" name="Rounded Rectangle 46"/>
+          <p:cNvSpPr/>
+          <p:nvPr/>
+        </p:nvSpPr>
+        <p:spPr>
+          <a:xfrm>
+            <a:off x="15115032" y="2514600"/>
+            <a:ext cx="4114800" cy="457200"/>
+          </a:xfrm>
+          <a:prstGeom prst="roundRect">
+            <a:avLst>
+              <a:gd name="adj" fmla="val 50000"/>
+            </a:avLst>
+          </a:prstGeom>
+          <a:solidFill>
+            <a:srgbClr val="FFA418"/>
+          </a:solidFill>
+          <a:ln>
+            <a:noFill/>
+          </a:ln>
+          <a:effectLst/>
+        </p:spPr>
+        <p:style>
+          <a:lnRef idx="1">
+            <a:schemeClr val="accent1"/>
+          </a:lnRef>
+          <a:fillRef idx="3">
+            <a:schemeClr val="accent1"/>
+          </a:fillRef>
+          <a:effectRef idx="2">
+            <a:schemeClr val="accent1"/>
+          </a:effectRef>
+          <a:fontRef idx="minor">
+            <a:schemeClr val="lt1"/>
+          </a:fontRef>
+        </p:style>
+        <p:txBody>
+          <a:bodyPr rtlCol="0" anchor="ctr" wrap="square" lIns="73152" rIns="73152" tIns="54864" bIns="54864"/>
+          <a:lstStyle/>
+          <a:p>
+            <a:pPr algn="ctr">
+              <a:spcAft>
+                <a:spcPts val="600"/>
+              </a:spcAft>
+            </a:pPr>
+            <a:r>
+              <a:rPr sz="1200" b="1">
+                <a:solidFill>
+                  <a:srgbClr val="0B3D7A"/>
+                </a:solidFill>
+              </a:rPr>
+              <a:t>explicit prod flag required</a:t>
+            </a:r>
+          </a:p>
+        </p:txBody>
+      </p:sp>
+      <p:sp>
+        <p:nvSpPr>
+          <p:cNvPr id="48" name="Rounded Rectangle 47"/>
+          <p:cNvSpPr/>
+          <p:nvPr/>
+        </p:nvSpPr>
+        <p:spPr>
+          <a:xfrm>
+            <a:off x="15115032" y="3108960"/>
+            <a:ext cx="4114800" cy="685800"/>
           </a:xfrm>
           <a:prstGeom prst="roundRect">
             <a:avLst>
@@ -15301,7 +16042,7 @@
                   <a:srgbClr val="0B3D7A"/>
                 </a:solidFill>
               </a:rPr>
-              <a:t>Diff after = rollback record</a:t>
+              <a:t>Inventory snapshot</a:t>
             </a:r>
           </a:p>
           <a:p>
@@ -15316,21 +16057,77 @@
                   <a:srgbClr val="4C5D69"/>
                 </a:solidFill>
               </a:rPr>
-              <a:t>inventory before against after: nothing else moved</a:t>
-            </a:r>
-          </a:p>
-        </p:txBody>
-      </p:sp>
-      <p:sp>
-        <p:nvSpPr>
-          <p:cNvPr id="35" name="Rounded Rectangle 34"/>
+              <a:t>the rollback baseline</a:t>
+            </a:r>
+          </a:p>
+        </p:txBody>
+      </p:sp>
+      <p:sp>
+        <p:nvSpPr>
+          <p:cNvPr id="49" name="Oval 48"/>
           <p:cNvSpPr/>
           <p:nvPr/>
         </p:nvSpPr>
         <p:spPr>
           <a:xfrm>
-            <a:off x="914400" y="8641080"/>
-            <a:ext cx="5852160" cy="1051560"/>
+            <a:off x="14987016" y="2980944"/>
+            <a:ext cx="310896" cy="310896"/>
+          </a:xfrm>
+          <a:prstGeom prst="ellipse">
+            <a:avLst/>
+          </a:prstGeom>
+          <a:solidFill>
+            <a:srgbClr val="FFA418"/>
+          </a:solidFill>
+          <a:ln>
+            <a:noFill/>
+          </a:ln>
+          <a:effectLst/>
+        </p:spPr>
+        <p:style>
+          <a:lnRef idx="1">
+            <a:schemeClr val="accent1"/>
+          </a:lnRef>
+          <a:fillRef idx="3">
+            <a:schemeClr val="accent1"/>
+          </a:fillRef>
+          <a:effectRef idx="2">
+            <a:schemeClr val="accent1"/>
+          </a:effectRef>
+          <a:fontRef idx="minor">
+            <a:schemeClr val="lt1"/>
+          </a:fontRef>
+        </p:style>
+        <p:txBody>
+          <a:bodyPr rtlCol="0" anchor="ctr" wrap="square" lIns="0" rIns="0" tIns="54864" bIns="54864"/>
+          <a:lstStyle/>
+          <a:p>
+            <a:pPr algn="ctr">
+              <a:spcAft>
+                <a:spcPts val="600"/>
+              </a:spcAft>
+            </a:pPr>
+            <a:r>
+              <a:rPr sz="1000" b="1">
+                <a:solidFill>
+                  <a:srgbClr val="0B3D7A"/>
+                </a:solidFill>
+              </a:rPr>
+              <a:t>15</a:t>
+            </a:r>
+          </a:p>
+        </p:txBody>
+      </p:sp>
+      <p:sp>
+        <p:nvSpPr>
+          <p:cNvPr id="50" name="Rounded Rectangle 49"/>
+          <p:cNvSpPr/>
+          <p:nvPr/>
+        </p:nvSpPr>
+        <p:spPr>
+          <a:xfrm>
+            <a:off x="15115032" y="3931920"/>
+            <a:ext cx="4114800" cy="1005840"/>
           </a:xfrm>
           <a:prstGeom prst="roundRect">
             <a:avLst>
@@ -15374,7 +16171,7 @@
                   <a:srgbClr val="0B3D7A"/>
                 </a:solidFill>
               </a:rPr>
-              <a:t>Additive-only domain patch</a:t>
+              <a:t>Same promotion, same proofs</a:t>
             </a:r>
           </a:p>
           <a:p>
@@ -15389,25 +16186,193 @@
                   <a:srgbClr val="4C5D69"/>
                 </a:solidFill>
               </a:rPr>
-              <a:t>the additions guard refuses any change to what is there; seven proofs per org; one-command restore</a:t>
-            </a:r>
-          </a:p>
-        </p:txBody>
-      </p:sp>
-      <p:sp>
-        <p:nvSpPr>
-          <p:cNvPr id="36" name="Rounded Rectangle 35"/>
+              <a:t>target datasource carried; rewritten; verified; imported; compared; executed</a:t>
+            </a:r>
+          </a:p>
+        </p:txBody>
+      </p:sp>
+      <p:sp>
+        <p:nvSpPr>
+          <p:cNvPr id="51" name="Oval 50"/>
           <p:cNvSpPr/>
           <p:nvPr/>
         </p:nvSpPr>
         <p:spPr>
           <a:xfrm>
-            <a:off x="7132320" y="8641080"/>
-            <a:ext cx="5852160" cy="1051560"/>
+            <a:off x="14987016" y="3803904"/>
+            <a:ext cx="310896" cy="310896"/>
+          </a:xfrm>
+          <a:prstGeom prst="ellipse">
+            <a:avLst/>
+          </a:prstGeom>
+          <a:solidFill>
+            <a:srgbClr val="FFA418"/>
+          </a:solidFill>
+          <a:ln>
+            <a:noFill/>
+          </a:ln>
+          <a:effectLst/>
+        </p:spPr>
+        <p:style>
+          <a:lnRef idx="1">
+            <a:schemeClr val="accent1"/>
+          </a:lnRef>
+          <a:fillRef idx="3">
+            <a:schemeClr val="accent1"/>
+          </a:fillRef>
+          <a:effectRef idx="2">
+            <a:schemeClr val="accent1"/>
+          </a:effectRef>
+          <a:fontRef idx="minor">
+            <a:schemeClr val="lt1"/>
+          </a:fontRef>
+        </p:style>
+        <p:txBody>
+          <a:bodyPr rtlCol="0" anchor="ctr" wrap="square" lIns="0" rIns="0" tIns="54864" bIns="54864"/>
+          <a:lstStyle/>
+          <a:p>
+            <a:pPr algn="ctr">
+              <a:spcAft>
+                <a:spcPts val="600"/>
+              </a:spcAft>
+            </a:pPr>
+            <a:r>
+              <a:rPr sz="1000" b="1">
+                <a:solidFill>
+                  <a:srgbClr val="0B3D7A"/>
+                </a:solidFill>
+              </a:rPr>
+              <a:t>16</a:t>
+            </a:r>
+          </a:p>
+        </p:txBody>
+      </p:sp>
+      <p:sp>
+        <p:nvSpPr>
+          <p:cNvPr id="52" name="Diamond 51"/>
+          <p:cNvSpPr/>
+          <p:nvPr/>
+        </p:nvSpPr>
+        <p:spPr>
+          <a:xfrm>
+            <a:off x="16395192" y="5074920"/>
+            <a:ext cx="1554480" cy="822960"/>
+          </a:xfrm>
+          <a:prstGeom prst="diamond">
+            <a:avLst/>
+          </a:prstGeom>
+          <a:solidFill>
+            <a:srgbClr val="FFA418"/>
+          </a:solidFill>
+          <a:ln>
+            <a:noFill/>
+          </a:ln>
+          <a:effectLst/>
+        </p:spPr>
+        <p:style>
+          <a:lnRef idx="1">
+            <a:schemeClr val="accent1"/>
+          </a:lnRef>
+          <a:fillRef idx="3">
+            <a:schemeClr val="accent1"/>
+          </a:fillRef>
+          <a:effectRef idx="2">
+            <a:schemeClr val="accent1"/>
+          </a:effectRef>
+          <a:fontRef idx="minor">
+            <a:schemeClr val="lt1"/>
+          </a:fontRef>
+        </p:style>
+        <p:txBody>
+          <a:bodyPr rtlCol="0" anchor="ctr" wrap="square" lIns="18288" rIns="18288" tIns="54864" bIns="54864"/>
+          <a:lstStyle/>
+          <a:p>
+            <a:pPr algn="ctr">
+              <a:spcAft>
+                <a:spcPts val="600"/>
+              </a:spcAft>
+            </a:pPr>
+            <a:r>
+              <a:rPr sz="1100" b="1">
+                <a:solidFill>
+                  <a:srgbClr val="0B3D7A"/>
+                </a:solidFill>
+              </a:rPr>
+              <a:t>seven proofs pass?</a:t>
+            </a:r>
+          </a:p>
+        </p:txBody>
+      </p:sp>
+      <p:sp>
+        <p:nvSpPr>
+          <p:cNvPr id="53" name="Oval 52"/>
+          <p:cNvSpPr/>
+          <p:nvPr/>
+        </p:nvSpPr>
+        <p:spPr>
+          <a:xfrm>
+            <a:off x="16267176" y="4946904"/>
+            <a:ext cx="310896" cy="310896"/>
+          </a:xfrm>
+          <a:prstGeom prst="ellipse">
+            <a:avLst/>
+          </a:prstGeom>
+          <a:solidFill>
+            <a:srgbClr val="FFA418"/>
+          </a:solidFill>
+          <a:ln>
+            <a:noFill/>
+          </a:ln>
+          <a:effectLst/>
+        </p:spPr>
+        <p:style>
+          <a:lnRef idx="1">
+            <a:schemeClr val="accent1"/>
+          </a:lnRef>
+          <a:fillRef idx="3">
+            <a:schemeClr val="accent1"/>
+          </a:fillRef>
+          <a:effectRef idx="2">
+            <a:schemeClr val="accent1"/>
+          </a:effectRef>
+          <a:fontRef idx="minor">
+            <a:schemeClr val="lt1"/>
+          </a:fontRef>
+        </p:style>
+        <p:txBody>
+          <a:bodyPr rtlCol="0" anchor="ctr" wrap="square" lIns="0" rIns="0" tIns="54864" bIns="54864"/>
+          <a:lstStyle/>
+          <a:p>
+            <a:pPr algn="ctr">
+              <a:spcAft>
+                <a:spcPts val="600"/>
+              </a:spcAft>
+            </a:pPr>
+            <a:r>
+              <a:rPr sz="1000" b="1">
+                <a:solidFill>
+                  <a:srgbClr val="0B3D7A"/>
+                </a:solidFill>
+              </a:rPr>
+              <a:t>17</a:t>
+            </a:r>
+          </a:p>
+        </p:txBody>
+      </p:sp>
+      <p:sp>
+        <p:nvSpPr>
+          <p:cNvPr id="54" name="Rounded Rectangle 53"/>
+          <p:cNvSpPr/>
+          <p:nvPr/>
+        </p:nvSpPr>
+        <p:spPr>
+          <a:xfrm>
+            <a:off x="18022824" y="5280660"/>
+            <a:ext cx="1188720" cy="411480"/>
           </a:xfrm>
           <a:prstGeom prst="roundRect">
             <a:avLst>
-              <a:gd name="adj" fmla="val 10000"/>
+              <a:gd name="adj" fmla="val 20000"/>
             </a:avLst>
           </a:prstGeom>
           <a:solidFill>
@@ -15433,50 +16398,35 @@
           </a:fontRef>
         </p:style>
         <p:txBody>
-          <a:bodyPr rtlCol="0" anchor="ctr" wrap="square" lIns="109728" rIns="109728" tIns="54864" bIns="54864"/>
-          <a:lstStyle/>
-          <a:p>
-            <a:pPr algn="l">
-              <a:spcAft>
-                <a:spcPts val="600"/>
-              </a:spcAft>
-            </a:pPr>
-            <a:r>
-              <a:rPr sz="1400" b="1">
+          <a:bodyPr rtlCol="0" anchor="ctr" wrap="square" lIns="36576" rIns="36576" tIns="54864" bIns="54864"/>
+          <a:lstStyle/>
+          <a:p>
+            <a:pPr algn="ctr">
+              <a:spcAft>
+                <a:spcPts val="600"/>
+              </a:spcAft>
+            </a:pPr>
+            <a:r>
+              <a:rPr sz="900" b="1">
                 <a:solidFill>
                   <a:srgbClr val="0B3D7A"/>
                 </a:solidFill>
               </a:rPr>
-              <a:t>Standardized Reports folder</a:t>
-            </a:r>
-          </a:p>
-          <a:p>
-            <a:pPr algn="l">
-              <a:spcAft>
-                <a:spcPts val="600"/>
-              </a:spcAft>
-            </a:pPr>
-            <a:r>
-              <a:rPr sz="1100" b="0">
-                <a:solidFill>
-                  <a:srgbClr val="4C5D69"/>
-                </a:solidFill>
-              </a:rPr>
-              <a:t>scheduled SQL reports in one folder; on Origin_DEV today, promoted to client orgs by the same tool when approved</a:t>
-            </a:r>
-          </a:p>
-        </p:txBody>
-      </p:sp>
-      <p:sp>
-        <p:nvSpPr>
-          <p:cNvPr id="37" name="Rounded Rectangle 36"/>
+              <a:t>no: stop</a:t>
+            </a:r>
+          </a:p>
+        </p:txBody>
+      </p:sp>
+      <p:sp>
+        <p:nvSpPr>
+          <p:cNvPr id="55" name="Rounded Rectangle 54"/>
           <p:cNvSpPr/>
           <p:nvPr/>
         </p:nvSpPr>
         <p:spPr>
           <a:xfrm>
-            <a:off x="13350240" y="8641080"/>
-            <a:ext cx="5852160" cy="1051560"/>
+            <a:off x="15115032" y="6035040"/>
+            <a:ext cx="4114800" cy="685800"/>
           </a:xfrm>
           <a:prstGeom prst="roundRect">
             <a:avLst>
@@ -15520,6 +16470,410 @@
                   <a:srgbClr val="0B3D7A"/>
                 </a:solidFill>
               </a:rPr>
+              <a:t>Sweep and sign off</a:t>
+            </a:r>
+          </a:p>
+          <a:p>
+            <a:pPr algn="l">
+              <a:spcAft>
+                <a:spcPts val="600"/>
+              </a:spcAft>
+            </a:pPr>
+            <a:r>
+              <a:rPr sz="1100" b="0">
+                <a:solidFill>
+                  <a:srgbClr val="4C5D69"/>
+                </a:solidFill>
+              </a:rPr>
+              <a:t>on the client's prod numbers</a:t>
+            </a:r>
+          </a:p>
+        </p:txBody>
+      </p:sp>
+      <p:sp>
+        <p:nvSpPr>
+          <p:cNvPr id="56" name="Oval 55"/>
+          <p:cNvSpPr/>
+          <p:nvPr/>
+        </p:nvSpPr>
+        <p:spPr>
+          <a:xfrm>
+            <a:off x="14987016" y="5907024"/>
+            <a:ext cx="310896" cy="310896"/>
+          </a:xfrm>
+          <a:prstGeom prst="ellipse">
+            <a:avLst/>
+          </a:prstGeom>
+          <a:solidFill>
+            <a:srgbClr val="FFA418"/>
+          </a:solidFill>
+          <a:ln>
+            <a:noFill/>
+          </a:ln>
+          <a:effectLst/>
+        </p:spPr>
+        <p:style>
+          <a:lnRef idx="1">
+            <a:schemeClr val="accent1"/>
+          </a:lnRef>
+          <a:fillRef idx="3">
+            <a:schemeClr val="accent1"/>
+          </a:fillRef>
+          <a:effectRef idx="2">
+            <a:schemeClr val="accent1"/>
+          </a:effectRef>
+          <a:fontRef idx="minor">
+            <a:schemeClr val="lt1"/>
+          </a:fontRef>
+        </p:style>
+        <p:txBody>
+          <a:bodyPr rtlCol="0" anchor="ctr" wrap="square" lIns="0" rIns="0" tIns="54864" bIns="54864"/>
+          <a:lstStyle/>
+          <a:p>
+            <a:pPr algn="ctr">
+              <a:spcAft>
+                <a:spcPts val="600"/>
+              </a:spcAft>
+            </a:pPr>
+            <a:r>
+              <a:rPr sz="1000" b="1">
+                <a:solidFill>
+                  <a:srgbClr val="0B3D7A"/>
+                </a:solidFill>
+              </a:rPr>
+              <a:t>18</a:t>
+            </a:r>
+          </a:p>
+        </p:txBody>
+      </p:sp>
+      <p:sp>
+        <p:nvSpPr>
+          <p:cNvPr id="57" name="Rounded Rectangle 56"/>
+          <p:cNvSpPr/>
+          <p:nvPr/>
+        </p:nvSpPr>
+        <p:spPr>
+          <a:xfrm>
+            <a:off x="15115032" y="6858000"/>
+            <a:ext cx="4114800" cy="777240"/>
+          </a:xfrm>
+          <a:prstGeom prst="roundRect">
+            <a:avLst>
+              <a:gd name="adj" fmla="val 10000"/>
+            </a:avLst>
+          </a:prstGeom>
+          <a:solidFill>
+            <a:srgbClr val="F5EFE9"/>
+          </a:solidFill>
+          <a:ln>
+            <a:noFill/>
+          </a:ln>
+          <a:effectLst/>
+        </p:spPr>
+        <p:style>
+          <a:lnRef idx="1">
+            <a:schemeClr val="accent1"/>
+          </a:lnRef>
+          <a:fillRef idx="3">
+            <a:schemeClr val="accent1"/>
+          </a:fillRef>
+          <a:effectRef idx="2">
+            <a:schemeClr val="accent1"/>
+          </a:effectRef>
+          <a:fontRef idx="minor">
+            <a:schemeClr val="lt1"/>
+          </a:fontRef>
+        </p:style>
+        <p:txBody>
+          <a:bodyPr rtlCol="0" anchor="ctr" wrap="square" lIns="109728" rIns="109728" tIns="54864" bIns="54864"/>
+          <a:lstStyle/>
+          <a:p>
+            <a:pPr algn="l">
+              <a:spcAft>
+                <a:spcPts val="600"/>
+              </a:spcAft>
+            </a:pPr>
+            <a:r>
+              <a:rPr sz="1400" b="1">
+                <a:solidFill>
+                  <a:srgbClr val="0B3D7A"/>
+                </a:solidFill>
+              </a:rPr>
+              <a:t>Diff after = rollback record</a:t>
+            </a:r>
+          </a:p>
+          <a:p>
+            <a:pPr algn="l">
+              <a:spcAft>
+                <a:spcPts val="600"/>
+              </a:spcAft>
+            </a:pPr>
+            <a:r>
+              <a:rPr sz="1100" b="0">
+                <a:solidFill>
+                  <a:srgbClr val="4C5D69"/>
+                </a:solidFill>
+              </a:rPr>
+              <a:t>inventory before against after: nothing else moved</a:t>
+            </a:r>
+          </a:p>
+        </p:txBody>
+      </p:sp>
+      <p:sp>
+        <p:nvSpPr>
+          <p:cNvPr id="58" name="Oval 57"/>
+          <p:cNvSpPr/>
+          <p:nvPr/>
+        </p:nvSpPr>
+        <p:spPr>
+          <a:xfrm>
+            <a:off x="14987016" y="6729984"/>
+            <a:ext cx="310896" cy="310896"/>
+          </a:xfrm>
+          <a:prstGeom prst="ellipse">
+            <a:avLst/>
+          </a:prstGeom>
+          <a:solidFill>
+            <a:srgbClr val="FFA418"/>
+          </a:solidFill>
+          <a:ln>
+            <a:noFill/>
+          </a:ln>
+          <a:effectLst/>
+        </p:spPr>
+        <p:style>
+          <a:lnRef idx="1">
+            <a:schemeClr val="accent1"/>
+          </a:lnRef>
+          <a:fillRef idx="3">
+            <a:schemeClr val="accent1"/>
+          </a:fillRef>
+          <a:effectRef idx="2">
+            <a:schemeClr val="accent1"/>
+          </a:effectRef>
+          <a:fontRef idx="minor">
+            <a:schemeClr val="lt1"/>
+          </a:fontRef>
+        </p:style>
+        <p:txBody>
+          <a:bodyPr rtlCol="0" anchor="ctr" wrap="square" lIns="0" rIns="0" tIns="54864" bIns="54864"/>
+          <a:lstStyle/>
+          <a:p>
+            <a:pPr algn="ctr">
+              <a:spcAft>
+                <a:spcPts val="600"/>
+              </a:spcAft>
+            </a:pPr>
+            <a:r>
+              <a:rPr sz="1000" b="1">
+                <a:solidFill>
+                  <a:srgbClr val="0B3D7A"/>
+                </a:solidFill>
+              </a:rPr>
+              <a:t>19</a:t>
+            </a:r>
+          </a:p>
+        </p:txBody>
+      </p:sp>
+      <p:sp>
+        <p:nvSpPr>
+          <p:cNvPr id="59" name="Rounded Rectangle 58"/>
+          <p:cNvSpPr/>
+          <p:nvPr/>
+        </p:nvSpPr>
+        <p:spPr>
+          <a:xfrm>
+            <a:off x="914400" y="9098280"/>
+            <a:ext cx="5852160" cy="960120"/>
+          </a:xfrm>
+          <a:prstGeom prst="roundRect">
+            <a:avLst>
+              <a:gd name="adj" fmla="val 10000"/>
+            </a:avLst>
+          </a:prstGeom>
+          <a:solidFill>
+            <a:srgbClr val="F5EFE9"/>
+          </a:solidFill>
+          <a:ln>
+            <a:noFill/>
+          </a:ln>
+          <a:effectLst/>
+        </p:spPr>
+        <p:style>
+          <a:lnRef idx="1">
+            <a:schemeClr val="accent1"/>
+          </a:lnRef>
+          <a:fillRef idx="3">
+            <a:schemeClr val="accent1"/>
+          </a:fillRef>
+          <a:effectRef idx="2">
+            <a:schemeClr val="accent1"/>
+          </a:effectRef>
+          <a:fontRef idx="minor">
+            <a:schemeClr val="lt1"/>
+          </a:fontRef>
+        </p:style>
+        <p:txBody>
+          <a:bodyPr rtlCol="0" anchor="ctr" wrap="square" lIns="109728" rIns="109728" tIns="54864" bIns="54864"/>
+          <a:lstStyle/>
+          <a:p>
+            <a:pPr algn="l">
+              <a:spcAft>
+                <a:spcPts val="600"/>
+              </a:spcAft>
+            </a:pPr>
+            <a:r>
+              <a:rPr sz="1400" b="1">
+                <a:solidFill>
+                  <a:srgbClr val="0B3D7A"/>
+                </a:solidFill>
+              </a:rPr>
+              <a:t>Additive-only domain patch</a:t>
+            </a:r>
+          </a:p>
+          <a:p>
+            <a:pPr algn="l">
+              <a:spcAft>
+                <a:spcPts val="600"/>
+              </a:spcAft>
+            </a:pPr>
+            <a:r>
+              <a:rPr sz="1100" b="0">
+                <a:solidFill>
+                  <a:srgbClr val="4C5D69"/>
+                </a:solidFill>
+              </a:rPr>
+              <a:t>the additions guard refuses any change to what is there; seven proofs per org; one-command restore</a:t>
+            </a:r>
+          </a:p>
+        </p:txBody>
+      </p:sp>
+      <p:sp>
+        <p:nvSpPr>
+          <p:cNvPr id="60" name="Rounded Rectangle 59"/>
+          <p:cNvSpPr/>
+          <p:nvPr/>
+        </p:nvSpPr>
+        <p:spPr>
+          <a:xfrm>
+            <a:off x="7132320" y="9098280"/>
+            <a:ext cx="5852160" cy="960120"/>
+          </a:xfrm>
+          <a:prstGeom prst="roundRect">
+            <a:avLst>
+              <a:gd name="adj" fmla="val 10000"/>
+            </a:avLst>
+          </a:prstGeom>
+          <a:solidFill>
+            <a:srgbClr val="F5EFE9"/>
+          </a:solidFill>
+          <a:ln>
+            <a:noFill/>
+          </a:ln>
+          <a:effectLst/>
+        </p:spPr>
+        <p:style>
+          <a:lnRef idx="1">
+            <a:schemeClr val="accent1"/>
+          </a:lnRef>
+          <a:fillRef idx="3">
+            <a:schemeClr val="accent1"/>
+          </a:fillRef>
+          <a:effectRef idx="2">
+            <a:schemeClr val="accent1"/>
+          </a:effectRef>
+          <a:fontRef idx="minor">
+            <a:schemeClr val="lt1"/>
+          </a:fontRef>
+        </p:style>
+        <p:txBody>
+          <a:bodyPr rtlCol="0" anchor="ctr" wrap="square" lIns="109728" rIns="109728" tIns="54864" bIns="54864"/>
+          <a:lstStyle/>
+          <a:p>
+            <a:pPr algn="l">
+              <a:spcAft>
+                <a:spcPts val="600"/>
+              </a:spcAft>
+            </a:pPr>
+            <a:r>
+              <a:rPr sz="1400" b="1">
+                <a:solidFill>
+                  <a:srgbClr val="0B3D7A"/>
+                </a:solidFill>
+              </a:rPr>
+              <a:t>Standardized Reports folder</a:t>
+            </a:r>
+          </a:p>
+          <a:p>
+            <a:pPr algn="l">
+              <a:spcAft>
+                <a:spcPts val="600"/>
+              </a:spcAft>
+            </a:pPr>
+            <a:r>
+              <a:rPr sz="1100" b="0">
+                <a:solidFill>
+                  <a:srgbClr val="4C5D69"/>
+                </a:solidFill>
+              </a:rPr>
+              <a:t>scheduled SQL reports in one folder; on Origin_DEV today, promoted to client orgs by the same tool when approved</a:t>
+            </a:r>
+          </a:p>
+        </p:txBody>
+      </p:sp>
+      <p:sp>
+        <p:nvSpPr>
+          <p:cNvPr id="61" name="Rounded Rectangle 60"/>
+          <p:cNvSpPr/>
+          <p:nvPr/>
+        </p:nvSpPr>
+        <p:spPr>
+          <a:xfrm>
+            <a:off x="13350240" y="9098280"/>
+            <a:ext cx="5852160" cy="960120"/>
+          </a:xfrm>
+          <a:prstGeom prst="roundRect">
+            <a:avLst>
+              <a:gd name="adj" fmla="val 10000"/>
+            </a:avLst>
+          </a:prstGeom>
+          <a:solidFill>
+            <a:srgbClr val="F5EFE9"/>
+          </a:solidFill>
+          <a:ln>
+            <a:noFill/>
+          </a:ln>
+          <a:effectLst/>
+        </p:spPr>
+        <p:style>
+          <a:lnRef idx="1">
+            <a:schemeClr val="accent1"/>
+          </a:lnRef>
+          <a:fillRef idx="3">
+            <a:schemeClr val="accent1"/>
+          </a:fillRef>
+          <a:effectRef idx="2">
+            <a:schemeClr val="accent1"/>
+          </a:effectRef>
+          <a:fontRef idx="minor">
+            <a:schemeClr val="lt1"/>
+          </a:fontRef>
+        </p:style>
+        <p:txBody>
+          <a:bodyPr rtlCol="0" anchor="ctr" wrap="square" lIns="109728" rIns="109728" tIns="54864" bIns="54864"/>
+          <a:lstStyle/>
+          <a:p>
+            <a:pPr algn="l">
+              <a:spcAft>
+                <a:spcPts val="600"/>
+              </a:spcAft>
+            </a:pPr>
+            <a:r>
+              <a:rPr sz="1400" b="1">
+                <a:solidFill>
+                  <a:srgbClr val="0B3D7A"/>
+                </a:solidFill>
+              </a:rPr>
               <a:t>Sweep after every change</a:t>
             </a:r>
           </a:p>
@@ -15536,13 +16890,51 @@
                 </a:solidFill>
               </a:rPr>
               <a:t>the sign-off is regenerated; the first red row is the alert</a:t>
+            </a:r>
+          </a:p>
+        </p:txBody>
+      </p:sp>
+      <p:sp>
+        <p:nvSpPr>
+          <p:cNvPr id="62" name="TextBox 61"/>
+          <p:cNvSpPr txBox="1"/>
+          <p:nvPr/>
+        </p:nvSpPr>
+        <p:spPr>
+          <a:xfrm>
+            <a:off x="12527280" y="1325880"/>
+            <a:ext cx="6675120" cy="320040"/>
+          </a:xfrm>
+          <a:prstGeom prst="rect">
+            <a:avLst/>
+          </a:prstGeom>
+          <a:noFill/>
+        </p:spPr>
+        <p:txBody>
+          <a:bodyPr wrap="square" anchor="t" lIns="0" rIns="0" tIns="54864" bIns="54864">
+            <a:spAutoFit/>
+          </a:bodyPr>
+          <a:lstStyle/>
+          <a:p>
+            <a:pPr algn="l">
+              <a:spcAft>
+                <a:spcPts val="600"/>
+              </a:spcAft>
+            </a:pPr>
+            <a:r>
+              <a:rPr sz="1200" b="1">
+                <a:solidFill>
+                  <a:srgbClr val="F5EFE9"/>
+                </a:solidFill>
+              </a:rPr>
+              <a:t>every later change re-enters at the client test org and repeats steps 10 to 19</a:t>
             </a:r>
           </a:p>
         </p:txBody>
       </p:sp>
       <p:cxnSp>
         <p:nvCxnSpPr>
-          <p:cNvPr id="38" name="Connector 37"/>
+          <p:cNvPr id="63" name="Connector 62"/>
           <p:cNvCxnSpPr/>
           <p:nvPr/>
         </p:nvCxnSpPr>
@@ -15578,7 +16970,7 @@
       </p:cxnSp>
       <p:cxnSp>
         <p:nvCxnSpPr>
-          <p:cNvPr id="39" name="Connector 38"/>
+          <p:cNvPr id="64" name="Connector 63"/>
           <p:cNvCxnSpPr/>
           <p:nvPr/>
         </p:nvCxnSpPr>
@@ -15614,14 +17006,14 @@
       </p:cxnSp>
       <p:cxnSp>
         <p:nvCxnSpPr>
-          <p:cNvPr id="40" name="Connector 39"/>
+          <p:cNvPr id="65" name="Connector 64"/>
           <p:cNvCxnSpPr/>
           <p:nvPr/>
         </p:nvCxnSpPr>
         <p:spPr>
           <a:xfrm>
             <a:off x="2962656" y="5852159"/>
-            <a:ext cx="0" cy="274321"/>
+            <a:ext cx="0" cy="228601"/>
           </a:xfrm>
           <a:prstGeom prst="line">
             <a:avLst/>
@@ -15650,84 +17042,14 @@
       </p:cxnSp>
       <p:cxnSp>
         <p:nvCxnSpPr>
-          <p:cNvPr id="41" name="Connector 40"/>
+          <p:cNvPr id="66" name="Connector 65"/>
           <p:cNvCxnSpPr/>
           <p:nvPr/>
         </p:nvCxnSpPr>
         <p:spPr>
-          <a:xfrm>
-            <a:off x="3739896" y="6537960"/>
-            <a:ext cx="1591056" cy="0"/>
-          </a:xfrm>
-          <a:prstGeom prst="line">
-            <a:avLst/>
-          </a:prstGeom>
-          <a:ln w="28575">
-            <a:solidFill>
-              <a:srgbClr val="F5EFE9"/>
-            </a:solidFill>
-          </a:ln>
-        </p:spPr>
-        <p:style>
-          <a:lnRef idx="2">
-            <a:schemeClr val="accent1"/>
-          </a:lnRef>
-          <a:fillRef idx="0">
-            <a:schemeClr val="accent1"/>
-          </a:fillRef>
-          <a:effectRef idx="1">
-            <a:schemeClr val="accent1"/>
-          </a:effectRef>
-          <a:fontRef idx="minor">
-            <a:schemeClr val="tx1"/>
-          </a:fontRef>
-        </p:style>
-      </p:cxnSp>
-      <p:cxnSp>
-        <p:nvCxnSpPr>
-          <p:cNvPr id="42" name="Connector 41"/>
-          <p:cNvCxnSpPr/>
-          <p:nvPr/>
-        </p:nvCxnSpPr>
-        <p:spPr>
-          <a:xfrm flipV="1">
-            <a:off x="5330952" y="2898648"/>
-            <a:ext cx="0" cy="3639312"/>
-          </a:xfrm>
-          <a:prstGeom prst="line">
-            <a:avLst/>
-          </a:prstGeom>
-          <a:ln w="28575">
-            <a:solidFill>
-              <a:srgbClr val="F5EFE9"/>
-            </a:solidFill>
-          </a:ln>
-        </p:spPr>
-        <p:style>
-          <a:lnRef idx="2">
-            <a:schemeClr val="accent1"/>
-          </a:lnRef>
-          <a:fillRef idx="0">
-            <a:schemeClr val="accent1"/>
-          </a:fillRef>
-          <a:effectRef idx="1">
-            <a:schemeClr val="accent1"/>
-          </a:effectRef>
-          <a:fontRef idx="minor">
-            <a:schemeClr val="tx1"/>
-          </a:fontRef>
-        </p:style>
-      </p:cxnSp>
-      <p:cxnSp>
-        <p:nvCxnSpPr>
-          <p:cNvPr id="43" name="Connector 42"/>
-          <p:cNvCxnSpPr/>
-          <p:nvPr/>
-        </p:nvCxnSpPr>
-        <p:spPr>
-          <a:xfrm>
-            <a:off x="5330952" y="2898648"/>
-            <a:ext cx="310896" cy="4572"/>
+          <a:xfrm flipH="1">
+            <a:off x="1975104" y="6492240"/>
+            <a:ext cx="210311" cy="0"/>
           </a:xfrm>
           <a:prstGeom prst="line">
             <a:avLst/>
@@ -15754,16 +17076,124 @@
           </a:fontRef>
         </p:style>
       </p:cxnSp>
+      <p:sp>
+        <p:nvSpPr>
+          <p:cNvPr id="67" name="TextBox 66"/>
+          <p:cNvSpPr txBox="1"/>
+          <p:nvPr/>
+        </p:nvSpPr>
+        <p:spPr>
+          <a:xfrm>
+            <a:off x="2171700" y="6108192"/>
+            <a:ext cx="2926080" cy="365760"/>
+          </a:xfrm>
+          <a:prstGeom prst="rect">
+            <a:avLst/>
+          </a:prstGeom>
+          <a:noFill/>
+        </p:spPr>
+        <p:txBody>
+          <a:bodyPr wrap="square" anchor="b" lIns="0" rIns="0" tIns="54864" bIns="54864">
+            <a:spAutoFit/>
+          </a:bodyPr>
+          <a:lstStyle/>
+          <a:p>
+            <a:pPr algn="l">
+              <a:spcAft>
+                <a:spcPts val="600"/>
+              </a:spcAft>
+            </a:pPr>
+            <a:r>
+              <a:rPr sz="1100" b="1">
+                <a:solidFill>
+                  <a:srgbClr val="F5EFE9"/>
+                </a:solidFill>
+              </a:rPr>
+              <a:t>no</a:t>
+            </a:r>
+          </a:p>
+        </p:txBody>
+      </p:sp>
       <p:cxnSp>
         <p:nvCxnSpPr>
-          <p:cNvPr id="44" name="Connector 43"/>
+          <p:cNvPr id="68" name="Connector 67"/>
           <p:cNvCxnSpPr/>
           <p:nvPr/>
         </p:nvCxnSpPr>
         <p:spPr>
           <a:xfrm>
-            <a:off x="7699248" y="3291840"/>
-            <a:ext cx="0" cy="137160"/>
+            <a:off x="3739896" y="6492240"/>
+            <a:ext cx="1591056" cy="0"/>
+          </a:xfrm>
+          <a:prstGeom prst="line">
+            <a:avLst/>
+          </a:prstGeom>
+          <a:ln w="28575">
+            <a:solidFill>
+              <a:srgbClr val="F5EFE9"/>
+            </a:solidFill>
+          </a:ln>
+        </p:spPr>
+        <p:style>
+          <a:lnRef idx="2">
+            <a:schemeClr val="accent1"/>
+          </a:lnRef>
+          <a:fillRef idx="0">
+            <a:schemeClr val="accent1"/>
+          </a:fillRef>
+          <a:effectRef idx="1">
+            <a:schemeClr val="accent1"/>
+          </a:effectRef>
+          <a:fontRef idx="minor">
+            <a:schemeClr val="tx1"/>
+          </a:fontRef>
+        </p:style>
+      </p:cxnSp>
+      <p:cxnSp>
+        <p:nvCxnSpPr>
+          <p:cNvPr id="69" name="Connector 68"/>
+          <p:cNvCxnSpPr/>
+          <p:nvPr/>
+        </p:nvCxnSpPr>
+        <p:spPr>
+          <a:xfrm flipV="1">
+            <a:off x="5330952" y="2903220"/>
+            <a:ext cx="0" cy="3589020"/>
+          </a:xfrm>
+          <a:prstGeom prst="line">
+            <a:avLst/>
+          </a:prstGeom>
+          <a:ln w="28575">
+            <a:solidFill>
+              <a:srgbClr val="F5EFE9"/>
+            </a:solidFill>
+          </a:ln>
+        </p:spPr>
+        <p:style>
+          <a:lnRef idx="2">
+            <a:schemeClr val="accent1"/>
+          </a:lnRef>
+          <a:fillRef idx="0">
+            <a:schemeClr val="accent1"/>
+          </a:fillRef>
+          <a:effectRef idx="1">
+            <a:schemeClr val="accent1"/>
+          </a:effectRef>
+          <a:fontRef idx="minor">
+            <a:schemeClr val="tx1"/>
+          </a:fontRef>
+        </p:style>
+      </p:cxnSp>
+      <p:cxnSp>
+        <p:nvCxnSpPr>
+          <p:cNvPr id="70" name="Connector 69"/>
+          <p:cNvCxnSpPr/>
+          <p:nvPr/>
+        </p:nvCxnSpPr>
+        <p:spPr>
+          <a:xfrm>
+            <a:off x="5330952" y="2903220"/>
+            <a:ext cx="310896" cy="0"/>
           </a:xfrm>
           <a:prstGeom prst="line">
             <a:avLst/>
@@ -15792,13 +17222,13 @@
       </p:cxnSp>
       <p:cxnSp>
         <p:nvCxnSpPr>
-          <p:cNvPr id="45" name="Connector 44"/>
+          <p:cNvPr id="71" name="Connector 70"/>
           <p:cNvCxnSpPr/>
           <p:nvPr/>
         </p:nvCxnSpPr>
         <p:spPr>
           <a:xfrm>
-            <a:off x="7699248" y="4206240"/>
+            <a:off x="7699248" y="3291840"/>
             <a:ext cx="0" cy="137160"/>
           </a:xfrm>
           <a:prstGeom prst="line">
@@ -15828,14 +17258,14 @@
       </p:cxnSp>
       <p:cxnSp>
         <p:nvCxnSpPr>
-          <p:cNvPr id="46" name="Connector 45"/>
+          <p:cNvPr id="72" name="Connector 71"/>
           <p:cNvCxnSpPr/>
           <p:nvPr/>
         </p:nvCxnSpPr>
         <p:spPr>
           <a:xfrm>
-            <a:off x="7699248" y="5212080"/>
-            <a:ext cx="0" cy="182880"/>
+            <a:off x="7699248" y="4206240"/>
+            <a:ext cx="0" cy="137160"/>
           </a:xfrm>
           <a:prstGeom prst="line">
             <a:avLst/>
@@ -15864,13 +17294,13 @@
       </p:cxnSp>
       <p:cxnSp>
         <p:nvCxnSpPr>
-          <p:cNvPr id="47" name="Connector 46"/>
+          <p:cNvPr id="73" name="Connector 72"/>
           <p:cNvCxnSpPr/>
           <p:nvPr/>
         </p:nvCxnSpPr>
         <p:spPr>
           <a:xfrm>
-            <a:off x="7699248" y="6217920"/>
+            <a:off x="7699248" y="5212080"/>
             <a:ext cx="0" cy="182880"/>
           </a:xfrm>
           <a:prstGeom prst="line">
@@ -15900,84 +17330,14 @@
       </p:cxnSp>
       <p:cxnSp>
         <p:nvCxnSpPr>
-          <p:cNvPr id="48" name="Connector 47"/>
+          <p:cNvPr id="74" name="Connector 73"/>
           <p:cNvCxnSpPr/>
           <p:nvPr/>
         </p:nvCxnSpPr>
         <p:spPr>
-          <a:xfrm flipV="1">
-            <a:off x="9756648" y="6784848"/>
-            <a:ext cx="310896" cy="4572"/>
-          </a:xfrm>
-          <a:prstGeom prst="line">
-            <a:avLst/>
-          </a:prstGeom>
-          <a:ln w="28575">
-            <a:solidFill>
-              <a:srgbClr val="F5EFE9"/>
-            </a:solidFill>
-          </a:ln>
-        </p:spPr>
-        <p:style>
-          <a:lnRef idx="2">
-            <a:schemeClr val="accent1"/>
-          </a:lnRef>
-          <a:fillRef idx="0">
-            <a:schemeClr val="accent1"/>
-          </a:fillRef>
-          <a:effectRef idx="1">
-            <a:schemeClr val="accent1"/>
-          </a:effectRef>
-          <a:fontRef idx="minor">
-            <a:schemeClr val="tx1"/>
-          </a:fontRef>
-        </p:style>
-      </p:cxnSp>
-      <p:cxnSp>
-        <p:nvCxnSpPr>
-          <p:cNvPr id="49" name="Connector 48"/>
-          <p:cNvCxnSpPr/>
-          <p:nvPr/>
-        </p:nvCxnSpPr>
-        <p:spPr>
-          <a:xfrm flipV="1">
-            <a:off x="10067544" y="2880360"/>
-            <a:ext cx="0" cy="3904488"/>
-          </a:xfrm>
-          <a:prstGeom prst="line">
-            <a:avLst/>
-          </a:prstGeom>
-          <a:ln w="28575">
-            <a:solidFill>
-              <a:srgbClr val="F5EFE9"/>
-            </a:solidFill>
-          </a:ln>
-        </p:spPr>
-        <p:style>
-          <a:lnRef idx="2">
-            <a:schemeClr val="accent1"/>
-          </a:lnRef>
-          <a:fillRef idx="0">
-            <a:schemeClr val="accent1"/>
-          </a:fillRef>
-          <a:effectRef idx="1">
-            <a:schemeClr val="accent1"/>
-          </a:effectRef>
-          <a:fontRef idx="minor">
-            <a:schemeClr val="tx1"/>
-          </a:fontRef>
-        </p:style>
-      </p:cxnSp>
-      <p:cxnSp>
-        <p:nvCxnSpPr>
-          <p:cNvPr id="50" name="Connector 49"/>
-          <p:cNvCxnSpPr/>
-          <p:nvPr/>
-        </p:nvCxnSpPr>
-        <p:spPr>
-          <a:xfrm>
-            <a:off x="10067544" y="2880360"/>
-            <a:ext cx="310896" cy="0"/>
+          <a:xfrm>
+            <a:off x="8476488" y="5806440"/>
+            <a:ext cx="73152" cy="0"/>
           </a:xfrm>
           <a:prstGeom prst="line">
             <a:avLst/>
@@ -16004,16 +17364,54 @@
           </a:fontRef>
         </p:style>
       </p:cxnSp>
+      <p:sp>
+        <p:nvSpPr>
+          <p:cNvPr id="75" name="TextBox 74"/>
+          <p:cNvSpPr txBox="1"/>
+          <p:nvPr/>
+        </p:nvSpPr>
+        <p:spPr>
+          <a:xfrm>
+            <a:off x="8604503" y="5422392"/>
+            <a:ext cx="2926080" cy="365760"/>
+          </a:xfrm>
+          <a:prstGeom prst="rect">
+            <a:avLst/>
+          </a:prstGeom>
+          <a:noFill/>
+        </p:spPr>
+        <p:txBody>
+          <a:bodyPr wrap="square" anchor="b" lIns="0" rIns="0" tIns="54864" bIns="54864">
+            <a:spAutoFit/>
+          </a:bodyPr>
+          <a:lstStyle/>
+          <a:p>
+            <a:pPr algn="l">
+              <a:spcAft>
+                <a:spcPts val="600"/>
+              </a:spcAft>
+            </a:pPr>
+            <a:r>
+              <a:rPr sz="1100" b="1">
+                <a:solidFill>
+                  <a:srgbClr val="F5EFE9"/>
+                </a:solidFill>
+              </a:rPr>
+              <a:t>no</a:t>
+            </a:r>
+          </a:p>
+        </p:txBody>
+      </p:sp>
       <p:cxnSp>
         <p:nvCxnSpPr>
-          <p:cNvPr id="51" name="Connector 50"/>
+          <p:cNvPr id="76" name="Connector 75"/>
           <p:cNvCxnSpPr/>
           <p:nvPr/>
         </p:nvCxnSpPr>
         <p:spPr>
           <a:xfrm>
-            <a:off x="12435840" y="3246120"/>
-            <a:ext cx="0" cy="137160"/>
+            <a:off x="7699248" y="6217920"/>
+            <a:ext cx="0" cy="182880"/>
           </a:xfrm>
           <a:prstGeom prst="line">
             <a:avLst/>
@@ -16042,14 +17440,84 @@
       </p:cxnSp>
       <p:cxnSp>
         <p:nvCxnSpPr>
-          <p:cNvPr id="52" name="Connector 51"/>
+          <p:cNvPr id="77" name="Connector 76"/>
           <p:cNvCxnSpPr/>
           <p:nvPr/>
         </p:nvCxnSpPr>
         <p:spPr>
           <a:xfrm>
-            <a:off x="12435840" y="4480560"/>
-            <a:ext cx="0" cy="137160"/>
+            <a:off x="9756648" y="6789420"/>
+            <a:ext cx="310896" cy="0"/>
+          </a:xfrm>
+          <a:prstGeom prst="line">
+            <a:avLst/>
+          </a:prstGeom>
+          <a:ln w="28575">
+            <a:solidFill>
+              <a:srgbClr val="F5EFE9"/>
+            </a:solidFill>
+          </a:ln>
+        </p:spPr>
+        <p:style>
+          <a:lnRef idx="2">
+            <a:schemeClr val="accent1"/>
+          </a:lnRef>
+          <a:fillRef idx="0">
+            <a:schemeClr val="accent1"/>
+          </a:fillRef>
+          <a:effectRef idx="1">
+            <a:schemeClr val="accent1"/>
+          </a:effectRef>
+          <a:fontRef idx="minor">
+            <a:schemeClr val="tx1"/>
+          </a:fontRef>
+        </p:style>
+      </p:cxnSp>
+      <p:cxnSp>
+        <p:nvCxnSpPr>
+          <p:cNvPr id="78" name="Connector 77"/>
+          <p:cNvCxnSpPr/>
+          <p:nvPr/>
+        </p:nvCxnSpPr>
+        <p:spPr>
+          <a:xfrm flipV="1">
+            <a:off x="10067544" y="3474720"/>
+            <a:ext cx="0" cy="3314700"/>
+          </a:xfrm>
+          <a:prstGeom prst="line">
+            <a:avLst/>
+          </a:prstGeom>
+          <a:ln w="28575">
+            <a:solidFill>
+              <a:srgbClr val="F5EFE9"/>
+            </a:solidFill>
+          </a:ln>
+        </p:spPr>
+        <p:style>
+          <a:lnRef idx="2">
+            <a:schemeClr val="accent1"/>
+          </a:lnRef>
+          <a:fillRef idx="0">
+            <a:schemeClr val="accent1"/>
+          </a:fillRef>
+          <a:effectRef idx="1">
+            <a:schemeClr val="accent1"/>
+          </a:effectRef>
+          <a:fontRef idx="minor">
+            <a:schemeClr val="tx1"/>
+          </a:fontRef>
+        </p:style>
+      </p:cxnSp>
+      <p:cxnSp>
+        <p:nvCxnSpPr>
+          <p:cNvPr id="79" name="Connector 78"/>
+          <p:cNvCxnSpPr/>
+          <p:nvPr/>
+        </p:nvCxnSpPr>
+        <p:spPr>
+          <a:xfrm>
+            <a:off x="10067544" y="3474720"/>
+            <a:ext cx="310896" cy="0"/>
           </a:xfrm>
           <a:prstGeom prst="line">
             <a:avLst/>
@@ -16078,13 +17546,13 @@
       </p:cxnSp>
       <p:cxnSp>
         <p:nvCxnSpPr>
-          <p:cNvPr id="53" name="Connector 52"/>
+          <p:cNvPr id="80" name="Connector 79"/>
           <p:cNvCxnSpPr/>
           <p:nvPr/>
         </p:nvCxnSpPr>
         <p:spPr>
           <a:xfrm>
-            <a:off x="12435840" y="5577840"/>
+            <a:off x="12435840" y="2971800"/>
             <a:ext cx="0" cy="137160"/>
           </a:xfrm>
           <a:prstGeom prst="line">
@@ -16114,14 +17582,14 @@
       </p:cxnSp>
       <p:cxnSp>
         <p:nvCxnSpPr>
-          <p:cNvPr id="54" name="Connector 53"/>
+          <p:cNvPr id="81" name="Connector 80"/>
           <p:cNvCxnSpPr/>
           <p:nvPr/>
         </p:nvCxnSpPr>
         <p:spPr>
           <a:xfrm>
-            <a:off x="12435840" y="6446520"/>
-            <a:ext cx="0" cy="137160"/>
+            <a:off x="12435840" y="3840480"/>
+            <a:ext cx="0" cy="137159"/>
           </a:xfrm>
           <a:prstGeom prst="line">
             <a:avLst/>
@@ -16150,84 +17618,14 @@
       </p:cxnSp>
       <p:cxnSp>
         <p:nvCxnSpPr>
-          <p:cNvPr id="55" name="Connector 54"/>
+          <p:cNvPr id="82" name="Connector 81"/>
           <p:cNvCxnSpPr/>
           <p:nvPr/>
         </p:nvCxnSpPr>
         <p:spPr>
           <a:xfrm>
-            <a:off x="14493240" y="7040880"/>
-            <a:ext cx="310896" cy="0"/>
-          </a:xfrm>
-          <a:prstGeom prst="line">
-            <a:avLst/>
-          </a:prstGeom>
-          <a:ln w="28575">
-            <a:solidFill>
-              <a:srgbClr val="F5EFE9"/>
-            </a:solidFill>
-          </a:ln>
-        </p:spPr>
-        <p:style>
-          <a:lnRef idx="2">
-            <a:schemeClr val="accent1"/>
-          </a:lnRef>
-          <a:fillRef idx="0">
-            <a:schemeClr val="accent1"/>
-          </a:fillRef>
-          <a:effectRef idx="1">
-            <a:schemeClr val="accent1"/>
-          </a:effectRef>
-          <a:fontRef idx="minor">
-            <a:schemeClr val="tx1"/>
-          </a:fontRef>
-        </p:style>
-      </p:cxnSp>
-      <p:cxnSp>
-        <p:nvCxnSpPr>
-          <p:cNvPr id="56" name="Connector 55"/>
-          <p:cNvCxnSpPr/>
-          <p:nvPr/>
-        </p:nvCxnSpPr>
-        <p:spPr>
-          <a:xfrm flipV="1">
-            <a:off x="14804136" y="2743200"/>
-            <a:ext cx="0" cy="4297680"/>
-          </a:xfrm>
-          <a:prstGeom prst="line">
-            <a:avLst/>
-          </a:prstGeom>
-          <a:ln w="28575">
-            <a:solidFill>
-              <a:srgbClr val="F5EFE9"/>
-            </a:solidFill>
-          </a:ln>
-        </p:spPr>
-        <p:style>
-          <a:lnRef idx="2">
-            <a:schemeClr val="accent1"/>
-          </a:lnRef>
-          <a:fillRef idx="0">
-            <a:schemeClr val="accent1"/>
-          </a:fillRef>
-          <a:effectRef idx="1">
-            <a:schemeClr val="accent1"/>
-          </a:effectRef>
-          <a:fontRef idx="minor">
-            <a:schemeClr val="tx1"/>
-          </a:fontRef>
-        </p:style>
-      </p:cxnSp>
-      <p:cxnSp>
-        <p:nvCxnSpPr>
-          <p:cNvPr id="57" name="Connector 56"/>
-          <p:cNvCxnSpPr/>
-          <p:nvPr/>
-        </p:nvCxnSpPr>
-        <p:spPr>
-          <a:xfrm>
-            <a:off x="14804136" y="2743200"/>
-            <a:ext cx="310896" cy="0"/>
+            <a:off x="12435840" y="5074920"/>
+            <a:ext cx="0" cy="137160"/>
           </a:xfrm>
           <a:prstGeom prst="line">
             <a:avLst/>
@@ -16256,14 +17654,14 @@
       </p:cxnSp>
       <p:cxnSp>
         <p:nvCxnSpPr>
-          <p:cNvPr id="58" name="Connector 57"/>
+          <p:cNvPr id="83" name="Connector 82"/>
           <p:cNvCxnSpPr/>
           <p:nvPr/>
         </p:nvCxnSpPr>
         <p:spPr>
           <a:xfrm>
-            <a:off x="17172432" y="2971800"/>
-            <a:ext cx="0" cy="137160"/>
+            <a:off x="13624559" y="5692140"/>
+            <a:ext cx="73152" cy="0"/>
           </a:xfrm>
           <a:prstGeom prst="line">
             <a:avLst/>
@@ -16290,15 +17688,53 @@
           </a:fontRef>
         </p:style>
       </p:cxnSp>
+      <p:sp>
+        <p:nvSpPr>
+          <p:cNvPr id="84" name="TextBox 83"/>
+          <p:cNvSpPr txBox="1"/>
+          <p:nvPr/>
+        </p:nvSpPr>
+        <p:spPr>
+          <a:xfrm>
+            <a:off x="13752575" y="5308092"/>
+            <a:ext cx="2926080" cy="365760"/>
+          </a:xfrm>
+          <a:prstGeom prst="rect">
+            <a:avLst/>
+          </a:prstGeom>
+          <a:noFill/>
+        </p:spPr>
+        <p:txBody>
+          <a:bodyPr wrap="square" anchor="b" lIns="0" rIns="0" tIns="54864" bIns="54864">
+            <a:spAutoFit/>
+          </a:bodyPr>
+          <a:lstStyle/>
+          <a:p>
+            <a:pPr algn="l">
+              <a:spcAft>
+                <a:spcPts val="600"/>
+              </a:spcAft>
+            </a:pPr>
+            <a:r>
+              <a:rPr sz="1100" b="1">
+                <a:solidFill>
+                  <a:srgbClr val="F5EFE9"/>
+                </a:solidFill>
+              </a:rPr>
+              <a:t>no</a:t>
+            </a:r>
+          </a:p>
+        </p:txBody>
+      </p:sp>
       <p:cxnSp>
         <p:nvCxnSpPr>
-          <p:cNvPr id="59" name="Connector 58"/>
+          <p:cNvPr id="85" name="Connector 84"/>
           <p:cNvCxnSpPr/>
           <p:nvPr/>
         </p:nvCxnSpPr>
         <p:spPr>
           <a:xfrm>
-            <a:off x="17172432" y="3794760"/>
+            <a:off x="12435840" y="6172200"/>
             <a:ext cx="0" cy="137160"/>
           </a:xfrm>
           <a:prstGeom prst="line">
@@ -16328,13 +17764,13 @@
       </p:cxnSp>
       <p:cxnSp>
         <p:nvCxnSpPr>
-          <p:cNvPr id="60" name="Connector 59"/>
+          <p:cNvPr id="86" name="Connector 85"/>
           <p:cNvCxnSpPr/>
           <p:nvPr/>
         </p:nvCxnSpPr>
         <p:spPr>
           <a:xfrm>
-            <a:off x="17172432" y="4937760"/>
+            <a:off x="12435840" y="7040880"/>
             <a:ext cx="0" cy="137160"/>
           </a:xfrm>
           <a:prstGeom prst="line">
@@ -16364,14 +17800,84 @@
       </p:cxnSp>
       <p:cxnSp>
         <p:nvCxnSpPr>
-          <p:cNvPr id="61" name="Connector 60"/>
+          <p:cNvPr id="87" name="Connector 86"/>
           <p:cNvCxnSpPr/>
           <p:nvPr/>
         </p:nvCxnSpPr>
         <p:spPr>
           <a:xfrm>
-            <a:off x="17172432" y="5897880"/>
-            <a:ext cx="0" cy="137160"/>
+            <a:off x="14493240" y="7635240"/>
+            <a:ext cx="310896" cy="0"/>
+          </a:xfrm>
+          <a:prstGeom prst="line">
+            <a:avLst/>
+          </a:prstGeom>
+          <a:ln w="28575">
+            <a:solidFill>
+              <a:srgbClr val="F5EFE9"/>
+            </a:solidFill>
+          </a:ln>
+        </p:spPr>
+        <p:style>
+          <a:lnRef idx="2">
+            <a:schemeClr val="accent1"/>
+          </a:lnRef>
+          <a:fillRef idx="0">
+            <a:schemeClr val="accent1"/>
+          </a:fillRef>
+          <a:effectRef idx="1">
+            <a:schemeClr val="accent1"/>
+          </a:effectRef>
+          <a:fontRef idx="minor">
+            <a:schemeClr val="tx1"/>
+          </a:fontRef>
+        </p:style>
+      </p:cxnSp>
+      <p:cxnSp>
+        <p:nvCxnSpPr>
+          <p:cNvPr id="88" name="Connector 87"/>
+          <p:cNvCxnSpPr/>
+          <p:nvPr/>
+        </p:nvCxnSpPr>
+        <p:spPr>
+          <a:xfrm flipV="1">
+            <a:off x="14804136" y="2743200"/>
+            <a:ext cx="0" cy="4892040"/>
+          </a:xfrm>
+          <a:prstGeom prst="line">
+            <a:avLst/>
+          </a:prstGeom>
+          <a:ln w="28575">
+            <a:solidFill>
+              <a:srgbClr val="F5EFE9"/>
+            </a:solidFill>
+          </a:ln>
+        </p:spPr>
+        <p:style>
+          <a:lnRef idx="2">
+            <a:schemeClr val="accent1"/>
+          </a:lnRef>
+          <a:fillRef idx="0">
+            <a:schemeClr val="accent1"/>
+          </a:fillRef>
+          <a:effectRef idx="1">
+            <a:schemeClr val="accent1"/>
+          </a:effectRef>
+          <a:fontRef idx="minor">
+            <a:schemeClr val="tx1"/>
+          </a:fontRef>
+        </p:style>
+      </p:cxnSp>
+      <p:cxnSp>
+        <p:nvCxnSpPr>
+          <p:cNvPr id="89" name="Connector 88"/>
+          <p:cNvCxnSpPr/>
+          <p:nvPr/>
+        </p:nvCxnSpPr>
+        <p:spPr>
+          <a:xfrm>
+            <a:off x="14804136" y="2743200"/>
+            <a:ext cx="310896" cy="0"/>
           </a:xfrm>
           <a:prstGeom prst="line">
             <a:avLst/>
@@ -16400,13 +17906,13 @@
       </p:cxnSp>
       <p:cxnSp>
         <p:nvCxnSpPr>
-          <p:cNvPr id="62" name="Connector 61"/>
+          <p:cNvPr id="90" name="Connector 89"/>
           <p:cNvCxnSpPr/>
           <p:nvPr/>
         </p:nvCxnSpPr>
         <p:spPr>
           <a:xfrm>
-            <a:off x="17172432" y="6720840"/>
+            <a:off x="17172432" y="2971800"/>
             <a:ext cx="0" cy="137160"/>
           </a:xfrm>
           <a:prstGeom prst="line">
@@ -16436,84 +17942,14 @@
       </p:cxnSp>
       <p:cxnSp>
         <p:nvCxnSpPr>
-          <p:cNvPr id="63" name="Connector 62"/>
+          <p:cNvPr id="91" name="Connector 90"/>
           <p:cNvCxnSpPr/>
           <p:nvPr/>
         </p:nvCxnSpPr>
         <p:spPr>
-          <a:xfrm flipH="1">
-            <a:off x="17007840" y="7635240"/>
-            <a:ext cx="164592" cy="301752"/>
-          </a:xfrm>
-          <a:prstGeom prst="line">
-            <a:avLst/>
-          </a:prstGeom>
-          <a:ln w="28575">
-            <a:solidFill>
-              <a:srgbClr val="F5EFE9"/>
-            </a:solidFill>
-          </a:ln>
-        </p:spPr>
-        <p:style>
-          <a:lnRef idx="2">
-            <a:schemeClr val="accent1"/>
-          </a:lnRef>
-          <a:fillRef idx="0">
-            <a:schemeClr val="accent1"/>
-          </a:fillRef>
-          <a:effectRef idx="1">
-            <a:schemeClr val="accent1"/>
-          </a:effectRef>
-          <a:fontRef idx="minor">
-            <a:schemeClr val="tx1"/>
-          </a:fontRef>
-        </p:style>
-      </p:cxnSp>
-      <p:cxnSp>
-        <p:nvCxnSpPr>
-          <p:cNvPr id="64" name="Connector 63"/>
-          <p:cNvCxnSpPr/>
-          <p:nvPr/>
-        </p:nvCxnSpPr>
-        <p:spPr>
-          <a:xfrm flipH="1">
-            <a:off x="16276320" y="7936992"/>
-            <a:ext cx="731520" cy="0"/>
-          </a:xfrm>
-          <a:prstGeom prst="line">
-            <a:avLst/>
-          </a:prstGeom>
-          <a:ln w="28575">
-            <a:solidFill>
-              <a:srgbClr val="F5EFE9"/>
-            </a:solidFill>
-          </a:ln>
-        </p:spPr>
-        <p:style>
-          <a:lnRef idx="2">
-            <a:schemeClr val="accent1"/>
-          </a:lnRef>
-          <a:fillRef idx="0">
-            <a:schemeClr val="accent1"/>
-          </a:fillRef>
-          <a:effectRef idx="1">
-            <a:schemeClr val="accent1"/>
-          </a:effectRef>
-          <a:fontRef idx="minor">
-            <a:schemeClr val="tx1"/>
-          </a:fontRef>
-        </p:style>
-      </p:cxnSp>
-      <p:cxnSp>
-        <p:nvCxnSpPr>
-          <p:cNvPr id="65" name="Connector 64"/>
-          <p:cNvCxnSpPr/>
-          <p:nvPr/>
-        </p:nvCxnSpPr>
-        <p:spPr>
-          <a:xfrm>
-            <a:off x="16276320" y="7936992"/>
-            <a:ext cx="0" cy="704088"/>
+          <a:xfrm>
+            <a:off x="17172432" y="3794760"/>
+            <a:ext cx="0" cy="137160"/>
           </a:xfrm>
           <a:prstGeom prst="line">
             <a:avLst/>
@@ -16540,15 +17976,444 @@
           </a:fontRef>
         </p:style>
       </p:cxnSp>
-      <p:sp>
-        <p:nvSpPr>
-          <p:cNvPr id="66" name="TextBox 65"/>
+      <p:cxnSp>
+        <p:nvCxnSpPr>
+          <p:cNvPr id="92" name="Connector 91"/>
+          <p:cNvCxnSpPr/>
+          <p:nvPr/>
+        </p:nvCxnSpPr>
+        <p:spPr>
+          <a:xfrm>
+            <a:off x="17172432" y="4937760"/>
+            <a:ext cx="0" cy="137160"/>
+          </a:xfrm>
+          <a:prstGeom prst="line">
+            <a:avLst/>
+          </a:prstGeom>
+          <a:ln w="28575">
+            <a:solidFill>
+              <a:srgbClr val="F5EFE9"/>
+            </a:solidFill>
+            <a:tailEnd type="triangle" w="med" len="med"/>
+          </a:ln>
+        </p:spPr>
+        <p:style>
+          <a:lnRef idx="2">
+            <a:schemeClr val="accent1"/>
+          </a:lnRef>
+          <a:fillRef idx="0">
+            <a:schemeClr val="accent1"/>
+          </a:fillRef>
+          <a:effectRef idx="1">
+            <a:schemeClr val="accent1"/>
+          </a:effectRef>
+          <a:fontRef idx="minor">
+            <a:schemeClr val="tx1"/>
+          </a:fontRef>
+        </p:style>
+      </p:cxnSp>
+      <p:cxnSp>
+        <p:nvCxnSpPr>
+          <p:cNvPr id="93" name="Connector 92"/>
+          <p:cNvCxnSpPr/>
+          <p:nvPr/>
+        </p:nvCxnSpPr>
+        <p:spPr>
+          <a:xfrm>
+            <a:off x="17949672" y="5486400"/>
+            <a:ext cx="73152" cy="0"/>
+          </a:xfrm>
+          <a:prstGeom prst="line">
+            <a:avLst/>
+          </a:prstGeom>
+          <a:ln w="28575">
+            <a:solidFill>
+              <a:srgbClr val="F5EFE9"/>
+            </a:solidFill>
+            <a:tailEnd type="triangle" w="med" len="med"/>
+          </a:ln>
+        </p:spPr>
+        <p:style>
+          <a:lnRef idx="2">
+            <a:schemeClr val="accent1"/>
+          </a:lnRef>
+          <a:fillRef idx="0">
+            <a:schemeClr val="accent1"/>
+          </a:fillRef>
+          <a:effectRef idx="1">
+            <a:schemeClr val="accent1"/>
+          </a:effectRef>
+          <a:fontRef idx="minor">
+            <a:schemeClr val="tx1"/>
+          </a:fontRef>
+        </p:style>
+      </p:cxnSp>
+      <p:sp>
+        <p:nvSpPr>
+          <p:cNvPr id="94" name="TextBox 93"/>
           <p:cNvSpPr txBox="1"/>
           <p:nvPr/>
         </p:nvSpPr>
         <p:spPr>
           <a:xfrm>
-            <a:off x="740664" y="10012680"/>
+            <a:off x="18077688" y="5102352"/>
+            <a:ext cx="2926080" cy="365760"/>
+          </a:xfrm>
+          <a:prstGeom prst="rect">
+            <a:avLst/>
+          </a:prstGeom>
+          <a:noFill/>
+        </p:spPr>
+        <p:txBody>
+          <a:bodyPr wrap="square" anchor="b" lIns="0" rIns="0" tIns="54864" bIns="54864">
+            <a:spAutoFit/>
+          </a:bodyPr>
+          <a:lstStyle/>
+          <a:p>
+            <a:pPr algn="l">
+              <a:spcAft>
+                <a:spcPts val="600"/>
+              </a:spcAft>
+            </a:pPr>
+            <a:r>
+              <a:rPr sz="1100" b="1">
+                <a:solidFill>
+                  <a:srgbClr val="F5EFE9"/>
+                </a:solidFill>
+              </a:rPr>
+              <a:t>no</a:t>
+            </a:r>
+          </a:p>
+        </p:txBody>
+      </p:sp>
+      <p:cxnSp>
+        <p:nvCxnSpPr>
+          <p:cNvPr id="95" name="Connector 94"/>
+          <p:cNvCxnSpPr/>
+          <p:nvPr/>
+        </p:nvCxnSpPr>
+        <p:spPr>
+          <a:xfrm>
+            <a:off x="17172432" y="5897880"/>
+            <a:ext cx="0" cy="137160"/>
+          </a:xfrm>
+          <a:prstGeom prst="line">
+            <a:avLst/>
+          </a:prstGeom>
+          <a:ln w="28575">
+            <a:solidFill>
+              <a:srgbClr val="F5EFE9"/>
+            </a:solidFill>
+            <a:tailEnd type="triangle" w="med" len="med"/>
+          </a:ln>
+        </p:spPr>
+        <p:style>
+          <a:lnRef idx="2">
+            <a:schemeClr val="accent1"/>
+          </a:lnRef>
+          <a:fillRef idx="0">
+            <a:schemeClr val="accent1"/>
+          </a:fillRef>
+          <a:effectRef idx="1">
+            <a:schemeClr val="accent1"/>
+          </a:effectRef>
+          <a:fontRef idx="minor">
+            <a:schemeClr val="tx1"/>
+          </a:fontRef>
+        </p:style>
+      </p:cxnSp>
+      <p:cxnSp>
+        <p:nvCxnSpPr>
+          <p:cNvPr id="96" name="Connector 95"/>
+          <p:cNvCxnSpPr/>
+          <p:nvPr/>
+        </p:nvCxnSpPr>
+        <p:spPr>
+          <a:xfrm>
+            <a:off x="17172432" y="6720840"/>
+            <a:ext cx="0" cy="137160"/>
+          </a:xfrm>
+          <a:prstGeom prst="line">
+            <a:avLst/>
+          </a:prstGeom>
+          <a:ln w="28575">
+            <a:solidFill>
+              <a:srgbClr val="F5EFE9"/>
+            </a:solidFill>
+            <a:tailEnd type="triangle" w="med" len="med"/>
+          </a:ln>
+        </p:spPr>
+        <p:style>
+          <a:lnRef idx="2">
+            <a:schemeClr val="accent1"/>
+          </a:lnRef>
+          <a:fillRef idx="0">
+            <a:schemeClr val="accent1"/>
+          </a:fillRef>
+          <a:effectRef idx="1">
+            <a:schemeClr val="accent1"/>
+          </a:effectRef>
+          <a:fontRef idx="minor">
+            <a:schemeClr val="tx1"/>
+          </a:fontRef>
+        </p:style>
+      </p:cxnSp>
+      <p:cxnSp>
+        <p:nvCxnSpPr>
+          <p:cNvPr id="97" name="Connector 96"/>
+          <p:cNvCxnSpPr/>
+          <p:nvPr/>
+        </p:nvCxnSpPr>
+        <p:spPr>
+          <a:xfrm>
+            <a:off x="17172432" y="7635240"/>
+            <a:ext cx="0" cy="777240"/>
+          </a:xfrm>
+          <a:prstGeom prst="line">
+            <a:avLst/>
+          </a:prstGeom>
+          <a:ln w="28575">
+            <a:solidFill>
+              <a:srgbClr val="F5EFE9"/>
+            </a:solidFill>
+          </a:ln>
+        </p:spPr>
+        <p:style>
+          <a:lnRef idx="2">
+            <a:schemeClr val="accent1"/>
+          </a:lnRef>
+          <a:fillRef idx="0">
+            <a:schemeClr val="accent1"/>
+          </a:fillRef>
+          <a:effectRef idx="1">
+            <a:schemeClr val="accent1"/>
+          </a:effectRef>
+          <a:fontRef idx="minor">
+            <a:schemeClr val="tx1"/>
+          </a:fontRef>
+        </p:style>
+      </p:cxnSp>
+      <p:cxnSp>
+        <p:nvCxnSpPr>
+          <p:cNvPr id="98" name="Connector 97"/>
+          <p:cNvCxnSpPr/>
+          <p:nvPr/>
+        </p:nvCxnSpPr>
+        <p:spPr>
+          <a:xfrm flipH="1">
+            <a:off x="16276320" y="8412480"/>
+            <a:ext cx="896112" cy="0"/>
+          </a:xfrm>
+          <a:prstGeom prst="line">
+            <a:avLst/>
+          </a:prstGeom>
+          <a:ln w="28575">
+            <a:solidFill>
+              <a:srgbClr val="F5EFE9"/>
+            </a:solidFill>
+          </a:ln>
+        </p:spPr>
+        <p:style>
+          <a:lnRef idx="2">
+            <a:schemeClr val="accent1"/>
+          </a:lnRef>
+          <a:fillRef idx="0">
+            <a:schemeClr val="accent1"/>
+          </a:fillRef>
+          <a:effectRef idx="1">
+            <a:schemeClr val="accent1"/>
+          </a:effectRef>
+          <a:fontRef idx="minor">
+            <a:schemeClr val="tx1"/>
+          </a:fontRef>
+        </p:style>
+      </p:cxnSp>
+      <p:cxnSp>
+        <p:nvCxnSpPr>
+          <p:cNvPr id="99" name="Connector 98"/>
+          <p:cNvCxnSpPr/>
+          <p:nvPr/>
+        </p:nvCxnSpPr>
+        <p:spPr>
+          <a:xfrm>
+            <a:off x="16276320" y="8412480"/>
+            <a:ext cx="0" cy="685800"/>
+          </a:xfrm>
+          <a:prstGeom prst="line">
+            <a:avLst/>
+          </a:prstGeom>
+          <a:ln w="28575">
+            <a:solidFill>
+              <a:srgbClr val="F5EFE9"/>
+            </a:solidFill>
+            <a:tailEnd type="triangle" w="med" len="med"/>
+          </a:ln>
+        </p:spPr>
+        <p:style>
+          <a:lnRef idx="2">
+            <a:schemeClr val="accent1"/>
+          </a:lnRef>
+          <a:fillRef idx="0">
+            <a:schemeClr val="accent1"/>
+          </a:fillRef>
+          <a:effectRef idx="1">
+            <a:schemeClr val="accent1"/>
+          </a:effectRef>
+          <a:fontRef idx="minor">
+            <a:schemeClr val="tx1"/>
+          </a:fontRef>
+        </p:style>
+      </p:cxnSp>
+      <p:cxnSp>
+        <p:nvCxnSpPr>
+          <p:cNvPr id="100" name="Connector 99"/>
+          <p:cNvCxnSpPr/>
+          <p:nvPr/>
+        </p:nvCxnSpPr>
+        <p:spPr>
+          <a:xfrm>
+            <a:off x="19202400" y="9578340"/>
+            <a:ext cx="457200" cy="0"/>
+          </a:xfrm>
+          <a:prstGeom prst="line">
+            <a:avLst/>
+          </a:prstGeom>
+          <a:ln w="28575">
+            <a:solidFill>
+              <a:srgbClr val="F5EFE9"/>
+            </a:solidFill>
+          </a:ln>
+        </p:spPr>
+        <p:style>
+          <a:lnRef idx="2">
+            <a:schemeClr val="accent1"/>
+          </a:lnRef>
+          <a:fillRef idx="0">
+            <a:schemeClr val="accent1"/>
+          </a:fillRef>
+          <a:effectRef idx="1">
+            <a:schemeClr val="accent1"/>
+          </a:effectRef>
+          <a:fontRef idx="minor">
+            <a:schemeClr val="tx1"/>
+          </a:fontRef>
+        </p:style>
+      </p:cxnSp>
+      <p:cxnSp>
+        <p:nvCxnSpPr>
+          <p:cNvPr id="101" name="Connector 100"/>
+          <p:cNvCxnSpPr/>
+          <p:nvPr/>
+        </p:nvCxnSpPr>
+        <p:spPr>
+          <a:xfrm flipV="1">
+            <a:off x="19659600" y="1691640"/>
+            <a:ext cx="0" cy="7886700"/>
+          </a:xfrm>
+          <a:prstGeom prst="line">
+            <a:avLst/>
+          </a:prstGeom>
+          <a:ln w="28575">
+            <a:solidFill>
+              <a:srgbClr val="F5EFE9"/>
+            </a:solidFill>
+          </a:ln>
+        </p:spPr>
+        <p:style>
+          <a:lnRef idx="2">
+            <a:schemeClr val="accent1"/>
+          </a:lnRef>
+          <a:fillRef idx="0">
+            <a:schemeClr val="accent1"/>
+          </a:fillRef>
+          <a:effectRef idx="1">
+            <a:schemeClr val="accent1"/>
+          </a:effectRef>
+          <a:fontRef idx="minor">
+            <a:schemeClr val="tx1"/>
+          </a:fontRef>
+        </p:style>
+      </p:cxnSp>
+      <p:cxnSp>
+        <p:nvCxnSpPr>
+          <p:cNvPr id="102" name="Connector 101"/>
+          <p:cNvCxnSpPr/>
+          <p:nvPr/>
+        </p:nvCxnSpPr>
+        <p:spPr>
+          <a:xfrm flipH="1">
+            <a:off x="12435840" y="1691640"/>
+            <a:ext cx="7223760" cy="0"/>
+          </a:xfrm>
+          <a:prstGeom prst="line">
+            <a:avLst/>
+          </a:prstGeom>
+          <a:ln w="28575">
+            <a:solidFill>
+              <a:srgbClr val="F5EFE9"/>
+            </a:solidFill>
+          </a:ln>
+        </p:spPr>
+        <p:style>
+          <a:lnRef idx="2">
+            <a:schemeClr val="accent1"/>
+          </a:lnRef>
+          <a:fillRef idx="0">
+            <a:schemeClr val="accent1"/>
+          </a:fillRef>
+          <a:effectRef idx="1">
+            <a:schemeClr val="accent1"/>
+          </a:effectRef>
+          <a:fontRef idx="minor">
+            <a:schemeClr val="tx1"/>
+          </a:fontRef>
+        </p:style>
+      </p:cxnSp>
+      <p:cxnSp>
+        <p:nvCxnSpPr>
+          <p:cNvPr id="103" name="Connector 102"/>
+          <p:cNvCxnSpPr/>
+          <p:nvPr/>
+        </p:nvCxnSpPr>
+        <p:spPr>
+          <a:xfrm>
+            <a:off x="12435840" y="1691640"/>
+            <a:ext cx="0" cy="822960"/>
+          </a:xfrm>
+          <a:prstGeom prst="line">
+            <a:avLst/>
+          </a:prstGeom>
+          <a:ln w="28575">
+            <a:solidFill>
+              <a:srgbClr val="F5EFE9"/>
+            </a:solidFill>
+            <a:tailEnd type="triangle" w="med" len="med"/>
+          </a:ln>
+        </p:spPr>
+        <p:style>
+          <a:lnRef idx="2">
+            <a:schemeClr val="accent1"/>
+          </a:lnRef>
+          <a:fillRef idx="0">
+            <a:schemeClr val="accent1"/>
+          </a:fillRef>
+          <a:effectRef idx="1">
+            <a:schemeClr val="accent1"/>
+          </a:effectRef>
+          <a:fontRef idx="minor">
+            <a:schemeClr val="tx1"/>
+          </a:fontRef>
+        </p:style>
+      </p:cxnSp>
+      <p:sp>
+        <p:nvSpPr>
+          <p:cNvPr id="104" name="TextBox 103"/>
+          <p:cNvSpPr txBox="1"/>
+          <p:nvPr/>
+        </p:nvSpPr>
+        <p:spPr>
+          <a:xfrm>
+            <a:off x="740664" y="10332720"/>
             <a:ext cx="18653760" cy="457200"/>
           </a:xfrm>
           <a:prstGeom prst="rect">
@@ -16573,7 +18438,7 @@
                   <a:srgbClr val="F5EFE9"/>
                 </a:solidFill>
               </a:rPr>
-              <a:t>Orange diamonds are gates: a failed gate stops the run and names the rollback. The Workstreams tree is never moved; the offering is a curated copy promoted org by org.</a:t>
+              <a:t>Orange diamonds are gates: a 'no' stops the run and names the rollback. Numbers are the order of one full promotion. The Workstreams tree is never moved; the offering is a curated copy promoted org by org.</a:t>
             </a:r>
           </a:p>
         </p:txBody>
@@ -32970,7 +34835,7 @@
                   <a:srgbClr val="F5EFE9"/>
                 </a:solidFill>
               </a:rPr>
-              <a:t>Submit 8 baselines as parallel scheduler jobs</a:t>
+              <a:t>5. Submit 8 baselines as parallel scheduler jobs</a:t>
             </a:r>
           </a:p>
           <a:p>
@@ -33084,7 +34949,7 @@
                   <a:srgbClr val="F5EFE9"/>
                 </a:solidFill>
               </a:rPr>
-              <a:t>created in steps 2 and 3, validated and gated before anything is scheduled; each stack feeds the domain chip beneath it</a:t>
+              <a:t>created in steps 2 and 3, validated at step 7 before anything is scheduled; each outlined stack feeds the domain chip beneath it</a:t>
             </a:r>
           </a:p>
         </p:txBody>
@@ -33092,6 +34957,594 @@
       <p:sp>
         <p:nvSpPr>
           <p:cNvPr id="9" name="Rounded Rectangle 8"/>
+          <p:cNvSpPr/>
+          <p:nvPr/>
+        </p:nvSpPr>
+        <p:spPr>
+          <a:xfrm>
+            <a:off x="868680" y="6355080"/>
+            <a:ext cx="2103120" cy="2377440"/>
+          </a:xfrm>
+          <a:prstGeom prst="roundRect">
+            <a:avLst>
+              <a:gd name="adj" fmla="val 4000"/>
+            </a:avLst>
+          </a:prstGeom>
+          <a:noFill/>
+          <a:ln w="19050">
+            <a:solidFill>
+              <a:srgbClr val="F5EFE9"/>
+            </a:solidFill>
+          </a:ln>
+          <a:effectLst/>
+        </p:spPr>
+        <p:style>
+          <a:lnRef idx="1">
+            <a:schemeClr val="accent1"/>
+          </a:lnRef>
+          <a:fillRef idx="3">
+            <a:schemeClr val="accent1"/>
+          </a:fillRef>
+          <a:effectRef idx="2">
+            <a:schemeClr val="accent1"/>
+          </a:effectRef>
+          <a:fontRef idx="minor">
+            <a:schemeClr val="lt1"/>
+          </a:fontRef>
+        </p:style>
+        <p:txBody>
+          <a:bodyPr rtlCol="0" anchor="ctr"/>
+          <a:lstStyle/>
+          <a:p>
+            <a:pPr algn="ctr"/>
+          </a:p>
+        </p:txBody>
+      </p:sp>
+      <p:sp>
+        <p:nvSpPr>
+          <p:cNvPr id="10" name="TextBox 9"/>
+          <p:cNvSpPr txBox="1"/>
+          <p:nvPr/>
+        </p:nvSpPr>
+        <p:spPr>
+          <a:xfrm>
+            <a:off x="1033271" y="6400800"/>
+            <a:ext cx="1773936" cy="411480"/>
+          </a:xfrm>
+          <a:prstGeom prst="rect">
+            <a:avLst/>
+          </a:prstGeom>
+          <a:noFill/>
+        </p:spPr>
+        <p:txBody>
+          <a:bodyPr wrap="square" anchor="t" lIns="0" rIns="0" tIns="54864" bIns="54864">
+            <a:spAutoFit/>
+          </a:bodyPr>
+          <a:lstStyle/>
+          <a:p>
+            <a:pPr algn="l">
+              <a:spcAft>
+                <a:spcPts val="600"/>
+              </a:spcAft>
+            </a:pPr>
+            <a:r>
+              <a:rPr sz="1400" b="1">
+                <a:solidFill>
+                  <a:srgbClr val="F5EFE9"/>
+                </a:solidFill>
+              </a:rPr>
+              <a:t>Finance tables</a:t>
+            </a:r>
+          </a:p>
+        </p:txBody>
+      </p:sp>
+      <p:sp>
+        <p:nvSpPr>
+          <p:cNvPr id="11" name="Rounded Rectangle 10"/>
+          <p:cNvSpPr/>
+          <p:nvPr/>
+        </p:nvSpPr>
+        <p:spPr>
+          <a:xfrm>
+            <a:off x="3108960" y="6355080"/>
+            <a:ext cx="2103120" cy="2377440"/>
+          </a:xfrm>
+          <a:prstGeom prst="roundRect">
+            <a:avLst>
+              <a:gd name="adj" fmla="val 4000"/>
+            </a:avLst>
+          </a:prstGeom>
+          <a:noFill/>
+          <a:ln w="19050">
+            <a:solidFill>
+              <a:srgbClr val="F5EFE9"/>
+            </a:solidFill>
+          </a:ln>
+          <a:effectLst/>
+        </p:spPr>
+        <p:style>
+          <a:lnRef idx="1">
+            <a:schemeClr val="accent1"/>
+          </a:lnRef>
+          <a:fillRef idx="3">
+            <a:schemeClr val="accent1"/>
+          </a:fillRef>
+          <a:effectRef idx="2">
+            <a:schemeClr val="accent1"/>
+          </a:effectRef>
+          <a:fontRef idx="minor">
+            <a:schemeClr val="lt1"/>
+          </a:fontRef>
+        </p:style>
+        <p:txBody>
+          <a:bodyPr rtlCol="0" anchor="ctr"/>
+          <a:lstStyle/>
+          <a:p>
+            <a:pPr algn="ctr"/>
+          </a:p>
+        </p:txBody>
+      </p:sp>
+      <p:sp>
+        <p:nvSpPr>
+          <p:cNvPr id="12" name="TextBox 11"/>
+          <p:cNvSpPr txBox="1"/>
+          <p:nvPr/>
+        </p:nvSpPr>
+        <p:spPr>
+          <a:xfrm>
+            <a:off x="3273552" y="6400800"/>
+            <a:ext cx="1773936" cy="411480"/>
+          </a:xfrm>
+          <a:prstGeom prst="rect">
+            <a:avLst/>
+          </a:prstGeom>
+          <a:noFill/>
+        </p:spPr>
+        <p:txBody>
+          <a:bodyPr wrap="square" anchor="t" lIns="0" rIns="0" tIns="54864" bIns="54864">
+            <a:spAutoFit/>
+          </a:bodyPr>
+          <a:lstStyle/>
+          <a:p>
+            <a:pPr algn="l">
+              <a:spcAft>
+                <a:spcPts val="600"/>
+              </a:spcAft>
+            </a:pPr>
+            <a:r>
+              <a:rPr sz="1400" b="1">
+                <a:solidFill>
+                  <a:srgbClr val="F5EFE9"/>
+                </a:solidFill>
+              </a:rPr>
+              <a:t>Billing tables</a:t>
+            </a:r>
+          </a:p>
+        </p:txBody>
+      </p:sp>
+      <p:sp>
+        <p:nvSpPr>
+          <p:cNvPr id="13" name="Rounded Rectangle 12"/>
+          <p:cNvSpPr/>
+          <p:nvPr/>
+        </p:nvSpPr>
+        <p:spPr>
+          <a:xfrm>
+            <a:off x="5349240" y="6355080"/>
+            <a:ext cx="2103120" cy="2377440"/>
+          </a:xfrm>
+          <a:prstGeom prst="roundRect">
+            <a:avLst>
+              <a:gd name="adj" fmla="val 4000"/>
+            </a:avLst>
+          </a:prstGeom>
+          <a:noFill/>
+          <a:ln w="19050">
+            <a:solidFill>
+              <a:srgbClr val="F5EFE9"/>
+            </a:solidFill>
+          </a:ln>
+          <a:effectLst/>
+        </p:spPr>
+        <p:style>
+          <a:lnRef idx="1">
+            <a:schemeClr val="accent1"/>
+          </a:lnRef>
+          <a:fillRef idx="3">
+            <a:schemeClr val="accent1"/>
+          </a:fillRef>
+          <a:effectRef idx="2">
+            <a:schemeClr val="accent1"/>
+          </a:effectRef>
+          <a:fontRef idx="minor">
+            <a:schemeClr val="lt1"/>
+          </a:fontRef>
+        </p:style>
+        <p:txBody>
+          <a:bodyPr rtlCol="0" anchor="ctr"/>
+          <a:lstStyle/>
+          <a:p>
+            <a:pPr algn="ctr"/>
+          </a:p>
+        </p:txBody>
+      </p:sp>
+      <p:sp>
+        <p:nvSpPr>
+          <p:cNvPr id="14" name="TextBox 13"/>
+          <p:cNvSpPr txBox="1"/>
+          <p:nvPr/>
+        </p:nvSpPr>
+        <p:spPr>
+          <a:xfrm>
+            <a:off x="5513831" y="6400800"/>
+            <a:ext cx="1773936" cy="411480"/>
+          </a:xfrm>
+          <a:prstGeom prst="rect">
+            <a:avLst/>
+          </a:prstGeom>
+          <a:noFill/>
+        </p:spPr>
+        <p:txBody>
+          <a:bodyPr wrap="square" anchor="t" lIns="0" rIns="0" tIns="54864" bIns="54864">
+            <a:spAutoFit/>
+          </a:bodyPr>
+          <a:lstStyle/>
+          <a:p>
+            <a:pPr algn="l">
+              <a:spcAft>
+                <a:spcPts val="600"/>
+              </a:spcAft>
+            </a:pPr>
+            <a:r>
+              <a:rPr sz="1400" b="1">
+                <a:solidFill>
+                  <a:srgbClr val="F5EFE9"/>
+                </a:solidFill>
+              </a:rPr>
+              <a:t>Meter Ops tables</a:t>
+            </a:r>
+          </a:p>
+        </p:txBody>
+      </p:sp>
+      <p:sp>
+        <p:nvSpPr>
+          <p:cNvPr id="15" name="Rounded Rectangle 14"/>
+          <p:cNvSpPr/>
+          <p:nvPr/>
+        </p:nvSpPr>
+        <p:spPr>
+          <a:xfrm>
+            <a:off x="7863840" y="6355080"/>
+            <a:ext cx="2377440" cy="2377440"/>
+          </a:xfrm>
+          <a:prstGeom prst="roundRect">
+            <a:avLst>
+              <a:gd name="adj" fmla="val 4000"/>
+            </a:avLst>
+          </a:prstGeom>
+          <a:noFill/>
+          <a:ln w="19050">
+            <a:solidFill>
+              <a:srgbClr val="F5EFE9"/>
+            </a:solidFill>
+          </a:ln>
+          <a:effectLst/>
+        </p:spPr>
+        <p:style>
+          <a:lnRef idx="1">
+            <a:schemeClr val="accent1"/>
+          </a:lnRef>
+          <a:fillRef idx="3">
+            <a:schemeClr val="accent1"/>
+          </a:fillRef>
+          <a:effectRef idx="2">
+            <a:schemeClr val="accent1"/>
+          </a:effectRef>
+          <a:fontRef idx="minor">
+            <a:schemeClr val="lt1"/>
+          </a:fontRef>
+        </p:style>
+        <p:txBody>
+          <a:bodyPr rtlCol="0" anchor="ctr"/>
+          <a:lstStyle/>
+          <a:p>
+            <a:pPr algn="ctr"/>
+          </a:p>
+        </p:txBody>
+      </p:sp>
+      <p:sp>
+        <p:nvSpPr>
+          <p:cNvPr id="16" name="TextBox 15"/>
+          <p:cNvSpPr txBox="1"/>
+          <p:nvPr/>
+        </p:nvSpPr>
+        <p:spPr>
+          <a:xfrm>
+            <a:off x="8028431" y="6400800"/>
+            <a:ext cx="2048256" cy="411480"/>
+          </a:xfrm>
+          <a:prstGeom prst="rect">
+            <a:avLst/>
+          </a:prstGeom>
+          <a:noFill/>
+        </p:spPr>
+        <p:txBody>
+          <a:bodyPr wrap="square" anchor="t" lIns="0" rIns="0" tIns="54864" bIns="54864">
+            <a:spAutoFit/>
+          </a:bodyPr>
+          <a:lstStyle/>
+          <a:p>
+            <a:pPr algn="l">
+              <a:spcAft>
+                <a:spcPts val="600"/>
+              </a:spcAft>
+            </a:pPr>
+            <a:r>
+              <a:rPr sz="1400" b="1">
+                <a:solidFill>
+                  <a:srgbClr val="F5EFE9"/>
+                </a:solidFill>
+              </a:rPr>
+              <a:t>Debt Mgmt objects</a:t>
+            </a:r>
+          </a:p>
+        </p:txBody>
+      </p:sp>
+      <p:sp>
+        <p:nvSpPr>
+          <p:cNvPr id="17" name="Rounded Rectangle 16"/>
+          <p:cNvSpPr/>
+          <p:nvPr/>
+        </p:nvSpPr>
+        <p:spPr>
+          <a:xfrm>
+            <a:off x="10515600" y="6355080"/>
+            <a:ext cx="2971800" cy="2377440"/>
+          </a:xfrm>
+          <a:prstGeom prst="roundRect">
+            <a:avLst>
+              <a:gd name="adj" fmla="val 4000"/>
+            </a:avLst>
+          </a:prstGeom>
+          <a:noFill/>
+          <a:ln w="19050">
+            <a:solidFill>
+              <a:srgbClr val="F5EFE9"/>
+            </a:solidFill>
+          </a:ln>
+          <a:effectLst/>
+        </p:spPr>
+        <p:style>
+          <a:lnRef idx="1">
+            <a:schemeClr val="accent1"/>
+          </a:lnRef>
+          <a:fillRef idx="3">
+            <a:schemeClr val="accent1"/>
+          </a:fillRef>
+          <a:effectRef idx="2">
+            <a:schemeClr val="accent1"/>
+          </a:effectRef>
+          <a:fontRef idx="minor">
+            <a:schemeClr val="lt1"/>
+          </a:fontRef>
+        </p:style>
+        <p:txBody>
+          <a:bodyPr rtlCol="0" anchor="ctr"/>
+          <a:lstStyle/>
+          <a:p>
+            <a:pPr algn="ctr"/>
+          </a:p>
+        </p:txBody>
+      </p:sp>
+      <p:sp>
+        <p:nvSpPr>
+          <p:cNvPr id="18" name="TextBox 17"/>
+          <p:cNvSpPr txBox="1"/>
+          <p:nvPr/>
+        </p:nvSpPr>
+        <p:spPr>
+          <a:xfrm>
+            <a:off x="10680192" y="6400800"/>
+            <a:ext cx="2642616" cy="411480"/>
+          </a:xfrm>
+          <a:prstGeom prst="rect">
+            <a:avLst/>
+          </a:prstGeom>
+          <a:noFill/>
+        </p:spPr>
+        <p:txBody>
+          <a:bodyPr wrap="square" anchor="t" lIns="0" rIns="0" tIns="54864" bIns="54864">
+            <a:spAutoFit/>
+          </a:bodyPr>
+          <a:lstStyle/>
+          <a:p>
+            <a:pPr algn="l">
+              <a:spcAft>
+                <a:spcPts val="600"/>
+              </a:spcAft>
+            </a:pPr>
+            <a:r>
+              <a:rPr sz="1400" b="1">
+                <a:solidFill>
+                  <a:srgbClr val="F5EFE9"/>
+                </a:solidFill>
+              </a:rPr>
+              <a:t>Meter Ops views</a:t>
+            </a:r>
+          </a:p>
+        </p:txBody>
+      </p:sp>
+      <p:sp>
+        <p:nvSpPr>
+          <p:cNvPr id="19" name="Rounded Rectangle 18"/>
+          <p:cNvSpPr/>
+          <p:nvPr/>
+        </p:nvSpPr>
+        <p:spPr>
+          <a:xfrm>
+            <a:off x="13716000" y="6355080"/>
+            <a:ext cx="3063240" cy="2377440"/>
+          </a:xfrm>
+          <a:prstGeom prst="roundRect">
+            <a:avLst>
+              <a:gd name="adj" fmla="val 4000"/>
+            </a:avLst>
+          </a:prstGeom>
+          <a:noFill/>
+          <a:ln w="19050">
+            <a:solidFill>
+              <a:srgbClr val="F5EFE9"/>
+            </a:solidFill>
+          </a:ln>
+          <a:effectLst/>
+        </p:spPr>
+        <p:style>
+          <a:lnRef idx="1">
+            <a:schemeClr val="accent1"/>
+          </a:lnRef>
+          <a:fillRef idx="3">
+            <a:schemeClr val="accent1"/>
+          </a:fillRef>
+          <a:effectRef idx="2">
+            <a:schemeClr val="accent1"/>
+          </a:effectRef>
+          <a:fontRef idx="minor">
+            <a:schemeClr val="lt1"/>
+          </a:fontRef>
+        </p:style>
+        <p:txBody>
+          <a:bodyPr rtlCol="0" anchor="ctr"/>
+          <a:lstStyle/>
+          <a:p>
+            <a:pPr algn="ctr"/>
+          </a:p>
+        </p:txBody>
+      </p:sp>
+      <p:sp>
+        <p:nvSpPr>
+          <p:cNvPr id="20" name="TextBox 19"/>
+          <p:cNvSpPr txBox="1"/>
+          <p:nvPr/>
+        </p:nvSpPr>
+        <p:spPr>
+          <a:xfrm>
+            <a:off x="13880592" y="6400800"/>
+            <a:ext cx="2734056" cy="411480"/>
+          </a:xfrm>
+          <a:prstGeom prst="rect">
+            <a:avLst/>
+          </a:prstGeom>
+          <a:noFill/>
+        </p:spPr>
+        <p:txBody>
+          <a:bodyPr wrap="square" anchor="t" lIns="0" rIns="0" tIns="54864" bIns="54864">
+            <a:spAutoFit/>
+          </a:bodyPr>
+          <a:lstStyle/>
+          <a:p>
+            <a:pPr algn="l">
+              <a:spcAft>
+                <a:spcPts val="600"/>
+              </a:spcAft>
+            </a:pPr>
+            <a:r>
+              <a:rPr sz="1400" b="1">
+                <a:solidFill>
+                  <a:srgbClr val="F5EFE9"/>
+                </a:solidFill>
+              </a:rPr>
+              <a:t>Field Ops views</a:t>
+            </a:r>
+          </a:p>
+        </p:txBody>
+      </p:sp>
+      <p:sp>
+        <p:nvSpPr>
+          <p:cNvPr id="21" name="Rounded Rectangle 20"/>
+          <p:cNvSpPr/>
+          <p:nvPr/>
+        </p:nvSpPr>
+        <p:spPr>
+          <a:xfrm>
+            <a:off x="17007840" y="6355080"/>
+            <a:ext cx="2194560" cy="2377440"/>
+          </a:xfrm>
+          <a:prstGeom prst="roundRect">
+            <a:avLst>
+              <a:gd name="adj" fmla="val 4000"/>
+            </a:avLst>
+          </a:prstGeom>
+          <a:noFill/>
+          <a:ln w="19050">
+            <a:solidFill>
+              <a:srgbClr val="F5EFE9"/>
+            </a:solidFill>
+          </a:ln>
+          <a:effectLst/>
+        </p:spPr>
+        <p:style>
+          <a:lnRef idx="1">
+            <a:schemeClr val="accent1"/>
+          </a:lnRef>
+          <a:fillRef idx="3">
+            <a:schemeClr val="accent1"/>
+          </a:fillRef>
+          <a:effectRef idx="2">
+            <a:schemeClr val="accent1"/>
+          </a:effectRef>
+          <a:fontRef idx="minor">
+            <a:schemeClr val="lt1"/>
+          </a:fontRef>
+        </p:style>
+        <p:txBody>
+          <a:bodyPr rtlCol="0" anchor="ctr"/>
+          <a:lstStyle/>
+          <a:p>
+            <a:pPr algn="ctr"/>
+          </a:p>
+        </p:txBody>
+      </p:sp>
+      <p:sp>
+        <p:nvSpPr>
+          <p:cNvPr id="22" name="TextBox 21"/>
+          <p:cNvSpPr txBox="1"/>
+          <p:nvPr/>
+        </p:nvSpPr>
+        <p:spPr>
+          <a:xfrm>
+            <a:off x="17172432" y="6400800"/>
+            <a:ext cx="1865376" cy="411480"/>
+          </a:xfrm>
+          <a:prstGeom prst="rect">
+            <a:avLst/>
+          </a:prstGeom>
+          <a:noFill/>
+        </p:spPr>
+        <p:txBody>
+          <a:bodyPr wrap="square" anchor="t" lIns="0" rIns="0" tIns="54864" bIns="54864">
+            <a:spAutoFit/>
+          </a:bodyPr>
+          <a:lstStyle/>
+          <a:p>
+            <a:pPr algn="l">
+              <a:spcAft>
+                <a:spcPts val="600"/>
+              </a:spcAft>
+            </a:pPr>
+            <a:r>
+              <a:rPr sz="1400" b="1">
+                <a:solidFill>
+                  <a:srgbClr val="F5EFE9"/>
+                </a:solidFill>
+              </a:rPr>
+              <a:t>Customer Ops views</a:t>
+            </a:r>
+          </a:p>
+        </p:txBody>
+      </p:sp>
+      <p:sp>
+        <p:nvSpPr>
+          <p:cNvPr id="23" name="Rounded Rectangle 22"/>
           <p:cNvSpPr/>
           <p:nvPr/>
         </p:nvSpPr>
@@ -33164,7 +35617,63 @@
       </p:sp>
       <p:sp>
         <p:nvSpPr>
-          <p:cNvPr id="10" name="Rounded Rectangle 9"/>
+          <p:cNvPr id="24" name="Oval 23"/>
+          <p:cNvSpPr/>
+          <p:nvPr/>
+        </p:nvSpPr>
+        <p:spPr>
+          <a:xfrm>
+            <a:off x="612648" y="2157984"/>
+            <a:ext cx="310896" cy="310896"/>
+          </a:xfrm>
+          <a:prstGeom prst="ellipse">
+            <a:avLst/>
+          </a:prstGeom>
+          <a:solidFill>
+            <a:srgbClr val="FFA418"/>
+          </a:solidFill>
+          <a:ln>
+            <a:noFill/>
+          </a:ln>
+          <a:effectLst/>
+        </p:spPr>
+        <p:style>
+          <a:lnRef idx="1">
+            <a:schemeClr val="accent1"/>
+          </a:lnRef>
+          <a:fillRef idx="3">
+            <a:schemeClr val="accent1"/>
+          </a:fillRef>
+          <a:effectRef idx="2">
+            <a:schemeClr val="accent1"/>
+          </a:effectRef>
+          <a:fontRef idx="minor">
+            <a:schemeClr val="lt1"/>
+          </a:fontRef>
+        </p:style>
+        <p:txBody>
+          <a:bodyPr rtlCol="0" anchor="ctr" wrap="square" lIns="0" rIns="0" tIns="54864" bIns="54864"/>
+          <a:lstStyle/>
+          <a:p>
+            <a:pPr algn="ctr">
+              <a:spcAft>
+                <a:spcPts val="600"/>
+              </a:spcAft>
+            </a:pPr>
+            <a:r>
+              <a:rPr sz="1000" b="1">
+                <a:solidFill>
+                  <a:srgbClr val="0B3D7A"/>
+                </a:solidFill>
+              </a:rPr>
+              <a:t>1</a:t>
+            </a:r>
+          </a:p>
+        </p:txBody>
+      </p:sp>
+      <p:sp>
+        <p:nvSpPr>
+          <p:cNvPr id="25" name="Rounded Rectangle 24"/>
           <p:cNvSpPr/>
           <p:nvPr/>
         </p:nvSpPr>
@@ -33237,7 +35746,63 @@
       </p:sp>
       <p:sp>
         <p:nvSpPr>
-          <p:cNvPr id="11" name="Rounded Rectangle 10"/>
+          <p:cNvPr id="26" name="Oval 25"/>
+          <p:cNvSpPr/>
+          <p:nvPr/>
+        </p:nvSpPr>
+        <p:spPr>
+          <a:xfrm>
+            <a:off x="3172968" y="2157984"/>
+            <a:ext cx="310896" cy="310896"/>
+          </a:xfrm>
+          <a:prstGeom prst="ellipse">
+            <a:avLst/>
+          </a:prstGeom>
+          <a:solidFill>
+            <a:srgbClr val="FFA418"/>
+          </a:solidFill>
+          <a:ln>
+            <a:noFill/>
+          </a:ln>
+          <a:effectLst/>
+        </p:spPr>
+        <p:style>
+          <a:lnRef idx="1">
+            <a:schemeClr val="accent1"/>
+          </a:lnRef>
+          <a:fillRef idx="3">
+            <a:schemeClr val="accent1"/>
+          </a:fillRef>
+          <a:effectRef idx="2">
+            <a:schemeClr val="accent1"/>
+          </a:effectRef>
+          <a:fontRef idx="minor">
+            <a:schemeClr val="lt1"/>
+          </a:fontRef>
+        </p:style>
+        <p:txBody>
+          <a:bodyPr rtlCol="0" anchor="ctr" wrap="square" lIns="0" rIns="0" tIns="54864" bIns="54864"/>
+          <a:lstStyle/>
+          <a:p>
+            <a:pPr algn="ctr">
+              <a:spcAft>
+                <a:spcPts val="600"/>
+              </a:spcAft>
+            </a:pPr>
+            <a:r>
+              <a:rPr sz="1000" b="1">
+                <a:solidFill>
+                  <a:srgbClr val="0B3D7A"/>
+                </a:solidFill>
+              </a:rPr>
+              <a:t>2</a:t>
+            </a:r>
+          </a:p>
+        </p:txBody>
+      </p:sp>
+      <p:sp>
+        <p:nvSpPr>
+          <p:cNvPr id="27" name="Rounded Rectangle 26"/>
           <p:cNvSpPr/>
           <p:nvPr/>
         </p:nvSpPr>
@@ -33310,7 +35875,63 @@
       </p:sp>
       <p:sp>
         <p:nvSpPr>
-          <p:cNvPr id="12" name="Rounded Rectangle 11"/>
+          <p:cNvPr id="28" name="Oval 27"/>
+          <p:cNvSpPr/>
+          <p:nvPr/>
+        </p:nvSpPr>
+        <p:spPr>
+          <a:xfrm>
+            <a:off x="6099048" y="2157984"/>
+            <a:ext cx="310896" cy="310896"/>
+          </a:xfrm>
+          <a:prstGeom prst="ellipse">
+            <a:avLst/>
+          </a:prstGeom>
+          <a:solidFill>
+            <a:srgbClr val="FFA418"/>
+          </a:solidFill>
+          <a:ln>
+            <a:noFill/>
+          </a:ln>
+          <a:effectLst/>
+        </p:spPr>
+        <p:style>
+          <a:lnRef idx="1">
+            <a:schemeClr val="accent1"/>
+          </a:lnRef>
+          <a:fillRef idx="3">
+            <a:schemeClr val="accent1"/>
+          </a:fillRef>
+          <a:effectRef idx="2">
+            <a:schemeClr val="accent1"/>
+          </a:effectRef>
+          <a:fontRef idx="minor">
+            <a:schemeClr val="lt1"/>
+          </a:fontRef>
+        </p:style>
+        <p:txBody>
+          <a:bodyPr rtlCol="0" anchor="ctr" wrap="square" lIns="0" rIns="0" tIns="54864" bIns="54864"/>
+          <a:lstStyle/>
+          <a:p>
+            <a:pPr algn="ctr">
+              <a:spcAft>
+                <a:spcPts val="600"/>
+              </a:spcAft>
+            </a:pPr>
+            <a:r>
+              <a:rPr sz="1000" b="1">
+                <a:solidFill>
+                  <a:srgbClr val="0B3D7A"/>
+                </a:solidFill>
+              </a:rPr>
+              <a:t>3</a:t>
+            </a:r>
+          </a:p>
+        </p:txBody>
+      </p:sp>
+      <p:sp>
+        <p:nvSpPr>
+          <p:cNvPr id="29" name="Rounded Rectangle 28"/>
           <p:cNvSpPr/>
           <p:nvPr/>
         </p:nvSpPr>
@@ -33383,7 +36004,63 @@
       </p:sp>
       <p:sp>
         <p:nvSpPr>
-          <p:cNvPr id="13" name="Rounded Rectangle 12"/>
+          <p:cNvPr id="30" name="Oval 29"/>
+          <p:cNvSpPr/>
+          <p:nvPr/>
+        </p:nvSpPr>
+        <p:spPr>
+          <a:xfrm>
+            <a:off x="9208008" y="2157984"/>
+            <a:ext cx="310896" cy="310896"/>
+          </a:xfrm>
+          <a:prstGeom prst="ellipse">
+            <a:avLst/>
+          </a:prstGeom>
+          <a:solidFill>
+            <a:srgbClr val="FFA418"/>
+          </a:solidFill>
+          <a:ln>
+            <a:noFill/>
+          </a:ln>
+          <a:effectLst/>
+        </p:spPr>
+        <p:style>
+          <a:lnRef idx="1">
+            <a:schemeClr val="accent1"/>
+          </a:lnRef>
+          <a:fillRef idx="3">
+            <a:schemeClr val="accent1"/>
+          </a:fillRef>
+          <a:effectRef idx="2">
+            <a:schemeClr val="accent1"/>
+          </a:effectRef>
+          <a:fontRef idx="minor">
+            <a:schemeClr val="lt1"/>
+          </a:fontRef>
+        </p:style>
+        <p:txBody>
+          <a:bodyPr rtlCol="0" anchor="ctr" wrap="square" lIns="0" rIns="0" tIns="54864" bIns="54864"/>
+          <a:lstStyle/>
+          <a:p>
+            <a:pPr algn="ctr">
+              <a:spcAft>
+                <a:spcPts val="600"/>
+              </a:spcAft>
+            </a:pPr>
+            <a:r>
+              <a:rPr sz="1000" b="1">
+                <a:solidFill>
+                  <a:srgbClr val="0B3D7A"/>
+                </a:solidFill>
+              </a:rPr>
+              <a:t>4</a:t>
+            </a:r>
+          </a:p>
+        </p:txBody>
+      </p:sp>
+      <p:sp>
+        <p:nvSpPr>
+          <p:cNvPr id="31" name="Rounded Rectangle 30"/>
           <p:cNvSpPr/>
           <p:nvPr/>
         </p:nvSpPr>
@@ -33441,7 +36118,7 @@
       </p:sp>
       <p:sp>
         <p:nvSpPr>
-          <p:cNvPr id="14" name="Rounded Rectangle 13"/>
+          <p:cNvPr id="32" name="Rounded Rectangle 31"/>
           <p:cNvSpPr/>
           <p:nvPr/>
         </p:nvSpPr>
@@ -33499,7 +36176,7 @@
       </p:sp>
       <p:sp>
         <p:nvSpPr>
-          <p:cNvPr id="15" name="Rounded Rectangle 14"/>
+          <p:cNvPr id="33" name="Rounded Rectangle 32"/>
           <p:cNvSpPr/>
           <p:nvPr/>
         </p:nvSpPr>
@@ -33557,7 +36234,7 @@
       </p:sp>
       <p:sp>
         <p:nvSpPr>
-          <p:cNvPr id="16" name="Rounded Rectangle 15"/>
+          <p:cNvPr id="34" name="Rounded Rectangle 33"/>
           <p:cNvSpPr/>
           <p:nvPr/>
         </p:nvSpPr>
@@ -33615,7 +36292,7 @@
       </p:sp>
       <p:sp>
         <p:nvSpPr>
-          <p:cNvPr id="17" name="Rounded Rectangle 16"/>
+          <p:cNvPr id="35" name="Rounded Rectangle 34"/>
           <p:cNvSpPr/>
           <p:nvPr/>
         </p:nvSpPr>
@@ -33673,7 +36350,7 @@
       </p:sp>
       <p:sp>
         <p:nvSpPr>
-          <p:cNvPr id="18" name="Rounded Rectangle 17"/>
+          <p:cNvPr id="36" name="Rounded Rectangle 35"/>
           <p:cNvSpPr/>
           <p:nvPr/>
         </p:nvSpPr>
@@ -33731,7 +36408,7 @@
       </p:sp>
       <p:sp>
         <p:nvSpPr>
-          <p:cNvPr id="19" name="Rounded Rectangle 18"/>
+          <p:cNvPr id="37" name="Rounded Rectangle 36"/>
           <p:cNvSpPr/>
           <p:nvPr/>
         </p:nvSpPr>
@@ -33789,7 +36466,7 @@
       </p:sp>
       <p:sp>
         <p:nvSpPr>
-          <p:cNvPr id="20" name="Rounded Rectangle 19"/>
+          <p:cNvPr id="38" name="Rounded Rectangle 37"/>
           <p:cNvSpPr/>
           <p:nvPr/>
         </p:nvSpPr>
@@ -33847,7 +36524,7 @@
       </p:sp>
       <p:sp>
         <p:nvSpPr>
-          <p:cNvPr id="21" name="Diamond 20"/>
+          <p:cNvPr id="39" name="Diamond 38"/>
           <p:cNvSpPr/>
           <p:nvPr/>
         </p:nvSpPr>
@@ -33903,16 +36580,16 @@
       </p:sp>
       <p:sp>
         <p:nvSpPr>
-          <p:cNvPr id="22" name="Diamond 21"/>
+          <p:cNvPr id="40" name="Oval 39"/>
           <p:cNvSpPr/>
           <p:nvPr/>
         </p:nvSpPr>
         <p:spPr>
           <a:xfrm>
-            <a:off x="14264640" y="4023360"/>
-            <a:ext cx="2377440" cy="960120"/>
-          </a:xfrm>
-          <a:prstGeom prst="diamond">
+            <a:off x="16971264" y="3895344"/>
+            <a:ext cx="310896" cy="310896"/>
+          </a:xfrm>
+          <a:prstGeom prst="ellipse">
             <a:avLst/>
           </a:prstGeom>
           <a:solidFill>
@@ -33938,7 +36615,7 @@
           </a:fontRef>
         </p:style>
         <p:txBody>
-          <a:bodyPr rtlCol="0" anchor="ctr" wrap="square" lIns="18288" rIns="18288" tIns="54864" bIns="54864"/>
+          <a:bodyPr rtlCol="0" anchor="ctr" wrap="square" lIns="0" rIns="0" tIns="54864" bIns="54864"/>
           <a:lstStyle/>
           <a:p>
             <a:pPr algn="ctr">
@@ -33952,25 +36629,25 @@
                   <a:srgbClr val="0B3D7A"/>
                 </a:solidFill>
               </a:rPr>
-              <a:t>validate and install gates pass?</a:t>
-            </a:r>
-          </a:p>
-        </p:txBody>
-      </p:sp>
-      <p:sp>
-        <p:nvSpPr>
-          <p:cNvPr id="23" name="Rounded Rectangle 22"/>
+              <a:t>6</a:t>
+            </a:r>
+          </a:p>
+        </p:txBody>
+      </p:sp>
+      <p:sp>
+        <p:nvSpPr>
+          <p:cNvPr id="41" name="Rounded Rectangle 40"/>
           <p:cNvSpPr/>
           <p:nvPr/>
         </p:nvSpPr>
         <p:spPr>
           <a:xfrm>
-            <a:off x="11612880" y="4114800"/>
-            <a:ext cx="2194560" cy="777240"/>
+            <a:off x="17282160" y="5120640"/>
+            <a:ext cx="1737360" cy="411480"/>
           </a:xfrm>
           <a:prstGeom prst="roundRect">
             <a:avLst>
-              <a:gd name="adj" fmla="val 10000"/>
+              <a:gd name="adj" fmla="val 20000"/>
             </a:avLst>
           </a:prstGeom>
           <a:solidFill>
@@ -33996,54 +36673,151 @@
           </a:fontRef>
         </p:style>
         <p:txBody>
-          <a:bodyPr rtlCol="0" anchor="ctr" wrap="square" lIns="109728" rIns="109728" tIns="54864" bIns="54864"/>
-          <a:lstStyle/>
-          <a:p>
-            <a:pPr algn="l">
-              <a:spcAft>
-                <a:spcPts val="600"/>
-              </a:spcAft>
-            </a:pPr>
-            <a:r>
-              <a:rPr sz="1400" b="1">
+          <a:bodyPr rtlCol="0" anchor="ctr" wrap="square" lIns="36576" rIns="36576" tIns="54864" bIns="54864"/>
+          <a:lstStyle/>
+          <a:p>
+            <a:pPr algn="ctr">
+              <a:spcAft>
+                <a:spcPts val="600"/>
+              </a:spcAft>
+            </a:pPr>
+            <a:r>
+              <a:rPr sz="900" b="1">
                 <a:solidFill>
                   <a:srgbClr val="0B3D7A"/>
                 </a:solidFill>
               </a:rPr>
-              <a:t>Post-load indexes</a:t>
-            </a:r>
-          </a:p>
-          <a:p>
-            <a:pPr algn="l">
-              <a:spcAft>
-                <a:spcPts val="600"/>
-              </a:spcAft>
-            </a:pPr>
-            <a:r>
-              <a:rPr sz="1100" b="0">
-                <a:solidFill>
-                  <a:srgbClr val="4C5D69"/>
-                </a:solidFill>
-              </a:rPr>
-              <a:t>keys and dates the domains filter on</a:t>
-            </a:r>
-          </a:p>
-        </p:txBody>
-      </p:sp>
-      <p:sp>
-        <p:nvSpPr>
-          <p:cNvPr id="24" name="Rounded Rectangle 23"/>
+              <a:t>no: stop, fix, re-run</a:t>
+            </a:r>
+          </a:p>
+        </p:txBody>
+      </p:sp>
+      <p:sp>
+        <p:nvSpPr>
+          <p:cNvPr id="42" name="Diamond 41"/>
           <p:cNvSpPr/>
           <p:nvPr/>
         </p:nvSpPr>
         <p:spPr>
           <a:xfrm>
-            <a:off x="8412480" y="4069080"/>
-            <a:ext cx="2743200" cy="868680"/>
+            <a:off x="14264640" y="4023360"/>
+            <a:ext cx="2377440" cy="960120"/>
+          </a:xfrm>
+          <a:prstGeom prst="diamond">
+            <a:avLst/>
+          </a:prstGeom>
+          <a:solidFill>
+            <a:srgbClr val="FFA418"/>
+          </a:solidFill>
+          <a:ln>
+            <a:noFill/>
+          </a:ln>
+          <a:effectLst/>
+        </p:spPr>
+        <p:style>
+          <a:lnRef idx="1">
+            <a:schemeClr val="accent1"/>
+          </a:lnRef>
+          <a:fillRef idx="3">
+            <a:schemeClr val="accent1"/>
+          </a:fillRef>
+          <a:effectRef idx="2">
+            <a:schemeClr val="accent1"/>
+          </a:effectRef>
+          <a:fontRef idx="minor">
+            <a:schemeClr val="lt1"/>
+          </a:fontRef>
+        </p:style>
+        <p:txBody>
+          <a:bodyPr rtlCol="0" anchor="ctr" wrap="square" lIns="18288" rIns="18288" tIns="54864" bIns="54864"/>
+          <a:lstStyle/>
+          <a:p>
+            <a:pPr algn="ctr">
+              <a:spcAft>
+                <a:spcPts val="600"/>
+              </a:spcAft>
+            </a:pPr>
+            <a:r>
+              <a:rPr sz="1000" b="1">
+                <a:solidFill>
+                  <a:srgbClr val="0B3D7A"/>
+                </a:solidFill>
+              </a:rPr>
+              <a:t>validate and install gates pass?</a:t>
+            </a:r>
+          </a:p>
+        </p:txBody>
+      </p:sp>
+      <p:sp>
+        <p:nvSpPr>
+          <p:cNvPr id="43" name="Oval 42"/>
+          <p:cNvSpPr/>
+          <p:nvPr/>
+        </p:nvSpPr>
+        <p:spPr>
+          <a:xfrm>
+            <a:off x="14136624" y="3895344"/>
+            <a:ext cx="310896" cy="310896"/>
+          </a:xfrm>
+          <a:prstGeom prst="ellipse">
+            <a:avLst/>
+          </a:prstGeom>
+          <a:solidFill>
+            <a:srgbClr val="FFA418"/>
+          </a:solidFill>
+          <a:ln>
+            <a:noFill/>
+          </a:ln>
+          <a:effectLst/>
+        </p:spPr>
+        <p:style>
+          <a:lnRef idx="1">
+            <a:schemeClr val="accent1"/>
+          </a:lnRef>
+          <a:fillRef idx="3">
+            <a:schemeClr val="accent1"/>
+          </a:fillRef>
+          <a:effectRef idx="2">
+            <a:schemeClr val="accent1"/>
+          </a:effectRef>
+          <a:fontRef idx="minor">
+            <a:schemeClr val="lt1"/>
+          </a:fontRef>
+        </p:style>
+        <p:txBody>
+          <a:bodyPr rtlCol="0" anchor="ctr" wrap="square" lIns="0" rIns="0" tIns="54864" bIns="54864"/>
+          <a:lstStyle/>
+          <a:p>
+            <a:pPr algn="ctr">
+              <a:spcAft>
+                <a:spcPts val="600"/>
+              </a:spcAft>
+            </a:pPr>
+            <a:r>
+              <a:rPr sz="1000" b="1">
+                <a:solidFill>
+                  <a:srgbClr val="0B3D7A"/>
+                </a:solidFill>
+              </a:rPr>
+              <a:t>7</a:t>
+            </a:r>
+          </a:p>
+        </p:txBody>
+      </p:sp>
+      <p:sp>
+        <p:nvSpPr>
+          <p:cNvPr id="44" name="Rounded Rectangle 43"/>
+          <p:cNvSpPr/>
+          <p:nvPr/>
+        </p:nvSpPr>
+        <p:spPr>
+          <a:xfrm>
+            <a:off x="14493240" y="5120640"/>
+            <a:ext cx="1920240" cy="411480"/>
           </a:xfrm>
           <a:prstGeom prst="roundRect">
             <a:avLst>
-              <a:gd name="adj" fmla="val 10000"/>
+              <a:gd name="adj" fmla="val 20000"/>
             </a:avLst>
           </a:prstGeom>
           <a:solidFill>
@@ -34069,6 +36843,64 @@
           </a:fontRef>
         </p:style>
         <p:txBody>
+          <a:bodyPr rtlCol="0" anchor="ctr" wrap="square" lIns="36576" rIns="36576" tIns="54864" bIns="54864"/>
+          <a:lstStyle/>
+          <a:p>
+            <a:pPr algn="ctr">
+              <a:spcAft>
+                <a:spcPts val="600"/>
+              </a:spcAft>
+            </a:pPr>
+            <a:r>
+              <a:rPr sz="900" b="1">
+                <a:solidFill>
+                  <a:srgbClr val="0B3D7A"/>
+                </a:solidFill>
+              </a:rPr>
+              <a:t>no: stop, fix, re-run</a:t>
+            </a:r>
+          </a:p>
+        </p:txBody>
+      </p:sp>
+      <p:sp>
+        <p:nvSpPr>
+          <p:cNvPr id="45" name="Rounded Rectangle 44"/>
+          <p:cNvSpPr/>
+          <p:nvPr/>
+        </p:nvSpPr>
+        <p:spPr>
+          <a:xfrm>
+            <a:off x="11612880" y="4114800"/>
+            <a:ext cx="2194560" cy="777240"/>
+          </a:xfrm>
+          <a:prstGeom prst="roundRect">
+            <a:avLst>
+              <a:gd name="adj" fmla="val 10000"/>
+            </a:avLst>
+          </a:prstGeom>
+          <a:solidFill>
+            <a:srgbClr val="F5EFE9"/>
+          </a:solidFill>
+          <a:ln>
+            <a:noFill/>
+          </a:ln>
+          <a:effectLst/>
+        </p:spPr>
+        <p:style>
+          <a:lnRef idx="1">
+            <a:schemeClr val="accent1"/>
+          </a:lnRef>
+          <a:fillRef idx="3">
+            <a:schemeClr val="accent1"/>
+          </a:fillRef>
+          <a:effectRef idx="2">
+            <a:schemeClr val="accent1"/>
+          </a:effectRef>
+          <a:fontRef idx="minor">
+            <a:schemeClr val="lt1"/>
+          </a:fontRef>
+        </p:style>
+        <p:txBody>
           <a:bodyPr rtlCol="0" anchor="ctr" wrap="square" lIns="109728" rIns="109728" tIns="54864" bIns="54864"/>
           <a:lstStyle/>
           <a:p>
@@ -34083,7 +36915,7 @@
                   <a:srgbClr val="0B3D7A"/>
                 </a:solidFill>
               </a:rPr>
-              <a:t>Rolling procedures</a:t>
+              <a:t>Post-load indexes</a:t>
             </a:r>
           </a:p>
           <a:p>
@@ -34098,23 +36930,23 @@
                   <a:srgbClr val="4C5D69"/>
                 </a:solidFill>
               </a:rPr>
-              <a:t>3 months rebuilt, 24 kept; one operational refresh run by hand</a:t>
-            </a:r>
-          </a:p>
-        </p:txBody>
-      </p:sp>
-      <p:sp>
-        <p:nvSpPr>
-          <p:cNvPr id="25" name="Diamond 24"/>
+              <a:t>keys and dates the domains filter on</a:t>
+            </a:r>
+          </a:p>
+        </p:txBody>
+      </p:sp>
+      <p:sp>
+        <p:nvSpPr>
+          <p:cNvPr id="46" name="Oval 45"/>
           <p:cNvSpPr/>
           <p:nvPr/>
         </p:nvSpPr>
         <p:spPr>
           <a:xfrm>
-            <a:off x="5943600" y="4023360"/>
-            <a:ext cx="2011680" cy="960120"/>
-          </a:xfrm>
-          <a:prstGeom prst="diamond">
+            <a:off x="11484863" y="3986784"/>
+            <a:ext cx="310896" cy="310896"/>
+          </a:xfrm>
+          <a:prstGeom prst="ellipse">
             <a:avLst/>
           </a:prstGeom>
           <a:solidFill>
@@ -34140,7 +36972,7 @@
           </a:fontRef>
         </p:style>
         <p:txBody>
-          <a:bodyPr rtlCol="0" anchor="ctr" wrap="square" lIns="18288" rIns="18288" tIns="54864" bIns="54864"/>
+          <a:bodyPr rtlCol="0" anchor="ctr" wrap="square" lIns="0" rIns="0" tIns="54864" bIns="54864"/>
           <a:lstStyle/>
           <a:p>
             <a:pPr algn="ctr">
@@ -34154,21 +36986,21 @@
                   <a:srgbClr val="0B3D7A"/>
                 </a:solidFill>
               </a:rPr>
-              <a:t>validated again?</a:t>
-            </a:r>
-          </a:p>
-        </p:txBody>
-      </p:sp>
-      <p:sp>
-        <p:nvSpPr>
-          <p:cNvPr id="26" name="Rounded Rectangle 25"/>
+              <a:t>8</a:t>
+            </a:r>
+          </a:p>
+        </p:txBody>
+      </p:sp>
+      <p:sp>
+        <p:nvSpPr>
+          <p:cNvPr id="47" name="Rounded Rectangle 46"/>
           <p:cNvSpPr/>
           <p:nvPr/>
         </p:nvSpPr>
         <p:spPr>
           <a:xfrm>
-            <a:off x="3063240" y="4069080"/>
-            <a:ext cx="2468880" cy="868680"/>
+            <a:off x="8412480" y="4069080"/>
+            <a:ext cx="2743200" cy="868680"/>
           </a:xfrm>
           <a:prstGeom prst="roundRect">
             <a:avLst>
@@ -34212,7 +37044,7 @@
                   <a:srgbClr val="0B3D7A"/>
                 </a:solidFill>
               </a:rPr>
-              <a:t>Schedule</a:t>
+              <a:t>Rolling procedures</a:t>
             </a:r>
           </a:p>
           <a:p>
@@ -34227,25 +37059,193 @@
                   <a:srgbClr val="4C5D69"/>
                 </a:solidFill>
               </a:rPr>
-              <a:t>twice daily from 10:00 and 16:00 UTC, 30-minute stagger; held on TEST until approved</a:t>
-            </a:r>
-          </a:p>
-        </p:txBody>
-      </p:sp>
-      <p:sp>
-        <p:nvSpPr>
-          <p:cNvPr id="27" name="Rounded Rectangle 26"/>
+              <a:t>3 months rebuilt, 24 kept; one operational refresh run by hand</a:t>
+            </a:r>
+          </a:p>
+        </p:txBody>
+      </p:sp>
+      <p:sp>
+        <p:nvSpPr>
+          <p:cNvPr id="48" name="Oval 47"/>
           <p:cNvSpPr/>
           <p:nvPr/>
         </p:nvSpPr>
         <p:spPr>
           <a:xfrm>
-            <a:off x="740664" y="4069080"/>
-            <a:ext cx="1920240" cy="868680"/>
+            <a:off x="8284463" y="3941064"/>
+            <a:ext cx="310896" cy="310896"/>
+          </a:xfrm>
+          <a:prstGeom prst="ellipse">
+            <a:avLst/>
+          </a:prstGeom>
+          <a:solidFill>
+            <a:srgbClr val="FFA418"/>
+          </a:solidFill>
+          <a:ln>
+            <a:noFill/>
+          </a:ln>
+          <a:effectLst/>
+        </p:spPr>
+        <p:style>
+          <a:lnRef idx="1">
+            <a:schemeClr val="accent1"/>
+          </a:lnRef>
+          <a:fillRef idx="3">
+            <a:schemeClr val="accent1"/>
+          </a:fillRef>
+          <a:effectRef idx="2">
+            <a:schemeClr val="accent1"/>
+          </a:effectRef>
+          <a:fontRef idx="minor">
+            <a:schemeClr val="lt1"/>
+          </a:fontRef>
+        </p:style>
+        <p:txBody>
+          <a:bodyPr rtlCol="0" anchor="ctr" wrap="square" lIns="0" rIns="0" tIns="54864" bIns="54864"/>
+          <a:lstStyle/>
+          <a:p>
+            <a:pPr algn="ctr">
+              <a:spcAft>
+                <a:spcPts val="600"/>
+              </a:spcAft>
+            </a:pPr>
+            <a:r>
+              <a:rPr sz="1000" b="1">
+                <a:solidFill>
+                  <a:srgbClr val="0B3D7A"/>
+                </a:solidFill>
+              </a:rPr>
+              <a:t>9</a:t>
+            </a:r>
+          </a:p>
+        </p:txBody>
+      </p:sp>
+      <p:sp>
+        <p:nvSpPr>
+          <p:cNvPr id="49" name="Diamond 48"/>
+          <p:cNvSpPr/>
+          <p:nvPr/>
+        </p:nvSpPr>
+        <p:spPr>
+          <a:xfrm>
+            <a:off x="5943600" y="4023360"/>
+            <a:ext cx="2011680" cy="960120"/>
+          </a:xfrm>
+          <a:prstGeom prst="diamond">
+            <a:avLst/>
+          </a:prstGeom>
+          <a:solidFill>
+            <a:srgbClr val="FFA418"/>
+          </a:solidFill>
+          <a:ln>
+            <a:noFill/>
+          </a:ln>
+          <a:effectLst/>
+        </p:spPr>
+        <p:style>
+          <a:lnRef idx="1">
+            <a:schemeClr val="accent1"/>
+          </a:lnRef>
+          <a:fillRef idx="3">
+            <a:schemeClr val="accent1"/>
+          </a:fillRef>
+          <a:effectRef idx="2">
+            <a:schemeClr val="accent1"/>
+          </a:effectRef>
+          <a:fontRef idx="minor">
+            <a:schemeClr val="lt1"/>
+          </a:fontRef>
+        </p:style>
+        <p:txBody>
+          <a:bodyPr rtlCol="0" anchor="ctr" wrap="square" lIns="18288" rIns="18288" tIns="54864" bIns="54864"/>
+          <a:lstStyle/>
+          <a:p>
+            <a:pPr algn="ctr">
+              <a:spcAft>
+                <a:spcPts val="600"/>
+              </a:spcAft>
+            </a:pPr>
+            <a:r>
+              <a:rPr sz="1000" b="1">
+                <a:solidFill>
+                  <a:srgbClr val="0B3D7A"/>
+                </a:solidFill>
+              </a:rPr>
+              <a:t>validated again?</a:t>
+            </a:r>
+          </a:p>
+        </p:txBody>
+      </p:sp>
+      <p:sp>
+        <p:nvSpPr>
+          <p:cNvPr id="50" name="Oval 49"/>
+          <p:cNvSpPr/>
+          <p:nvPr/>
+        </p:nvSpPr>
+        <p:spPr>
+          <a:xfrm>
+            <a:off x="5815584" y="3895344"/>
+            <a:ext cx="310896" cy="310896"/>
+          </a:xfrm>
+          <a:prstGeom prst="ellipse">
+            <a:avLst/>
+          </a:prstGeom>
+          <a:solidFill>
+            <a:srgbClr val="FFA418"/>
+          </a:solidFill>
+          <a:ln>
+            <a:noFill/>
+          </a:ln>
+          <a:effectLst/>
+        </p:spPr>
+        <p:style>
+          <a:lnRef idx="1">
+            <a:schemeClr val="accent1"/>
+          </a:lnRef>
+          <a:fillRef idx="3">
+            <a:schemeClr val="accent1"/>
+          </a:fillRef>
+          <a:effectRef idx="2">
+            <a:schemeClr val="accent1"/>
+          </a:effectRef>
+          <a:fontRef idx="minor">
+            <a:schemeClr val="lt1"/>
+          </a:fontRef>
+        </p:style>
+        <p:txBody>
+          <a:bodyPr rtlCol="0" anchor="ctr" wrap="square" lIns="0" rIns="0" tIns="54864" bIns="54864"/>
+          <a:lstStyle/>
+          <a:p>
+            <a:pPr algn="ctr">
+              <a:spcAft>
+                <a:spcPts val="600"/>
+              </a:spcAft>
+            </a:pPr>
+            <a:r>
+              <a:rPr sz="1000" b="1">
+                <a:solidFill>
+                  <a:srgbClr val="0B3D7A"/>
+                </a:solidFill>
+              </a:rPr>
+              <a:t>10</a:t>
+            </a:r>
+          </a:p>
+        </p:txBody>
+      </p:sp>
+      <p:sp>
+        <p:nvSpPr>
+          <p:cNvPr id="51" name="Rounded Rectangle 50"/>
+          <p:cNvSpPr/>
+          <p:nvPr/>
+        </p:nvSpPr>
+        <p:spPr>
+          <a:xfrm>
+            <a:off x="6035040" y="3429000"/>
+            <a:ext cx="1828800" cy="411480"/>
           </a:xfrm>
           <a:prstGeom prst="roundRect">
             <a:avLst>
-              <a:gd name="adj" fmla="val 10000"/>
+              <a:gd name="adj" fmla="val 20000"/>
             </a:avLst>
           </a:prstGeom>
           <a:solidFill>
@@ -34271,316 +37271,35 @@
           </a:fontRef>
         </p:style>
         <p:txBody>
-          <a:bodyPr rtlCol="0" anchor="ctr" wrap="square" lIns="109728" rIns="109728" tIns="54864" bIns="54864"/>
-          <a:lstStyle/>
-          <a:p>
-            <a:pPr algn="l">
-              <a:spcAft>
-                <a:spcPts val="600"/>
-              </a:spcAft>
-            </a:pPr>
-            <a:r>
-              <a:rPr sz="1400" b="1">
+          <a:bodyPr rtlCol="0" anchor="ctr" wrap="square" lIns="36576" rIns="36576" tIns="54864" bIns="54864"/>
+          <a:lstStyle/>
+          <a:p>
+            <a:pPr algn="ctr">
+              <a:spcAft>
+                <a:spcPts val="600"/>
+              </a:spcAft>
+            </a:pPr>
+            <a:r>
+              <a:rPr sz="900" b="1">
                 <a:solidFill>
                   <a:srgbClr val="0B3D7A"/>
                 </a:solidFill>
               </a:rPr>
-              <a:t>Capture runs, data quality</a:t>
-            </a:r>
-          </a:p>
-          <a:p>
-            <a:pPr algn="l">
-              <a:spcAft>
-                <a:spcPts val="600"/>
-              </a:spcAft>
-            </a:pPr>
-            <a:r>
-              <a:rPr sz="1100" b="0">
-                <a:solidFill>
-                  <a:srgbClr val="4C5D69"/>
-                </a:solidFill>
-              </a:rPr>
-              <a:t>per client, kept with the log</a:t>
-            </a:r>
-          </a:p>
-        </p:txBody>
-      </p:sp>
-      <p:sp>
-        <p:nvSpPr>
-          <p:cNvPr id="28" name="TextBox 27"/>
-          <p:cNvSpPr txBox="1"/>
-          <p:nvPr/>
-        </p:nvSpPr>
-        <p:spPr>
-          <a:xfrm>
-            <a:off x="868680" y="6327648"/>
-            <a:ext cx="2103120" cy="320040"/>
-          </a:xfrm>
-          <a:prstGeom prst="rect">
-            <a:avLst/>
-          </a:prstGeom>
-          <a:noFill/>
-        </p:spPr>
-        <p:txBody>
-          <a:bodyPr wrap="square" anchor="t" lIns="0" rIns="0" tIns="54864" bIns="54864">
-            <a:spAutoFit/>
-          </a:bodyPr>
-          <a:lstStyle/>
-          <a:p>
-            <a:pPr algn="l">
-              <a:spcAft>
-                <a:spcPts val="600"/>
-              </a:spcAft>
-            </a:pPr>
-            <a:r>
-              <a:rPr sz="1200" b="1">
-                <a:solidFill>
-                  <a:srgbClr val="F5EFE9"/>
-                </a:solidFill>
-              </a:rPr>
-              <a:t>Finance tables</a:t>
-            </a:r>
-          </a:p>
-        </p:txBody>
-      </p:sp>
-      <p:sp>
-        <p:nvSpPr>
-          <p:cNvPr id="29" name="TextBox 28"/>
-          <p:cNvSpPr txBox="1"/>
-          <p:nvPr/>
-        </p:nvSpPr>
-        <p:spPr>
-          <a:xfrm>
-            <a:off x="3108960" y="6327648"/>
-            <a:ext cx="2103120" cy="320040"/>
-          </a:xfrm>
-          <a:prstGeom prst="rect">
-            <a:avLst/>
-          </a:prstGeom>
-          <a:noFill/>
-        </p:spPr>
-        <p:txBody>
-          <a:bodyPr wrap="square" anchor="t" lIns="0" rIns="0" tIns="54864" bIns="54864">
-            <a:spAutoFit/>
-          </a:bodyPr>
-          <a:lstStyle/>
-          <a:p>
-            <a:pPr algn="l">
-              <a:spcAft>
-                <a:spcPts val="600"/>
-              </a:spcAft>
-            </a:pPr>
-            <a:r>
-              <a:rPr sz="1200" b="1">
-                <a:solidFill>
-                  <a:srgbClr val="F5EFE9"/>
-                </a:solidFill>
-              </a:rPr>
-              <a:t>Billing and Rates tables</a:t>
-            </a:r>
-          </a:p>
-        </p:txBody>
-      </p:sp>
-      <p:sp>
-        <p:nvSpPr>
-          <p:cNvPr id="30" name="TextBox 29"/>
-          <p:cNvSpPr txBox="1"/>
-          <p:nvPr/>
-        </p:nvSpPr>
-        <p:spPr>
-          <a:xfrm>
-            <a:off x="5349240" y="6327648"/>
-            <a:ext cx="2103120" cy="320040"/>
-          </a:xfrm>
-          <a:prstGeom prst="rect">
-            <a:avLst/>
-          </a:prstGeom>
-          <a:noFill/>
-        </p:spPr>
-        <p:txBody>
-          <a:bodyPr wrap="square" anchor="t" lIns="0" rIns="0" tIns="54864" bIns="54864">
-            <a:spAutoFit/>
-          </a:bodyPr>
-          <a:lstStyle/>
-          <a:p>
-            <a:pPr algn="l">
-              <a:spcAft>
-                <a:spcPts val="600"/>
-              </a:spcAft>
-            </a:pPr>
-            <a:r>
-              <a:rPr sz="1200" b="1">
-                <a:solidFill>
-                  <a:srgbClr val="F5EFE9"/>
-                </a:solidFill>
-              </a:rPr>
-              <a:t>Meter Operations tables</a:t>
-            </a:r>
-          </a:p>
-        </p:txBody>
-      </p:sp>
-      <p:sp>
-        <p:nvSpPr>
-          <p:cNvPr id="31" name="TextBox 30"/>
-          <p:cNvSpPr txBox="1"/>
-          <p:nvPr/>
-        </p:nvSpPr>
-        <p:spPr>
-          <a:xfrm>
-            <a:off x="7863840" y="6327648"/>
-            <a:ext cx="2377440" cy="320040"/>
-          </a:xfrm>
-          <a:prstGeom prst="rect">
-            <a:avLst/>
-          </a:prstGeom>
-          <a:noFill/>
-        </p:spPr>
-        <p:txBody>
-          <a:bodyPr wrap="square" anchor="t" lIns="0" rIns="0" tIns="54864" bIns="54864">
-            <a:spAutoFit/>
-          </a:bodyPr>
-          <a:lstStyle/>
-          <a:p>
-            <a:pPr algn="l">
-              <a:spcAft>
-                <a:spcPts val="600"/>
-              </a:spcAft>
-            </a:pPr>
-            <a:r>
-              <a:rPr sz="1200" b="1">
-                <a:solidFill>
-                  <a:srgbClr val="F5EFE9"/>
-                </a:solidFill>
-              </a:rPr>
-              <a:t>Debt Management table + seed</a:t>
-            </a:r>
-          </a:p>
-        </p:txBody>
-      </p:sp>
-      <p:sp>
-        <p:nvSpPr>
-          <p:cNvPr id="32" name="TextBox 31"/>
-          <p:cNvSpPr txBox="1"/>
-          <p:nvPr/>
-        </p:nvSpPr>
-        <p:spPr>
-          <a:xfrm>
-            <a:off x="10515600" y="6327648"/>
-            <a:ext cx="2971800" cy="320040"/>
-          </a:xfrm>
-          <a:prstGeom prst="rect">
-            <a:avLst/>
-          </a:prstGeom>
-          <a:noFill/>
-        </p:spPr>
-        <p:txBody>
-          <a:bodyPr wrap="square" anchor="t" lIns="0" rIns="0" tIns="54864" bIns="54864">
-            <a:spAutoFit/>
-          </a:bodyPr>
-          <a:lstStyle/>
-          <a:p>
-            <a:pPr algn="l">
-              <a:spcAft>
-                <a:spcPts val="600"/>
-              </a:spcAft>
-            </a:pPr>
-            <a:r>
-              <a:rPr sz="1200" b="1">
-                <a:solidFill>
-                  <a:srgbClr val="F5EFE9"/>
-                </a:solidFill>
-              </a:rPr>
-              <a:t>Meter Operations views</a:t>
-            </a:r>
-          </a:p>
-        </p:txBody>
-      </p:sp>
-      <p:sp>
-        <p:nvSpPr>
-          <p:cNvPr id="33" name="TextBox 32"/>
-          <p:cNvSpPr txBox="1"/>
-          <p:nvPr/>
-        </p:nvSpPr>
-        <p:spPr>
-          <a:xfrm>
-            <a:off x="13716000" y="6327648"/>
-            <a:ext cx="3063240" cy="320040"/>
-          </a:xfrm>
-          <a:prstGeom prst="rect">
-            <a:avLst/>
-          </a:prstGeom>
-          <a:noFill/>
-        </p:spPr>
-        <p:txBody>
-          <a:bodyPr wrap="square" anchor="t" lIns="0" rIns="0" tIns="54864" bIns="54864">
-            <a:spAutoFit/>
-          </a:bodyPr>
-          <a:lstStyle/>
-          <a:p>
-            <a:pPr algn="l">
-              <a:spcAft>
-                <a:spcPts val="600"/>
-              </a:spcAft>
-            </a:pPr>
-            <a:r>
-              <a:rPr sz="1200" b="1">
-                <a:solidFill>
-                  <a:srgbClr val="F5EFE9"/>
-                </a:solidFill>
-              </a:rPr>
-              <a:t>Field Operations views</a:t>
-            </a:r>
-          </a:p>
-        </p:txBody>
-      </p:sp>
-      <p:sp>
-        <p:nvSpPr>
-          <p:cNvPr id="34" name="TextBox 33"/>
-          <p:cNvSpPr txBox="1"/>
-          <p:nvPr/>
-        </p:nvSpPr>
-        <p:spPr>
-          <a:xfrm>
-            <a:off x="17007840" y="6327648"/>
-            <a:ext cx="2194560" cy="320040"/>
-          </a:xfrm>
-          <a:prstGeom prst="rect">
-            <a:avLst/>
-          </a:prstGeom>
-          <a:noFill/>
-        </p:spPr>
-        <p:txBody>
-          <a:bodyPr wrap="square" anchor="t" lIns="0" rIns="0" tIns="54864" bIns="54864">
-            <a:spAutoFit/>
-          </a:bodyPr>
-          <a:lstStyle/>
-          <a:p>
-            <a:pPr algn="l">
-              <a:spcAft>
-                <a:spcPts val="600"/>
-              </a:spcAft>
-            </a:pPr>
-            <a:r>
-              <a:rPr sz="1200" b="1">
-                <a:solidFill>
-                  <a:srgbClr val="F5EFE9"/>
-                </a:solidFill>
-              </a:rPr>
-              <a:t>Customer Operations views</a:t>
-            </a:r>
-          </a:p>
-        </p:txBody>
-      </p:sp>
-      <p:sp>
-        <p:nvSpPr>
-          <p:cNvPr id="35" name="Rounded Rectangle 34"/>
+              <a:t>no: stop, fix, re-run</a:t>
+            </a:r>
+          </a:p>
+        </p:txBody>
+      </p:sp>
+      <p:sp>
+        <p:nvSpPr>
+          <p:cNvPr id="52" name="Rounded Rectangle 51"/>
           <p:cNvSpPr/>
           <p:nvPr/>
         </p:nvSpPr>
         <p:spPr>
           <a:xfrm>
-            <a:off x="868680" y="6675120"/>
-            <a:ext cx="2103120" cy="822960"/>
+            <a:off x="3063240" y="4069080"/>
+            <a:ext cx="2468880" cy="868680"/>
           </a:xfrm>
           <a:prstGeom prst="roundRect">
             <a:avLst>
@@ -34610,7 +37329,78 @@
           </a:fontRef>
         </p:style>
         <p:txBody>
-          <a:bodyPr rtlCol="0" anchor="ctr" wrap="square" lIns="45720" rIns="45720" tIns="54864" bIns="54864"/>
+          <a:bodyPr rtlCol="0" anchor="ctr" wrap="square" lIns="109728" rIns="109728" tIns="54864" bIns="54864"/>
+          <a:lstStyle/>
+          <a:p>
+            <a:pPr algn="l">
+              <a:spcAft>
+                <a:spcPts val="600"/>
+              </a:spcAft>
+            </a:pPr>
+            <a:r>
+              <a:rPr sz="1400" b="1">
+                <a:solidFill>
+                  <a:srgbClr val="0B3D7A"/>
+                </a:solidFill>
+              </a:rPr>
+              <a:t>Schedule</a:t>
+            </a:r>
+          </a:p>
+          <a:p>
+            <a:pPr algn="l">
+              <a:spcAft>
+                <a:spcPts val="600"/>
+              </a:spcAft>
+            </a:pPr>
+            <a:r>
+              <a:rPr sz="1100" b="0">
+                <a:solidFill>
+                  <a:srgbClr val="4C5D69"/>
+                </a:solidFill>
+              </a:rPr>
+              <a:t>twice daily from 10:00 and 16:00 UTC, 30-minute stagger; held on TEST until approved</a:t>
+            </a:r>
+          </a:p>
+        </p:txBody>
+      </p:sp>
+      <p:sp>
+        <p:nvSpPr>
+          <p:cNvPr id="53" name="Oval 52"/>
+          <p:cNvSpPr/>
+          <p:nvPr/>
+        </p:nvSpPr>
+        <p:spPr>
+          <a:xfrm>
+            <a:off x="2935224" y="3941064"/>
+            <a:ext cx="310896" cy="310896"/>
+          </a:xfrm>
+          <a:prstGeom prst="ellipse">
+            <a:avLst/>
+          </a:prstGeom>
+          <a:solidFill>
+            <a:srgbClr val="FFA418"/>
+          </a:solidFill>
+          <a:ln>
+            <a:noFill/>
+          </a:ln>
+          <a:effectLst/>
+        </p:spPr>
+        <p:style>
+          <a:lnRef idx="1">
+            <a:schemeClr val="accent1"/>
+          </a:lnRef>
+          <a:fillRef idx="3">
+            <a:schemeClr val="accent1"/>
+          </a:fillRef>
+          <a:effectRef idx="2">
+            <a:schemeClr val="accent1"/>
+          </a:effectRef>
+          <a:fontRef idx="minor">
+            <a:schemeClr val="lt1"/>
+          </a:fontRef>
+        </p:style>
+        <p:txBody>
+          <a:bodyPr rtlCol="0" anchor="ctr" wrap="square" lIns="0" rIns="0" tIns="54864" bIns="54864"/>
           <a:lstStyle/>
           <a:p>
             <a:pPr algn="ctr">
@@ -34619,41 +37409,26 @@
               </a:spcAft>
             </a:pPr>
             <a:r>
-              <a:rPr sz="1100" b="1">
+              <a:rPr sz="1000" b="1">
                 <a:solidFill>
                   <a:srgbClr val="0B3D7A"/>
                 </a:solidFill>
               </a:rPr>
-              <a:t>FT_RPT_CURR</a:t>
-            </a:r>
-          </a:p>
-          <a:p>
-            <a:pPr algn="ctr">
-              <a:spcAft>
-                <a:spcPts val="600"/>
-              </a:spcAft>
-            </a:pPr>
-            <a:r>
-              <a:rPr sz="950" b="0">
-                <a:solidFill>
-                  <a:srgbClr val="4C5D69"/>
-                </a:solidFill>
-              </a:rPr>
-              <a:t>financial transactions</a:t>
-            </a:r>
-          </a:p>
-        </p:txBody>
-      </p:sp>
-      <p:sp>
-        <p:nvSpPr>
-          <p:cNvPr id="36" name="Rounded Rectangle 35"/>
+              <a:t>11</a:t>
+            </a:r>
+          </a:p>
+        </p:txBody>
+      </p:sp>
+      <p:sp>
+        <p:nvSpPr>
+          <p:cNvPr id="54" name="Rounded Rectangle 53"/>
           <p:cNvSpPr/>
           <p:nvPr/>
         </p:nvSpPr>
         <p:spPr>
           <a:xfrm>
-            <a:off x="868680" y="7635240"/>
-            <a:ext cx="2103120" cy="822960"/>
+            <a:off x="740664" y="4069080"/>
+            <a:ext cx="1920240" cy="868680"/>
           </a:xfrm>
           <a:prstGeom prst="roundRect">
             <a:avLst>
@@ -34683,7 +37458,78 @@
           </a:fontRef>
         </p:style>
         <p:txBody>
-          <a:bodyPr rtlCol="0" anchor="ctr" wrap="square" lIns="45720" rIns="45720" tIns="54864" bIns="54864"/>
+          <a:bodyPr rtlCol="0" anchor="ctr" wrap="square" lIns="109728" rIns="109728" tIns="54864" bIns="54864"/>
+          <a:lstStyle/>
+          <a:p>
+            <a:pPr algn="l">
+              <a:spcAft>
+                <a:spcPts val="600"/>
+              </a:spcAft>
+            </a:pPr>
+            <a:r>
+              <a:rPr sz="1400" b="1">
+                <a:solidFill>
+                  <a:srgbClr val="0B3D7A"/>
+                </a:solidFill>
+              </a:rPr>
+              <a:t>Capture runs, data quality</a:t>
+            </a:r>
+          </a:p>
+          <a:p>
+            <a:pPr algn="l">
+              <a:spcAft>
+                <a:spcPts val="600"/>
+              </a:spcAft>
+            </a:pPr>
+            <a:r>
+              <a:rPr sz="1100" b="0">
+                <a:solidFill>
+                  <a:srgbClr val="4C5D69"/>
+                </a:solidFill>
+              </a:rPr>
+              <a:t>per client, kept with the log</a:t>
+            </a:r>
+          </a:p>
+        </p:txBody>
+      </p:sp>
+      <p:sp>
+        <p:nvSpPr>
+          <p:cNvPr id="55" name="Oval 54"/>
+          <p:cNvSpPr/>
+          <p:nvPr/>
+        </p:nvSpPr>
+        <p:spPr>
+          <a:xfrm>
+            <a:off x="612648" y="3941064"/>
+            <a:ext cx="310896" cy="310896"/>
+          </a:xfrm>
+          <a:prstGeom prst="ellipse">
+            <a:avLst/>
+          </a:prstGeom>
+          <a:solidFill>
+            <a:srgbClr val="FFA418"/>
+          </a:solidFill>
+          <a:ln>
+            <a:noFill/>
+          </a:ln>
+          <a:effectLst/>
+        </p:spPr>
+        <p:style>
+          <a:lnRef idx="1">
+            <a:schemeClr val="accent1"/>
+          </a:lnRef>
+          <a:fillRef idx="3">
+            <a:schemeClr val="accent1"/>
+          </a:fillRef>
+          <a:effectRef idx="2">
+            <a:schemeClr val="accent1"/>
+          </a:effectRef>
+          <a:fontRef idx="minor">
+            <a:schemeClr val="lt1"/>
+          </a:fontRef>
+        </p:style>
+        <p:txBody>
+          <a:bodyPr rtlCol="0" anchor="ctr" wrap="square" lIns="0" rIns="0" tIns="54864" bIns="54864"/>
           <a:lstStyle/>
           <a:p>
             <a:pPr algn="ctr">
@@ -34692,41 +37538,79 @@
               </a:spcAft>
             </a:pPr>
             <a:r>
-              <a:rPr sz="950" b="1">
+              <a:rPr sz="1000" b="1">
                 <a:solidFill>
                   <a:srgbClr val="0B3D7A"/>
                 </a:solidFill>
               </a:rPr>
-              <a:t>FT_GL_DISTRIBUTION_RPT_CURR</a:t>
-            </a:r>
-          </a:p>
-          <a:p>
-            <a:pPr algn="ctr">
-              <a:spcAft>
-                <a:spcPts val="600"/>
-              </a:spcAft>
-            </a:pPr>
-            <a:r>
-              <a:rPr sz="950" b="0">
-                <a:solidFill>
-                  <a:srgbClr val="4C5D69"/>
-                </a:solidFill>
-              </a:rPr>
-              <a:t>GL distribution</a:t>
-            </a:r>
-          </a:p>
-        </p:txBody>
-      </p:sp>
-      <p:sp>
-        <p:nvSpPr>
-          <p:cNvPr id="37" name="Rounded Rectangle 36"/>
+              <a:t>12</a:t>
+            </a:r>
+          </a:p>
+        </p:txBody>
+      </p:sp>
+      <p:sp>
+        <p:nvSpPr>
+          <p:cNvPr id="56" name="TextBox 55"/>
+          <p:cNvSpPr txBox="1"/>
+          <p:nvPr/>
+        </p:nvSpPr>
+        <p:spPr>
+          <a:xfrm>
+            <a:off x="740664" y="5001768"/>
+            <a:ext cx="3474720" cy="548640"/>
+          </a:xfrm>
+          <a:prstGeom prst="rect">
+            <a:avLst/>
+          </a:prstGeom>
+          <a:noFill/>
+        </p:spPr>
+        <p:txBody>
+          <a:bodyPr wrap="square" anchor="t" lIns="0" rIns="0" tIns="54864" bIns="54864">
+            <a:spAutoFit/>
+          </a:bodyPr>
+          <a:lstStyle/>
+          <a:p>
+            <a:pPr algn="l">
+              <a:spcAft>
+                <a:spcPts val="600"/>
+              </a:spcAft>
+            </a:pPr>
+            <a:r>
+              <a:rPr sz="1200" b="1">
+                <a:solidFill>
+                  <a:srgbClr val="F5EFE9"/>
+                </a:solidFill>
+              </a:rPr>
+              <a:t>runs at (UTC), one job every 30 minutes</a:t>
+            </a:r>
+          </a:p>
+          <a:p>
+            <a:pPr algn="l">
+              <a:spcAft>
+                <a:spcPts val="600"/>
+              </a:spcAft>
+            </a:pPr>
+            <a:r>
+              <a:rPr sz="1100" b="0">
+                <a:solidFill>
+                  <a:srgbClr val="F5EFE9"/>
+                </a:solidFill>
+              </a:rPr>
+              <a:t>10:00 to 13:30, then again 16:00 to 19:30</a:t>
+            </a:r>
+          </a:p>
+        </p:txBody>
+      </p:sp>
+      <p:sp>
+        <p:nvSpPr>
+          <p:cNvPr id="57" name="Rounded Rectangle 56"/>
           <p:cNvSpPr/>
           <p:nvPr/>
         </p:nvSpPr>
         <p:spPr>
           <a:xfrm>
-            <a:off x="3108960" y="6675120"/>
-            <a:ext cx="2103120" cy="822960"/>
+            <a:off x="960120" y="6766560"/>
+            <a:ext cx="1920240" cy="777240"/>
           </a:xfrm>
           <a:prstGeom prst="roundRect">
             <a:avLst>
@@ -34765,12 +37649,12 @@
               </a:spcAft>
             </a:pPr>
             <a:r>
-              <a:rPr sz="950" b="1">
+              <a:rPr sz="1100" b="1">
                 <a:solidFill>
                   <a:srgbClr val="0B3D7A"/>
                 </a:solidFill>
               </a:rPr>
-              <a:t>BSEG_BILLED_USAGE_RPT_CURR</a:t>
+              <a:t>FT_RPT_CURR</a:t>
             </a:r>
           </a:p>
           <a:p>
@@ -34785,21 +37669,21 @@
                   <a:srgbClr val="4C5D69"/>
                 </a:solidFill>
               </a:rPr>
-              <a:t>billed usage per segment</a:t>
-            </a:r>
-          </a:p>
-        </p:txBody>
-      </p:sp>
-      <p:sp>
-        <p:nvSpPr>
-          <p:cNvPr id="38" name="Rounded Rectangle 37"/>
+              <a:t>financial transactions</a:t>
+            </a:r>
+          </a:p>
+        </p:txBody>
+      </p:sp>
+      <p:sp>
+        <p:nvSpPr>
+          <p:cNvPr id="58" name="Rounded Rectangle 57"/>
           <p:cNvSpPr/>
           <p:nvPr/>
         </p:nvSpPr>
         <p:spPr>
           <a:xfrm>
-            <a:off x="3108960" y="7635240"/>
-            <a:ext cx="2103120" cy="822960"/>
+            <a:off x="960120" y="7680960"/>
+            <a:ext cx="1920240" cy="777240"/>
           </a:xfrm>
           <a:prstGeom prst="roundRect">
             <a:avLst>
@@ -34838,12 +37722,12 @@
               </a:spcAft>
             </a:pPr>
             <a:r>
-              <a:rPr sz="950" b="1">
+              <a:rPr sz="900" b="1">
                 <a:solidFill>
                   <a:srgbClr val="0B3D7A"/>
                 </a:solidFill>
               </a:rPr>
-              <a:t>BSEG_SQ_USAGE_RPT_CURR</a:t>
+              <a:t>FT_GL_DISTRIBUTION_RPT_CURR</a:t>
             </a:r>
           </a:p>
           <a:p>
@@ -34858,21 +37742,21 @@
                   <a:srgbClr val="4C5D69"/>
                 </a:solidFill>
               </a:rPr>
-              <a:t>service quantities</a:t>
-            </a:r>
-          </a:p>
-        </p:txBody>
-      </p:sp>
-      <p:sp>
-        <p:nvSpPr>
-          <p:cNvPr id="39" name="Rounded Rectangle 38"/>
+              <a:t>GL distribution</a:t>
+            </a:r>
+          </a:p>
+        </p:txBody>
+      </p:sp>
+      <p:sp>
+        <p:nvSpPr>
+          <p:cNvPr id="59" name="Rounded Rectangle 58"/>
           <p:cNvSpPr/>
           <p:nvPr/>
         </p:nvSpPr>
         <p:spPr>
           <a:xfrm>
-            <a:off x="5349240" y="6675120"/>
-            <a:ext cx="2103120" cy="594360"/>
+            <a:off x="3200400" y="6766560"/>
+            <a:ext cx="1920240" cy="777240"/>
           </a:xfrm>
           <a:prstGeom prst="roundRect">
             <a:avLst>
@@ -34911,12 +37795,12 @@
               </a:spcAft>
             </a:pPr>
             <a:r>
-              <a:rPr sz="950" b="1">
+              <a:rPr sz="900" b="1">
                 <a:solidFill>
                   <a:srgbClr val="0B3D7A"/>
                 </a:solidFill>
               </a:rPr>
-              <a:t>D1_MSRMT_RPT_CURR</a:t>
+              <a:t>BSEG_BILLED_USAGE_RPT_CURR</a:t>
             </a:r>
           </a:p>
           <a:p>
@@ -34931,21 +37815,21 @@
                   <a:srgbClr val="4C5D69"/>
                 </a:solidFill>
               </a:rPr>
-              <a:t>measurements</a:t>
-            </a:r>
-          </a:p>
-        </p:txBody>
-      </p:sp>
-      <p:sp>
-        <p:nvSpPr>
-          <p:cNvPr id="40" name="Rounded Rectangle 39"/>
+              <a:t>billed usage per segment</a:t>
+            </a:r>
+          </a:p>
+        </p:txBody>
+      </p:sp>
+      <p:sp>
+        <p:nvSpPr>
+          <p:cNvPr id="60" name="Rounded Rectangle 59"/>
           <p:cNvSpPr/>
           <p:nvPr/>
         </p:nvSpPr>
         <p:spPr>
           <a:xfrm>
-            <a:off x="5349240" y="7360920"/>
-            <a:ext cx="2103120" cy="594360"/>
+            <a:off x="3200400" y="7680960"/>
+            <a:ext cx="1920240" cy="777240"/>
           </a:xfrm>
           <a:prstGeom prst="roundRect">
             <a:avLst>
@@ -34984,12 +37868,12 @@
               </a:spcAft>
             </a:pPr>
             <a:r>
-              <a:rPr sz="950" b="1">
+              <a:rPr sz="900" b="1">
                 <a:solidFill>
                   <a:srgbClr val="0B3D7A"/>
                 </a:solidFill>
               </a:rPr>
-              <a:t>D1_USAGE_RPT_CURR</a:t>
+              <a:t>BSEG_SQ_USAGE_RPT_CURR</a:t>
             </a:r>
           </a:p>
           <a:p>
@@ -35004,21 +37888,21 @@
                   <a:srgbClr val="4C5D69"/>
                 </a:solidFill>
               </a:rPr>
-              <a:t>usage transactions</a:t>
-            </a:r>
-          </a:p>
-        </p:txBody>
-      </p:sp>
-      <p:sp>
-        <p:nvSpPr>
-          <p:cNvPr id="41" name="Rounded Rectangle 40"/>
+              <a:t>service quantities</a:t>
+            </a:r>
+          </a:p>
+        </p:txBody>
+      </p:sp>
+      <p:sp>
+        <p:nvSpPr>
+          <p:cNvPr id="61" name="Rounded Rectangle 60"/>
           <p:cNvSpPr/>
           <p:nvPr/>
         </p:nvSpPr>
         <p:spPr>
           <a:xfrm>
-            <a:off x="5349240" y="8046720"/>
-            <a:ext cx="2103120" cy="594360"/>
+            <a:off x="5440680" y="6766560"/>
+            <a:ext cx="1920240" cy="566928"/>
           </a:xfrm>
           <a:prstGeom prst="roundRect">
             <a:avLst>
@@ -35062,6 +37946,152 @@
                   <a:srgbClr val="0B3D7A"/>
                 </a:solidFill>
               </a:rPr>
+              <a:t>D1_MSRMT_RPT_CURR</a:t>
+            </a:r>
+          </a:p>
+          <a:p>
+            <a:pPr algn="ctr">
+              <a:spcAft>
+                <a:spcPts val="600"/>
+              </a:spcAft>
+            </a:pPr>
+            <a:r>
+              <a:rPr sz="950" b="0">
+                <a:solidFill>
+                  <a:srgbClr val="4C5D69"/>
+                </a:solidFill>
+              </a:rPr>
+              <a:t>measurements</a:t>
+            </a:r>
+          </a:p>
+        </p:txBody>
+      </p:sp>
+      <p:sp>
+        <p:nvSpPr>
+          <p:cNvPr id="62" name="Rounded Rectangle 61"/>
+          <p:cNvSpPr/>
+          <p:nvPr/>
+        </p:nvSpPr>
+        <p:spPr>
+          <a:xfrm>
+            <a:off x="5440680" y="7424927"/>
+            <a:ext cx="1920240" cy="566928"/>
+          </a:xfrm>
+          <a:prstGeom prst="roundRect">
+            <a:avLst>
+              <a:gd name="adj" fmla="val 10000"/>
+            </a:avLst>
+          </a:prstGeom>
+          <a:solidFill>
+            <a:srgbClr val="F5EFE9"/>
+          </a:solidFill>
+          <a:ln>
+            <a:noFill/>
+          </a:ln>
+          <a:effectLst/>
+        </p:spPr>
+        <p:style>
+          <a:lnRef idx="1">
+            <a:schemeClr val="accent1"/>
+          </a:lnRef>
+          <a:fillRef idx="3">
+            <a:schemeClr val="accent1"/>
+          </a:fillRef>
+          <a:effectRef idx="2">
+            <a:schemeClr val="accent1"/>
+          </a:effectRef>
+          <a:fontRef idx="minor">
+            <a:schemeClr val="lt1"/>
+          </a:fontRef>
+        </p:style>
+        <p:txBody>
+          <a:bodyPr rtlCol="0" anchor="ctr" wrap="square" lIns="45720" rIns="45720" tIns="54864" bIns="54864"/>
+          <a:lstStyle/>
+          <a:p>
+            <a:pPr algn="ctr">
+              <a:spcAft>
+                <a:spcPts val="600"/>
+              </a:spcAft>
+            </a:pPr>
+            <a:r>
+              <a:rPr sz="900" b="1">
+                <a:solidFill>
+                  <a:srgbClr val="0B3D7A"/>
+                </a:solidFill>
+              </a:rPr>
+              <a:t>D1_USAGE_RPT_CURR</a:t>
+            </a:r>
+          </a:p>
+          <a:p>
+            <a:pPr algn="ctr">
+              <a:spcAft>
+                <a:spcPts val="600"/>
+              </a:spcAft>
+            </a:pPr>
+            <a:r>
+              <a:rPr sz="950" b="0">
+                <a:solidFill>
+                  <a:srgbClr val="4C5D69"/>
+                </a:solidFill>
+              </a:rPr>
+              <a:t>usage transactions</a:t>
+            </a:r>
+          </a:p>
+        </p:txBody>
+      </p:sp>
+      <p:sp>
+        <p:nvSpPr>
+          <p:cNvPr id="63" name="Rounded Rectangle 62"/>
+          <p:cNvSpPr/>
+          <p:nvPr/>
+        </p:nvSpPr>
+        <p:spPr>
+          <a:xfrm>
+            <a:off x="5440680" y="8083296"/>
+            <a:ext cx="1920240" cy="566928"/>
+          </a:xfrm>
+          <a:prstGeom prst="roundRect">
+            <a:avLst>
+              <a:gd name="adj" fmla="val 10000"/>
+            </a:avLst>
+          </a:prstGeom>
+          <a:solidFill>
+            <a:srgbClr val="F5EFE9"/>
+          </a:solidFill>
+          <a:ln>
+            <a:noFill/>
+          </a:ln>
+          <a:effectLst/>
+        </p:spPr>
+        <p:style>
+          <a:lnRef idx="1">
+            <a:schemeClr val="accent1"/>
+          </a:lnRef>
+          <a:fillRef idx="3">
+            <a:schemeClr val="accent1"/>
+          </a:fillRef>
+          <a:effectRef idx="2">
+            <a:schemeClr val="accent1"/>
+          </a:effectRef>
+          <a:fontRef idx="minor">
+            <a:schemeClr val="lt1"/>
+          </a:fontRef>
+        </p:style>
+        <p:txBody>
+          <a:bodyPr rtlCol="0" anchor="ctr" wrap="square" lIns="45720" rIns="45720" tIns="54864" bIns="54864"/>
+          <a:lstStyle/>
+          <a:p>
+            <a:pPr algn="ctr">
+              <a:spcAft>
+                <a:spcPts val="600"/>
+              </a:spcAft>
+            </a:pPr>
+            <a:r>
+              <a:rPr sz="850" b="1">
+                <a:solidFill>
+                  <a:srgbClr val="0B3D7A"/>
+                </a:solidFill>
+              </a:rPr>
               <a:t>D1_USAGE_SCALAR_DTL_RPT_CURR</a:t>
             </a:r>
           </a:p>
@@ -35084,7 +38114,7 @@
       </p:sp>
       <p:sp>
         <p:nvSpPr>
-          <p:cNvPr id="42" name="Rounded Rectangle 41"/>
+          <p:cNvPr id="64" name="Rounded Rectangle 63"/>
           <p:cNvSpPr/>
           <p:nvPr/>
         </p:nvSpPr>
@@ -35142,7 +38172,7 @@
       </p:sp>
       <p:sp>
         <p:nvSpPr>
-          <p:cNvPr id="43" name="Rounded Rectangle 42"/>
+          <p:cNvPr id="65" name="Rounded Rectangle 64"/>
           <p:cNvSpPr/>
           <p:nvPr/>
         </p:nvSpPr>
@@ -35200,7 +38230,7 @@
       </p:sp>
       <p:sp>
         <p:nvSpPr>
-          <p:cNvPr id="44" name="Rounded Rectangle 43"/>
+          <p:cNvPr id="66" name="Rounded Rectangle 65"/>
           <p:cNvSpPr/>
           <p:nvPr/>
         </p:nvSpPr>
@@ -35258,14 +38288,14 @@
       </p:sp>
       <p:sp>
         <p:nvSpPr>
-          <p:cNvPr id="45" name="Rounded Rectangle 44"/>
+          <p:cNvPr id="67" name="Rounded Rectangle 66"/>
           <p:cNvSpPr/>
           <p:nvPr/>
         </p:nvSpPr>
         <p:spPr>
           <a:xfrm>
-            <a:off x="7863840" y="6675120"/>
-            <a:ext cx="2377440" cy="868680"/>
+            <a:off x="7955279" y="6766560"/>
+            <a:ext cx="2194560" cy="822960"/>
           </a:xfrm>
           <a:prstGeom prst="roundRect">
             <a:avLst>
@@ -35331,14 +38361,14 @@
       </p:sp>
       <p:sp>
         <p:nvSpPr>
-          <p:cNvPr id="46" name="Rounded Rectangle 45"/>
+          <p:cNvPr id="68" name="Rounded Rectangle 67"/>
           <p:cNvSpPr/>
           <p:nvPr/>
         </p:nvSpPr>
         <p:spPr>
           <a:xfrm>
-            <a:off x="7863840" y="7726679"/>
-            <a:ext cx="2377440" cy="640080"/>
+            <a:off x="7955279" y="7726679"/>
+            <a:ext cx="2194560" cy="640080"/>
           </a:xfrm>
           <a:prstGeom prst="roundRect">
             <a:avLst>
@@ -35404,7 +38434,7 @@
       </p:sp>
       <p:sp>
         <p:nvSpPr>
-          <p:cNvPr id="47" name="Rounded Rectangle 46"/>
+          <p:cNvPr id="69" name="Rounded Rectangle 68"/>
           <p:cNvSpPr/>
           <p:nvPr/>
         </p:nvSpPr>
@@ -35462,14 +38492,14 @@
       </p:sp>
       <p:sp>
         <p:nvSpPr>
-          <p:cNvPr id="48" name="Rounded Rectangle 47"/>
+          <p:cNvPr id="70" name="Rounded Rectangle 69"/>
           <p:cNvSpPr/>
           <p:nvPr/>
         </p:nvSpPr>
         <p:spPr>
           <a:xfrm>
-            <a:off x="10515600" y="6675120"/>
-            <a:ext cx="2971800" cy="457200"/>
+            <a:off x="10607040" y="6766560"/>
+            <a:ext cx="2788920" cy="457200"/>
           </a:xfrm>
           <a:prstGeom prst="roundRect">
             <a:avLst>
@@ -35520,14 +38550,14 @@
       </p:sp>
       <p:sp>
         <p:nvSpPr>
-          <p:cNvPr id="49" name="Rounded Rectangle 48"/>
+          <p:cNvPr id="71" name="Rounded Rectangle 70"/>
           <p:cNvSpPr/>
           <p:nvPr/>
         </p:nvSpPr>
         <p:spPr>
           <a:xfrm>
-            <a:off x="10515600" y="7223760"/>
-            <a:ext cx="2971800" cy="457200"/>
+            <a:off x="10607040" y="7315200"/>
+            <a:ext cx="2788920" cy="457200"/>
           </a:xfrm>
           <a:prstGeom prst="roundRect">
             <a:avLst>
@@ -35578,14 +38608,14 @@
       </p:sp>
       <p:sp>
         <p:nvSpPr>
-          <p:cNvPr id="50" name="Rounded Rectangle 49"/>
+          <p:cNvPr id="72" name="Rounded Rectangle 71"/>
           <p:cNvSpPr/>
           <p:nvPr/>
         </p:nvSpPr>
         <p:spPr>
           <a:xfrm>
-            <a:off x="10515600" y="7772400"/>
-            <a:ext cx="2971800" cy="457200"/>
+            <a:off x="10607040" y="7863840"/>
+            <a:ext cx="2788920" cy="457200"/>
           </a:xfrm>
           <a:prstGeom prst="roundRect">
             <a:avLst>
@@ -35636,7 +38666,7 @@
       </p:sp>
       <p:sp>
         <p:nvSpPr>
-          <p:cNvPr id="51" name="Rounded Rectangle 50"/>
+          <p:cNvPr id="73" name="Rounded Rectangle 72"/>
           <p:cNvSpPr/>
           <p:nvPr/>
         </p:nvSpPr>
@@ -35694,7 +38724,7 @@
       </p:sp>
       <p:sp>
         <p:nvSpPr>
-          <p:cNvPr id="52" name="Rounded Rectangle 51"/>
+          <p:cNvPr id="74" name="Rounded Rectangle 73"/>
           <p:cNvSpPr/>
           <p:nvPr/>
         </p:nvSpPr>
@@ -35752,14 +38782,14 @@
       </p:sp>
       <p:sp>
         <p:nvSpPr>
-          <p:cNvPr id="53" name="Rounded Rectangle 52"/>
+          <p:cNvPr id="75" name="Rounded Rectangle 74"/>
           <p:cNvSpPr/>
           <p:nvPr/>
         </p:nvSpPr>
         <p:spPr>
           <a:xfrm>
-            <a:off x="13716000" y="6675120"/>
-            <a:ext cx="3063240" cy="457200"/>
+            <a:off x="13807440" y="6766560"/>
+            <a:ext cx="2880360" cy="457200"/>
           </a:xfrm>
           <a:prstGeom prst="roundRect">
             <a:avLst>
@@ -35810,14 +38840,14 @@
       </p:sp>
       <p:sp>
         <p:nvSpPr>
-          <p:cNvPr id="54" name="Rounded Rectangle 53"/>
+          <p:cNvPr id="76" name="Rounded Rectangle 75"/>
           <p:cNvSpPr/>
           <p:nvPr/>
         </p:nvSpPr>
         <p:spPr>
           <a:xfrm>
-            <a:off x="13716000" y="7223760"/>
-            <a:ext cx="3063240" cy="457200"/>
+            <a:off x="13807440" y="7315200"/>
+            <a:ext cx="2880360" cy="457200"/>
           </a:xfrm>
           <a:prstGeom prst="roundRect">
             <a:avLst>
@@ -35868,14 +38898,14 @@
       </p:sp>
       <p:sp>
         <p:nvSpPr>
-          <p:cNvPr id="55" name="Rounded Rectangle 54"/>
+          <p:cNvPr id="77" name="Rounded Rectangle 76"/>
           <p:cNvSpPr/>
           <p:nvPr/>
         </p:nvSpPr>
         <p:spPr>
           <a:xfrm>
-            <a:off x="13716000" y="7772400"/>
-            <a:ext cx="3063240" cy="457200"/>
+            <a:off x="13807440" y="7863840"/>
+            <a:ext cx="2880360" cy="457200"/>
           </a:xfrm>
           <a:prstGeom prst="roundRect">
             <a:avLst>
@@ -35926,7 +38956,7 @@
       </p:sp>
       <p:sp>
         <p:nvSpPr>
-          <p:cNvPr id="56" name="Rounded Rectangle 55"/>
+          <p:cNvPr id="78" name="Rounded Rectangle 77"/>
           <p:cNvSpPr/>
           <p:nvPr/>
         </p:nvSpPr>
@@ -35984,7 +39014,7 @@
       </p:sp>
       <p:sp>
         <p:nvSpPr>
-          <p:cNvPr id="57" name="Rounded Rectangle 56"/>
+          <p:cNvPr id="79" name="Rounded Rectangle 78"/>
           <p:cNvSpPr/>
           <p:nvPr/>
         </p:nvSpPr>
@@ -36042,14 +39072,14 @@
       </p:sp>
       <p:sp>
         <p:nvSpPr>
-          <p:cNvPr id="58" name="Rounded Rectangle 57"/>
+          <p:cNvPr id="80" name="Rounded Rectangle 79"/>
           <p:cNvSpPr/>
           <p:nvPr/>
         </p:nvSpPr>
         <p:spPr>
           <a:xfrm>
-            <a:off x="17007840" y="6675120"/>
-            <a:ext cx="2194560" cy="457200"/>
+            <a:off x="17099280" y="6766560"/>
+            <a:ext cx="2011680" cy="457200"/>
           </a:xfrm>
           <a:prstGeom prst="roundRect">
             <a:avLst>
@@ -36100,14 +39130,14 @@
       </p:sp>
       <p:sp>
         <p:nvSpPr>
-          <p:cNvPr id="59" name="Rounded Rectangle 58"/>
+          <p:cNvPr id="81" name="Rounded Rectangle 80"/>
           <p:cNvSpPr/>
           <p:nvPr/>
         </p:nvSpPr>
         <p:spPr>
           <a:xfrm>
-            <a:off x="17007840" y="7223760"/>
-            <a:ext cx="2194560" cy="457200"/>
+            <a:off x="17099280" y="7315200"/>
+            <a:ext cx="2011680" cy="457200"/>
           </a:xfrm>
           <a:prstGeom prst="roundRect">
             <a:avLst>
@@ -36158,7 +39188,7 @@
       </p:sp>
       <p:sp>
         <p:nvSpPr>
-          <p:cNvPr id="60" name="Rounded Rectangle 59"/>
+          <p:cNvPr id="82" name="Rounded Rectangle 81"/>
           <p:cNvSpPr/>
           <p:nvPr/>
         </p:nvSpPr>
@@ -36216,7 +39246,7 @@
       </p:sp>
       <p:cxnSp>
         <p:nvCxnSpPr>
-          <p:cNvPr id="61" name="Connector 60"/>
+          <p:cNvPr id="83" name="Connector 82"/>
           <p:cNvCxnSpPr/>
           <p:nvPr/>
         </p:nvCxnSpPr>
@@ -36252,7 +39282,7 @@
       </p:cxnSp>
       <p:cxnSp>
         <p:nvCxnSpPr>
-          <p:cNvPr id="62" name="Connector 61"/>
+          <p:cNvPr id="84" name="Connector 83"/>
           <p:cNvCxnSpPr/>
           <p:nvPr/>
         </p:nvCxnSpPr>
@@ -36288,7 +39318,7 @@
       </p:cxnSp>
       <p:cxnSp>
         <p:nvCxnSpPr>
-          <p:cNvPr id="63" name="Connector 62"/>
+          <p:cNvPr id="85" name="Connector 84"/>
           <p:cNvCxnSpPr/>
           <p:nvPr/>
         </p:nvCxnSpPr>
@@ -36324,7 +39354,7 @@
       </p:cxnSp>
       <p:cxnSp>
         <p:nvCxnSpPr>
-          <p:cNvPr id="64" name="Connector 63"/>
+          <p:cNvPr id="86" name="Connector 85"/>
           <p:cNvCxnSpPr/>
           <p:nvPr/>
         </p:nvCxnSpPr>
@@ -36360,7 +39390,7 @@
       </p:cxnSp>
       <p:cxnSp>
         <p:nvCxnSpPr>
-          <p:cNvPr id="65" name="Connector 64"/>
+          <p:cNvPr id="87" name="Connector 86"/>
           <p:cNvCxnSpPr/>
           <p:nvPr/>
         </p:nvCxnSpPr>
@@ -36395,7 +39425,7 @@
       </p:cxnSp>
       <p:cxnSp>
         <p:nvCxnSpPr>
-          <p:cNvPr id="66" name="Connector 65"/>
+          <p:cNvPr id="88" name="Connector 87"/>
           <p:cNvCxnSpPr/>
           <p:nvPr/>
         </p:nvCxnSpPr>
@@ -36430,7 +39460,7 @@
       </p:cxnSp>
       <p:cxnSp>
         <p:nvCxnSpPr>
-          <p:cNvPr id="67" name="Connector 66"/>
+          <p:cNvPr id="89" name="Connector 88"/>
           <p:cNvCxnSpPr/>
           <p:nvPr/>
         </p:nvCxnSpPr>
@@ -36466,14 +39496,14 @@
       </p:cxnSp>
       <p:cxnSp>
         <p:nvCxnSpPr>
-          <p:cNvPr id="68" name="Connector 67"/>
+          <p:cNvPr id="90" name="Connector 89"/>
           <p:cNvCxnSpPr/>
           <p:nvPr/>
         </p:nvCxnSpPr>
         <p:spPr>
-          <a:xfrm flipH="1">
-            <a:off x="16642080" y="4503420"/>
-            <a:ext cx="457200" cy="0"/>
+          <a:xfrm>
+            <a:off x="18150839" y="4983480"/>
+            <a:ext cx="0" cy="137160"/>
           </a:xfrm>
           <a:prstGeom prst="line">
             <a:avLst/>
@@ -36500,15 +39530,53 @@
           </a:fontRef>
         </p:style>
       </p:cxnSp>
+      <p:sp>
+        <p:nvSpPr>
+          <p:cNvPr id="91" name="TextBox 90"/>
+          <p:cNvSpPr txBox="1"/>
+          <p:nvPr/>
+        </p:nvSpPr>
+        <p:spPr>
+          <a:xfrm>
+            <a:off x="18242280" y="4668012"/>
+            <a:ext cx="2926080" cy="365760"/>
+          </a:xfrm>
+          <a:prstGeom prst="rect">
+            <a:avLst/>
+          </a:prstGeom>
+          <a:noFill/>
+        </p:spPr>
+        <p:txBody>
+          <a:bodyPr wrap="square" anchor="b" lIns="0" rIns="0" tIns="54864" bIns="54864">
+            <a:spAutoFit/>
+          </a:bodyPr>
+          <a:lstStyle/>
+          <a:p>
+            <a:pPr algn="l">
+              <a:spcAft>
+                <a:spcPts val="600"/>
+              </a:spcAft>
+            </a:pPr>
+            <a:r>
+              <a:rPr sz="1100" b="1">
+                <a:solidFill>
+                  <a:srgbClr val="F5EFE9"/>
+                </a:solidFill>
+              </a:rPr>
+              <a:t>no</a:t>
+            </a:r>
+          </a:p>
+        </p:txBody>
+      </p:sp>
       <p:cxnSp>
         <p:nvCxnSpPr>
-          <p:cNvPr id="69" name="Connector 68"/>
+          <p:cNvPr id="92" name="Connector 91"/>
           <p:cNvCxnSpPr/>
           <p:nvPr/>
         </p:nvCxnSpPr>
         <p:spPr>
           <a:xfrm flipH="1">
-            <a:off x="13807440" y="4503420"/>
+            <a:off x="16642080" y="4503420"/>
             <a:ext cx="457200" cy="0"/>
           </a:xfrm>
           <a:prstGeom prst="line">
@@ -36538,14 +39606,14 @@
       </p:cxnSp>
       <p:cxnSp>
         <p:nvCxnSpPr>
-          <p:cNvPr id="70" name="Connector 69"/>
+          <p:cNvPr id="93" name="Connector 92"/>
           <p:cNvCxnSpPr/>
           <p:nvPr/>
         </p:nvCxnSpPr>
         <p:spPr>
-          <a:xfrm flipH="1">
-            <a:off x="11155680" y="4503420"/>
-            <a:ext cx="457200" cy="0"/>
+          <a:xfrm>
+            <a:off x="15453359" y="4983480"/>
+            <a:ext cx="0" cy="137160"/>
           </a:xfrm>
           <a:prstGeom prst="line">
             <a:avLst/>
@@ -36572,16 +39640,54 @@
           </a:fontRef>
         </p:style>
       </p:cxnSp>
+      <p:sp>
+        <p:nvSpPr>
+          <p:cNvPr id="94" name="TextBox 93"/>
+          <p:cNvSpPr txBox="1"/>
+          <p:nvPr/>
+        </p:nvSpPr>
+        <p:spPr>
+          <a:xfrm>
+            <a:off x="15544800" y="4668012"/>
+            <a:ext cx="2926080" cy="365760"/>
+          </a:xfrm>
+          <a:prstGeom prst="rect">
+            <a:avLst/>
+          </a:prstGeom>
+          <a:noFill/>
+        </p:spPr>
+        <p:txBody>
+          <a:bodyPr wrap="square" anchor="b" lIns="0" rIns="0" tIns="54864" bIns="54864">
+            <a:spAutoFit/>
+          </a:bodyPr>
+          <a:lstStyle/>
+          <a:p>
+            <a:pPr algn="l">
+              <a:spcAft>
+                <a:spcPts val="600"/>
+              </a:spcAft>
+            </a:pPr>
+            <a:r>
+              <a:rPr sz="1100" b="1">
+                <a:solidFill>
+                  <a:srgbClr val="F5EFE9"/>
+                </a:solidFill>
+              </a:rPr>
+              <a:t>no</a:t>
+            </a:r>
+          </a:p>
+        </p:txBody>
+      </p:sp>
       <p:cxnSp>
         <p:nvCxnSpPr>
-          <p:cNvPr id="71" name="Connector 70"/>
+          <p:cNvPr id="95" name="Connector 94"/>
           <p:cNvCxnSpPr/>
           <p:nvPr/>
         </p:nvCxnSpPr>
         <p:spPr>
           <a:xfrm flipH="1">
-            <a:off x="7955279" y="4503420"/>
-            <a:ext cx="457201" cy="0"/>
+            <a:off x="13807440" y="4503420"/>
+            <a:ext cx="457200" cy="0"/>
           </a:xfrm>
           <a:prstGeom prst="line">
             <a:avLst/>
@@ -36610,14 +39716,14 @@
       </p:cxnSp>
       <p:cxnSp>
         <p:nvCxnSpPr>
-          <p:cNvPr id="72" name="Connector 71"/>
+          <p:cNvPr id="96" name="Connector 95"/>
           <p:cNvCxnSpPr/>
           <p:nvPr/>
         </p:nvCxnSpPr>
         <p:spPr>
           <a:xfrm flipH="1">
-            <a:off x="5532120" y="4503420"/>
-            <a:ext cx="411480" cy="0"/>
+            <a:off x="11155680" y="4503420"/>
+            <a:ext cx="457200" cy="0"/>
           </a:xfrm>
           <a:prstGeom prst="line">
             <a:avLst/>
@@ -36646,14 +39752,14 @@
       </p:cxnSp>
       <p:cxnSp>
         <p:nvCxnSpPr>
-          <p:cNvPr id="73" name="Connector 72"/>
+          <p:cNvPr id="97" name="Connector 96"/>
           <p:cNvCxnSpPr/>
           <p:nvPr/>
         </p:nvCxnSpPr>
         <p:spPr>
           <a:xfrm flipH="1">
-            <a:off x="2660904" y="4503420"/>
-            <a:ext cx="402336" cy="0"/>
+            <a:off x="7955279" y="4503420"/>
+            <a:ext cx="457201" cy="0"/>
           </a:xfrm>
           <a:prstGeom prst="line">
             <a:avLst/>
@@ -36682,84 +39788,14 @@
       </p:cxnSp>
       <p:cxnSp>
         <p:nvCxnSpPr>
-          <p:cNvPr id="74" name="Connector 73"/>
+          <p:cNvPr id="98" name="Connector 97"/>
           <p:cNvCxnSpPr/>
           <p:nvPr/>
         </p:nvCxnSpPr>
         <p:spPr>
-          <a:xfrm>
-            <a:off x="4297680" y="4937760"/>
-            <a:ext cx="0" cy="411480"/>
-          </a:xfrm>
-          <a:prstGeom prst="line">
-            <a:avLst/>
-          </a:prstGeom>
-          <a:ln w="28575">
-            <a:solidFill>
-              <a:srgbClr val="F5EFE9"/>
-            </a:solidFill>
-          </a:ln>
-        </p:spPr>
-        <p:style>
-          <a:lnRef idx="2">
-            <a:schemeClr val="accent1"/>
-          </a:lnRef>
-          <a:fillRef idx="0">
-            <a:schemeClr val="accent1"/>
-          </a:fillRef>
-          <a:effectRef idx="1">
-            <a:schemeClr val="accent1"/>
-          </a:effectRef>
-          <a:fontRef idx="minor">
-            <a:schemeClr val="tx1"/>
-          </a:fontRef>
-        </p:style>
-      </p:cxnSp>
-      <p:cxnSp>
-        <p:nvCxnSpPr>
-          <p:cNvPr id="75" name="Connector 74"/>
-          <p:cNvCxnSpPr/>
-          <p:nvPr/>
-        </p:nvCxnSpPr>
-        <p:spPr>
-          <a:xfrm>
-            <a:off x="4297680" y="5349240"/>
-            <a:ext cx="5486400" cy="0"/>
-          </a:xfrm>
-          <a:prstGeom prst="line">
-            <a:avLst/>
-          </a:prstGeom>
-          <a:ln w="28575">
-            <a:solidFill>
-              <a:srgbClr val="F5EFE9"/>
-            </a:solidFill>
-          </a:ln>
-        </p:spPr>
-        <p:style>
-          <a:lnRef idx="2">
-            <a:schemeClr val="accent1"/>
-          </a:lnRef>
-          <a:fillRef idx="0">
-            <a:schemeClr val="accent1"/>
-          </a:fillRef>
-          <a:effectRef idx="1">
-            <a:schemeClr val="accent1"/>
-          </a:effectRef>
-          <a:fontRef idx="minor">
-            <a:schemeClr val="tx1"/>
-          </a:fontRef>
-        </p:style>
-      </p:cxnSp>
-      <p:cxnSp>
-        <p:nvCxnSpPr>
-          <p:cNvPr id="76" name="Connector 75"/>
-          <p:cNvCxnSpPr/>
-          <p:nvPr/>
-        </p:nvCxnSpPr>
-        <p:spPr>
           <a:xfrm flipV="1">
-            <a:off x="9784080" y="4937760"/>
-            <a:ext cx="0" cy="411480"/>
+            <a:off x="6949440" y="3840480"/>
+            <a:ext cx="0" cy="182880"/>
           </a:xfrm>
           <a:prstGeom prst="line">
             <a:avLst/>
@@ -36788,14 +39824,14 @@
       </p:cxnSp>
       <p:sp>
         <p:nvSpPr>
-          <p:cNvPr id="77" name="TextBox 76"/>
+          <p:cNvPr id="99" name="TextBox 98"/>
           <p:cNvSpPr txBox="1"/>
           <p:nvPr/>
         </p:nvSpPr>
         <p:spPr>
           <a:xfrm>
-            <a:off x="4572000" y="5029200"/>
-            <a:ext cx="5486400" cy="365760"/>
+            <a:off x="7040879" y="3547872"/>
+            <a:ext cx="2926080" cy="365760"/>
           </a:xfrm>
           <a:prstGeom prst="rect">
             <a:avLst/>
@@ -36819,21 +39855,21 @@
                   <a:srgbClr val="F5EFE9"/>
                 </a:solidFill>
               </a:rPr>
-              <a:t>every 12 hours: the newest 3 months rebuilt, older rows kept</a:t>
+              <a:t>no</a:t>
             </a:r>
           </a:p>
         </p:txBody>
       </p:sp>
       <p:cxnSp>
         <p:nvCxnSpPr>
-          <p:cNvPr id="78" name="Connector 77"/>
+          <p:cNvPr id="100" name="Connector 99"/>
           <p:cNvCxnSpPr/>
           <p:nvPr/>
         </p:nvCxnSpPr>
         <p:spPr>
-          <a:xfrm>
-            <a:off x="1920239" y="8458200"/>
-            <a:ext cx="0" cy="548640"/>
+          <a:xfrm flipH="1">
+            <a:off x="5532120" y="4503420"/>
+            <a:ext cx="411480" cy="0"/>
           </a:xfrm>
           <a:prstGeom prst="line">
             <a:avLst/>
@@ -36862,14 +39898,14 @@
       </p:cxnSp>
       <p:cxnSp>
         <p:nvCxnSpPr>
-          <p:cNvPr id="79" name="Connector 78"/>
+          <p:cNvPr id="101" name="Connector 100"/>
           <p:cNvCxnSpPr/>
           <p:nvPr/>
         </p:nvCxnSpPr>
         <p:spPr>
-          <a:xfrm>
-            <a:off x="4160520" y="8458200"/>
-            <a:ext cx="0" cy="548640"/>
+          <a:xfrm flipH="1">
+            <a:off x="2660904" y="4503420"/>
+            <a:ext cx="402336" cy="0"/>
           </a:xfrm>
           <a:prstGeom prst="line">
             <a:avLst/>
@@ -36898,14 +39934,84 @@
       </p:cxnSp>
       <p:cxnSp>
         <p:nvCxnSpPr>
-          <p:cNvPr id="80" name="Connector 79"/>
+          <p:cNvPr id="102" name="Connector 101"/>
           <p:cNvCxnSpPr/>
           <p:nvPr/>
         </p:nvCxnSpPr>
         <p:spPr>
           <a:xfrm>
-            <a:off x="6400800" y="8641080"/>
-            <a:ext cx="0" cy="365760"/>
+            <a:off x="4297680" y="4937760"/>
+            <a:ext cx="0" cy="411480"/>
+          </a:xfrm>
+          <a:prstGeom prst="line">
+            <a:avLst/>
+          </a:prstGeom>
+          <a:ln w="28575">
+            <a:solidFill>
+              <a:srgbClr val="F5EFE9"/>
+            </a:solidFill>
+          </a:ln>
+        </p:spPr>
+        <p:style>
+          <a:lnRef idx="2">
+            <a:schemeClr val="accent1"/>
+          </a:lnRef>
+          <a:fillRef idx="0">
+            <a:schemeClr val="accent1"/>
+          </a:fillRef>
+          <a:effectRef idx="1">
+            <a:schemeClr val="accent1"/>
+          </a:effectRef>
+          <a:fontRef idx="minor">
+            <a:schemeClr val="tx1"/>
+          </a:fontRef>
+        </p:style>
+      </p:cxnSp>
+      <p:cxnSp>
+        <p:nvCxnSpPr>
+          <p:cNvPr id="103" name="Connector 102"/>
+          <p:cNvCxnSpPr/>
+          <p:nvPr/>
+        </p:nvCxnSpPr>
+        <p:spPr>
+          <a:xfrm>
+            <a:off x="4297680" y="5349240"/>
+            <a:ext cx="5486400" cy="0"/>
+          </a:xfrm>
+          <a:prstGeom prst="line">
+            <a:avLst/>
+          </a:prstGeom>
+          <a:ln w="28575">
+            <a:solidFill>
+              <a:srgbClr val="F5EFE9"/>
+            </a:solidFill>
+          </a:ln>
+        </p:spPr>
+        <p:style>
+          <a:lnRef idx="2">
+            <a:schemeClr val="accent1"/>
+          </a:lnRef>
+          <a:fillRef idx="0">
+            <a:schemeClr val="accent1"/>
+          </a:fillRef>
+          <a:effectRef idx="1">
+            <a:schemeClr val="accent1"/>
+          </a:effectRef>
+          <a:fontRef idx="minor">
+            <a:schemeClr val="tx1"/>
+          </a:fontRef>
+        </p:style>
+      </p:cxnSp>
+      <p:cxnSp>
+        <p:nvCxnSpPr>
+          <p:cNvPr id="104" name="Connector 103"/>
+          <p:cNvCxnSpPr/>
+          <p:nvPr/>
+        </p:nvCxnSpPr>
+        <p:spPr>
+          <a:xfrm flipV="1">
+            <a:off x="9784080" y="4937760"/>
+            <a:ext cx="0" cy="411480"/>
           </a:xfrm>
           <a:prstGeom prst="line">
             <a:avLst/>
@@ -36932,16 +40038,54 @@
           </a:fontRef>
         </p:style>
       </p:cxnSp>
+      <p:sp>
+        <p:nvSpPr>
+          <p:cNvPr id="105" name="TextBox 104"/>
+          <p:cNvSpPr txBox="1"/>
+          <p:nvPr/>
+        </p:nvSpPr>
+        <p:spPr>
+          <a:xfrm>
+            <a:off x="4572000" y="5029200"/>
+            <a:ext cx="5486400" cy="365760"/>
+          </a:xfrm>
+          <a:prstGeom prst="rect">
+            <a:avLst/>
+          </a:prstGeom>
+          <a:noFill/>
+        </p:spPr>
+        <p:txBody>
+          <a:bodyPr wrap="square" anchor="b" lIns="0" rIns="0" tIns="54864" bIns="54864">
+            <a:spAutoFit/>
+          </a:bodyPr>
+          <a:lstStyle/>
+          <a:p>
+            <a:pPr algn="l">
+              <a:spcAft>
+                <a:spcPts val="600"/>
+              </a:spcAft>
+            </a:pPr>
+            <a:r>
+              <a:rPr sz="1100" b="1">
+                <a:solidFill>
+                  <a:srgbClr val="F5EFE9"/>
+                </a:solidFill>
+              </a:rPr>
+              <a:t>every 12 hours: the newest 3 months rebuilt, older rows kept</a:t>
+            </a:r>
+          </a:p>
+        </p:txBody>
+      </p:sp>
       <p:cxnSp>
         <p:nvCxnSpPr>
-          <p:cNvPr id="81" name="Connector 80"/>
+          <p:cNvPr id="106" name="Connector 105"/>
           <p:cNvCxnSpPr/>
           <p:nvPr/>
         </p:nvCxnSpPr>
         <p:spPr>
           <a:xfrm>
-            <a:off x="9052560" y="8366759"/>
-            <a:ext cx="0" cy="640081"/>
+            <a:off x="1920239" y="8732520"/>
+            <a:ext cx="0" cy="274320"/>
           </a:xfrm>
           <a:prstGeom prst="line">
             <a:avLst/>
@@ -36970,119 +40114,14 @@
       </p:cxnSp>
       <p:cxnSp>
         <p:nvCxnSpPr>
-          <p:cNvPr id="82" name="Connector 81"/>
+          <p:cNvPr id="107" name="Connector 106"/>
           <p:cNvCxnSpPr/>
           <p:nvPr/>
         </p:nvCxnSpPr>
         <p:spPr>
-          <a:xfrm flipH="1">
-            <a:off x="10332720" y="7452360"/>
-            <a:ext cx="182880" cy="0"/>
-          </a:xfrm>
-          <a:prstGeom prst="line">
-            <a:avLst/>
-          </a:prstGeom>
-          <a:ln w="28575">
-            <a:solidFill>
-              <a:srgbClr val="F5EFE9"/>
-            </a:solidFill>
-          </a:ln>
-        </p:spPr>
-        <p:style>
-          <a:lnRef idx="2">
-            <a:schemeClr val="accent1"/>
-          </a:lnRef>
-          <a:fillRef idx="0">
-            <a:schemeClr val="accent1"/>
-          </a:fillRef>
-          <a:effectRef idx="1">
-            <a:schemeClr val="accent1"/>
-          </a:effectRef>
-          <a:fontRef idx="minor">
-            <a:schemeClr val="tx1"/>
-          </a:fontRef>
-        </p:style>
-      </p:cxnSp>
-      <p:cxnSp>
-        <p:nvCxnSpPr>
-          <p:cNvPr id="83" name="Connector 82"/>
-          <p:cNvCxnSpPr/>
-          <p:nvPr/>
-        </p:nvCxnSpPr>
-        <p:spPr>
-          <a:xfrm>
-            <a:off x="10332720" y="7452360"/>
-            <a:ext cx="0" cy="1280160"/>
-          </a:xfrm>
-          <a:prstGeom prst="line">
-            <a:avLst/>
-          </a:prstGeom>
-          <a:ln w="28575">
-            <a:solidFill>
-              <a:srgbClr val="F5EFE9"/>
-            </a:solidFill>
-          </a:ln>
-        </p:spPr>
-        <p:style>
-          <a:lnRef idx="2">
-            <a:schemeClr val="accent1"/>
-          </a:lnRef>
-          <a:fillRef idx="0">
-            <a:schemeClr val="accent1"/>
-          </a:fillRef>
-          <a:effectRef idx="1">
-            <a:schemeClr val="accent1"/>
-          </a:effectRef>
-          <a:fontRef idx="minor">
-            <a:schemeClr val="tx1"/>
-          </a:fontRef>
-        </p:style>
-      </p:cxnSp>
-      <p:cxnSp>
-        <p:nvCxnSpPr>
-          <p:cNvPr id="84" name="Connector 83"/>
-          <p:cNvCxnSpPr/>
-          <p:nvPr/>
-        </p:nvCxnSpPr>
-        <p:spPr>
-          <a:xfrm>
-            <a:off x="10332720" y="8732520"/>
-            <a:ext cx="886968" cy="0"/>
-          </a:xfrm>
-          <a:prstGeom prst="line">
-            <a:avLst/>
-          </a:prstGeom>
-          <a:ln w="28575">
-            <a:solidFill>
-              <a:srgbClr val="F5EFE9"/>
-            </a:solidFill>
-          </a:ln>
-        </p:spPr>
-        <p:style>
-          <a:lnRef idx="2">
-            <a:schemeClr val="accent1"/>
-          </a:lnRef>
-          <a:fillRef idx="0">
-            <a:schemeClr val="accent1"/>
-          </a:fillRef>
-          <a:effectRef idx="1">
-            <a:schemeClr val="accent1"/>
-          </a:effectRef>
-          <a:fontRef idx="minor">
-            <a:schemeClr val="tx1"/>
-          </a:fontRef>
-        </p:style>
-      </p:cxnSp>
-      <p:cxnSp>
-        <p:nvCxnSpPr>
-          <p:cNvPr id="85" name="Connector 84"/>
-          <p:cNvCxnSpPr/>
-          <p:nvPr/>
-        </p:nvCxnSpPr>
-        <p:spPr>
-          <a:xfrm>
-            <a:off x="11219688" y="8732520"/>
-            <a:ext cx="4572" cy="274320"/>
+          <a:xfrm>
+            <a:off x="4160520" y="8732520"/>
+            <a:ext cx="0" cy="274320"/>
           </a:xfrm>
           <a:prstGeom prst="line">
             <a:avLst/>
@@ -37111,84 +40150,14 @@
       </p:cxnSp>
       <p:cxnSp>
         <p:nvCxnSpPr>
-          <p:cNvPr id="86" name="Connector 85"/>
+          <p:cNvPr id="108" name="Connector 107"/>
           <p:cNvCxnSpPr/>
           <p:nvPr/>
         </p:nvCxnSpPr>
         <p:spPr>
-          <a:xfrm flipH="1">
-            <a:off x="11996928" y="8229600"/>
-            <a:ext cx="4572" cy="502920"/>
-          </a:xfrm>
-          <a:prstGeom prst="line">
-            <a:avLst/>
-          </a:prstGeom>
-          <a:ln w="28575">
-            <a:solidFill>
-              <a:srgbClr val="F5EFE9"/>
-            </a:solidFill>
-          </a:ln>
-        </p:spPr>
-        <p:style>
-          <a:lnRef idx="2">
-            <a:schemeClr val="accent1"/>
-          </a:lnRef>
-          <a:fillRef idx="0">
-            <a:schemeClr val="accent1"/>
-          </a:fillRef>
-          <a:effectRef idx="1">
-            <a:schemeClr val="accent1"/>
-          </a:effectRef>
-          <a:fontRef idx="minor">
-            <a:schemeClr val="tx1"/>
-          </a:fontRef>
-        </p:style>
-      </p:cxnSp>
-      <p:cxnSp>
-        <p:nvCxnSpPr>
-          <p:cNvPr id="87" name="Connector 86"/>
-          <p:cNvCxnSpPr/>
-          <p:nvPr/>
-        </p:nvCxnSpPr>
-        <p:spPr>
-          <a:xfrm>
-            <a:off x="11996928" y="8732520"/>
-            <a:ext cx="777240" cy="0"/>
-          </a:xfrm>
-          <a:prstGeom prst="line">
-            <a:avLst/>
-          </a:prstGeom>
-          <a:ln w="28575">
-            <a:solidFill>
-              <a:srgbClr val="F5EFE9"/>
-            </a:solidFill>
-          </a:ln>
-        </p:spPr>
-        <p:style>
-          <a:lnRef idx="2">
-            <a:schemeClr val="accent1"/>
-          </a:lnRef>
-          <a:fillRef idx="0">
-            <a:schemeClr val="accent1"/>
-          </a:fillRef>
-          <a:effectRef idx="1">
-            <a:schemeClr val="accent1"/>
-          </a:effectRef>
-          <a:fontRef idx="minor">
-            <a:schemeClr val="tx1"/>
-          </a:fontRef>
-        </p:style>
-      </p:cxnSp>
-      <p:cxnSp>
-        <p:nvCxnSpPr>
-          <p:cNvPr id="88" name="Connector 87"/>
-          <p:cNvCxnSpPr/>
-          <p:nvPr/>
-        </p:nvCxnSpPr>
-        <p:spPr>
-          <a:xfrm>
-            <a:off x="12774168" y="8732520"/>
-            <a:ext cx="4572" cy="274320"/>
+          <a:xfrm>
+            <a:off x="6400800" y="8732520"/>
+            <a:ext cx="0" cy="274320"/>
           </a:xfrm>
           <a:prstGeom prst="line">
             <a:avLst/>
@@ -37217,84 +40186,14 @@
       </p:cxnSp>
       <p:cxnSp>
         <p:nvCxnSpPr>
-          <p:cNvPr id="89" name="Connector 88"/>
+          <p:cNvPr id="109" name="Connector 108"/>
           <p:cNvCxnSpPr/>
           <p:nvPr/>
         </p:nvCxnSpPr>
         <p:spPr>
           <a:xfrm>
-            <a:off x="15247620" y="8229600"/>
-            <a:ext cx="0" cy="365760"/>
-          </a:xfrm>
-          <a:prstGeom prst="line">
-            <a:avLst/>
-          </a:prstGeom>
-          <a:ln w="28575">
-            <a:solidFill>
-              <a:srgbClr val="F5EFE9"/>
-            </a:solidFill>
-          </a:ln>
-        </p:spPr>
-        <p:style>
-          <a:lnRef idx="2">
-            <a:schemeClr val="accent1"/>
-          </a:lnRef>
-          <a:fillRef idx="0">
-            <a:schemeClr val="accent1"/>
-          </a:fillRef>
-          <a:effectRef idx="1">
-            <a:schemeClr val="accent1"/>
-          </a:effectRef>
-          <a:fontRef idx="minor">
-            <a:schemeClr val="tx1"/>
-          </a:fontRef>
-        </p:style>
-      </p:cxnSp>
-      <p:cxnSp>
-        <p:nvCxnSpPr>
-          <p:cNvPr id="90" name="Connector 89"/>
-          <p:cNvCxnSpPr/>
-          <p:nvPr/>
-        </p:nvCxnSpPr>
-        <p:spPr>
-          <a:xfrm flipH="1">
-            <a:off x="14447520" y="8595360"/>
-            <a:ext cx="800100" cy="0"/>
-          </a:xfrm>
-          <a:prstGeom prst="line">
-            <a:avLst/>
-          </a:prstGeom>
-          <a:ln w="28575">
-            <a:solidFill>
-              <a:srgbClr val="F5EFE9"/>
-            </a:solidFill>
-          </a:ln>
-        </p:spPr>
-        <p:style>
-          <a:lnRef idx="2">
-            <a:schemeClr val="accent1"/>
-          </a:lnRef>
-          <a:fillRef idx="0">
-            <a:schemeClr val="accent1"/>
-          </a:fillRef>
-          <a:effectRef idx="1">
-            <a:schemeClr val="accent1"/>
-          </a:effectRef>
-          <a:fontRef idx="minor">
-            <a:schemeClr val="tx1"/>
-          </a:fontRef>
-        </p:style>
-      </p:cxnSp>
-      <p:cxnSp>
-        <p:nvCxnSpPr>
-          <p:cNvPr id="91" name="Connector 90"/>
-          <p:cNvCxnSpPr/>
-          <p:nvPr/>
-        </p:nvCxnSpPr>
-        <p:spPr>
-          <a:xfrm>
-            <a:off x="14447520" y="8595360"/>
-            <a:ext cx="0" cy="411480"/>
+            <a:off x="9052560" y="8732520"/>
+            <a:ext cx="0" cy="274320"/>
           </a:xfrm>
           <a:prstGeom prst="line">
             <a:avLst/>
@@ -37323,14 +40222,14 @@
       </p:cxnSp>
       <p:cxnSp>
         <p:nvCxnSpPr>
-          <p:cNvPr id="92" name="Connector 91"/>
+          <p:cNvPr id="110" name="Connector 109"/>
           <p:cNvCxnSpPr/>
           <p:nvPr/>
         </p:nvCxnSpPr>
         <p:spPr>
           <a:xfrm>
-            <a:off x="15247620" y="8229600"/>
-            <a:ext cx="0" cy="365760"/>
+            <a:off x="12001500" y="8732520"/>
+            <a:ext cx="0" cy="137160"/>
           </a:xfrm>
           <a:prstGeom prst="line">
             <a:avLst/>
@@ -37358,14 +40257,14 @@
       </p:cxnSp>
       <p:cxnSp>
         <p:nvCxnSpPr>
-          <p:cNvPr id="93" name="Connector 92"/>
+          <p:cNvPr id="111" name="Connector 110"/>
           <p:cNvCxnSpPr/>
           <p:nvPr/>
         </p:nvCxnSpPr>
         <p:spPr>
-          <a:xfrm>
-            <a:off x="15247620" y="8595360"/>
-            <a:ext cx="800100" cy="0"/>
+          <a:xfrm flipH="1">
+            <a:off x="11219688" y="8869680"/>
+            <a:ext cx="781812" cy="0"/>
           </a:xfrm>
           <a:prstGeom prst="line">
             <a:avLst/>
@@ -37393,14 +40292,14 @@
       </p:cxnSp>
       <p:cxnSp>
         <p:nvCxnSpPr>
-          <p:cNvPr id="94" name="Connector 93"/>
+          <p:cNvPr id="112" name="Connector 111"/>
           <p:cNvCxnSpPr/>
           <p:nvPr/>
         </p:nvCxnSpPr>
         <p:spPr>
           <a:xfrm>
-            <a:off x="16047720" y="8595360"/>
-            <a:ext cx="0" cy="411480"/>
+            <a:off x="11219688" y="8869680"/>
+            <a:ext cx="4572" cy="137160"/>
           </a:xfrm>
           <a:prstGeom prst="line">
             <a:avLst/>
@@ -37429,14 +40328,84 @@
       </p:cxnSp>
       <p:cxnSp>
         <p:nvCxnSpPr>
-          <p:cNvPr id="95" name="Connector 94"/>
+          <p:cNvPr id="113" name="Connector 112"/>
           <p:cNvCxnSpPr/>
           <p:nvPr/>
         </p:nvCxnSpPr>
         <p:spPr>
           <a:xfrm>
-            <a:off x="18105120" y="7680960"/>
-            <a:ext cx="0" cy="1325880"/>
+            <a:off x="12001500" y="8732520"/>
+            <a:ext cx="0" cy="137160"/>
+          </a:xfrm>
+          <a:prstGeom prst="line">
+            <a:avLst/>
+          </a:prstGeom>
+          <a:ln w="28575">
+            <a:solidFill>
+              <a:srgbClr val="F5EFE9"/>
+            </a:solidFill>
+          </a:ln>
+        </p:spPr>
+        <p:style>
+          <a:lnRef idx="2">
+            <a:schemeClr val="accent1"/>
+          </a:lnRef>
+          <a:fillRef idx="0">
+            <a:schemeClr val="accent1"/>
+          </a:fillRef>
+          <a:effectRef idx="1">
+            <a:schemeClr val="accent1"/>
+          </a:effectRef>
+          <a:fontRef idx="minor">
+            <a:schemeClr val="tx1"/>
+          </a:fontRef>
+        </p:style>
+      </p:cxnSp>
+      <p:cxnSp>
+        <p:nvCxnSpPr>
+          <p:cNvPr id="114" name="Connector 113"/>
+          <p:cNvCxnSpPr/>
+          <p:nvPr/>
+        </p:nvCxnSpPr>
+        <p:spPr>
+          <a:xfrm>
+            <a:off x="12001500" y="8869680"/>
+            <a:ext cx="772668" cy="0"/>
+          </a:xfrm>
+          <a:prstGeom prst="line">
+            <a:avLst/>
+          </a:prstGeom>
+          <a:ln w="28575">
+            <a:solidFill>
+              <a:srgbClr val="F5EFE9"/>
+            </a:solidFill>
+          </a:ln>
+        </p:spPr>
+        <p:style>
+          <a:lnRef idx="2">
+            <a:schemeClr val="accent1"/>
+          </a:lnRef>
+          <a:fillRef idx="0">
+            <a:schemeClr val="accent1"/>
+          </a:fillRef>
+          <a:effectRef idx="1">
+            <a:schemeClr val="accent1"/>
+          </a:effectRef>
+          <a:fontRef idx="minor">
+            <a:schemeClr val="tx1"/>
+          </a:fontRef>
+        </p:style>
+      </p:cxnSp>
+      <p:cxnSp>
+        <p:nvCxnSpPr>
+          <p:cNvPr id="115" name="Connector 114"/>
+          <p:cNvCxnSpPr/>
+          <p:nvPr/>
+        </p:nvCxnSpPr>
+        <p:spPr>
+          <a:xfrm>
+            <a:off x="12774168" y="8869680"/>
+            <a:ext cx="4572" cy="137160"/>
           </a:xfrm>
           <a:prstGeom prst="line">
             <a:avLst/>
@@ -37463,9 +40432,257 @@
           </a:fontRef>
         </p:style>
       </p:cxnSp>
-      <p:sp>
-        <p:nvSpPr>
-          <p:cNvPr id="96" name="TextBox 95"/>
+      <p:cxnSp>
+        <p:nvCxnSpPr>
+          <p:cNvPr id="116" name="Connector 115"/>
+          <p:cNvCxnSpPr/>
+          <p:nvPr/>
+        </p:nvCxnSpPr>
+        <p:spPr>
+          <a:xfrm>
+            <a:off x="15247620" y="8732520"/>
+            <a:ext cx="0" cy="137160"/>
+          </a:xfrm>
+          <a:prstGeom prst="line">
+            <a:avLst/>
+          </a:prstGeom>
+          <a:ln w="28575">
+            <a:solidFill>
+              <a:srgbClr val="F5EFE9"/>
+            </a:solidFill>
+          </a:ln>
+        </p:spPr>
+        <p:style>
+          <a:lnRef idx="2">
+            <a:schemeClr val="accent1"/>
+          </a:lnRef>
+          <a:fillRef idx="0">
+            <a:schemeClr val="accent1"/>
+          </a:fillRef>
+          <a:effectRef idx="1">
+            <a:schemeClr val="accent1"/>
+          </a:effectRef>
+          <a:fontRef idx="minor">
+            <a:schemeClr val="tx1"/>
+          </a:fontRef>
+        </p:style>
+      </p:cxnSp>
+      <p:cxnSp>
+        <p:nvCxnSpPr>
+          <p:cNvPr id="117" name="Connector 116"/>
+          <p:cNvCxnSpPr/>
+          <p:nvPr/>
+        </p:nvCxnSpPr>
+        <p:spPr>
+          <a:xfrm flipH="1">
+            <a:off x="14447520" y="8869680"/>
+            <a:ext cx="800100" cy="0"/>
+          </a:xfrm>
+          <a:prstGeom prst="line">
+            <a:avLst/>
+          </a:prstGeom>
+          <a:ln w="28575">
+            <a:solidFill>
+              <a:srgbClr val="F5EFE9"/>
+            </a:solidFill>
+          </a:ln>
+        </p:spPr>
+        <p:style>
+          <a:lnRef idx="2">
+            <a:schemeClr val="accent1"/>
+          </a:lnRef>
+          <a:fillRef idx="0">
+            <a:schemeClr val="accent1"/>
+          </a:fillRef>
+          <a:effectRef idx="1">
+            <a:schemeClr val="accent1"/>
+          </a:effectRef>
+          <a:fontRef idx="minor">
+            <a:schemeClr val="tx1"/>
+          </a:fontRef>
+        </p:style>
+      </p:cxnSp>
+      <p:cxnSp>
+        <p:nvCxnSpPr>
+          <p:cNvPr id="118" name="Connector 117"/>
+          <p:cNvCxnSpPr/>
+          <p:nvPr/>
+        </p:nvCxnSpPr>
+        <p:spPr>
+          <a:xfrm>
+            <a:off x="14447520" y="8869680"/>
+            <a:ext cx="0" cy="137160"/>
+          </a:xfrm>
+          <a:prstGeom prst="line">
+            <a:avLst/>
+          </a:prstGeom>
+          <a:ln w="28575">
+            <a:solidFill>
+              <a:srgbClr val="F5EFE9"/>
+            </a:solidFill>
+            <a:tailEnd type="triangle" w="med" len="med"/>
+          </a:ln>
+        </p:spPr>
+        <p:style>
+          <a:lnRef idx="2">
+            <a:schemeClr val="accent1"/>
+          </a:lnRef>
+          <a:fillRef idx="0">
+            <a:schemeClr val="accent1"/>
+          </a:fillRef>
+          <a:effectRef idx="1">
+            <a:schemeClr val="accent1"/>
+          </a:effectRef>
+          <a:fontRef idx="minor">
+            <a:schemeClr val="tx1"/>
+          </a:fontRef>
+        </p:style>
+      </p:cxnSp>
+      <p:cxnSp>
+        <p:nvCxnSpPr>
+          <p:cNvPr id="119" name="Connector 118"/>
+          <p:cNvCxnSpPr/>
+          <p:nvPr/>
+        </p:nvCxnSpPr>
+        <p:spPr>
+          <a:xfrm>
+            <a:off x="15247620" y="8732520"/>
+            <a:ext cx="0" cy="137160"/>
+          </a:xfrm>
+          <a:prstGeom prst="line">
+            <a:avLst/>
+          </a:prstGeom>
+          <a:ln w="28575">
+            <a:solidFill>
+              <a:srgbClr val="F5EFE9"/>
+            </a:solidFill>
+          </a:ln>
+        </p:spPr>
+        <p:style>
+          <a:lnRef idx="2">
+            <a:schemeClr val="accent1"/>
+          </a:lnRef>
+          <a:fillRef idx="0">
+            <a:schemeClr val="accent1"/>
+          </a:fillRef>
+          <a:effectRef idx="1">
+            <a:schemeClr val="accent1"/>
+          </a:effectRef>
+          <a:fontRef idx="minor">
+            <a:schemeClr val="tx1"/>
+          </a:fontRef>
+        </p:style>
+      </p:cxnSp>
+      <p:cxnSp>
+        <p:nvCxnSpPr>
+          <p:cNvPr id="120" name="Connector 119"/>
+          <p:cNvCxnSpPr/>
+          <p:nvPr/>
+        </p:nvCxnSpPr>
+        <p:spPr>
+          <a:xfrm>
+            <a:off x="15247620" y="8869680"/>
+            <a:ext cx="800100" cy="0"/>
+          </a:xfrm>
+          <a:prstGeom prst="line">
+            <a:avLst/>
+          </a:prstGeom>
+          <a:ln w="28575">
+            <a:solidFill>
+              <a:srgbClr val="F5EFE9"/>
+            </a:solidFill>
+          </a:ln>
+        </p:spPr>
+        <p:style>
+          <a:lnRef idx="2">
+            <a:schemeClr val="accent1"/>
+          </a:lnRef>
+          <a:fillRef idx="0">
+            <a:schemeClr val="accent1"/>
+          </a:fillRef>
+          <a:effectRef idx="1">
+            <a:schemeClr val="accent1"/>
+          </a:effectRef>
+          <a:fontRef idx="minor">
+            <a:schemeClr val="tx1"/>
+          </a:fontRef>
+        </p:style>
+      </p:cxnSp>
+      <p:cxnSp>
+        <p:nvCxnSpPr>
+          <p:cNvPr id="121" name="Connector 120"/>
+          <p:cNvCxnSpPr/>
+          <p:nvPr/>
+        </p:nvCxnSpPr>
+        <p:spPr>
+          <a:xfrm>
+            <a:off x="16047720" y="8869680"/>
+            <a:ext cx="0" cy="137160"/>
+          </a:xfrm>
+          <a:prstGeom prst="line">
+            <a:avLst/>
+          </a:prstGeom>
+          <a:ln w="28575">
+            <a:solidFill>
+              <a:srgbClr val="F5EFE9"/>
+            </a:solidFill>
+            <a:tailEnd type="triangle" w="med" len="med"/>
+          </a:ln>
+        </p:spPr>
+        <p:style>
+          <a:lnRef idx="2">
+            <a:schemeClr val="accent1"/>
+          </a:lnRef>
+          <a:fillRef idx="0">
+            <a:schemeClr val="accent1"/>
+          </a:fillRef>
+          <a:effectRef idx="1">
+            <a:schemeClr val="accent1"/>
+          </a:effectRef>
+          <a:fontRef idx="minor">
+            <a:schemeClr val="tx1"/>
+          </a:fontRef>
+        </p:style>
+      </p:cxnSp>
+      <p:cxnSp>
+        <p:nvCxnSpPr>
+          <p:cNvPr id="122" name="Connector 121"/>
+          <p:cNvCxnSpPr/>
+          <p:nvPr/>
+        </p:nvCxnSpPr>
+        <p:spPr>
+          <a:xfrm>
+            <a:off x="18105120" y="8732520"/>
+            <a:ext cx="0" cy="274320"/>
+          </a:xfrm>
+          <a:prstGeom prst="line">
+            <a:avLst/>
+          </a:prstGeom>
+          <a:ln w="28575">
+            <a:solidFill>
+              <a:srgbClr val="F5EFE9"/>
+            </a:solidFill>
+            <a:tailEnd type="triangle" w="med" len="med"/>
+          </a:ln>
+        </p:spPr>
+        <p:style>
+          <a:lnRef idx="2">
+            <a:schemeClr val="accent1"/>
+          </a:lnRef>
+          <a:fillRef idx="0">
+            <a:schemeClr val="accent1"/>
+          </a:fillRef>
+          <a:effectRef idx="1">
+            <a:schemeClr val="accent1"/>
+          </a:effectRef>
+          <a:fontRef idx="minor">
+            <a:schemeClr val="tx1"/>
+          </a:fontRef>
+        </p:style>
+      </p:cxnSp>
+      <p:sp>
+        <p:nvSpPr>
+          <p:cNvPr id="123" name="TextBox 122"/>
           <p:cNvSpPr txBox="1"/>
           <p:nvPr/>
         </p:nvSpPr>
@@ -37496,7 +40713,7 @@
                   <a:srgbClr val="F5EFE9"/>
                 </a:solidFill>
               </a:rPr>
-              <a:t>Every box in the map is one database object the domains read: seven rolling snapshot tables, the SA aged-balance table with its lookup seed, and eight CMS views. Orange diamonds are gates that stop the rollout; the loop under the second row is the twice-daily rolling refresh (3 months rebuilt, 24 kept; 6 months at CityCorp and Odessa).</a:t>
+              <a:t>Every box in the map is one database object the domains read: seven rolling snapshot tables, the SA aged-balance table with its lookup seed, and eight CMS views. Numbers are the order of one rollout; orange diamonds are gates and a 'no' stops it there. The loop under the second row is the twice-daily rolling refresh (3 months rebuilt, 24 kept; 6 months at CityCorp and Odessa).</a:t>
             </a:r>
           </a:p>
         </p:txBody>

--- a/jaspersoft/docs/OriginBA_Automated_Deployment.pptx
+++ b/jaspersoft/docs/OriginBA_Automated_Deployment.pptx
@@ -14339,8 +14339,8 @@
         </p:nvSpPr>
         <p:spPr>
           <a:xfrm>
-            <a:off x="2185415" y="6080760"/>
-            <a:ext cx="1554480" cy="822960"/>
+            <a:off x="2276856" y="6080760"/>
+            <a:ext cx="1371600" cy="822960"/>
           </a:xfrm>
           <a:prstGeom prst="diamond">
             <a:avLst/>
@@ -14395,7 +14395,7 @@
         </p:nvSpPr>
         <p:spPr>
           <a:xfrm>
-            <a:off x="2057399" y="5952744"/>
+            <a:off x="2148840" y="5952744"/>
             <a:ext cx="310896" cy="310896"/>
           </a:xfrm>
           <a:prstGeom prst="ellipse">
@@ -14452,7 +14452,7 @@
         <p:spPr>
           <a:xfrm>
             <a:off x="923544" y="6286500"/>
-            <a:ext cx="1051560" cy="411480"/>
+            <a:ext cx="896112" cy="411480"/>
           </a:xfrm>
           <a:prstGeom prst="roundRect">
             <a:avLst>
@@ -14496,7 +14496,7 @@
                   <a:srgbClr val="0B3D7A"/>
                 </a:solidFill>
               </a:rPr>
-              <a:t>no: stop</a:t>
+              <a:t>stop</a:t>
             </a:r>
           </a:p>
         </p:txBody>
@@ -14896,8 +14896,8 @@
         </p:nvSpPr>
         <p:spPr>
           <a:xfrm>
-            <a:off x="6922008" y="5394960"/>
-            <a:ext cx="1554480" cy="822960"/>
+            <a:off x="7013448" y="5394960"/>
+            <a:ext cx="1371600" cy="822960"/>
           </a:xfrm>
           <a:prstGeom prst="diamond">
             <a:avLst/>
@@ -14952,7 +14952,7 @@
         </p:nvSpPr>
         <p:spPr>
           <a:xfrm>
-            <a:off x="6793992" y="5266944"/>
+            <a:off x="6885432" y="5266944"/>
             <a:ext cx="310896" cy="310896"/>
           </a:xfrm>
           <a:prstGeom prst="ellipse">
@@ -15008,8 +15008,8 @@
         </p:nvSpPr>
         <p:spPr>
           <a:xfrm>
-            <a:off x="8549640" y="5600700"/>
-            <a:ext cx="1188720" cy="411480"/>
+            <a:off x="8842248" y="5600700"/>
+            <a:ext cx="896112" cy="411480"/>
           </a:xfrm>
           <a:prstGeom prst="roundRect">
             <a:avLst>
@@ -15053,7 +15053,7 @@
                   <a:srgbClr val="0B3D7A"/>
                 </a:solidFill>
               </a:rPr>
-              <a:t>no: stop</a:t>
+              <a:t>stop</a:t>
             </a:r>
           </a:p>
         </p:txBody>
@@ -15511,8 +15511,8 @@
         </p:nvSpPr>
         <p:spPr>
           <a:xfrm>
-            <a:off x="11247119" y="5212080"/>
-            <a:ext cx="2377440" cy="960120"/>
+            <a:off x="11750040" y="5212080"/>
+            <a:ext cx="1371600" cy="822960"/>
           </a:xfrm>
           <a:prstGeom prst="diamond">
             <a:avLst/>
@@ -15549,12 +15549,12 @@
               </a:spcAft>
             </a:pPr>
             <a:r>
-              <a:rPr sz="1000" b="1">
+              <a:rPr sz="1100" b="1">
                 <a:solidFill>
                   <a:srgbClr val="0B3D7A"/>
                 </a:solidFill>
               </a:rPr>
-              <a:t>verified? no source strings, references exist, fields resolve</a:t>
+              <a:t>package verified?</a:t>
             </a:r>
           </a:p>
         </p:txBody>
@@ -15567,7 +15567,7 @@
         </p:nvSpPr>
         <p:spPr>
           <a:xfrm>
-            <a:off x="11119103" y="5084064"/>
+            <a:off x="11622024" y="5084064"/>
             <a:ext cx="310896" cy="310896"/>
           </a:xfrm>
           <a:prstGeom prst="ellipse">
@@ -15623,8 +15623,8 @@
         </p:nvSpPr>
         <p:spPr>
           <a:xfrm>
-            <a:off x="13697711" y="5486400"/>
-            <a:ext cx="777240" cy="411480"/>
+            <a:off x="13578840" y="5417820"/>
+            <a:ext cx="896112" cy="411480"/>
           </a:xfrm>
           <a:prstGeom prst="roundRect">
             <a:avLst>
@@ -15668,7 +15668,7 @@
                   <a:srgbClr val="0B3D7A"/>
                 </a:solidFill>
               </a:rPr>
-              <a:t>no: stop</a:t>
+              <a:t>stop</a:t>
             </a:r>
           </a:p>
         </p:txBody>
@@ -15681,7 +15681,7 @@
         </p:nvSpPr>
         <p:spPr>
           <a:xfrm>
-            <a:off x="10378440" y="6309360"/>
+            <a:off x="10378440" y="6217920"/>
             <a:ext cx="4114800" cy="731520"/>
           </a:xfrm>
           <a:prstGeom prst="roundRect">
@@ -15754,7 +15754,7 @@
         </p:nvSpPr>
         <p:spPr>
           <a:xfrm>
-            <a:off x="10250424" y="6181344"/>
+            <a:off x="10250424" y="6089904"/>
             <a:ext cx="310896" cy="310896"/>
           </a:xfrm>
           <a:prstGeom prst="ellipse">
@@ -15810,7 +15810,7 @@
         </p:nvSpPr>
         <p:spPr>
           <a:xfrm>
-            <a:off x="10378440" y="7178040"/>
+            <a:off x="10378440" y="7086600"/>
             <a:ext cx="4114800" cy="914400"/>
           </a:xfrm>
           <a:prstGeom prst="roundRect">
@@ -15883,7 +15883,7 @@
         </p:nvSpPr>
         <p:spPr>
           <a:xfrm>
-            <a:off x="10250424" y="7050024"/>
+            <a:off x="10250424" y="6958584"/>
             <a:ext cx="310896" cy="310896"/>
           </a:xfrm>
           <a:prstGeom prst="ellipse">
@@ -16255,8 +16255,8 @@
         </p:nvSpPr>
         <p:spPr>
           <a:xfrm>
-            <a:off x="16395192" y="5074920"/>
-            <a:ext cx="1554480" cy="822960"/>
+            <a:off x="16486632" y="5074920"/>
+            <a:ext cx="1371600" cy="822960"/>
           </a:xfrm>
           <a:prstGeom prst="diamond">
             <a:avLst/>
@@ -16311,7 +16311,7 @@
         </p:nvSpPr>
         <p:spPr>
           <a:xfrm>
-            <a:off x="16267176" y="4946904"/>
+            <a:off x="16358616" y="4946904"/>
             <a:ext cx="310896" cy="310896"/>
           </a:xfrm>
           <a:prstGeom prst="ellipse">
@@ -16367,8 +16367,8 @@
         </p:nvSpPr>
         <p:spPr>
           <a:xfrm>
-            <a:off x="18022824" y="5280660"/>
-            <a:ext cx="1188720" cy="411480"/>
+            <a:off x="18315432" y="5280660"/>
+            <a:ext cx="896112" cy="411480"/>
           </a:xfrm>
           <a:prstGeom prst="roundRect">
             <a:avLst>
@@ -16412,7 +16412,7 @@
                   <a:srgbClr val="0B3D7A"/>
                 </a:solidFill>
               </a:rPr>
-              <a:t>no: stop</a:t>
+              <a:t>stop</a:t>
             </a:r>
           </a:p>
         </p:txBody>
@@ -17048,8 +17048,8 @@
         </p:nvCxnSpPr>
         <p:spPr>
           <a:xfrm flipH="1">
-            <a:off x="1975104" y="6492240"/>
-            <a:ext cx="210311" cy="0"/>
+            <a:off x="1819656" y="6492240"/>
+            <a:ext cx="457200" cy="0"/>
           </a:xfrm>
           <a:prstGeom prst="line">
             <a:avLst/>
@@ -17084,8 +17084,8 @@
         </p:nvSpPr>
         <p:spPr>
           <a:xfrm>
-            <a:off x="2171700" y="6108192"/>
-            <a:ext cx="2926080" cy="365760"/>
+            <a:off x="1499616" y="6181344"/>
+            <a:ext cx="1097280" cy="274320"/>
           </a:xfrm>
           <a:prstGeom prst="rect">
             <a:avLst/>
@@ -17098,7 +17098,7 @@
           </a:bodyPr>
           <a:lstStyle/>
           <a:p>
-            <a:pPr algn="l">
+            <a:pPr algn="ctr">
               <a:spcAft>
                 <a:spcPts val="600"/>
               </a:spcAft>
@@ -17122,8 +17122,8 @@
         </p:nvCxnSpPr>
         <p:spPr>
           <a:xfrm>
-            <a:off x="3739896" y="6492240"/>
-            <a:ext cx="1591056" cy="0"/>
+            <a:off x="3648456" y="6492240"/>
+            <a:ext cx="1682496" cy="0"/>
           </a:xfrm>
           <a:prstGeom prst="line">
             <a:avLst/>
@@ -17220,9 +17220,47 @@
           </a:fontRef>
         </p:style>
       </p:cxnSp>
+      <p:sp>
+        <p:nvSpPr>
+          <p:cNvPr id="71" name="TextBox 70"/>
+          <p:cNvSpPr txBox="1"/>
+          <p:nvPr/>
+        </p:nvSpPr>
+        <p:spPr>
+          <a:xfrm>
+            <a:off x="4023360" y="6144768"/>
+            <a:ext cx="914400" cy="365760"/>
+          </a:xfrm>
+          <a:prstGeom prst="rect">
+            <a:avLst/>
+          </a:prstGeom>
+          <a:noFill/>
+        </p:spPr>
+        <p:txBody>
+          <a:bodyPr wrap="square" anchor="b" lIns="0" rIns="0" tIns="54864" bIns="54864">
+            <a:spAutoFit/>
+          </a:bodyPr>
+          <a:lstStyle/>
+          <a:p>
+            <a:pPr algn="l">
+              <a:spcAft>
+                <a:spcPts val="600"/>
+              </a:spcAft>
+            </a:pPr>
+            <a:r>
+              <a:rPr sz="1100" b="1">
+                <a:solidFill>
+                  <a:srgbClr val="F5EFE9"/>
+                </a:solidFill>
+              </a:rPr>
+              <a:t>yes</a:t>
+            </a:r>
+          </a:p>
+        </p:txBody>
+      </p:sp>
       <p:cxnSp>
         <p:nvCxnSpPr>
-          <p:cNvPr id="71" name="Connector 70"/>
+          <p:cNvPr id="72" name="Connector 71"/>
           <p:cNvCxnSpPr/>
           <p:nvPr/>
         </p:nvCxnSpPr>
@@ -17258,7 +17296,7 @@
       </p:cxnSp>
       <p:cxnSp>
         <p:nvCxnSpPr>
-          <p:cNvPr id="72" name="Connector 71"/>
+          <p:cNvPr id="73" name="Connector 72"/>
           <p:cNvCxnSpPr/>
           <p:nvPr/>
         </p:nvCxnSpPr>
@@ -17294,7 +17332,7 @@
       </p:cxnSp>
       <p:cxnSp>
         <p:nvCxnSpPr>
-          <p:cNvPr id="73" name="Connector 72"/>
+          <p:cNvPr id="74" name="Connector 73"/>
           <p:cNvCxnSpPr/>
           <p:nvPr/>
         </p:nvCxnSpPr>
@@ -17330,14 +17368,14 @@
       </p:cxnSp>
       <p:cxnSp>
         <p:nvCxnSpPr>
-          <p:cNvPr id="74" name="Connector 73"/>
+          <p:cNvPr id="75" name="Connector 74"/>
           <p:cNvCxnSpPr/>
           <p:nvPr/>
         </p:nvCxnSpPr>
         <p:spPr>
           <a:xfrm>
-            <a:off x="8476488" y="5806440"/>
-            <a:ext cx="73152" cy="0"/>
+            <a:off x="8385048" y="5806440"/>
+            <a:ext cx="457200" cy="0"/>
           </a:xfrm>
           <a:prstGeom prst="line">
             <a:avLst/>
@@ -17366,14 +17404,14 @@
       </p:cxnSp>
       <p:sp>
         <p:nvSpPr>
-          <p:cNvPr id="75" name="TextBox 74"/>
+          <p:cNvPr id="76" name="TextBox 75"/>
           <p:cNvSpPr txBox="1"/>
           <p:nvPr/>
         </p:nvSpPr>
         <p:spPr>
           <a:xfrm>
-            <a:off x="8604503" y="5422392"/>
-            <a:ext cx="2926080" cy="365760"/>
+            <a:off x="8065008" y="5495544"/>
+            <a:ext cx="1097280" cy="274320"/>
           </a:xfrm>
           <a:prstGeom prst="rect">
             <a:avLst/>
@@ -17386,7 +17424,7 @@
           </a:bodyPr>
           <a:lstStyle/>
           <a:p>
-            <a:pPr algn="l">
+            <a:pPr algn="ctr">
               <a:spcAft>
                 <a:spcPts val="600"/>
               </a:spcAft>
@@ -17404,7 +17442,7 @@
       </p:sp>
       <p:cxnSp>
         <p:nvCxnSpPr>
-          <p:cNvPr id="76" name="Connector 75"/>
+          <p:cNvPr id="77" name="Connector 76"/>
           <p:cNvCxnSpPr/>
           <p:nvPr/>
         </p:nvCxnSpPr>
@@ -17438,9 +17476,47 @@
           </a:fontRef>
         </p:style>
       </p:cxnSp>
+      <p:sp>
+        <p:nvSpPr>
+          <p:cNvPr id="78" name="TextBox 77"/>
+          <p:cNvSpPr txBox="1"/>
+          <p:nvPr/>
+        </p:nvSpPr>
+        <p:spPr>
+          <a:xfrm>
+            <a:off x="7763256" y="6172200"/>
+            <a:ext cx="1097280" cy="274320"/>
+          </a:xfrm>
+          <a:prstGeom prst="rect">
+            <a:avLst/>
+          </a:prstGeom>
+          <a:noFill/>
+        </p:spPr>
+        <p:txBody>
+          <a:bodyPr wrap="square" anchor="ctr" lIns="0" rIns="0" tIns="54864" bIns="54864">
+            <a:spAutoFit/>
+          </a:bodyPr>
+          <a:lstStyle/>
+          <a:p>
+            <a:pPr algn="l">
+              <a:spcAft>
+                <a:spcPts val="600"/>
+              </a:spcAft>
+            </a:pPr>
+            <a:r>
+              <a:rPr sz="1100" b="1">
+                <a:solidFill>
+                  <a:srgbClr val="F5EFE9"/>
+                </a:solidFill>
+              </a:rPr>
+              <a:t>yes</a:t>
+            </a:r>
+          </a:p>
+        </p:txBody>
+      </p:sp>
       <p:cxnSp>
         <p:nvCxnSpPr>
-          <p:cNvPr id="77" name="Connector 76"/>
+          <p:cNvPr id="79" name="Connector 78"/>
           <p:cNvCxnSpPr/>
           <p:nvPr/>
         </p:nvCxnSpPr>
@@ -17475,7 +17551,7 @@
       </p:cxnSp>
       <p:cxnSp>
         <p:nvCxnSpPr>
-          <p:cNvPr id="78" name="Connector 77"/>
+          <p:cNvPr id="80" name="Connector 79"/>
           <p:cNvCxnSpPr/>
           <p:nvPr/>
         </p:nvCxnSpPr>
@@ -17510,7 +17586,7 @@
       </p:cxnSp>
       <p:cxnSp>
         <p:nvCxnSpPr>
-          <p:cNvPr id="79" name="Connector 78"/>
+          <p:cNvPr id="81" name="Connector 80"/>
           <p:cNvCxnSpPr/>
           <p:nvPr/>
         </p:nvCxnSpPr>
@@ -17546,7 +17622,7 @@
       </p:cxnSp>
       <p:cxnSp>
         <p:nvCxnSpPr>
-          <p:cNvPr id="80" name="Connector 79"/>
+          <p:cNvPr id="82" name="Connector 81"/>
           <p:cNvCxnSpPr/>
           <p:nvPr/>
         </p:nvCxnSpPr>
@@ -17582,7 +17658,7 @@
       </p:cxnSp>
       <p:cxnSp>
         <p:nvCxnSpPr>
-          <p:cNvPr id="81" name="Connector 80"/>
+          <p:cNvPr id="83" name="Connector 82"/>
           <p:cNvCxnSpPr/>
           <p:nvPr/>
         </p:nvCxnSpPr>
@@ -17618,7 +17694,7 @@
       </p:cxnSp>
       <p:cxnSp>
         <p:nvCxnSpPr>
-          <p:cNvPr id="82" name="Connector 81"/>
+          <p:cNvPr id="84" name="Connector 83"/>
           <p:cNvCxnSpPr/>
           <p:nvPr/>
         </p:nvCxnSpPr>
@@ -17654,14 +17730,14 @@
       </p:cxnSp>
       <p:cxnSp>
         <p:nvCxnSpPr>
-          <p:cNvPr id="83" name="Connector 82"/>
+          <p:cNvPr id="85" name="Connector 84"/>
           <p:cNvCxnSpPr/>
           <p:nvPr/>
         </p:nvCxnSpPr>
         <p:spPr>
-          <a:xfrm>
-            <a:off x="13624559" y="5692140"/>
-            <a:ext cx="73152" cy="0"/>
+          <a:xfrm flipV="1">
+            <a:off x="13121640" y="5623559"/>
+            <a:ext cx="457200" cy="1"/>
           </a:xfrm>
           <a:prstGeom prst="line">
             <a:avLst/>
@@ -17690,14 +17766,14 @@
       </p:cxnSp>
       <p:sp>
         <p:nvSpPr>
-          <p:cNvPr id="84" name="TextBox 83"/>
+          <p:cNvPr id="86" name="TextBox 85"/>
           <p:cNvSpPr txBox="1"/>
           <p:nvPr/>
         </p:nvSpPr>
         <p:spPr>
           <a:xfrm>
-            <a:off x="13752575" y="5308092"/>
-            <a:ext cx="2926080" cy="365760"/>
+            <a:off x="12801600" y="5312664"/>
+            <a:ext cx="1097280" cy="274320"/>
           </a:xfrm>
           <a:prstGeom prst="rect">
             <a:avLst/>
@@ -17710,7 +17786,7 @@
           </a:bodyPr>
           <a:lstStyle/>
           <a:p>
-            <a:pPr algn="l">
+            <a:pPr algn="ctr">
               <a:spcAft>
                 <a:spcPts val="600"/>
               </a:spcAft>
@@ -17728,14 +17804,14 @@
       </p:sp>
       <p:cxnSp>
         <p:nvCxnSpPr>
-          <p:cNvPr id="85" name="Connector 84"/>
+          <p:cNvPr id="87" name="Connector 86"/>
           <p:cNvCxnSpPr/>
           <p:nvPr/>
         </p:nvCxnSpPr>
         <p:spPr>
           <a:xfrm>
-            <a:off x="12435840" y="6172200"/>
-            <a:ext cx="0" cy="137160"/>
+            <a:off x="12435840" y="6035040"/>
+            <a:ext cx="0" cy="182880"/>
           </a:xfrm>
           <a:prstGeom prst="line">
             <a:avLst/>
@@ -17762,15 +17838,53 @@
           </a:fontRef>
         </p:style>
       </p:cxnSp>
+      <p:sp>
+        <p:nvSpPr>
+          <p:cNvPr id="88" name="TextBox 87"/>
+          <p:cNvSpPr txBox="1"/>
+          <p:nvPr/>
+        </p:nvSpPr>
+        <p:spPr>
+          <a:xfrm>
+            <a:off x="12499848" y="5989320"/>
+            <a:ext cx="1097280" cy="274320"/>
+          </a:xfrm>
+          <a:prstGeom prst="rect">
+            <a:avLst/>
+          </a:prstGeom>
+          <a:noFill/>
+        </p:spPr>
+        <p:txBody>
+          <a:bodyPr wrap="square" anchor="ctr" lIns="0" rIns="0" tIns="54864" bIns="54864">
+            <a:spAutoFit/>
+          </a:bodyPr>
+          <a:lstStyle/>
+          <a:p>
+            <a:pPr algn="l">
+              <a:spcAft>
+                <a:spcPts val="600"/>
+              </a:spcAft>
+            </a:pPr>
+            <a:r>
+              <a:rPr sz="1100" b="1">
+                <a:solidFill>
+                  <a:srgbClr val="F5EFE9"/>
+                </a:solidFill>
+              </a:rPr>
+              <a:t>yes</a:t>
+            </a:r>
+          </a:p>
+        </p:txBody>
+      </p:sp>
       <p:cxnSp>
         <p:nvCxnSpPr>
-          <p:cNvPr id="86" name="Connector 85"/>
+          <p:cNvPr id="89" name="Connector 88"/>
           <p:cNvCxnSpPr/>
           <p:nvPr/>
         </p:nvCxnSpPr>
         <p:spPr>
           <a:xfrm>
-            <a:off x="12435840" y="7040880"/>
+            <a:off x="12435840" y="6949440"/>
             <a:ext cx="0" cy="137160"/>
           </a:xfrm>
           <a:prstGeom prst="line">
@@ -17800,13 +17914,13 @@
       </p:cxnSp>
       <p:cxnSp>
         <p:nvCxnSpPr>
-          <p:cNvPr id="87" name="Connector 86"/>
+          <p:cNvPr id="90" name="Connector 89"/>
           <p:cNvCxnSpPr/>
           <p:nvPr/>
         </p:nvCxnSpPr>
         <p:spPr>
           <a:xfrm>
-            <a:off x="14493240" y="7635240"/>
+            <a:off x="14493240" y="7543800"/>
             <a:ext cx="310896" cy="0"/>
           </a:xfrm>
           <a:prstGeom prst="line">
@@ -17835,14 +17949,14 @@
       </p:cxnSp>
       <p:cxnSp>
         <p:nvCxnSpPr>
-          <p:cNvPr id="88" name="Connector 87"/>
+          <p:cNvPr id="91" name="Connector 90"/>
           <p:cNvCxnSpPr/>
           <p:nvPr/>
         </p:nvCxnSpPr>
         <p:spPr>
           <a:xfrm flipV="1">
             <a:off x="14804136" y="2743200"/>
-            <a:ext cx="0" cy="4892040"/>
+            <a:ext cx="0" cy="4800600"/>
           </a:xfrm>
           <a:prstGeom prst="line">
             <a:avLst/>
@@ -17870,7 +17984,7 @@
       </p:cxnSp>
       <p:cxnSp>
         <p:nvCxnSpPr>
-          <p:cNvPr id="89" name="Connector 88"/>
+          <p:cNvPr id="92" name="Connector 91"/>
           <p:cNvCxnSpPr/>
           <p:nvPr/>
         </p:nvCxnSpPr>
@@ -17906,7 +18020,7 @@
       </p:cxnSp>
       <p:cxnSp>
         <p:nvCxnSpPr>
-          <p:cNvPr id="90" name="Connector 89"/>
+          <p:cNvPr id="93" name="Connector 92"/>
           <p:cNvCxnSpPr/>
           <p:nvPr/>
         </p:nvCxnSpPr>
@@ -17942,7 +18056,7 @@
       </p:cxnSp>
       <p:cxnSp>
         <p:nvCxnSpPr>
-          <p:cNvPr id="91" name="Connector 90"/>
+          <p:cNvPr id="94" name="Connector 93"/>
           <p:cNvCxnSpPr/>
           <p:nvPr/>
         </p:nvCxnSpPr>
@@ -17978,7 +18092,7 @@
       </p:cxnSp>
       <p:cxnSp>
         <p:nvCxnSpPr>
-          <p:cNvPr id="92" name="Connector 91"/>
+          <p:cNvPr id="95" name="Connector 94"/>
           <p:cNvCxnSpPr/>
           <p:nvPr/>
         </p:nvCxnSpPr>
@@ -18014,14 +18128,14 @@
       </p:cxnSp>
       <p:cxnSp>
         <p:nvCxnSpPr>
-          <p:cNvPr id="93" name="Connector 92"/>
+          <p:cNvPr id="96" name="Connector 95"/>
           <p:cNvCxnSpPr/>
           <p:nvPr/>
         </p:nvCxnSpPr>
         <p:spPr>
           <a:xfrm>
-            <a:off x="17949672" y="5486400"/>
-            <a:ext cx="73152" cy="0"/>
+            <a:off x="17858232" y="5486400"/>
+            <a:ext cx="457200" cy="0"/>
           </a:xfrm>
           <a:prstGeom prst="line">
             <a:avLst/>
@@ -18050,14 +18164,14 @@
       </p:cxnSp>
       <p:sp>
         <p:nvSpPr>
-          <p:cNvPr id="94" name="TextBox 93"/>
+          <p:cNvPr id="97" name="TextBox 96"/>
           <p:cNvSpPr txBox="1"/>
           <p:nvPr/>
         </p:nvSpPr>
         <p:spPr>
           <a:xfrm>
-            <a:off x="18077688" y="5102352"/>
-            <a:ext cx="2926080" cy="365760"/>
+            <a:off x="17538192" y="5175504"/>
+            <a:ext cx="1097280" cy="274320"/>
           </a:xfrm>
           <a:prstGeom prst="rect">
             <a:avLst/>
@@ -18070,7 +18184,7 @@
           </a:bodyPr>
           <a:lstStyle/>
           <a:p>
-            <a:pPr algn="l">
+            <a:pPr algn="ctr">
               <a:spcAft>
                 <a:spcPts val="600"/>
               </a:spcAft>
@@ -18088,7 +18202,7 @@
       </p:sp>
       <p:cxnSp>
         <p:nvCxnSpPr>
-          <p:cNvPr id="95" name="Connector 94"/>
+          <p:cNvPr id="98" name="Connector 97"/>
           <p:cNvCxnSpPr/>
           <p:nvPr/>
         </p:nvCxnSpPr>
@@ -18122,9 +18236,47 @@
           </a:fontRef>
         </p:style>
       </p:cxnSp>
+      <p:sp>
+        <p:nvSpPr>
+          <p:cNvPr id="99" name="TextBox 98"/>
+          <p:cNvSpPr txBox="1"/>
+          <p:nvPr/>
+        </p:nvSpPr>
+        <p:spPr>
+          <a:xfrm>
+            <a:off x="17236440" y="5829300"/>
+            <a:ext cx="1097280" cy="274320"/>
+          </a:xfrm>
+          <a:prstGeom prst="rect">
+            <a:avLst/>
+          </a:prstGeom>
+          <a:noFill/>
+        </p:spPr>
+        <p:txBody>
+          <a:bodyPr wrap="square" anchor="ctr" lIns="0" rIns="0" tIns="54864" bIns="54864">
+            <a:spAutoFit/>
+          </a:bodyPr>
+          <a:lstStyle/>
+          <a:p>
+            <a:pPr algn="l">
+              <a:spcAft>
+                <a:spcPts val="600"/>
+              </a:spcAft>
+            </a:pPr>
+            <a:r>
+              <a:rPr sz="1100" b="1">
+                <a:solidFill>
+                  <a:srgbClr val="F5EFE9"/>
+                </a:solidFill>
+              </a:rPr>
+              <a:t>yes</a:t>
+            </a:r>
+          </a:p>
+        </p:txBody>
+      </p:sp>
       <p:cxnSp>
         <p:nvCxnSpPr>
-          <p:cNvPr id="96" name="Connector 95"/>
+          <p:cNvPr id="100" name="Connector 99"/>
           <p:cNvCxnSpPr/>
           <p:nvPr/>
         </p:nvCxnSpPr>
@@ -18160,7 +18312,7 @@
       </p:cxnSp>
       <p:cxnSp>
         <p:nvCxnSpPr>
-          <p:cNvPr id="97" name="Connector 96"/>
+          <p:cNvPr id="101" name="Connector 100"/>
           <p:cNvCxnSpPr/>
           <p:nvPr/>
         </p:nvCxnSpPr>
@@ -18195,7 +18347,7 @@
       </p:cxnSp>
       <p:cxnSp>
         <p:nvCxnSpPr>
-          <p:cNvPr id="98" name="Connector 97"/>
+          <p:cNvPr id="102" name="Connector 101"/>
           <p:cNvCxnSpPr/>
           <p:nvPr/>
         </p:nvCxnSpPr>
@@ -18230,7 +18382,7 @@
       </p:cxnSp>
       <p:cxnSp>
         <p:nvCxnSpPr>
-          <p:cNvPr id="99" name="Connector 98"/>
+          <p:cNvPr id="103" name="Connector 102"/>
           <p:cNvCxnSpPr/>
           <p:nvPr/>
         </p:nvCxnSpPr>
@@ -18266,7 +18418,7 @@
       </p:cxnSp>
       <p:cxnSp>
         <p:nvCxnSpPr>
-          <p:cNvPr id="100" name="Connector 99"/>
+          <p:cNvPr id="104" name="Connector 103"/>
           <p:cNvCxnSpPr/>
           <p:nvPr/>
         </p:nvCxnSpPr>
@@ -18301,7 +18453,7 @@
       </p:cxnSp>
       <p:cxnSp>
         <p:nvCxnSpPr>
-          <p:cNvPr id="101" name="Connector 100"/>
+          <p:cNvPr id="105" name="Connector 104"/>
           <p:cNvCxnSpPr/>
           <p:nvPr/>
         </p:nvCxnSpPr>
@@ -18336,7 +18488,7 @@
       </p:cxnSp>
       <p:cxnSp>
         <p:nvCxnSpPr>
-          <p:cNvPr id="102" name="Connector 101"/>
+          <p:cNvPr id="106" name="Connector 105"/>
           <p:cNvCxnSpPr/>
           <p:nvPr/>
         </p:nvCxnSpPr>
@@ -18371,7 +18523,7 @@
       </p:cxnSp>
       <p:cxnSp>
         <p:nvCxnSpPr>
-          <p:cNvPr id="103" name="Connector 102"/>
+          <p:cNvPr id="107" name="Connector 106"/>
           <p:cNvCxnSpPr/>
           <p:nvPr/>
         </p:nvCxnSpPr>
@@ -18407,7 +18559,7 @@
       </p:cxnSp>
       <p:sp>
         <p:nvSpPr>
-          <p:cNvPr id="104" name="TextBox 103"/>
+          <p:cNvPr id="108" name="TextBox 107"/>
           <p:cNvSpPr txBox="1"/>
           <p:nvPr/>
         </p:nvSpPr>
@@ -18438,7 +18590,7 @@
                   <a:srgbClr val="F5EFE9"/>
                 </a:solidFill>
               </a:rPr>
-              <a:t>Orange diamonds are gates: a 'no' stops the run and names the rollback. Numbers are the order of one full promotion. The Workstreams tree is never moved; the offering is a curated copy promoted org by org.</a:t>
+              <a:t>Orange diamonds are gates: yes continues, no stops the run and names the rollback. Numbers are the order of one full promotion. The Workstreams tree is never moved; the offering is a curated copy promoted org by org.</a:t>
             </a:r>
           </a:p>
         </p:txBody>
@@ -36530,8 +36682,8 @@
         </p:nvSpPr>
         <p:spPr>
           <a:xfrm>
-            <a:off x="17099280" y="4023360"/>
-            <a:ext cx="2103120" cy="960120"/>
+            <a:off x="17099280" y="4069080"/>
+            <a:ext cx="2103120" cy="868680"/>
           </a:xfrm>
           <a:prstGeom prst="diamond">
             <a:avLst/>
@@ -36586,7 +36738,7 @@
         </p:nvSpPr>
         <p:spPr>
           <a:xfrm>
-            <a:off x="16971264" y="3895344"/>
+            <a:off x="16971264" y="3941064"/>
             <a:ext cx="310896" cy="310896"/>
           </a:xfrm>
           <a:prstGeom prst="ellipse">
@@ -36642,8 +36794,8 @@
         </p:nvSpPr>
         <p:spPr>
           <a:xfrm>
-            <a:off x="17282160" y="5120640"/>
-            <a:ext cx="1737360" cy="411480"/>
+            <a:off x="17282160" y="5257800"/>
+            <a:ext cx="1737360" cy="384048"/>
           </a:xfrm>
           <a:prstGeom prst="roundRect">
             <a:avLst>
@@ -36687,7 +36839,7 @@
                   <a:srgbClr val="0B3D7A"/>
                 </a:solidFill>
               </a:rPr>
-              <a:t>no: stop, fix, re-run</a:t>
+              <a:t>stop, fix, re-run</a:t>
             </a:r>
           </a:p>
         </p:txBody>
@@ -36700,8 +36852,8 @@
         </p:nvSpPr>
         <p:spPr>
           <a:xfrm>
-            <a:off x="14264640" y="4023360"/>
-            <a:ext cx="2377440" cy="960120"/>
+            <a:off x="14264640" y="4069080"/>
+            <a:ext cx="2377440" cy="868680"/>
           </a:xfrm>
           <a:prstGeom prst="diamond">
             <a:avLst/>
@@ -36756,7 +36908,7 @@
         </p:nvSpPr>
         <p:spPr>
           <a:xfrm>
-            <a:off x="14136624" y="3895344"/>
+            <a:off x="14136624" y="3941064"/>
             <a:ext cx="310896" cy="310896"/>
           </a:xfrm>
           <a:prstGeom prst="ellipse">
@@ -36812,8 +36964,8 @@
         </p:nvSpPr>
         <p:spPr>
           <a:xfrm>
-            <a:off x="14493240" y="5120640"/>
-            <a:ext cx="1920240" cy="411480"/>
+            <a:off x="14493240" y="5257800"/>
+            <a:ext cx="1920240" cy="384048"/>
           </a:xfrm>
           <a:prstGeom prst="roundRect">
             <a:avLst>
@@ -36857,7 +37009,7 @@
                   <a:srgbClr val="0B3D7A"/>
                 </a:solidFill>
               </a:rPr>
-              <a:t>no: stop, fix, re-run</a:t>
+              <a:t>stop, fix, re-run</a:t>
             </a:r>
           </a:p>
         </p:txBody>
@@ -36870,8 +37022,8 @@
         </p:nvSpPr>
         <p:spPr>
           <a:xfrm>
-            <a:off x="11612880" y="4114800"/>
-            <a:ext cx="2194560" cy="777240"/>
+            <a:off x="11612880" y="4069080"/>
+            <a:ext cx="2194560" cy="868680"/>
           </a:xfrm>
           <a:prstGeom prst="roundRect">
             <a:avLst>
@@ -36943,7 +37095,7 @@
         </p:nvSpPr>
         <p:spPr>
           <a:xfrm>
-            <a:off x="11484863" y="3986784"/>
+            <a:off x="11484863" y="3941064"/>
             <a:ext cx="310896" cy="310896"/>
           </a:xfrm>
           <a:prstGeom prst="ellipse">
@@ -37128,8 +37280,8 @@
         </p:nvSpPr>
         <p:spPr>
           <a:xfrm>
-            <a:off x="5943600" y="4023360"/>
-            <a:ext cx="2011680" cy="960120"/>
+            <a:off x="5943600" y="4069080"/>
+            <a:ext cx="2011680" cy="868680"/>
           </a:xfrm>
           <a:prstGeom prst="diamond">
             <a:avLst/>
@@ -37184,7 +37336,7 @@
         </p:nvSpPr>
         <p:spPr>
           <a:xfrm>
-            <a:off x="5815584" y="3895344"/>
+            <a:off x="5815584" y="3941064"/>
             <a:ext cx="310896" cy="310896"/>
           </a:xfrm>
           <a:prstGeom prst="ellipse">
@@ -37240,8 +37392,8 @@
         </p:nvSpPr>
         <p:spPr>
           <a:xfrm>
-            <a:off x="6035040" y="3429000"/>
-            <a:ext cx="1828800" cy="411480"/>
+            <a:off x="6035040" y="3337560"/>
+            <a:ext cx="1828800" cy="384048"/>
           </a:xfrm>
           <a:prstGeom prst="roundRect">
             <a:avLst>
@@ -37285,7 +37437,7 @@
                   <a:srgbClr val="0B3D7A"/>
                 </a:solidFill>
               </a:rPr>
-              <a:t>no: stop, fix, re-run</a:t>
+              <a:t>stop, fix, re-run</a:t>
             </a:r>
           </a:p>
         </p:txBody>
@@ -39467,7 +39619,7 @@
         <p:spPr>
           <a:xfrm flipH="1">
             <a:off x="18150839" y="3749039"/>
-            <a:ext cx="1" cy="274321"/>
+            <a:ext cx="1" cy="320041"/>
           </a:xfrm>
           <a:prstGeom prst="line">
             <a:avLst/>
@@ -39502,8 +39654,8 @@
         </p:nvCxnSpPr>
         <p:spPr>
           <a:xfrm>
-            <a:off x="18150839" y="4983480"/>
-            <a:ext cx="0" cy="137160"/>
+            <a:off x="18150839" y="4937760"/>
+            <a:ext cx="0" cy="320040"/>
           </a:xfrm>
           <a:prstGeom prst="line">
             <a:avLst/>
@@ -39538,8 +39690,8 @@
         </p:nvSpPr>
         <p:spPr>
           <a:xfrm>
-            <a:off x="18242280" y="4668012"/>
-            <a:ext cx="2926080" cy="365760"/>
+            <a:off x="18214848" y="4960620"/>
+            <a:ext cx="1097280" cy="274320"/>
           </a:xfrm>
           <a:prstGeom prst="rect">
             <a:avLst/>
@@ -39547,7 +39699,7 @@
           <a:noFill/>
         </p:spPr>
         <p:txBody>
-          <a:bodyPr wrap="square" anchor="b" lIns="0" rIns="0" tIns="54864" bIns="54864">
+          <a:bodyPr wrap="square" anchor="ctr" lIns="0" rIns="0" tIns="54864" bIns="54864">
             <a:spAutoFit/>
           </a:bodyPr>
           <a:lstStyle/>
@@ -39604,16 +39756,54 @@
           </a:fontRef>
         </p:style>
       </p:cxnSp>
+      <p:sp>
+        <p:nvSpPr>
+          <p:cNvPr id="93" name="TextBox 92"/>
+          <p:cNvSpPr txBox="1"/>
+          <p:nvPr/>
+        </p:nvSpPr>
+        <p:spPr>
+          <a:xfrm>
+            <a:off x="16322039" y="4192524"/>
+            <a:ext cx="1097280" cy="274320"/>
+          </a:xfrm>
+          <a:prstGeom prst="rect">
+            <a:avLst/>
+          </a:prstGeom>
+          <a:noFill/>
+        </p:spPr>
+        <p:txBody>
+          <a:bodyPr wrap="square" anchor="b" lIns="0" rIns="0" tIns="54864" bIns="54864">
+            <a:spAutoFit/>
+          </a:bodyPr>
+          <a:lstStyle/>
+          <a:p>
+            <a:pPr algn="ctr">
+              <a:spcAft>
+                <a:spcPts val="600"/>
+              </a:spcAft>
+            </a:pPr>
+            <a:r>
+              <a:rPr sz="1100" b="1">
+                <a:solidFill>
+                  <a:srgbClr val="F5EFE9"/>
+                </a:solidFill>
+              </a:rPr>
+              <a:t>yes</a:t>
+            </a:r>
+          </a:p>
+        </p:txBody>
+      </p:sp>
       <p:cxnSp>
         <p:nvCxnSpPr>
-          <p:cNvPr id="93" name="Connector 92"/>
+          <p:cNvPr id="94" name="Connector 93"/>
           <p:cNvCxnSpPr/>
           <p:nvPr/>
         </p:nvCxnSpPr>
         <p:spPr>
           <a:xfrm>
-            <a:off x="15453359" y="4983480"/>
-            <a:ext cx="0" cy="137160"/>
+            <a:off x="15453359" y="4937760"/>
+            <a:ext cx="0" cy="320040"/>
           </a:xfrm>
           <a:prstGeom prst="line">
             <a:avLst/>
@@ -39642,14 +39832,14 @@
       </p:cxnSp>
       <p:sp>
         <p:nvSpPr>
-          <p:cNvPr id="94" name="TextBox 93"/>
+          <p:cNvPr id="95" name="TextBox 94"/>
           <p:cNvSpPr txBox="1"/>
           <p:nvPr/>
         </p:nvSpPr>
         <p:spPr>
           <a:xfrm>
-            <a:off x="15544800" y="4668012"/>
-            <a:ext cx="2926080" cy="365760"/>
+            <a:off x="15517367" y="4960620"/>
+            <a:ext cx="1097280" cy="274320"/>
           </a:xfrm>
           <a:prstGeom prst="rect">
             <a:avLst/>
@@ -39657,7 +39847,7 @@
           <a:noFill/>
         </p:spPr>
         <p:txBody>
-          <a:bodyPr wrap="square" anchor="b" lIns="0" rIns="0" tIns="54864" bIns="54864">
+          <a:bodyPr wrap="square" anchor="ctr" lIns="0" rIns="0" tIns="54864" bIns="54864">
             <a:spAutoFit/>
           </a:bodyPr>
           <a:lstStyle/>
@@ -39680,7 +39870,7 @@
       </p:sp>
       <p:cxnSp>
         <p:nvCxnSpPr>
-          <p:cNvPr id="95" name="Connector 94"/>
+          <p:cNvPr id="96" name="Connector 95"/>
           <p:cNvCxnSpPr/>
           <p:nvPr/>
         </p:nvCxnSpPr>
@@ -39714,9 +39904,47 @@
           </a:fontRef>
         </p:style>
       </p:cxnSp>
+      <p:sp>
+        <p:nvSpPr>
+          <p:cNvPr id="97" name="TextBox 96"/>
+          <p:cNvSpPr txBox="1"/>
+          <p:nvPr/>
+        </p:nvSpPr>
+        <p:spPr>
+          <a:xfrm>
+            <a:off x="13487400" y="4192524"/>
+            <a:ext cx="1097280" cy="274320"/>
+          </a:xfrm>
+          <a:prstGeom prst="rect">
+            <a:avLst/>
+          </a:prstGeom>
+          <a:noFill/>
+        </p:spPr>
+        <p:txBody>
+          <a:bodyPr wrap="square" anchor="b" lIns="0" rIns="0" tIns="54864" bIns="54864">
+            <a:spAutoFit/>
+          </a:bodyPr>
+          <a:lstStyle/>
+          <a:p>
+            <a:pPr algn="ctr">
+              <a:spcAft>
+                <a:spcPts val="600"/>
+              </a:spcAft>
+            </a:pPr>
+            <a:r>
+              <a:rPr sz="1100" b="1">
+                <a:solidFill>
+                  <a:srgbClr val="F5EFE9"/>
+                </a:solidFill>
+              </a:rPr>
+              <a:t>yes</a:t>
+            </a:r>
+          </a:p>
+        </p:txBody>
+      </p:sp>
       <p:cxnSp>
         <p:nvCxnSpPr>
-          <p:cNvPr id="96" name="Connector 95"/>
+          <p:cNvPr id="98" name="Connector 97"/>
           <p:cNvCxnSpPr/>
           <p:nvPr/>
         </p:nvCxnSpPr>
@@ -39752,7 +39980,7 @@
       </p:cxnSp>
       <p:cxnSp>
         <p:nvCxnSpPr>
-          <p:cNvPr id="97" name="Connector 96"/>
+          <p:cNvPr id="99" name="Connector 98"/>
           <p:cNvCxnSpPr/>
           <p:nvPr/>
         </p:nvCxnSpPr>
@@ -39788,14 +40016,14 @@
       </p:cxnSp>
       <p:cxnSp>
         <p:nvCxnSpPr>
-          <p:cNvPr id="98" name="Connector 97"/>
+          <p:cNvPr id="100" name="Connector 99"/>
           <p:cNvCxnSpPr/>
           <p:nvPr/>
         </p:nvCxnSpPr>
         <p:spPr>
           <a:xfrm flipV="1">
-            <a:off x="6949440" y="3840480"/>
-            <a:ext cx="0" cy="182880"/>
+            <a:off x="6949440" y="3721608"/>
+            <a:ext cx="0" cy="347472"/>
           </a:xfrm>
           <a:prstGeom prst="line">
             <a:avLst/>
@@ -39824,14 +40052,14 @@
       </p:cxnSp>
       <p:sp>
         <p:nvSpPr>
-          <p:cNvPr id="99" name="TextBox 98"/>
+          <p:cNvPr id="101" name="TextBox 100"/>
           <p:cNvSpPr txBox="1"/>
           <p:nvPr/>
         </p:nvSpPr>
         <p:spPr>
           <a:xfrm>
-            <a:off x="7040879" y="3547872"/>
-            <a:ext cx="2926080" cy="365760"/>
+            <a:off x="7013448" y="3758183"/>
+            <a:ext cx="1097280" cy="274320"/>
           </a:xfrm>
           <a:prstGeom prst="rect">
             <a:avLst/>
@@ -39839,7 +40067,7 @@
           <a:noFill/>
         </p:spPr>
         <p:txBody>
-          <a:bodyPr wrap="square" anchor="b" lIns="0" rIns="0" tIns="54864" bIns="54864">
+          <a:bodyPr wrap="square" anchor="ctr" lIns="0" rIns="0" tIns="54864" bIns="54864">
             <a:spAutoFit/>
           </a:bodyPr>
           <a:lstStyle/>
@@ -39862,7 +40090,7 @@
       </p:sp>
       <p:cxnSp>
         <p:nvCxnSpPr>
-          <p:cNvPr id="100" name="Connector 99"/>
+          <p:cNvPr id="102" name="Connector 101"/>
           <p:cNvCxnSpPr/>
           <p:nvPr/>
         </p:nvCxnSpPr>
@@ -39896,9 +40124,47 @@
           </a:fontRef>
         </p:style>
       </p:cxnSp>
+      <p:sp>
+        <p:nvSpPr>
+          <p:cNvPr id="103" name="TextBox 102"/>
+          <p:cNvSpPr txBox="1"/>
+          <p:nvPr/>
+        </p:nvSpPr>
+        <p:spPr>
+          <a:xfrm>
+            <a:off x="5189220" y="4192524"/>
+            <a:ext cx="1097280" cy="274320"/>
+          </a:xfrm>
+          <a:prstGeom prst="rect">
+            <a:avLst/>
+          </a:prstGeom>
+          <a:noFill/>
+        </p:spPr>
+        <p:txBody>
+          <a:bodyPr wrap="square" anchor="b" lIns="0" rIns="0" tIns="54864" bIns="54864">
+            <a:spAutoFit/>
+          </a:bodyPr>
+          <a:lstStyle/>
+          <a:p>
+            <a:pPr algn="ctr">
+              <a:spcAft>
+                <a:spcPts val="600"/>
+              </a:spcAft>
+            </a:pPr>
+            <a:r>
+              <a:rPr sz="1100" b="1">
+                <a:solidFill>
+                  <a:srgbClr val="F5EFE9"/>
+                </a:solidFill>
+              </a:rPr>
+              <a:t>yes</a:t>
+            </a:r>
+          </a:p>
+        </p:txBody>
+      </p:sp>
       <p:cxnSp>
         <p:nvCxnSpPr>
-          <p:cNvPr id="101" name="Connector 100"/>
+          <p:cNvPr id="104" name="Connector 103"/>
           <p:cNvCxnSpPr/>
           <p:nvPr/>
         </p:nvCxnSpPr>
@@ -39934,7 +40200,7 @@
       </p:cxnSp>
       <p:cxnSp>
         <p:nvCxnSpPr>
-          <p:cNvPr id="102" name="Connector 101"/>
+          <p:cNvPr id="105" name="Connector 104"/>
           <p:cNvCxnSpPr/>
           <p:nvPr/>
         </p:nvCxnSpPr>
@@ -39969,7 +40235,7 @@
       </p:cxnSp>
       <p:cxnSp>
         <p:nvCxnSpPr>
-          <p:cNvPr id="103" name="Connector 102"/>
+          <p:cNvPr id="106" name="Connector 105"/>
           <p:cNvCxnSpPr/>
           <p:nvPr/>
         </p:nvCxnSpPr>
@@ -40004,7 +40270,7 @@
       </p:cxnSp>
       <p:cxnSp>
         <p:nvCxnSpPr>
-          <p:cNvPr id="104" name="Connector 103"/>
+          <p:cNvPr id="107" name="Connector 106"/>
           <p:cNvCxnSpPr/>
           <p:nvPr/>
         </p:nvCxnSpPr>
@@ -40040,7 +40306,7 @@
       </p:cxnSp>
       <p:sp>
         <p:nvSpPr>
-          <p:cNvPr id="105" name="TextBox 104"/>
+          <p:cNvPr id="108" name="TextBox 107"/>
           <p:cNvSpPr txBox="1"/>
           <p:nvPr/>
         </p:nvSpPr>
@@ -40078,7 +40344,7 @@
       </p:sp>
       <p:cxnSp>
         <p:nvCxnSpPr>
-          <p:cNvPr id="106" name="Connector 105"/>
+          <p:cNvPr id="109" name="Connector 108"/>
           <p:cNvCxnSpPr/>
           <p:nvPr/>
         </p:nvCxnSpPr>
@@ -40114,7 +40380,7 @@
       </p:cxnSp>
       <p:cxnSp>
         <p:nvCxnSpPr>
-          <p:cNvPr id="107" name="Connector 106"/>
+          <p:cNvPr id="110" name="Connector 109"/>
           <p:cNvCxnSpPr/>
           <p:nvPr/>
         </p:nvCxnSpPr>
@@ -40150,7 +40416,7 @@
       </p:cxnSp>
       <p:cxnSp>
         <p:nvCxnSpPr>
-          <p:cNvPr id="108" name="Connector 107"/>
+          <p:cNvPr id="111" name="Connector 110"/>
           <p:cNvCxnSpPr/>
           <p:nvPr/>
         </p:nvCxnSpPr>
@@ -40186,7 +40452,7 @@
       </p:cxnSp>
       <p:cxnSp>
         <p:nvCxnSpPr>
-          <p:cNvPr id="109" name="Connector 108"/>
+          <p:cNvPr id="112" name="Connector 111"/>
           <p:cNvCxnSpPr/>
           <p:nvPr/>
         </p:nvCxnSpPr>
@@ -40222,7 +40488,7 @@
       </p:cxnSp>
       <p:cxnSp>
         <p:nvCxnSpPr>
-          <p:cNvPr id="110" name="Connector 109"/>
+          <p:cNvPr id="113" name="Connector 112"/>
           <p:cNvCxnSpPr/>
           <p:nvPr/>
         </p:nvCxnSpPr>
@@ -40257,7 +40523,7 @@
       </p:cxnSp>
       <p:cxnSp>
         <p:nvCxnSpPr>
-          <p:cNvPr id="111" name="Connector 110"/>
+          <p:cNvPr id="114" name="Connector 113"/>
           <p:cNvCxnSpPr/>
           <p:nvPr/>
         </p:nvCxnSpPr>
@@ -40292,7 +40558,7 @@
       </p:cxnSp>
       <p:cxnSp>
         <p:nvCxnSpPr>
-          <p:cNvPr id="112" name="Connector 111"/>
+          <p:cNvPr id="115" name="Connector 114"/>
           <p:cNvCxnSpPr/>
           <p:nvPr/>
         </p:nvCxnSpPr>
@@ -40328,7 +40594,7 @@
       </p:cxnSp>
       <p:cxnSp>
         <p:nvCxnSpPr>
-          <p:cNvPr id="113" name="Connector 112"/>
+          <p:cNvPr id="116" name="Connector 115"/>
           <p:cNvCxnSpPr/>
           <p:nvPr/>
         </p:nvCxnSpPr>
@@ -40363,7 +40629,7 @@
       </p:cxnSp>
       <p:cxnSp>
         <p:nvCxnSpPr>
-          <p:cNvPr id="114" name="Connector 113"/>
+          <p:cNvPr id="117" name="Connector 116"/>
           <p:cNvCxnSpPr/>
           <p:nvPr/>
         </p:nvCxnSpPr>
@@ -40398,7 +40664,7 @@
       </p:cxnSp>
       <p:cxnSp>
         <p:nvCxnSpPr>
-          <p:cNvPr id="115" name="Connector 114"/>
+          <p:cNvPr id="118" name="Connector 117"/>
           <p:cNvCxnSpPr/>
           <p:nvPr/>
         </p:nvCxnSpPr>
@@ -40434,7 +40700,7 @@
       </p:cxnSp>
       <p:cxnSp>
         <p:nvCxnSpPr>
-          <p:cNvPr id="116" name="Connector 115"/>
+          <p:cNvPr id="119" name="Connector 118"/>
           <p:cNvCxnSpPr/>
           <p:nvPr/>
         </p:nvCxnSpPr>
@@ -40469,7 +40735,7 @@
       </p:cxnSp>
       <p:cxnSp>
         <p:nvCxnSpPr>
-          <p:cNvPr id="117" name="Connector 116"/>
+          <p:cNvPr id="120" name="Connector 119"/>
           <p:cNvCxnSpPr/>
           <p:nvPr/>
         </p:nvCxnSpPr>
@@ -40504,7 +40770,7 @@
       </p:cxnSp>
       <p:cxnSp>
         <p:nvCxnSpPr>
-          <p:cNvPr id="118" name="Connector 117"/>
+          <p:cNvPr id="121" name="Connector 120"/>
           <p:cNvCxnSpPr/>
           <p:nvPr/>
         </p:nvCxnSpPr>
@@ -40540,7 +40806,7 @@
       </p:cxnSp>
       <p:cxnSp>
         <p:nvCxnSpPr>
-          <p:cNvPr id="119" name="Connector 118"/>
+          <p:cNvPr id="122" name="Connector 121"/>
           <p:cNvCxnSpPr/>
           <p:nvPr/>
         </p:nvCxnSpPr>
@@ -40575,7 +40841,7 @@
       </p:cxnSp>
       <p:cxnSp>
         <p:nvCxnSpPr>
-          <p:cNvPr id="120" name="Connector 119"/>
+          <p:cNvPr id="123" name="Connector 122"/>
           <p:cNvCxnSpPr/>
           <p:nvPr/>
         </p:nvCxnSpPr>
@@ -40610,7 +40876,7 @@
       </p:cxnSp>
       <p:cxnSp>
         <p:nvCxnSpPr>
-          <p:cNvPr id="121" name="Connector 120"/>
+          <p:cNvPr id="124" name="Connector 123"/>
           <p:cNvCxnSpPr/>
           <p:nvPr/>
         </p:nvCxnSpPr>
@@ -40646,7 +40912,7 @@
       </p:cxnSp>
       <p:cxnSp>
         <p:nvCxnSpPr>
-          <p:cNvPr id="122" name="Connector 121"/>
+          <p:cNvPr id="125" name="Connector 124"/>
           <p:cNvCxnSpPr/>
           <p:nvPr/>
         </p:nvCxnSpPr>
@@ -40682,7 +40948,7 @@
       </p:cxnSp>
       <p:sp>
         <p:nvSpPr>
-          <p:cNvPr id="123" name="TextBox 122"/>
+          <p:cNvPr id="126" name="TextBox 125"/>
           <p:cNvSpPr txBox="1"/>
           <p:nvPr/>
         </p:nvSpPr>
@@ -40713,7 +40979,7 @@
                   <a:srgbClr val="F5EFE9"/>
                 </a:solidFill>
               </a:rPr>
-              <a:t>Every box in the map is one database object the domains read: seven rolling snapshot tables, the SA aged-balance table with its lookup seed, and eight CMS views. Numbers are the order of one rollout; orange diamonds are gates and a 'no' stops it there. The loop under the second row is the twice-daily rolling refresh (3 months rebuilt, 24 kept; 6 months at CityCorp and Odessa).</a:t>
+              <a:t>Every box in the map is one database object the domains read: seven rolling snapshot tables, the SA aged-balance table with its lookup seed, and eight CMS views. Numbers are the order of one rollout; orange diamonds are gates: yes continues, no stops the rollout there. The loop under the second row is the twice-daily rolling refresh (3 months rebuilt, 24 kept; 6 months at CityCorp and Odessa).</a:t>
             </a:r>
           </a:p>
         </p:txBody>

--- a/jaspersoft/docs/OriginBA_Automated_Deployment.pptx
+++ b/jaspersoft/docs/OriginBA_Automated_Deployment.pptx
@@ -35115,7 +35115,7 @@
         <p:spPr>
           <a:xfrm>
             <a:off x="868680" y="6355080"/>
-            <a:ext cx="2103120" cy="2377440"/>
+            <a:ext cx="2606040" cy="2377440"/>
           </a:xfrm>
           <a:prstGeom prst="roundRect">
             <a:avLst>
@@ -35161,7 +35161,7 @@
         <p:spPr>
           <a:xfrm>
             <a:off x="1033271" y="6400800"/>
-            <a:ext cx="1773936" cy="411480"/>
+            <a:ext cx="2276856" cy="411480"/>
           </a:xfrm>
           <a:prstGeom prst="rect">
             <a:avLst/>
@@ -35198,8 +35198,8 @@
         </p:nvSpPr>
         <p:spPr>
           <a:xfrm>
-            <a:off x="3108960" y="6355080"/>
-            <a:ext cx="2103120" cy="2377440"/>
+            <a:off x="3584448" y="6355080"/>
+            <a:ext cx="2606040" cy="2377440"/>
           </a:xfrm>
           <a:prstGeom prst="roundRect">
             <a:avLst>
@@ -35244,8 +35244,8 @@
         </p:nvSpPr>
         <p:spPr>
           <a:xfrm>
-            <a:off x="3273552" y="6400800"/>
-            <a:ext cx="1773936" cy="411480"/>
+            <a:off x="3749039" y="6400800"/>
+            <a:ext cx="2276856" cy="411480"/>
           </a:xfrm>
           <a:prstGeom prst="rect">
             <a:avLst/>
@@ -35282,8 +35282,8 @@
         </p:nvSpPr>
         <p:spPr>
           <a:xfrm>
-            <a:off x="5349240" y="6355080"/>
-            <a:ext cx="2103120" cy="2377440"/>
+            <a:off x="6300216" y="6355080"/>
+            <a:ext cx="2606040" cy="2377440"/>
           </a:xfrm>
           <a:prstGeom prst="roundRect">
             <a:avLst>
@@ -35328,8 +35328,8 @@
         </p:nvSpPr>
         <p:spPr>
           <a:xfrm>
-            <a:off x="5513831" y="6400800"/>
-            <a:ext cx="1773936" cy="411480"/>
+            <a:off x="6464807" y="6400800"/>
+            <a:ext cx="2276856" cy="411480"/>
           </a:xfrm>
           <a:prstGeom prst="rect">
             <a:avLst/>
@@ -35366,7 +35366,7 @@
         </p:nvSpPr>
         <p:spPr>
           <a:xfrm>
-            <a:off x="7863840" y="6355080"/>
+            <a:off x="9015984" y="6355080"/>
             <a:ext cx="2377440" cy="2377440"/>
           </a:xfrm>
           <a:prstGeom prst="roundRect">
@@ -35412,7 +35412,7 @@
         </p:nvSpPr>
         <p:spPr>
           <a:xfrm>
-            <a:off x="8028431" y="6400800"/>
+            <a:off x="9180576" y="6400800"/>
             <a:ext cx="2048256" cy="411480"/>
           </a:xfrm>
           <a:prstGeom prst="rect">
@@ -35450,8 +35450,8 @@
         </p:nvSpPr>
         <p:spPr>
           <a:xfrm>
-            <a:off x="10515600" y="6355080"/>
-            <a:ext cx="2971800" cy="2377440"/>
+            <a:off x="11503152" y="6355080"/>
+            <a:ext cx="2651760" cy="2377440"/>
           </a:xfrm>
           <a:prstGeom prst="roundRect">
             <a:avLst>
@@ -35496,8 +35496,8 @@
         </p:nvSpPr>
         <p:spPr>
           <a:xfrm>
-            <a:off x="10680192" y="6400800"/>
-            <a:ext cx="2642616" cy="411480"/>
+            <a:off x="11667744" y="6400800"/>
+            <a:ext cx="2322576" cy="411480"/>
           </a:xfrm>
           <a:prstGeom prst="rect">
             <a:avLst/>
@@ -35534,8 +35534,8 @@
         </p:nvSpPr>
         <p:spPr>
           <a:xfrm>
-            <a:off x="13716000" y="6355080"/>
-            <a:ext cx="3063240" cy="2377440"/>
+            <a:off x="14264640" y="6355080"/>
+            <a:ext cx="2697480" cy="2377440"/>
           </a:xfrm>
           <a:prstGeom prst="roundRect">
             <a:avLst>
@@ -35580,8 +35580,8 @@
         </p:nvSpPr>
         <p:spPr>
           <a:xfrm>
-            <a:off x="13880592" y="6400800"/>
-            <a:ext cx="2734056" cy="411480"/>
+            <a:off x="14429232" y="6400800"/>
+            <a:ext cx="2368296" cy="411480"/>
           </a:xfrm>
           <a:prstGeom prst="rect">
             <a:avLst/>
@@ -35618,8 +35618,8 @@
         </p:nvSpPr>
         <p:spPr>
           <a:xfrm>
-            <a:off x="17007840" y="6355080"/>
-            <a:ext cx="2194560" cy="2377440"/>
+            <a:off x="17071848" y="6355080"/>
+            <a:ext cx="2148840" cy="2377440"/>
           </a:xfrm>
           <a:prstGeom prst="roundRect">
             <a:avLst>
@@ -35664,8 +35664,8 @@
         </p:nvSpPr>
         <p:spPr>
           <a:xfrm>
-            <a:off x="17172432" y="6400800"/>
-            <a:ext cx="1865376" cy="411480"/>
+            <a:off x="17236440" y="6400800"/>
+            <a:ext cx="1819656" cy="411480"/>
           </a:xfrm>
           <a:prstGeom prst="rect">
             <a:avLst/>
@@ -37762,7 +37762,7 @@
         <p:spPr>
           <a:xfrm>
             <a:off x="960120" y="6766560"/>
-            <a:ext cx="1920240" cy="777240"/>
+            <a:ext cx="2423160" cy="777240"/>
           </a:xfrm>
           <a:prstGeom prst="roundRect">
             <a:avLst>
@@ -37801,7 +37801,7 @@
               </a:spcAft>
             </a:pPr>
             <a:r>
-              <a:rPr sz="1100" b="1">
+              <a:rPr sz="900" b="1">
                 <a:solidFill>
                   <a:srgbClr val="0B3D7A"/>
                 </a:solidFill>
@@ -37835,7 +37835,7 @@
         <p:spPr>
           <a:xfrm>
             <a:off x="960120" y="7680960"/>
-            <a:ext cx="1920240" cy="777240"/>
+            <a:ext cx="2423160" cy="777240"/>
           </a:xfrm>
           <a:prstGeom prst="roundRect">
             <a:avLst>
@@ -37907,8 +37907,8 @@
         </p:nvSpPr>
         <p:spPr>
           <a:xfrm>
-            <a:off x="3200400" y="6766560"/>
-            <a:ext cx="1920240" cy="777240"/>
+            <a:off x="3675887" y="6766560"/>
+            <a:ext cx="2423160" cy="777240"/>
           </a:xfrm>
           <a:prstGeom prst="roundRect">
             <a:avLst>
@@ -37980,8 +37980,8 @@
         </p:nvSpPr>
         <p:spPr>
           <a:xfrm>
-            <a:off x="3200400" y="7680960"/>
-            <a:ext cx="1920240" cy="777240"/>
+            <a:off x="3675887" y="7680960"/>
+            <a:ext cx="2423160" cy="777240"/>
           </a:xfrm>
           <a:prstGeom prst="roundRect">
             <a:avLst>
@@ -38053,8 +38053,8 @@
         </p:nvSpPr>
         <p:spPr>
           <a:xfrm>
-            <a:off x="5440680" y="6766560"/>
-            <a:ext cx="1920240" cy="566928"/>
+            <a:off x="6391656" y="6766560"/>
+            <a:ext cx="2423160" cy="566928"/>
           </a:xfrm>
           <a:prstGeom prst="roundRect">
             <a:avLst>
@@ -38126,8 +38126,8 @@
         </p:nvSpPr>
         <p:spPr>
           <a:xfrm>
-            <a:off x="5440680" y="7424927"/>
-            <a:ext cx="1920240" cy="566928"/>
+            <a:off x="6391656" y="7424927"/>
+            <a:ext cx="2423160" cy="566928"/>
           </a:xfrm>
           <a:prstGeom prst="roundRect">
             <a:avLst>
@@ -38199,8 +38199,8 @@
         </p:nvSpPr>
         <p:spPr>
           <a:xfrm>
-            <a:off x="5440680" y="8083296"/>
-            <a:ext cx="1920240" cy="566928"/>
+            <a:off x="6391656" y="8083296"/>
+            <a:ext cx="2423160" cy="566928"/>
           </a:xfrm>
           <a:prstGeom prst="roundRect">
             <a:avLst>
@@ -38239,7 +38239,7 @@
               </a:spcAft>
             </a:pPr>
             <a:r>
-              <a:rPr sz="850" b="1">
+              <a:rPr sz="900" b="1">
                 <a:solidFill>
                   <a:srgbClr val="0B3D7A"/>
                 </a:solidFill>
@@ -38273,7 +38273,7 @@
         <p:spPr>
           <a:xfrm>
             <a:off x="868680" y="9006840"/>
-            <a:ext cx="2103120" cy="548640"/>
+            <a:ext cx="2606040" cy="548640"/>
           </a:xfrm>
           <a:prstGeom prst="roundRect">
             <a:avLst>
@@ -38330,8 +38330,8 @@
         </p:nvSpPr>
         <p:spPr>
           <a:xfrm>
-            <a:off x="3108960" y="9006840"/>
-            <a:ext cx="2103120" cy="548640"/>
+            <a:off x="3584448" y="9006840"/>
+            <a:ext cx="2606040" cy="548640"/>
           </a:xfrm>
           <a:prstGeom prst="roundRect">
             <a:avLst>
@@ -38388,8 +38388,8 @@
         </p:nvSpPr>
         <p:spPr>
           <a:xfrm>
-            <a:off x="5349240" y="9006840"/>
-            <a:ext cx="2103120" cy="548640"/>
+            <a:off x="6300216" y="9006840"/>
+            <a:ext cx="2606040" cy="548640"/>
           </a:xfrm>
           <a:prstGeom prst="roundRect">
             <a:avLst>
@@ -38446,7 +38446,7 @@
         </p:nvSpPr>
         <p:spPr>
           <a:xfrm>
-            <a:off x="7955279" y="6766560"/>
+            <a:off x="9107424" y="6766560"/>
             <a:ext cx="2194560" cy="822960"/>
           </a:xfrm>
           <a:prstGeom prst="roundRect">
@@ -38519,7 +38519,7 @@
         </p:nvSpPr>
         <p:spPr>
           <a:xfrm>
-            <a:off x="7955279" y="7726679"/>
+            <a:off x="9107424" y="7726679"/>
             <a:ext cx="2194560" cy="640080"/>
           </a:xfrm>
           <a:prstGeom prst="roundRect">
@@ -38592,7 +38592,7 @@
         </p:nvSpPr>
         <p:spPr>
           <a:xfrm>
-            <a:off x="7863840" y="9006840"/>
+            <a:off x="9015984" y="9006840"/>
             <a:ext cx="2377440" cy="548640"/>
           </a:xfrm>
           <a:prstGeom prst="roundRect">
@@ -38650,8 +38650,8 @@
         </p:nvSpPr>
         <p:spPr>
           <a:xfrm>
-            <a:off x="10607040" y="6766560"/>
-            <a:ext cx="2788920" cy="457200"/>
+            <a:off x="11594592" y="6766560"/>
+            <a:ext cx="2468880" cy="457200"/>
           </a:xfrm>
           <a:prstGeom prst="roundRect">
             <a:avLst>
@@ -38708,8 +38708,8 @@
         </p:nvSpPr>
         <p:spPr>
           <a:xfrm>
-            <a:off x="10607040" y="7315200"/>
-            <a:ext cx="2788920" cy="457200"/>
+            <a:off x="11594592" y="7315200"/>
+            <a:ext cx="2468880" cy="457200"/>
           </a:xfrm>
           <a:prstGeom prst="roundRect">
             <a:avLst>
@@ -38766,8 +38766,8 @@
         </p:nvSpPr>
         <p:spPr>
           <a:xfrm>
-            <a:off x="10607040" y="7863840"/>
-            <a:ext cx="2788920" cy="457200"/>
+            <a:off x="11594592" y="7863840"/>
+            <a:ext cx="2468880" cy="457200"/>
           </a:xfrm>
           <a:prstGeom prst="roundRect">
             <a:avLst>
@@ -38824,8 +38824,8 @@
         </p:nvSpPr>
         <p:spPr>
           <a:xfrm>
-            <a:off x="10515600" y="9006840"/>
-            <a:ext cx="1417320" cy="548640"/>
+            <a:off x="11503152" y="9006840"/>
+            <a:ext cx="1280160" cy="548640"/>
           </a:xfrm>
           <a:prstGeom prst="roundRect">
             <a:avLst>
@@ -38882,8 +38882,8 @@
         </p:nvSpPr>
         <p:spPr>
           <a:xfrm>
-            <a:off x="12070080" y="9006840"/>
-            <a:ext cx="1417320" cy="548640"/>
+            <a:off x="12874752" y="9006840"/>
+            <a:ext cx="1280160" cy="548640"/>
           </a:xfrm>
           <a:prstGeom prst="roundRect">
             <a:avLst>
@@ -38940,8 +38940,8 @@
         </p:nvSpPr>
         <p:spPr>
           <a:xfrm>
-            <a:off x="13807440" y="6766560"/>
-            <a:ext cx="2880360" cy="457200"/>
+            <a:off x="14356080" y="6766560"/>
+            <a:ext cx="2514600" cy="457200"/>
           </a:xfrm>
           <a:prstGeom prst="roundRect">
             <a:avLst>
@@ -38998,8 +38998,8 @@
         </p:nvSpPr>
         <p:spPr>
           <a:xfrm>
-            <a:off x="13807440" y="7315200"/>
-            <a:ext cx="2880360" cy="457200"/>
+            <a:off x="14356080" y="7315200"/>
+            <a:ext cx="2514600" cy="457200"/>
           </a:xfrm>
           <a:prstGeom prst="roundRect">
             <a:avLst>
@@ -39056,8 +39056,8 @@
         </p:nvSpPr>
         <p:spPr>
           <a:xfrm>
-            <a:off x="13807440" y="7863840"/>
-            <a:ext cx="2880360" cy="457200"/>
+            <a:off x="14356080" y="7863840"/>
+            <a:ext cx="2514600" cy="457200"/>
           </a:xfrm>
           <a:prstGeom prst="roundRect">
             <a:avLst>
@@ -39114,8 +39114,8 @@
         </p:nvSpPr>
         <p:spPr>
           <a:xfrm>
-            <a:off x="13716000" y="9006840"/>
-            <a:ext cx="1463040" cy="548640"/>
+            <a:off x="14264640" y="9006840"/>
+            <a:ext cx="1298448" cy="548640"/>
           </a:xfrm>
           <a:prstGeom prst="roundRect">
             <a:avLst>
@@ -39172,8 +39172,8 @@
         </p:nvSpPr>
         <p:spPr>
           <a:xfrm>
-            <a:off x="15316200" y="9006840"/>
-            <a:ext cx="1463040" cy="548640"/>
+            <a:off x="15663672" y="9006840"/>
+            <a:ext cx="1298448" cy="548640"/>
           </a:xfrm>
           <a:prstGeom prst="roundRect">
             <a:avLst>
@@ -39230,8 +39230,8 @@
         </p:nvSpPr>
         <p:spPr>
           <a:xfrm>
-            <a:off x="17099280" y="6766560"/>
-            <a:ext cx="2011680" cy="457200"/>
+            <a:off x="17163288" y="6766560"/>
+            <a:ext cx="1965960" cy="457200"/>
           </a:xfrm>
           <a:prstGeom prst="roundRect">
             <a:avLst>
@@ -39288,8 +39288,8 @@
         </p:nvSpPr>
         <p:spPr>
           <a:xfrm>
-            <a:off x="17099280" y="7315200"/>
-            <a:ext cx="2011680" cy="457200"/>
+            <a:off x="17163288" y="7315200"/>
+            <a:ext cx="1965960" cy="457200"/>
           </a:xfrm>
           <a:prstGeom prst="roundRect">
             <a:avLst>
@@ -39346,8 +39346,8 @@
         </p:nvSpPr>
         <p:spPr>
           <a:xfrm>
-            <a:off x="17007840" y="9006840"/>
-            <a:ext cx="2194560" cy="548640"/>
+            <a:off x="17071848" y="9006840"/>
+            <a:ext cx="2148840" cy="548640"/>
           </a:xfrm>
           <a:prstGeom prst="roundRect">
             <a:avLst>
@@ -40350,7 +40350,7 @@
         </p:nvCxnSpPr>
         <p:spPr>
           <a:xfrm>
-            <a:off x="1920239" y="8732520"/>
+            <a:off x="2171700" y="8732520"/>
             <a:ext cx="0" cy="274320"/>
           </a:xfrm>
           <a:prstGeom prst="line">
@@ -40386,7 +40386,7 @@
         </p:nvCxnSpPr>
         <p:spPr>
           <a:xfrm>
-            <a:off x="4160520" y="8732520"/>
+            <a:off x="4887468" y="8732520"/>
             <a:ext cx="0" cy="274320"/>
           </a:xfrm>
           <a:prstGeom prst="line">
@@ -40422,7 +40422,7 @@
         </p:nvCxnSpPr>
         <p:spPr>
           <a:xfrm>
-            <a:off x="6400800" y="8732520"/>
+            <a:off x="7603236" y="8732520"/>
             <a:ext cx="0" cy="274320"/>
           </a:xfrm>
           <a:prstGeom prst="line">
@@ -40458,7 +40458,7 @@
         </p:nvCxnSpPr>
         <p:spPr>
           <a:xfrm>
-            <a:off x="9052560" y="8732520"/>
+            <a:off x="10204704" y="8732520"/>
             <a:ext cx="0" cy="274320"/>
           </a:xfrm>
           <a:prstGeom prst="line">
@@ -40494,7 +40494,7 @@
         </p:nvCxnSpPr>
         <p:spPr>
           <a:xfrm>
-            <a:off x="12001500" y="8732520"/>
+            <a:off x="12829032" y="8732520"/>
             <a:ext cx="0" cy="137160"/>
           </a:xfrm>
           <a:prstGeom prst="line">
@@ -40529,8 +40529,8 @@
         </p:nvCxnSpPr>
         <p:spPr>
           <a:xfrm flipH="1">
-            <a:off x="11219688" y="8869680"/>
-            <a:ext cx="781812" cy="0"/>
+            <a:off x="12143232" y="8869680"/>
+            <a:ext cx="685800" cy="0"/>
           </a:xfrm>
           <a:prstGeom prst="line">
             <a:avLst/>
@@ -40564,8 +40564,8 @@
         </p:nvCxnSpPr>
         <p:spPr>
           <a:xfrm>
-            <a:off x="11219688" y="8869680"/>
-            <a:ext cx="4572" cy="137160"/>
+            <a:off x="12143232" y="8869680"/>
+            <a:ext cx="0" cy="137160"/>
           </a:xfrm>
           <a:prstGeom prst="line">
             <a:avLst/>
@@ -40600,7 +40600,7 @@
         </p:nvCxnSpPr>
         <p:spPr>
           <a:xfrm>
-            <a:off x="12001500" y="8732520"/>
+            <a:off x="12829032" y="8732520"/>
             <a:ext cx="0" cy="137160"/>
           </a:xfrm>
           <a:prstGeom prst="line">
@@ -40635,8 +40635,8 @@
         </p:nvCxnSpPr>
         <p:spPr>
           <a:xfrm>
-            <a:off x="12001500" y="8869680"/>
-            <a:ext cx="772668" cy="0"/>
+            <a:off x="12829032" y="8869680"/>
+            <a:ext cx="685800" cy="0"/>
           </a:xfrm>
           <a:prstGeom prst="line">
             <a:avLst/>
@@ -40670,8 +40670,8 @@
         </p:nvCxnSpPr>
         <p:spPr>
           <a:xfrm>
-            <a:off x="12774168" y="8869680"/>
-            <a:ext cx="4572" cy="137160"/>
+            <a:off x="13514832" y="8869680"/>
+            <a:ext cx="0" cy="137160"/>
           </a:xfrm>
           <a:prstGeom prst="line">
             <a:avLst/>
@@ -40706,7 +40706,7 @@
         </p:nvCxnSpPr>
         <p:spPr>
           <a:xfrm>
-            <a:off x="15247620" y="8732520"/>
+            <a:off x="15613380" y="8732520"/>
             <a:ext cx="0" cy="137160"/>
           </a:xfrm>
           <a:prstGeom prst="line">
@@ -40741,8 +40741,8 @@
         </p:nvCxnSpPr>
         <p:spPr>
           <a:xfrm flipH="1">
-            <a:off x="14447520" y="8869680"/>
-            <a:ext cx="800100" cy="0"/>
+            <a:off x="14913863" y="8869680"/>
+            <a:ext cx="699517" cy="0"/>
           </a:xfrm>
           <a:prstGeom prst="line">
             <a:avLst/>
@@ -40776,7 +40776,7 @@
         </p:nvCxnSpPr>
         <p:spPr>
           <a:xfrm>
-            <a:off x="14447520" y="8869680"/>
+            <a:off x="14913863" y="8869680"/>
             <a:ext cx="0" cy="137160"/>
           </a:xfrm>
           <a:prstGeom prst="line">
@@ -40812,7 +40812,7 @@
         </p:nvCxnSpPr>
         <p:spPr>
           <a:xfrm>
-            <a:off x="15247620" y="8732520"/>
+            <a:off x="15613380" y="8732520"/>
             <a:ext cx="0" cy="137160"/>
           </a:xfrm>
           <a:prstGeom prst="line">
@@ -40847,8 +40847,8 @@
         </p:nvCxnSpPr>
         <p:spPr>
           <a:xfrm>
-            <a:off x="15247620" y="8869680"/>
-            <a:ext cx="800100" cy="0"/>
+            <a:off x="15613380" y="8869680"/>
+            <a:ext cx="699516" cy="0"/>
           </a:xfrm>
           <a:prstGeom prst="line">
             <a:avLst/>
@@ -40882,7 +40882,7 @@
         </p:nvCxnSpPr>
         <p:spPr>
           <a:xfrm>
-            <a:off x="16047720" y="8869680"/>
+            <a:off x="16312896" y="8869680"/>
             <a:ext cx="0" cy="137160"/>
           </a:xfrm>
           <a:prstGeom prst="line">
@@ -40918,7 +40918,7 @@
         </p:nvCxnSpPr>
         <p:spPr>
           <a:xfrm>
-            <a:off x="18105120" y="8732520"/>
+            <a:off x="18146268" y="8732520"/>
             <a:ext cx="0" cy="274320"/>
           </a:xfrm>
           <a:prstGeom prst="line">

--- a/jaspersoft/docs/OriginBA_Automated_Deployment.pptx
+++ b/jaspersoft/docs/OriginBA_Automated_Deployment.pptx
@@ -7737,7 +7737,7 @@
             <a:avLst/>
           </a:prstGeom>
           <a:solidFill>
-            <a:srgbClr val="0B1723"/>
+            <a:srgbClr val="16283C"/>
           </a:solidFill>
           <a:ln>
             <a:noFill/>
@@ -7863,7 +7863,7 @@
             <a:avLst/>
           </a:prstGeom>
           <a:solidFill>
-            <a:srgbClr val="0B1723"/>
+            <a:srgbClr val="16283C"/>
           </a:solidFill>
           <a:ln>
             <a:noFill/>
@@ -8723,7 +8723,7 @@
             <a:avLst/>
           </a:prstGeom>
           <a:solidFill>
-            <a:srgbClr val="0B1723"/>
+            <a:srgbClr val="16283C"/>
           </a:solidFill>
           <a:ln>
             <a:noFill/>
@@ -9583,7 +9583,7 @@
             <a:avLst/>
           </a:prstGeom>
           <a:solidFill>
-            <a:srgbClr val="0B1723"/>
+            <a:srgbClr val="16283C"/>
           </a:solidFill>
           <a:ln>
             <a:noFill/>
@@ -10980,7 +10980,7 @@
             <a:avLst/>
           </a:prstGeom>
           <a:solidFill>
-            <a:srgbClr val="0B1723"/>
+            <a:srgbClr val="16283C"/>
           </a:solidFill>
           <a:ln>
             <a:noFill/>
@@ -12658,7 +12658,7 @@
             <a:avLst/>
           </a:prstGeom>
           <a:solidFill>
-            <a:srgbClr val="0B1723"/>
+            <a:srgbClr val="16283C"/>
           </a:solidFill>
           <a:ln>
             <a:noFill/>
@@ -13577,7 +13577,7 @@
             <a:avLst/>
           </a:prstGeom>
           <a:solidFill>
-            <a:srgbClr val="0B1723"/>
+            <a:srgbClr val="16283C"/>
           </a:solidFill>
           <a:ln>
             <a:noFill/>
@@ -18919,7 +18919,7 @@
             <a:avLst/>
           </a:prstGeom>
           <a:solidFill>
-            <a:srgbClr val="0B1723"/>
+            <a:srgbClr val="16283C"/>
           </a:solidFill>
           <a:ln>
             <a:noFill/>
@@ -20316,7 +20316,7 @@
             <a:avLst/>
           </a:prstGeom>
           <a:solidFill>
-            <a:srgbClr val="0B1723"/>
+            <a:srgbClr val="16283C"/>
           </a:solidFill>
           <a:ln>
             <a:noFill/>
@@ -20911,7 +20911,7 @@
             <a:avLst/>
           </a:prstGeom>
           <a:solidFill>
-            <a:srgbClr val="0B1723"/>
+            <a:srgbClr val="16283C"/>
           </a:solidFill>
           <a:ln>
             <a:noFill/>
@@ -21876,7 +21876,7 @@
             <a:avLst/>
           </a:prstGeom>
           <a:solidFill>
-            <a:srgbClr val="0B1723"/>
+            <a:srgbClr val="16283C"/>
           </a:solidFill>
           <a:ln>
             <a:noFill/>
@@ -23299,7 +23299,7 @@
             <a:avLst/>
           </a:prstGeom>
           <a:solidFill>
-            <a:srgbClr val="0B1723"/>
+            <a:srgbClr val="16283C"/>
           </a:solidFill>
           <a:ln>
             <a:noFill/>
@@ -24695,7 +24695,7 @@
             <a:avLst/>
           </a:prstGeom>
           <a:solidFill>
-            <a:srgbClr val="0B1723"/>
+            <a:srgbClr val="16283C"/>
           </a:solidFill>
           <a:ln>
             <a:noFill/>
@@ -25202,7 +25202,7 @@
             <a:avLst/>
           </a:prstGeom>
           <a:solidFill>
-            <a:srgbClr val="0B1723"/>
+            <a:srgbClr val="16283C"/>
           </a:solidFill>
           <a:ln>
             <a:noFill/>
@@ -25911,7 +25911,7 @@
             <a:avLst/>
           </a:prstGeom>
           <a:solidFill>
-            <a:srgbClr val="0B1723"/>
+            <a:srgbClr val="16283C"/>
           </a:solidFill>
           <a:ln>
             <a:noFill/>
@@ -26851,7 +26851,7 @@
             <a:avLst/>
           </a:prstGeom>
           <a:solidFill>
-            <a:srgbClr val="0B1723"/>
+            <a:srgbClr val="16283C"/>
           </a:solidFill>
           <a:ln>
             <a:noFill/>
@@ -27805,7 +27805,7 @@
             <a:avLst/>
           </a:prstGeom>
           <a:solidFill>
-            <a:srgbClr val="0B1723"/>
+            <a:srgbClr val="16283C"/>
           </a:solidFill>
           <a:ln>
             <a:noFill/>
@@ -28310,7 +28310,7 @@
             <a:avLst/>
           </a:prstGeom>
           <a:solidFill>
-            <a:srgbClr val="0B1723"/>
+            <a:srgbClr val="16283C"/>
           </a:solidFill>
           <a:ln>
             <a:noFill/>
@@ -29801,7 +29801,7 @@
             <a:avLst/>
           </a:prstGeom>
           <a:solidFill>
-            <a:srgbClr val="0B1723"/>
+            <a:srgbClr val="16283C"/>
           </a:solidFill>
           <a:ln>
             <a:noFill/>
@@ -31234,7 +31234,7 @@
             <a:avLst/>
           </a:prstGeom>
           <a:solidFill>
-            <a:srgbClr val="0B1723"/>
+            <a:srgbClr val="16283C"/>
           </a:solidFill>
           <a:ln>
             <a:noFill/>
@@ -32341,7 +32341,7 @@
             <a:avLst/>
           </a:prstGeom>
           <a:solidFill>
-            <a:srgbClr val="0B1723"/>
+            <a:srgbClr val="16283C"/>
           </a:solidFill>
           <a:ln>
             <a:noFill/>
@@ -33640,7 +33640,7 @@
             <a:avLst/>
           </a:prstGeom>
           <a:solidFill>
-            <a:srgbClr val="0B1723"/>
+            <a:srgbClr val="16283C"/>
           </a:solidFill>
           <a:ln>
             <a:noFill/>
@@ -35189,7 +35189,7 @@
             <a:avLst/>
           </a:prstGeom>
           <a:solidFill>
-            <a:srgbClr val="0B1723"/>
+            <a:srgbClr val="16283C"/>
           </a:solidFill>
           <a:ln>
             <a:noFill/>
@@ -35784,7 +35784,7 @@
             <a:avLst/>
           </a:prstGeom>
           <a:solidFill>
-            <a:srgbClr val="0B1723"/>
+            <a:srgbClr val="16283C"/>
           </a:solidFill>
           <a:ln>
             <a:noFill/>
